--- a/Documents/보고서 파일.pptx
+++ b/Documents/보고서 파일.pptx
@@ -3,11 +3,16 @@
 <p:presentation xmlns:a="http://schemas.openxmlformats.org/drawingml/2006/main" xmlns:r="http://schemas.openxmlformats.org/officeDocument/2006/relationships" xmlns:p="http://schemas.openxmlformats.org/presentationml/2006/main" saveSubsetFonts="1">
   <p:sldMasterIdLst>
     <p:sldMasterId id="2147483648" r:id="rId1"/>
+    <p:sldMasterId id="2147483660" r:id="rId2"/>
   </p:sldMasterIdLst>
   <p:sldIdLst>
-    <p:sldId id="256" r:id="rId2"/>
-    <p:sldId id="257" r:id="rId3"/>
-    <p:sldId id="259" r:id="rId4"/>
+    <p:sldId id="256" r:id="rId3"/>
+    <p:sldId id="257" r:id="rId4"/>
+    <p:sldId id="259" r:id="rId5"/>
+    <p:sldId id="258" r:id="rId6"/>
+    <p:sldId id="263" r:id="rId7"/>
+    <p:sldId id="262" r:id="rId8"/>
+    <p:sldId id="261" r:id="rId9"/>
   </p:sldIdLst>
   <p:sldSz cx="12192000" cy="6858000"/>
   <p:notesSz cx="6858000" cy="9144000"/>
@@ -106,13 +111,18 @@
       </a:defRPr>
     </a:lvl9pPr>
   </p:defaultTextStyle>
+  <p:extLst>
+    <p:ext uri="{EFAFB233-063F-42B5-8137-9DF3F51BA10A}">
+      <p15:sldGuideLst xmlns:p15="http://schemas.microsoft.com/office/powerpoint/2012/main"/>
+    </p:ext>
+  </p:extLst>
 </p:presentation>
 </file>
 
 <file path=ppt/revisionInfo.xml><?xml version="1.0" encoding="utf-8"?>
 <p1510:revInfo xmlns:a="http://schemas.openxmlformats.org/drawingml/2006/main" xmlns:r="http://schemas.openxmlformats.org/officeDocument/2006/relationships" xmlns:p1510="http://schemas.microsoft.com/office/powerpoint/2015/10/main">
   <p1510:revLst>
-    <p1510:client id="{677F6D55-966C-4D09-8244-D4902671CCF2}" v="71" dt="2026-08-21T02:20:42.803"/>
+    <p1510:client id="{677F6D55-966C-4D09-8244-D4902671CCF2}" v="183" dt="2026-08-21T08:12:44.228"/>
   </p1510:revLst>
 </p1510:revInfo>
 </file>
@@ -121,19 +131,19 @@
 <pc:chgInfo xmlns:a="http://schemas.openxmlformats.org/drawingml/2006/main" xmlns:r="http://schemas.openxmlformats.org/officeDocument/2006/relationships" xmlns:ac="http://schemas.microsoft.com/office/drawing/2013/main/command" xmlns:pc="http://schemas.microsoft.com/office/powerpoint/2013/main/command">
   <pc:docChgLst>
     <pc:chgData name="연우 오" userId="c3558644dac54ca4" providerId="LiveId" clId="{9333FDCA-79D6-4088-A778-579BE454CE38}"/>
-    <pc:docChg chg="undo custSel addSld delSld modSld">
-      <pc:chgData name="연우 오" userId="c3558644dac54ca4" providerId="LiveId" clId="{9333FDCA-79D6-4088-A778-579BE454CE38}" dt="2026-08-21T02:20:49.736" v="921" actId="20577"/>
+    <pc:docChg chg="undo redo custSel addSld delSld modSld sldOrd">
+      <pc:chgData name="연우 오" userId="c3558644dac54ca4" providerId="LiveId" clId="{9333FDCA-79D6-4088-A778-579BE454CE38}" dt="2026-08-21T08:12:44.228" v="3810" actId="20577"/>
       <pc:docMkLst>
         <pc:docMk/>
       </pc:docMkLst>
       <pc:sldChg chg="addSp delSp modSp mod">
-        <pc:chgData name="연우 오" userId="c3558644dac54ca4" providerId="LiveId" clId="{9333FDCA-79D6-4088-A778-579BE454CE38}" dt="2026-08-21T01:20:29.985" v="531" actId="1076"/>
+        <pc:chgData name="연우 오" userId="c3558644dac54ca4" providerId="LiveId" clId="{9333FDCA-79D6-4088-A778-579BE454CE38}" dt="2026-08-21T07:52:16.416" v="3281" actId="14100"/>
         <pc:sldMkLst>
           <pc:docMk/>
           <pc:sldMk cId="3694522991" sldId="256"/>
         </pc:sldMkLst>
-        <pc:spChg chg="mod">
-          <ac:chgData name="연우 오" userId="c3558644dac54ca4" providerId="LiveId" clId="{9333FDCA-79D6-4088-A778-579BE454CE38}" dt="2026-08-20T23:19:30.413" v="32" actId="255"/>
+        <pc:spChg chg="mod ord">
+          <ac:chgData name="연우 오" userId="c3558644dac54ca4" providerId="LiveId" clId="{9333FDCA-79D6-4088-A778-579BE454CE38}" dt="2026-08-21T07:49:37.931" v="2327" actId="166"/>
           <ac:spMkLst>
             <pc:docMk/>
             <pc:sldMk cId="3694522991" sldId="256"/>
@@ -148,16 +158,16 @@
             <ac:spMk id="3" creationId="{76452ABD-CDF8-B89F-0707-5D1691B6D25A}"/>
           </ac:spMkLst>
         </pc:spChg>
-        <pc:spChg chg="add mod">
-          <ac:chgData name="연우 오" userId="c3558644dac54ca4" providerId="LiveId" clId="{9333FDCA-79D6-4088-A778-579BE454CE38}" dt="2026-08-20T23:34:30.471" v="287" actId="1076"/>
+        <pc:spChg chg="add mod ord">
+          <ac:chgData name="연우 오" userId="c3558644dac54ca4" providerId="LiveId" clId="{9333FDCA-79D6-4088-A778-579BE454CE38}" dt="2026-08-21T07:49:37.931" v="2327" actId="166"/>
           <ac:spMkLst>
             <pc:docMk/>
             <pc:sldMk cId="3694522991" sldId="256"/>
             <ac:spMk id="4" creationId="{A0F1D0AE-0809-55A2-50D5-E07C23A03EBA}"/>
           </ac:spMkLst>
         </pc:spChg>
-        <pc:spChg chg="add mod">
-          <ac:chgData name="연우 오" userId="c3558644dac54ca4" providerId="LiveId" clId="{9333FDCA-79D6-4088-A778-579BE454CE38}" dt="2026-08-20T23:20:24.656" v="118" actId="20577"/>
+        <pc:spChg chg="add mod ord">
+          <ac:chgData name="연우 오" userId="c3558644dac54ca4" providerId="LiveId" clId="{9333FDCA-79D6-4088-A778-579BE454CE38}" dt="2026-08-21T07:49:37.931" v="2327" actId="166"/>
           <ac:spMkLst>
             <pc:docMk/>
             <pc:sldMk cId="3694522991" sldId="256"/>
@@ -170,6 +180,14 @@
             <pc:docMk/>
             <pc:sldMk cId="3694522991" sldId="256"/>
             <ac:spMk id="6" creationId="{6081D9EA-CF99-AFD1-53CC-472B830753FD}"/>
+          </ac:spMkLst>
+        </pc:spChg>
+        <pc:spChg chg="add mod ord">
+          <ac:chgData name="연우 오" userId="c3558644dac54ca4" providerId="LiveId" clId="{9333FDCA-79D6-4088-A778-579BE454CE38}" dt="2026-08-21T07:52:03.917" v="3280" actId="207"/>
+          <ac:spMkLst>
+            <pc:docMk/>
+            <pc:sldMk cId="3694522991" sldId="256"/>
+            <ac:spMk id="7" creationId="{1988447A-651A-7674-B384-7B128617E260}"/>
           </ac:spMkLst>
         </pc:spChg>
         <pc:spChg chg="del mod">
@@ -284,8 +302,8 @@
             <ac:picMk id="11" creationId="{37B98BD4-E291-9C33-79F1-16F4EBEF7311}"/>
           </ac:picMkLst>
         </pc:picChg>
-        <pc:picChg chg="add mod">
-          <ac:chgData name="연우 오" userId="c3558644dac54ca4" providerId="LiveId" clId="{9333FDCA-79D6-4088-A778-579BE454CE38}" dt="2026-08-21T01:20:29.985" v="531" actId="1076"/>
+        <pc:picChg chg="add mod ord">
+          <ac:chgData name="연우 오" userId="c3558644dac54ca4" providerId="LiveId" clId="{9333FDCA-79D6-4088-A778-579BE454CE38}" dt="2026-08-21T07:52:16.416" v="3281" actId="14100"/>
           <ac:picMkLst>
             <pc:docMk/>
             <pc:sldMk cId="3694522991" sldId="256"/>
@@ -316,6 +334,69 @@
           </ac:spMkLst>
         </pc:spChg>
       </pc:sldChg>
+      <pc:sldChg chg="addSp delSp modSp add del mod">
+        <pc:chgData name="연우 오" userId="c3558644dac54ca4" providerId="LiveId" clId="{9333FDCA-79D6-4088-A778-579BE454CE38}" dt="2026-08-21T08:12:44.228" v="3810" actId="20577"/>
+        <pc:sldMkLst>
+          <pc:docMk/>
+          <pc:sldMk cId="0" sldId="258"/>
+        </pc:sldMkLst>
+        <pc:spChg chg="mod">
+          <ac:chgData name="연우 오" userId="c3558644dac54ca4" providerId="LiveId" clId="{9333FDCA-79D6-4088-A778-579BE454CE38}" dt="2026-08-21T08:05:18.642" v="3617" actId="1076"/>
+          <ac:spMkLst>
+            <pc:docMk/>
+            <pc:sldMk cId="0" sldId="258"/>
+            <ac:spMk id="2" creationId="{00000000-0000-0000-0000-000000000000}"/>
+          </ac:spMkLst>
+        </pc:spChg>
+        <pc:spChg chg="mod">
+          <ac:chgData name="연우 오" userId="c3558644dac54ca4" providerId="LiveId" clId="{9333FDCA-79D6-4088-A778-579BE454CE38}" dt="2026-08-21T08:02:10.647" v="3391"/>
+          <ac:spMkLst>
+            <pc:docMk/>
+            <pc:sldMk cId="0" sldId="258"/>
+            <ac:spMk id="3" creationId="{00000000-0000-0000-0000-000000000000}"/>
+          </ac:spMkLst>
+        </pc:spChg>
+        <pc:spChg chg="del">
+          <ac:chgData name="연우 오" userId="c3558644dac54ca4" providerId="LiveId" clId="{9333FDCA-79D6-4088-A778-579BE454CE38}" dt="2026-08-21T08:04:28.165" v="3589" actId="478"/>
+          <ac:spMkLst>
+            <pc:docMk/>
+            <pc:sldMk cId="0" sldId="258"/>
+            <ac:spMk id="5" creationId="{00000000-0000-0000-0000-000000000000}"/>
+          </ac:spMkLst>
+        </pc:spChg>
+        <pc:spChg chg="mod">
+          <ac:chgData name="연우 오" userId="c3558644dac54ca4" providerId="LiveId" clId="{9333FDCA-79D6-4088-A778-579BE454CE38}" dt="2026-08-21T08:12:44.228" v="3810" actId="20577"/>
+          <ac:spMkLst>
+            <pc:docMk/>
+            <pc:sldMk cId="0" sldId="258"/>
+            <ac:spMk id="8" creationId="{00000000-0000-0000-0000-000000000000}"/>
+          </ac:spMkLst>
+        </pc:spChg>
+        <pc:spChg chg="mod">
+          <ac:chgData name="연우 오" userId="c3558644dac54ca4" providerId="LiveId" clId="{9333FDCA-79D6-4088-A778-579BE454CE38}" dt="2026-08-21T08:07:05.187" v="3751"/>
+          <ac:spMkLst>
+            <pc:docMk/>
+            <pc:sldMk cId="0" sldId="258"/>
+            <ac:spMk id="10" creationId="{00000000-0000-0000-0000-000000000000}"/>
+          </ac:spMkLst>
+        </pc:spChg>
+        <pc:picChg chg="add del mod">
+          <ac:chgData name="연우 오" userId="c3558644dac54ca4" providerId="LiveId" clId="{9333FDCA-79D6-4088-A778-579BE454CE38}" dt="2026-08-21T08:08:17.364" v="3757" actId="478"/>
+          <ac:picMkLst>
+            <pc:docMk/>
+            <pc:sldMk cId="0" sldId="258"/>
+            <ac:picMk id="11" creationId="{FD331FD0-E91E-45EC-C951-92D8E3B63821}"/>
+          </ac:picMkLst>
+        </pc:picChg>
+        <pc:picChg chg="add mod">
+          <ac:chgData name="연우 오" userId="c3558644dac54ca4" providerId="LiveId" clId="{9333FDCA-79D6-4088-A778-579BE454CE38}" dt="2026-08-21T08:08:49.485" v="3762" actId="1076"/>
+          <ac:picMkLst>
+            <pc:docMk/>
+            <pc:sldMk cId="0" sldId="258"/>
+            <ac:picMk id="12" creationId="{6F836141-F320-57A3-36AA-AD246B1F6298}"/>
+          </ac:picMkLst>
+        </pc:picChg>
+      </pc:sldChg>
       <pc:sldChg chg="addSp delSp modSp new del mod">
         <pc:chgData name="연우 오" userId="c3558644dac54ca4" providerId="LiveId" clId="{9333FDCA-79D6-4088-A778-579BE454CE38}" dt="2026-08-21T02:15:41.905" v="536" actId="47"/>
         <pc:sldMkLst>
@@ -339,8 +420,8 @@
           </ac:spMkLst>
         </pc:spChg>
       </pc:sldChg>
-      <pc:sldChg chg="delSp modSp add mod">
-        <pc:chgData name="연우 오" userId="c3558644dac54ca4" providerId="LiveId" clId="{9333FDCA-79D6-4088-A778-579BE454CE38}" dt="2026-08-21T02:20:49.736" v="921" actId="20577"/>
+      <pc:sldChg chg="addSp delSp modSp add mod ord modAnim">
+        <pc:chgData name="연우 오" userId="c3558644dac54ca4" providerId="LiveId" clId="{9333FDCA-79D6-4088-A778-579BE454CE38}" dt="2026-08-21T08:03:21.641" v="3401"/>
         <pc:sldMkLst>
           <pc:docMk/>
           <pc:sldMk cId="0" sldId="259"/>
@@ -354,7 +435,7 @@
           </ac:spMkLst>
         </pc:spChg>
         <pc:spChg chg="mod">
-          <ac:chgData name="연우 오" userId="c3558644dac54ca4" providerId="LiveId" clId="{9333FDCA-79D6-4088-A778-579BE454CE38}" dt="2026-08-21T02:16:25.567" v="588" actId="14100"/>
+          <ac:chgData name="연우 오" userId="c3558644dac54ca4" providerId="LiveId" clId="{9333FDCA-79D6-4088-A778-579BE454CE38}" dt="2026-08-21T08:03:09.885" v="3399" actId="20577"/>
           <ac:spMkLst>
             <pc:docMk/>
             <pc:sldMk cId="0" sldId="259"/>
@@ -377,6 +458,14 @@
             <ac:spMk id="5" creationId="{00000000-0000-0000-0000-000000000000}"/>
           </ac:spMkLst>
         </pc:spChg>
+        <pc:spChg chg="add mod">
+          <ac:chgData name="연우 오" userId="c3558644dac54ca4" providerId="LiveId" clId="{9333FDCA-79D6-4088-A778-579BE454CE38}" dt="2026-08-21T07:38:16.811" v="1078"/>
+          <ac:spMkLst>
+            <pc:docMk/>
+            <pc:sldMk cId="0" sldId="259"/>
+            <ac:spMk id="5" creationId="{3D16C7EE-5C35-F897-8E04-A4EF9675D001}"/>
+          </ac:spMkLst>
+        </pc:spChg>
         <pc:spChg chg="mod">
           <ac:chgData name="연우 오" userId="c3558644dac54ca4" providerId="LiveId" clId="{9333FDCA-79D6-4088-A778-579BE454CE38}" dt="2026-08-21T02:16:09.568" v="586" actId="1076"/>
           <ac:spMkLst>
@@ -386,7 +475,7 @@
           </ac:spMkLst>
         </pc:spChg>
         <pc:spChg chg="mod">
-          <ac:chgData name="연우 오" userId="c3558644dac54ca4" providerId="LiveId" clId="{9333FDCA-79D6-4088-A778-579BE454CE38}" dt="2026-08-21T02:17:07.652" v="603" actId="1076"/>
+          <ac:chgData name="연우 오" userId="c3558644dac54ca4" providerId="LiveId" clId="{9333FDCA-79D6-4088-A778-579BE454CE38}" dt="2026-08-21T07:36:23.193" v="1013" actId="1076"/>
           <ac:spMkLst>
             <pc:docMk/>
             <pc:sldMk cId="0" sldId="259"/>
@@ -410,7 +499,7 @@
           </ac:spMkLst>
         </pc:spChg>
         <pc:spChg chg="mod">
-          <ac:chgData name="연우 오" userId="c3558644dac54ca4" providerId="LiveId" clId="{9333FDCA-79D6-4088-A778-579BE454CE38}" dt="2026-08-21T02:18:40.925" v="717"/>
+          <ac:chgData name="연우 오" userId="c3558644dac54ca4" providerId="LiveId" clId="{9333FDCA-79D6-4088-A778-579BE454CE38}" dt="2026-08-21T07:36:20.247" v="1012" actId="20577"/>
           <ac:spMkLst>
             <pc:docMk/>
             <pc:sldMk cId="0" sldId="259"/>
@@ -442,7 +531,7 @@
           </ac:spMkLst>
         </pc:spChg>
         <pc:spChg chg="mod">
-          <ac:chgData name="연우 오" userId="c3558644dac54ca4" providerId="LiveId" clId="{9333FDCA-79D6-4088-A778-579BE454CE38}" dt="2026-08-21T02:20:49.736" v="921" actId="20577"/>
+          <ac:chgData name="연우 오" userId="c3558644dac54ca4" providerId="LiveId" clId="{9333FDCA-79D6-4088-A778-579BE454CE38}" dt="2026-08-21T07:36:45.015" v="1018" actId="20577"/>
           <ac:spMkLst>
             <pc:docMk/>
             <pc:sldMk cId="0" sldId="259"/>
@@ -466,7 +555,7 @@
           </ac:spMkLst>
         </pc:spChg>
         <pc:spChg chg="mod">
-          <ac:chgData name="연우 오" userId="c3558644dac54ca4" providerId="LiveId" clId="{9333FDCA-79D6-4088-A778-579BE454CE38}" dt="2026-08-21T02:16:54.745" v="598" actId="14100"/>
+          <ac:chgData name="연우 오" userId="c3558644dac54ca4" providerId="LiveId" clId="{9333FDCA-79D6-4088-A778-579BE454CE38}" dt="2026-08-21T07:35:05.292" v="924" actId="1076"/>
           <ac:spMkLst>
             <pc:docMk/>
             <pc:sldMk cId="0" sldId="259"/>
@@ -474,11 +563,231 @@
           </ac:spMkLst>
         </pc:spChg>
         <pc:spChg chg="mod">
-          <ac:chgData name="연우 오" userId="c3558644dac54ca4" providerId="LiveId" clId="{9333FDCA-79D6-4088-A778-579BE454CE38}" dt="2026-08-21T02:16:54.745" v="598" actId="14100"/>
+          <ac:chgData name="연우 오" userId="c3558644dac54ca4" providerId="LiveId" clId="{9333FDCA-79D6-4088-A778-579BE454CE38}" dt="2026-08-21T07:37:37.497" v="1056" actId="20577"/>
           <ac:spMkLst>
             <pc:docMk/>
             <pc:sldMk cId="0" sldId="259"/>
             <ac:spMk id="18" creationId="{00000000-0000-0000-0000-000000000000}"/>
+          </ac:spMkLst>
+        </pc:spChg>
+        <pc:spChg chg="add mod">
+          <ac:chgData name="연우 오" userId="c3558644dac54ca4" providerId="LiveId" clId="{9333FDCA-79D6-4088-A778-579BE454CE38}" dt="2026-08-21T07:38:07.821" v="1069" actId="20577"/>
+          <ac:spMkLst>
+            <pc:docMk/>
+            <pc:sldMk cId="0" sldId="259"/>
+            <ac:spMk id="20" creationId="{AB951590-A76B-7674-ECB6-6D577AC5EF34}"/>
+          </ac:spMkLst>
+        </pc:spChg>
+        <pc:spChg chg="add mod">
+          <ac:chgData name="연우 오" userId="c3558644dac54ca4" providerId="LiveId" clId="{9333FDCA-79D6-4088-A778-579BE454CE38}" dt="2026-08-21T07:40:31.505" v="1292"/>
+          <ac:spMkLst>
+            <pc:docMk/>
+            <pc:sldMk cId="0" sldId="259"/>
+            <ac:spMk id="22" creationId="{D64DE112-81C7-D038-4DD6-E76A7D30FE2A}"/>
+          </ac:spMkLst>
+        </pc:spChg>
+      </pc:sldChg>
+      <pc:sldChg chg="new del">
+        <pc:chgData name="연우 오" userId="c3558644dac54ca4" providerId="LiveId" clId="{9333FDCA-79D6-4088-A778-579BE454CE38}" dt="2026-08-21T07:52:37.278" v="3283" actId="47"/>
+        <pc:sldMkLst>
+          <pc:docMk/>
+          <pc:sldMk cId="3791773719" sldId="260"/>
+        </pc:sldMkLst>
+      </pc:sldChg>
+      <pc:sldChg chg="modSp add mod">
+        <pc:chgData name="연우 오" userId="c3558644dac54ca4" providerId="LiveId" clId="{9333FDCA-79D6-4088-A778-579BE454CE38}" dt="2026-08-21T07:52:50.039" v="3294" actId="20577"/>
+        <pc:sldMkLst>
+          <pc:docMk/>
+          <pc:sldMk cId="538983994" sldId="261"/>
+        </pc:sldMkLst>
+        <pc:spChg chg="mod">
+          <ac:chgData name="연우 오" userId="c3558644dac54ca4" providerId="LiveId" clId="{9333FDCA-79D6-4088-A778-579BE454CE38}" dt="2026-08-21T07:52:50.039" v="3294" actId="20577"/>
+          <ac:spMkLst>
+            <pc:docMk/>
+            <pc:sldMk cId="538983994" sldId="261"/>
+            <ac:spMk id="3" creationId="{16517C86-CA02-3849-4FF8-2ED94D3D56F4}"/>
+          </ac:spMkLst>
+        </pc:spChg>
+      </pc:sldChg>
+      <pc:sldChg chg="addSp delSp modSp add mod modAnim">
+        <pc:chgData name="연우 오" userId="c3558644dac54ca4" providerId="LiveId" clId="{9333FDCA-79D6-4088-A778-579BE454CE38}" dt="2026-08-21T08:00:01.458" v="3343" actId="1076"/>
+        <pc:sldMkLst>
+          <pc:docMk/>
+          <pc:sldMk cId="328680156" sldId="262"/>
+        </pc:sldMkLst>
+        <pc:spChg chg="add del mod ord">
+          <ac:chgData name="연우 오" userId="c3558644dac54ca4" providerId="LiveId" clId="{9333FDCA-79D6-4088-A778-579BE454CE38}" dt="2026-08-21T07:56:29.238" v="3308" actId="478"/>
+          <ac:spMkLst>
+            <pc:docMk/>
+            <pc:sldMk cId="328680156" sldId="262"/>
+            <ac:spMk id="2" creationId="{C60434D3-3507-AEFD-D0EF-F20C13A62C20}"/>
+          </ac:spMkLst>
+        </pc:spChg>
+        <pc:spChg chg="add del">
+          <ac:chgData name="연우 오" userId="c3558644dac54ca4" providerId="LiveId" clId="{9333FDCA-79D6-4088-A778-579BE454CE38}" dt="2026-08-21T07:57:15.725" v="3318" actId="478"/>
+          <ac:spMkLst>
+            <pc:docMk/>
+            <pc:sldMk cId="328680156" sldId="262"/>
+            <ac:spMk id="5" creationId="{463C90C0-8258-B202-A3AD-412FD2790AB9}"/>
+          </ac:spMkLst>
+        </pc:spChg>
+        <pc:spChg chg="add del">
+          <ac:chgData name="연우 오" userId="c3558644dac54ca4" providerId="LiveId" clId="{9333FDCA-79D6-4088-A778-579BE454CE38}" dt="2026-08-21T07:57:15.725" v="3318" actId="478"/>
+          <ac:spMkLst>
+            <pc:docMk/>
+            <pc:sldMk cId="328680156" sldId="262"/>
+            <ac:spMk id="7" creationId="{9375AE55-7223-B4A4-7B2C-523DD951A1C6}"/>
+          </ac:spMkLst>
+        </pc:spChg>
+        <pc:spChg chg="add del">
+          <ac:chgData name="연우 오" userId="c3558644dac54ca4" providerId="LiveId" clId="{9333FDCA-79D6-4088-A778-579BE454CE38}" dt="2026-08-21T07:57:15.725" v="3318" actId="478"/>
+          <ac:spMkLst>
+            <pc:docMk/>
+            <pc:sldMk cId="328680156" sldId="262"/>
+            <ac:spMk id="8" creationId="{1B94C377-0A25-CF28-3C88-01B81EF060D7}"/>
+          </ac:spMkLst>
+        </pc:spChg>
+        <pc:spChg chg="add del">
+          <ac:chgData name="연우 오" userId="c3558644dac54ca4" providerId="LiveId" clId="{9333FDCA-79D6-4088-A778-579BE454CE38}" dt="2026-08-21T07:57:15.725" v="3318" actId="478"/>
+          <ac:spMkLst>
+            <pc:docMk/>
+            <pc:sldMk cId="328680156" sldId="262"/>
+            <ac:spMk id="9" creationId="{D6CF98DF-D3E5-25EA-B44E-7AF85E6FE92E}"/>
+          </ac:spMkLst>
+        </pc:spChg>
+        <pc:spChg chg="add del">
+          <ac:chgData name="연우 오" userId="c3558644dac54ca4" providerId="LiveId" clId="{9333FDCA-79D6-4088-A778-579BE454CE38}" dt="2026-08-21T07:57:15.725" v="3318" actId="478"/>
+          <ac:spMkLst>
+            <pc:docMk/>
+            <pc:sldMk cId="328680156" sldId="262"/>
+            <ac:spMk id="10" creationId="{F2CB0C06-4B15-EF39-BEDD-302FCDDA3202}"/>
+          </ac:spMkLst>
+        </pc:spChg>
+        <pc:spChg chg="del">
+          <ac:chgData name="연우 오" userId="c3558644dac54ca4" providerId="LiveId" clId="{9333FDCA-79D6-4088-A778-579BE454CE38}" dt="2026-08-21T07:57:45.032" v="3322" actId="478"/>
+          <ac:spMkLst>
+            <pc:docMk/>
+            <pc:sldMk cId="328680156" sldId="262"/>
+            <ac:spMk id="11" creationId="{5B9E8BE1-B56F-267B-44D5-06EF6736E350}"/>
+          </ac:spMkLst>
+        </pc:spChg>
+        <pc:spChg chg="del">
+          <ac:chgData name="연우 오" userId="c3558644dac54ca4" providerId="LiveId" clId="{9333FDCA-79D6-4088-A778-579BE454CE38}" dt="2026-08-21T07:57:45.032" v="3322" actId="478"/>
+          <ac:spMkLst>
+            <pc:docMk/>
+            <pc:sldMk cId="328680156" sldId="262"/>
+            <ac:spMk id="12" creationId="{ACB6CA2A-BAC0-391E-A0B6-47B608DB14AA}"/>
+          </ac:spMkLst>
+        </pc:spChg>
+        <pc:spChg chg="del">
+          <ac:chgData name="연우 오" userId="c3558644dac54ca4" providerId="LiveId" clId="{9333FDCA-79D6-4088-A778-579BE454CE38}" dt="2026-08-21T07:57:45.032" v="3322" actId="478"/>
+          <ac:spMkLst>
+            <pc:docMk/>
+            <pc:sldMk cId="328680156" sldId="262"/>
+            <ac:spMk id="13" creationId="{40A9D36C-D632-9D65-9E2A-E379219B9C00}"/>
+          </ac:spMkLst>
+        </pc:spChg>
+        <pc:spChg chg="del">
+          <ac:chgData name="연우 오" userId="c3558644dac54ca4" providerId="LiveId" clId="{9333FDCA-79D6-4088-A778-579BE454CE38}" dt="2026-08-21T07:57:45.032" v="3322" actId="478"/>
+          <ac:spMkLst>
+            <pc:docMk/>
+            <pc:sldMk cId="328680156" sldId="262"/>
+            <ac:spMk id="14" creationId="{A9DEFE4B-C0A0-F60F-64DF-210E209883AA}"/>
+          </ac:spMkLst>
+        </pc:spChg>
+        <pc:spChg chg="del">
+          <ac:chgData name="연우 오" userId="c3558644dac54ca4" providerId="LiveId" clId="{9333FDCA-79D6-4088-A778-579BE454CE38}" dt="2026-08-21T07:58:25.100" v="3328" actId="478"/>
+          <ac:spMkLst>
+            <pc:docMk/>
+            <pc:sldMk cId="328680156" sldId="262"/>
+            <ac:spMk id="15" creationId="{17E36507-A3E0-B281-0E99-C7C2258A0326}"/>
+          </ac:spMkLst>
+        </pc:spChg>
+        <pc:spChg chg="del">
+          <ac:chgData name="연우 오" userId="c3558644dac54ca4" providerId="LiveId" clId="{9333FDCA-79D6-4088-A778-579BE454CE38}" dt="2026-08-21T07:58:25.100" v="3328" actId="478"/>
+          <ac:spMkLst>
+            <pc:docMk/>
+            <pc:sldMk cId="328680156" sldId="262"/>
+            <ac:spMk id="16" creationId="{6CD31241-DED3-6BDE-D422-967D87661E23}"/>
+          </ac:spMkLst>
+        </pc:spChg>
+        <pc:spChg chg="del">
+          <ac:chgData name="연우 오" userId="c3558644dac54ca4" providerId="LiveId" clId="{9333FDCA-79D6-4088-A778-579BE454CE38}" dt="2026-08-21T07:58:25.100" v="3328" actId="478"/>
+          <ac:spMkLst>
+            <pc:docMk/>
+            <pc:sldMk cId="328680156" sldId="262"/>
+            <ac:spMk id="17" creationId="{DAFA0E28-0601-0B9F-AB41-9CF46E5AED51}"/>
+          </ac:spMkLst>
+        </pc:spChg>
+        <pc:spChg chg="del">
+          <ac:chgData name="연우 오" userId="c3558644dac54ca4" providerId="LiveId" clId="{9333FDCA-79D6-4088-A778-579BE454CE38}" dt="2026-08-21T07:58:25.100" v="3328" actId="478"/>
+          <ac:spMkLst>
+            <pc:docMk/>
+            <pc:sldMk cId="328680156" sldId="262"/>
+            <ac:spMk id="18" creationId="{7CC86BBB-4391-A449-D393-D8A447F59AED}"/>
+          </ac:spMkLst>
+        </pc:spChg>
+        <pc:spChg chg="mod">
+          <ac:chgData name="연우 오" userId="c3558644dac54ca4" providerId="LiveId" clId="{9333FDCA-79D6-4088-A778-579BE454CE38}" dt="2026-08-21T07:55:19.816" v="3306"/>
+          <ac:spMkLst>
+            <pc:docMk/>
+            <pc:sldMk cId="328680156" sldId="262"/>
+            <ac:spMk id="19" creationId="{ED489981-8D94-AF64-B0AF-4C43BA01D177}"/>
+          </ac:spMkLst>
+        </pc:spChg>
+        <pc:spChg chg="del">
+          <ac:chgData name="연우 오" userId="c3558644dac54ca4" providerId="LiveId" clId="{9333FDCA-79D6-4088-A778-579BE454CE38}" dt="2026-08-21T07:57:45.032" v="3322" actId="478"/>
+          <ac:spMkLst>
+            <pc:docMk/>
+            <pc:sldMk cId="328680156" sldId="262"/>
+            <ac:spMk id="20" creationId="{289E730C-864C-C424-0510-91884B39C855}"/>
+          </ac:spMkLst>
+        </pc:spChg>
+        <pc:spChg chg="del">
+          <ac:chgData name="연우 오" userId="c3558644dac54ca4" providerId="LiveId" clId="{9333FDCA-79D6-4088-A778-579BE454CE38}" dt="2026-08-21T07:58:25.100" v="3328" actId="478"/>
+          <ac:spMkLst>
+            <pc:docMk/>
+            <pc:sldMk cId="328680156" sldId="262"/>
+            <ac:spMk id="22" creationId="{F60F6C2A-2504-535C-1DD7-52D19F96C204}"/>
+          </ac:spMkLst>
+        </pc:spChg>
+        <pc:picChg chg="add mod">
+          <ac:chgData name="연우 오" userId="c3558644dac54ca4" providerId="LiveId" clId="{9333FDCA-79D6-4088-A778-579BE454CE38}" dt="2026-08-21T07:57:24.594" v="3319" actId="1076"/>
+          <ac:picMkLst>
+            <pc:docMk/>
+            <pc:sldMk cId="328680156" sldId="262"/>
+            <ac:picMk id="23" creationId="{05524E77-A1EB-D065-EA8F-171494E12CF0}"/>
+          </ac:picMkLst>
+        </pc:picChg>
+        <pc:picChg chg="add mod">
+          <ac:chgData name="연우 오" userId="c3558644dac54ca4" providerId="LiveId" clId="{9333FDCA-79D6-4088-A778-579BE454CE38}" dt="2026-08-21T08:00:01.458" v="3343" actId="1076"/>
+          <ac:picMkLst>
+            <pc:docMk/>
+            <pc:sldMk cId="328680156" sldId="262"/>
+            <ac:picMk id="25" creationId="{A84239FD-D2E2-72D2-DD3E-A77EA2982FBC}"/>
+          </ac:picMkLst>
+        </pc:picChg>
+        <pc:picChg chg="add mod">
+          <ac:chgData name="연우 오" userId="c3558644dac54ca4" providerId="LiveId" clId="{9333FDCA-79D6-4088-A778-579BE454CE38}" dt="2026-08-21T07:58:48.855" v="3336" actId="1076"/>
+          <ac:picMkLst>
+            <pc:docMk/>
+            <pc:sldMk cId="328680156" sldId="262"/>
+            <ac:picMk id="27" creationId="{82318D07-84B4-2C48-9B36-6D6931692162}"/>
+          </ac:picMkLst>
+        </pc:picChg>
+      </pc:sldChg>
+      <pc:sldChg chg="modSp add del mod">
+        <pc:chgData name="연우 오" userId="c3558644dac54ca4" providerId="LiveId" clId="{9333FDCA-79D6-4088-A778-579BE454CE38}" dt="2026-08-21T08:02:28.762" v="3395" actId="20577"/>
+        <pc:sldMkLst>
+          <pc:docMk/>
+          <pc:sldMk cId="0" sldId="263"/>
+        </pc:sldMkLst>
+        <pc:spChg chg="mod">
+          <ac:chgData name="연우 오" userId="c3558644dac54ca4" providerId="LiveId" clId="{9333FDCA-79D6-4088-A778-579BE454CE38}" dt="2026-08-21T08:02:28.762" v="3395" actId="20577"/>
+          <ac:spMkLst>
+            <pc:docMk/>
+            <pc:sldMk cId="0" sldId="263"/>
+            <ac:spMk id="3" creationId="{00000000-0000-0000-0000-000000000000}"/>
           </ac:spMkLst>
         </pc:spChg>
       </pc:sldChg>
@@ -634,7 +943,7 @@
           <a:p>
             <a:fld id="{C2084FD7-7AF8-460D-9715-A4E08247DCDC}" type="datetimeFigureOut">
               <a:rPr lang="ko-KR" altLang="en-US" smtClean="0"/>
-              <a:t>2026-08-20</a:t>
+              <a:t>2026-08-21</a:t>
             </a:fld>
             <a:endParaRPr lang="ko-KR" altLang="en-US"/>
           </a:p>
@@ -832,7 +1141,7 @@
           <a:p>
             <a:fld id="{C2084FD7-7AF8-460D-9715-A4E08247DCDC}" type="datetimeFigureOut">
               <a:rPr lang="ko-KR" altLang="en-US" smtClean="0"/>
-              <a:t>2026-08-20</a:t>
+              <a:t>2026-08-21</a:t>
             </a:fld>
             <a:endParaRPr lang="ko-KR" altLang="en-US"/>
           </a:p>
@@ -1040,7 +1349,7 @@
           <a:p>
             <a:fld id="{C2084FD7-7AF8-460D-9715-A4E08247DCDC}" type="datetimeFigureOut">
               <a:rPr lang="ko-KR" altLang="en-US" smtClean="0"/>
-              <a:t>2026-08-20</a:t>
+              <a:t>2026-08-21</a:t>
             </a:fld>
             <a:endParaRPr lang="ko-KR" altLang="en-US"/>
           </a:p>
@@ -1104,6 +1413,1850 @@
     <p:extLst>
       <p:ext uri="{BB962C8B-B14F-4D97-AF65-F5344CB8AC3E}">
         <p14:creationId xmlns:p14="http://schemas.microsoft.com/office/powerpoint/2010/main" val="2329918714"/>
+      </p:ext>
+    </p:extLst>
+  </p:cSld>
+  <p:clrMapOvr>
+    <a:masterClrMapping/>
+  </p:clrMapOvr>
+</p:sldLayout>
+</file>
+
+<file path=ppt/slideLayouts/slideLayout12.xml><?xml version="1.0" encoding="utf-8"?>
+<p:sldLayout xmlns:a="http://schemas.openxmlformats.org/drawingml/2006/main" xmlns:r="http://schemas.openxmlformats.org/officeDocument/2006/relationships" xmlns:p="http://schemas.openxmlformats.org/presentationml/2006/main" type="title" preserve="1">
+  <p:cSld name="Title Slide">
+    <p:spTree>
+      <p:nvGrpSpPr>
+        <p:cNvPr id="1" name=""/>
+        <p:cNvGrpSpPr/>
+        <p:nvPr/>
+      </p:nvGrpSpPr>
+      <p:grpSpPr>
+        <a:xfrm>
+          <a:off x="0" y="0"/>
+          <a:ext cx="0" cy="0"/>
+          <a:chOff x="0" y="0"/>
+          <a:chExt cx="0" cy="0"/>
+        </a:xfrm>
+      </p:grpSpPr>
+      <p:sp>
+        <p:nvSpPr>
+          <p:cNvPr id="2" name="Title 1"/>
+          <p:cNvSpPr>
+            <a:spLocks noGrp="1"/>
+          </p:cNvSpPr>
+          <p:nvPr>
+            <p:ph type="ctrTitle"/>
+          </p:nvPr>
+        </p:nvSpPr>
+        <p:spPr>
+          <a:xfrm>
+            <a:off x="685800" y="2130425"/>
+            <a:ext cx="7772400" cy="1470025"/>
+          </a:xfrm>
+        </p:spPr>
+        <p:txBody>
+          <a:bodyPr/>
+          <a:lstStyle/>
+          <a:p>
+            <a:r>
+              <a:rPr lang="en-US"/>
+              <a:t>Click to edit Master title style</a:t>
+            </a:r>
+          </a:p>
+        </p:txBody>
+      </p:sp>
+      <p:sp>
+        <p:nvSpPr>
+          <p:cNvPr id="3" name="Subtitle 2"/>
+          <p:cNvSpPr>
+            <a:spLocks noGrp="1"/>
+          </p:cNvSpPr>
+          <p:nvPr>
+            <p:ph type="subTitle" idx="1"/>
+          </p:nvPr>
+        </p:nvSpPr>
+        <p:spPr>
+          <a:xfrm>
+            <a:off x="1371600" y="3886200"/>
+            <a:ext cx="6400800" cy="1752600"/>
+          </a:xfrm>
+        </p:spPr>
+        <p:txBody>
+          <a:bodyPr/>
+          <a:lstStyle>
+            <a:lvl1pPr marL="0" indent="0" algn="ctr">
+              <a:buNone/>
+              <a:defRPr>
+                <a:solidFill>
+                  <a:schemeClr val="tx1">
+                    <a:tint val="75000"/>
+                  </a:schemeClr>
+                </a:solidFill>
+              </a:defRPr>
+            </a:lvl1pPr>
+            <a:lvl2pPr marL="457200" indent="0" algn="ctr">
+              <a:buNone/>
+              <a:defRPr>
+                <a:solidFill>
+                  <a:schemeClr val="tx1">
+                    <a:tint val="75000"/>
+                  </a:schemeClr>
+                </a:solidFill>
+              </a:defRPr>
+            </a:lvl2pPr>
+            <a:lvl3pPr marL="914400" indent="0" algn="ctr">
+              <a:buNone/>
+              <a:defRPr>
+                <a:solidFill>
+                  <a:schemeClr val="tx1">
+                    <a:tint val="75000"/>
+                  </a:schemeClr>
+                </a:solidFill>
+              </a:defRPr>
+            </a:lvl3pPr>
+            <a:lvl4pPr marL="1371600" indent="0" algn="ctr">
+              <a:buNone/>
+              <a:defRPr>
+                <a:solidFill>
+                  <a:schemeClr val="tx1">
+                    <a:tint val="75000"/>
+                  </a:schemeClr>
+                </a:solidFill>
+              </a:defRPr>
+            </a:lvl4pPr>
+            <a:lvl5pPr marL="1828800" indent="0" algn="ctr">
+              <a:buNone/>
+              <a:defRPr>
+                <a:solidFill>
+                  <a:schemeClr val="tx1">
+                    <a:tint val="75000"/>
+                  </a:schemeClr>
+                </a:solidFill>
+              </a:defRPr>
+            </a:lvl5pPr>
+            <a:lvl6pPr marL="2286000" indent="0" algn="ctr">
+              <a:buNone/>
+              <a:defRPr>
+                <a:solidFill>
+                  <a:schemeClr val="tx1">
+                    <a:tint val="75000"/>
+                  </a:schemeClr>
+                </a:solidFill>
+              </a:defRPr>
+            </a:lvl6pPr>
+            <a:lvl7pPr marL="2743200" indent="0" algn="ctr">
+              <a:buNone/>
+              <a:defRPr>
+                <a:solidFill>
+                  <a:schemeClr val="tx1">
+                    <a:tint val="75000"/>
+                  </a:schemeClr>
+                </a:solidFill>
+              </a:defRPr>
+            </a:lvl7pPr>
+            <a:lvl8pPr marL="3200400" indent="0" algn="ctr">
+              <a:buNone/>
+              <a:defRPr>
+                <a:solidFill>
+                  <a:schemeClr val="tx1">
+                    <a:tint val="75000"/>
+                  </a:schemeClr>
+                </a:solidFill>
+              </a:defRPr>
+            </a:lvl8pPr>
+            <a:lvl9pPr marL="3657600" indent="0" algn="ctr">
+              <a:buNone/>
+              <a:defRPr>
+                <a:solidFill>
+                  <a:schemeClr val="tx1">
+                    <a:tint val="75000"/>
+                  </a:schemeClr>
+                </a:solidFill>
+              </a:defRPr>
+            </a:lvl9pPr>
+          </a:lstStyle>
+          <a:p>
+            <a:r>
+              <a:rPr lang="en-US"/>
+              <a:t>Click to edit Master subtitle style</a:t>
+            </a:r>
+          </a:p>
+        </p:txBody>
+      </p:sp>
+      <p:sp>
+        <p:nvSpPr>
+          <p:cNvPr id="4" name="Date Placeholder 3"/>
+          <p:cNvSpPr>
+            <a:spLocks noGrp="1"/>
+          </p:cNvSpPr>
+          <p:nvPr>
+            <p:ph type="dt" sz="half" idx="10"/>
+          </p:nvPr>
+        </p:nvSpPr>
+        <p:spPr/>
+        <p:txBody>
+          <a:bodyPr/>
+          <a:lstStyle/>
+          <a:p>
+            <a:fld id="{5BCAD085-E8A6-8845-BD4E-CB4CCA059FC4}" type="datetimeFigureOut">
+              <a:rPr lang="en-US" smtClean="0"/>
+              <a:t>8/21/2026</a:t>
+            </a:fld>
+            <a:endParaRPr lang="en-US"/>
+          </a:p>
+        </p:txBody>
+      </p:sp>
+      <p:sp>
+        <p:nvSpPr>
+          <p:cNvPr id="5" name="Footer Placeholder 4"/>
+          <p:cNvSpPr>
+            <a:spLocks noGrp="1"/>
+          </p:cNvSpPr>
+          <p:nvPr>
+            <p:ph type="ftr" sz="quarter" idx="11"/>
+          </p:nvPr>
+        </p:nvSpPr>
+        <p:spPr/>
+        <p:txBody>
+          <a:bodyPr/>
+          <a:lstStyle/>
+          <a:p>
+            <a:endParaRPr lang="en-US"/>
+          </a:p>
+        </p:txBody>
+      </p:sp>
+      <p:sp>
+        <p:nvSpPr>
+          <p:cNvPr id="6" name="Slide Number Placeholder 5"/>
+          <p:cNvSpPr>
+            <a:spLocks noGrp="1"/>
+          </p:cNvSpPr>
+          <p:nvPr>
+            <p:ph type="sldNum" sz="quarter" idx="12"/>
+          </p:nvPr>
+        </p:nvSpPr>
+        <p:spPr/>
+        <p:txBody>
+          <a:bodyPr/>
+          <a:lstStyle/>
+          <a:p>
+            <a:fld id="{C1FF6DA9-008F-8B48-92A6-B652298478BF}" type="slidenum">
+              <a:rPr lang="en-US" smtClean="0"/>
+              <a:t>‹#›</a:t>
+            </a:fld>
+            <a:endParaRPr lang="en-US"/>
+          </a:p>
+        </p:txBody>
+      </p:sp>
+    </p:spTree>
+    <p:extLst>
+      <p:ext uri="{BB962C8B-B14F-4D97-AF65-F5344CB8AC3E}">
+        <p14:creationId xmlns:p14="http://schemas.microsoft.com/office/powerpoint/2010/main" val="915169902"/>
+      </p:ext>
+    </p:extLst>
+  </p:cSld>
+  <p:clrMapOvr>
+    <a:masterClrMapping/>
+  </p:clrMapOvr>
+</p:sldLayout>
+</file>
+
+<file path=ppt/slideLayouts/slideLayout13.xml><?xml version="1.0" encoding="utf-8"?>
+<p:sldLayout xmlns:a="http://schemas.openxmlformats.org/drawingml/2006/main" xmlns:r="http://schemas.openxmlformats.org/officeDocument/2006/relationships" xmlns:p="http://schemas.openxmlformats.org/presentationml/2006/main" type="obj" preserve="1">
+  <p:cSld name="Title and Content">
+    <p:spTree>
+      <p:nvGrpSpPr>
+        <p:cNvPr id="1" name=""/>
+        <p:cNvGrpSpPr/>
+        <p:nvPr/>
+      </p:nvGrpSpPr>
+      <p:grpSpPr>
+        <a:xfrm>
+          <a:off x="0" y="0"/>
+          <a:ext cx="0" cy="0"/>
+          <a:chOff x="0" y="0"/>
+          <a:chExt cx="0" cy="0"/>
+        </a:xfrm>
+      </p:grpSpPr>
+      <p:sp>
+        <p:nvSpPr>
+          <p:cNvPr id="2" name="Title 1"/>
+          <p:cNvSpPr>
+            <a:spLocks noGrp="1"/>
+          </p:cNvSpPr>
+          <p:nvPr>
+            <p:ph type="title"/>
+          </p:nvPr>
+        </p:nvSpPr>
+        <p:spPr/>
+        <p:txBody>
+          <a:bodyPr/>
+          <a:lstStyle/>
+          <a:p>
+            <a:r>
+              <a:rPr lang="en-US"/>
+              <a:t>Click to edit Master title style</a:t>
+            </a:r>
+          </a:p>
+        </p:txBody>
+      </p:sp>
+      <p:sp>
+        <p:nvSpPr>
+          <p:cNvPr id="3" name="Content Placeholder 2"/>
+          <p:cNvSpPr>
+            <a:spLocks noGrp="1"/>
+          </p:cNvSpPr>
+          <p:nvPr>
+            <p:ph idx="1"/>
+          </p:nvPr>
+        </p:nvSpPr>
+        <p:spPr/>
+        <p:txBody>
+          <a:bodyPr/>
+          <a:lstStyle/>
+          <a:p>
+            <a:pPr lvl="0"/>
+            <a:r>
+              <a:rPr lang="en-US"/>
+              <a:t>Click to edit Master text styles</a:t>
+            </a:r>
+          </a:p>
+          <a:p>
+            <a:pPr lvl="1"/>
+            <a:r>
+              <a:rPr lang="en-US"/>
+              <a:t>Second level</a:t>
+            </a:r>
+          </a:p>
+          <a:p>
+            <a:pPr lvl="2"/>
+            <a:r>
+              <a:rPr lang="en-US"/>
+              <a:t>Third level</a:t>
+            </a:r>
+          </a:p>
+          <a:p>
+            <a:pPr lvl="3"/>
+            <a:r>
+              <a:rPr lang="en-US"/>
+              <a:t>Fourth level</a:t>
+            </a:r>
+          </a:p>
+          <a:p>
+            <a:pPr lvl="4"/>
+            <a:r>
+              <a:rPr lang="en-US"/>
+              <a:t>Fifth level</a:t>
+            </a:r>
+          </a:p>
+        </p:txBody>
+      </p:sp>
+      <p:sp>
+        <p:nvSpPr>
+          <p:cNvPr id="4" name="Date Placeholder 3"/>
+          <p:cNvSpPr>
+            <a:spLocks noGrp="1"/>
+          </p:cNvSpPr>
+          <p:nvPr>
+            <p:ph type="dt" sz="half" idx="10"/>
+          </p:nvPr>
+        </p:nvSpPr>
+        <p:spPr/>
+        <p:txBody>
+          <a:bodyPr/>
+          <a:lstStyle/>
+          <a:p>
+            <a:fld id="{5BCAD085-E8A6-8845-BD4E-CB4CCA059FC4}" type="datetimeFigureOut">
+              <a:rPr lang="en-US" smtClean="0"/>
+              <a:t>8/21/2026</a:t>
+            </a:fld>
+            <a:endParaRPr lang="en-US"/>
+          </a:p>
+        </p:txBody>
+      </p:sp>
+      <p:sp>
+        <p:nvSpPr>
+          <p:cNvPr id="5" name="Footer Placeholder 4"/>
+          <p:cNvSpPr>
+            <a:spLocks noGrp="1"/>
+          </p:cNvSpPr>
+          <p:nvPr>
+            <p:ph type="ftr" sz="quarter" idx="11"/>
+          </p:nvPr>
+        </p:nvSpPr>
+        <p:spPr/>
+        <p:txBody>
+          <a:bodyPr/>
+          <a:lstStyle/>
+          <a:p>
+            <a:endParaRPr lang="en-US"/>
+          </a:p>
+        </p:txBody>
+      </p:sp>
+      <p:sp>
+        <p:nvSpPr>
+          <p:cNvPr id="6" name="Slide Number Placeholder 5"/>
+          <p:cNvSpPr>
+            <a:spLocks noGrp="1"/>
+          </p:cNvSpPr>
+          <p:nvPr>
+            <p:ph type="sldNum" sz="quarter" idx="12"/>
+          </p:nvPr>
+        </p:nvSpPr>
+        <p:spPr/>
+        <p:txBody>
+          <a:bodyPr/>
+          <a:lstStyle/>
+          <a:p>
+            <a:fld id="{C1FF6DA9-008F-8B48-92A6-B652298478BF}" type="slidenum">
+              <a:rPr lang="en-US" smtClean="0"/>
+              <a:t>‹#›</a:t>
+            </a:fld>
+            <a:endParaRPr lang="en-US"/>
+          </a:p>
+        </p:txBody>
+      </p:sp>
+    </p:spTree>
+    <p:extLst>
+      <p:ext uri="{BB962C8B-B14F-4D97-AF65-F5344CB8AC3E}">
+        <p14:creationId xmlns:p14="http://schemas.microsoft.com/office/powerpoint/2010/main" val="552277658"/>
+      </p:ext>
+    </p:extLst>
+  </p:cSld>
+  <p:clrMapOvr>
+    <a:masterClrMapping/>
+  </p:clrMapOvr>
+</p:sldLayout>
+</file>
+
+<file path=ppt/slideLayouts/slideLayout14.xml><?xml version="1.0" encoding="utf-8"?>
+<p:sldLayout xmlns:a="http://schemas.openxmlformats.org/drawingml/2006/main" xmlns:r="http://schemas.openxmlformats.org/officeDocument/2006/relationships" xmlns:p="http://schemas.openxmlformats.org/presentationml/2006/main" type="secHead" preserve="1">
+  <p:cSld name="Section Header">
+    <p:spTree>
+      <p:nvGrpSpPr>
+        <p:cNvPr id="1" name=""/>
+        <p:cNvGrpSpPr/>
+        <p:nvPr/>
+      </p:nvGrpSpPr>
+      <p:grpSpPr>
+        <a:xfrm>
+          <a:off x="0" y="0"/>
+          <a:ext cx="0" cy="0"/>
+          <a:chOff x="0" y="0"/>
+          <a:chExt cx="0" cy="0"/>
+        </a:xfrm>
+      </p:grpSpPr>
+      <p:sp>
+        <p:nvSpPr>
+          <p:cNvPr id="2" name="Title 1"/>
+          <p:cNvSpPr>
+            <a:spLocks noGrp="1"/>
+          </p:cNvSpPr>
+          <p:nvPr>
+            <p:ph type="title"/>
+          </p:nvPr>
+        </p:nvSpPr>
+        <p:spPr>
+          <a:xfrm>
+            <a:off x="722313" y="4406900"/>
+            <a:ext cx="7772400" cy="1362075"/>
+          </a:xfrm>
+        </p:spPr>
+        <p:txBody>
+          <a:bodyPr anchor="t"/>
+          <a:lstStyle>
+            <a:lvl1pPr algn="l">
+              <a:defRPr sz="4000" b="1" cap="all"/>
+            </a:lvl1pPr>
+          </a:lstStyle>
+          <a:p>
+            <a:r>
+              <a:rPr lang="en-US"/>
+              <a:t>Click to edit Master title style</a:t>
+            </a:r>
+          </a:p>
+        </p:txBody>
+      </p:sp>
+      <p:sp>
+        <p:nvSpPr>
+          <p:cNvPr id="3" name="Text Placeholder 2"/>
+          <p:cNvSpPr>
+            <a:spLocks noGrp="1"/>
+          </p:cNvSpPr>
+          <p:nvPr>
+            <p:ph type="body" idx="1"/>
+          </p:nvPr>
+        </p:nvSpPr>
+        <p:spPr>
+          <a:xfrm>
+            <a:off x="722313" y="2906713"/>
+            <a:ext cx="7772400" cy="1500187"/>
+          </a:xfrm>
+        </p:spPr>
+        <p:txBody>
+          <a:bodyPr anchor="b"/>
+          <a:lstStyle>
+            <a:lvl1pPr marL="0" indent="0">
+              <a:buNone/>
+              <a:defRPr sz="2000">
+                <a:solidFill>
+                  <a:schemeClr val="tx1">
+                    <a:tint val="75000"/>
+                  </a:schemeClr>
+                </a:solidFill>
+              </a:defRPr>
+            </a:lvl1pPr>
+            <a:lvl2pPr marL="457200" indent="0">
+              <a:buNone/>
+              <a:defRPr sz="1800">
+                <a:solidFill>
+                  <a:schemeClr val="tx1">
+                    <a:tint val="75000"/>
+                  </a:schemeClr>
+                </a:solidFill>
+              </a:defRPr>
+            </a:lvl2pPr>
+            <a:lvl3pPr marL="914400" indent="0">
+              <a:buNone/>
+              <a:defRPr sz="1600">
+                <a:solidFill>
+                  <a:schemeClr val="tx1">
+                    <a:tint val="75000"/>
+                  </a:schemeClr>
+                </a:solidFill>
+              </a:defRPr>
+            </a:lvl3pPr>
+            <a:lvl4pPr marL="1371600" indent="0">
+              <a:buNone/>
+              <a:defRPr sz="1400">
+                <a:solidFill>
+                  <a:schemeClr val="tx1">
+                    <a:tint val="75000"/>
+                  </a:schemeClr>
+                </a:solidFill>
+              </a:defRPr>
+            </a:lvl4pPr>
+            <a:lvl5pPr marL="1828800" indent="0">
+              <a:buNone/>
+              <a:defRPr sz="1400">
+                <a:solidFill>
+                  <a:schemeClr val="tx1">
+                    <a:tint val="75000"/>
+                  </a:schemeClr>
+                </a:solidFill>
+              </a:defRPr>
+            </a:lvl5pPr>
+            <a:lvl6pPr marL="2286000" indent="0">
+              <a:buNone/>
+              <a:defRPr sz="1400">
+                <a:solidFill>
+                  <a:schemeClr val="tx1">
+                    <a:tint val="75000"/>
+                  </a:schemeClr>
+                </a:solidFill>
+              </a:defRPr>
+            </a:lvl6pPr>
+            <a:lvl7pPr marL="2743200" indent="0">
+              <a:buNone/>
+              <a:defRPr sz="1400">
+                <a:solidFill>
+                  <a:schemeClr val="tx1">
+                    <a:tint val="75000"/>
+                  </a:schemeClr>
+                </a:solidFill>
+              </a:defRPr>
+            </a:lvl7pPr>
+            <a:lvl8pPr marL="3200400" indent="0">
+              <a:buNone/>
+              <a:defRPr sz="1400">
+                <a:solidFill>
+                  <a:schemeClr val="tx1">
+                    <a:tint val="75000"/>
+                  </a:schemeClr>
+                </a:solidFill>
+              </a:defRPr>
+            </a:lvl8pPr>
+            <a:lvl9pPr marL="3657600" indent="0">
+              <a:buNone/>
+              <a:defRPr sz="1400">
+                <a:solidFill>
+                  <a:schemeClr val="tx1">
+                    <a:tint val="75000"/>
+                  </a:schemeClr>
+                </a:solidFill>
+              </a:defRPr>
+            </a:lvl9pPr>
+          </a:lstStyle>
+          <a:p>
+            <a:pPr lvl="0"/>
+            <a:r>
+              <a:rPr lang="en-US"/>
+              <a:t>Click to edit Master text styles</a:t>
+            </a:r>
+          </a:p>
+        </p:txBody>
+      </p:sp>
+      <p:sp>
+        <p:nvSpPr>
+          <p:cNvPr id="4" name="Date Placeholder 3"/>
+          <p:cNvSpPr>
+            <a:spLocks noGrp="1"/>
+          </p:cNvSpPr>
+          <p:nvPr>
+            <p:ph type="dt" sz="half" idx="10"/>
+          </p:nvPr>
+        </p:nvSpPr>
+        <p:spPr/>
+        <p:txBody>
+          <a:bodyPr/>
+          <a:lstStyle/>
+          <a:p>
+            <a:fld id="{5BCAD085-E8A6-8845-BD4E-CB4CCA059FC4}" type="datetimeFigureOut">
+              <a:rPr lang="en-US" smtClean="0"/>
+              <a:t>8/21/2026</a:t>
+            </a:fld>
+            <a:endParaRPr lang="en-US"/>
+          </a:p>
+        </p:txBody>
+      </p:sp>
+      <p:sp>
+        <p:nvSpPr>
+          <p:cNvPr id="5" name="Footer Placeholder 4"/>
+          <p:cNvSpPr>
+            <a:spLocks noGrp="1"/>
+          </p:cNvSpPr>
+          <p:nvPr>
+            <p:ph type="ftr" sz="quarter" idx="11"/>
+          </p:nvPr>
+        </p:nvSpPr>
+        <p:spPr/>
+        <p:txBody>
+          <a:bodyPr/>
+          <a:lstStyle/>
+          <a:p>
+            <a:endParaRPr lang="en-US"/>
+          </a:p>
+        </p:txBody>
+      </p:sp>
+      <p:sp>
+        <p:nvSpPr>
+          <p:cNvPr id="6" name="Slide Number Placeholder 5"/>
+          <p:cNvSpPr>
+            <a:spLocks noGrp="1"/>
+          </p:cNvSpPr>
+          <p:nvPr>
+            <p:ph type="sldNum" sz="quarter" idx="12"/>
+          </p:nvPr>
+        </p:nvSpPr>
+        <p:spPr/>
+        <p:txBody>
+          <a:bodyPr/>
+          <a:lstStyle/>
+          <a:p>
+            <a:fld id="{C1FF6DA9-008F-8B48-92A6-B652298478BF}" type="slidenum">
+              <a:rPr lang="en-US" smtClean="0"/>
+              <a:t>‹#›</a:t>
+            </a:fld>
+            <a:endParaRPr lang="en-US"/>
+          </a:p>
+        </p:txBody>
+      </p:sp>
+    </p:spTree>
+    <p:extLst>
+      <p:ext uri="{BB962C8B-B14F-4D97-AF65-F5344CB8AC3E}">
+        <p14:creationId xmlns:p14="http://schemas.microsoft.com/office/powerpoint/2010/main" val="3618312378"/>
+      </p:ext>
+    </p:extLst>
+  </p:cSld>
+  <p:clrMapOvr>
+    <a:masterClrMapping/>
+  </p:clrMapOvr>
+</p:sldLayout>
+</file>
+
+<file path=ppt/slideLayouts/slideLayout15.xml><?xml version="1.0" encoding="utf-8"?>
+<p:sldLayout xmlns:a="http://schemas.openxmlformats.org/drawingml/2006/main" xmlns:r="http://schemas.openxmlformats.org/officeDocument/2006/relationships" xmlns:p="http://schemas.openxmlformats.org/presentationml/2006/main" type="twoObj" preserve="1">
+  <p:cSld name="Two Content">
+    <p:spTree>
+      <p:nvGrpSpPr>
+        <p:cNvPr id="1" name=""/>
+        <p:cNvGrpSpPr/>
+        <p:nvPr/>
+      </p:nvGrpSpPr>
+      <p:grpSpPr>
+        <a:xfrm>
+          <a:off x="0" y="0"/>
+          <a:ext cx="0" cy="0"/>
+          <a:chOff x="0" y="0"/>
+          <a:chExt cx="0" cy="0"/>
+        </a:xfrm>
+      </p:grpSpPr>
+      <p:sp>
+        <p:nvSpPr>
+          <p:cNvPr id="2" name="Title 1"/>
+          <p:cNvSpPr>
+            <a:spLocks noGrp="1"/>
+          </p:cNvSpPr>
+          <p:nvPr>
+            <p:ph type="title"/>
+          </p:nvPr>
+        </p:nvSpPr>
+        <p:spPr/>
+        <p:txBody>
+          <a:bodyPr/>
+          <a:lstStyle/>
+          <a:p>
+            <a:r>
+              <a:rPr lang="en-US"/>
+              <a:t>Click to edit Master title style</a:t>
+            </a:r>
+          </a:p>
+        </p:txBody>
+      </p:sp>
+      <p:sp>
+        <p:nvSpPr>
+          <p:cNvPr id="3" name="Content Placeholder 2"/>
+          <p:cNvSpPr>
+            <a:spLocks noGrp="1"/>
+          </p:cNvSpPr>
+          <p:nvPr>
+            <p:ph sz="half" idx="1"/>
+          </p:nvPr>
+        </p:nvSpPr>
+        <p:spPr>
+          <a:xfrm>
+            <a:off x="457200" y="1600200"/>
+            <a:ext cx="4038600" cy="4525963"/>
+          </a:xfrm>
+        </p:spPr>
+        <p:txBody>
+          <a:bodyPr/>
+          <a:lstStyle>
+            <a:lvl1pPr>
+              <a:defRPr sz="2800"/>
+            </a:lvl1pPr>
+            <a:lvl2pPr>
+              <a:defRPr sz="2400"/>
+            </a:lvl2pPr>
+            <a:lvl3pPr>
+              <a:defRPr sz="2000"/>
+            </a:lvl3pPr>
+            <a:lvl4pPr>
+              <a:defRPr sz="1800"/>
+            </a:lvl4pPr>
+            <a:lvl5pPr>
+              <a:defRPr sz="1800"/>
+            </a:lvl5pPr>
+            <a:lvl6pPr>
+              <a:defRPr sz="1800"/>
+            </a:lvl6pPr>
+            <a:lvl7pPr>
+              <a:defRPr sz="1800"/>
+            </a:lvl7pPr>
+            <a:lvl8pPr>
+              <a:defRPr sz="1800"/>
+            </a:lvl8pPr>
+            <a:lvl9pPr>
+              <a:defRPr sz="1800"/>
+            </a:lvl9pPr>
+          </a:lstStyle>
+          <a:p>
+            <a:pPr lvl="0"/>
+            <a:r>
+              <a:rPr lang="en-US"/>
+              <a:t>Click to edit Master text styles</a:t>
+            </a:r>
+          </a:p>
+          <a:p>
+            <a:pPr lvl="1"/>
+            <a:r>
+              <a:rPr lang="en-US"/>
+              <a:t>Second level</a:t>
+            </a:r>
+          </a:p>
+          <a:p>
+            <a:pPr lvl="2"/>
+            <a:r>
+              <a:rPr lang="en-US"/>
+              <a:t>Third level</a:t>
+            </a:r>
+          </a:p>
+          <a:p>
+            <a:pPr lvl="3"/>
+            <a:r>
+              <a:rPr lang="en-US"/>
+              <a:t>Fourth level</a:t>
+            </a:r>
+          </a:p>
+          <a:p>
+            <a:pPr lvl="4"/>
+            <a:r>
+              <a:rPr lang="en-US"/>
+              <a:t>Fifth level</a:t>
+            </a:r>
+          </a:p>
+        </p:txBody>
+      </p:sp>
+      <p:sp>
+        <p:nvSpPr>
+          <p:cNvPr id="4" name="Content Placeholder 3"/>
+          <p:cNvSpPr>
+            <a:spLocks noGrp="1"/>
+          </p:cNvSpPr>
+          <p:nvPr>
+            <p:ph sz="half" idx="2"/>
+          </p:nvPr>
+        </p:nvSpPr>
+        <p:spPr>
+          <a:xfrm>
+            <a:off x="4648200" y="1600200"/>
+            <a:ext cx="4038600" cy="4525963"/>
+          </a:xfrm>
+        </p:spPr>
+        <p:txBody>
+          <a:bodyPr/>
+          <a:lstStyle>
+            <a:lvl1pPr>
+              <a:defRPr sz="2800"/>
+            </a:lvl1pPr>
+            <a:lvl2pPr>
+              <a:defRPr sz="2400"/>
+            </a:lvl2pPr>
+            <a:lvl3pPr>
+              <a:defRPr sz="2000"/>
+            </a:lvl3pPr>
+            <a:lvl4pPr>
+              <a:defRPr sz="1800"/>
+            </a:lvl4pPr>
+            <a:lvl5pPr>
+              <a:defRPr sz="1800"/>
+            </a:lvl5pPr>
+            <a:lvl6pPr>
+              <a:defRPr sz="1800"/>
+            </a:lvl6pPr>
+            <a:lvl7pPr>
+              <a:defRPr sz="1800"/>
+            </a:lvl7pPr>
+            <a:lvl8pPr>
+              <a:defRPr sz="1800"/>
+            </a:lvl8pPr>
+            <a:lvl9pPr>
+              <a:defRPr sz="1800"/>
+            </a:lvl9pPr>
+          </a:lstStyle>
+          <a:p>
+            <a:pPr lvl="0"/>
+            <a:r>
+              <a:rPr lang="en-US"/>
+              <a:t>Click to edit Master text styles</a:t>
+            </a:r>
+          </a:p>
+          <a:p>
+            <a:pPr lvl="1"/>
+            <a:r>
+              <a:rPr lang="en-US"/>
+              <a:t>Second level</a:t>
+            </a:r>
+          </a:p>
+          <a:p>
+            <a:pPr lvl="2"/>
+            <a:r>
+              <a:rPr lang="en-US"/>
+              <a:t>Third level</a:t>
+            </a:r>
+          </a:p>
+          <a:p>
+            <a:pPr lvl="3"/>
+            <a:r>
+              <a:rPr lang="en-US"/>
+              <a:t>Fourth level</a:t>
+            </a:r>
+          </a:p>
+          <a:p>
+            <a:pPr lvl="4"/>
+            <a:r>
+              <a:rPr lang="en-US"/>
+              <a:t>Fifth level</a:t>
+            </a:r>
+          </a:p>
+        </p:txBody>
+      </p:sp>
+      <p:sp>
+        <p:nvSpPr>
+          <p:cNvPr id="5" name="Date Placeholder 4"/>
+          <p:cNvSpPr>
+            <a:spLocks noGrp="1"/>
+          </p:cNvSpPr>
+          <p:nvPr>
+            <p:ph type="dt" sz="half" idx="10"/>
+          </p:nvPr>
+        </p:nvSpPr>
+        <p:spPr/>
+        <p:txBody>
+          <a:bodyPr/>
+          <a:lstStyle/>
+          <a:p>
+            <a:fld id="{5BCAD085-E8A6-8845-BD4E-CB4CCA059FC4}" type="datetimeFigureOut">
+              <a:rPr lang="en-US" smtClean="0"/>
+              <a:t>8/21/2026</a:t>
+            </a:fld>
+            <a:endParaRPr lang="en-US"/>
+          </a:p>
+        </p:txBody>
+      </p:sp>
+      <p:sp>
+        <p:nvSpPr>
+          <p:cNvPr id="6" name="Footer Placeholder 5"/>
+          <p:cNvSpPr>
+            <a:spLocks noGrp="1"/>
+          </p:cNvSpPr>
+          <p:nvPr>
+            <p:ph type="ftr" sz="quarter" idx="11"/>
+          </p:nvPr>
+        </p:nvSpPr>
+        <p:spPr/>
+        <p:txBody>
+          <a:bodyPr/>
+          <a:lstStyle/>
+          <a:p>
+            <a:endParaRPr lang="en-US"/>
+          </a:p>
+        </p:txBody>
+      </p:sp>
+      <p:sp>
+        <p:nvSpPr>
+          <p:cNvPr id="7" name="Slide Number Placeholder 6"/>
+          <p:cNvSpPr>
+            <a:spLocks noGrp="1"/>
+          </p:cNvSpPr>
+          <p:nvPr>
+            <p:ph type="sldNum" sz="quarter" idx="12"/>
+          </p:nvPr>
+        </p:nvSpPr>
+        <p:spPr/>
+        <p:txBody>
+          <a:bodyPr/>
+          <a:lstStyle/>
+          <a:p>
+            <a:fld id="{C1FF6DA9-008F-8B48-92A6-B652298478BF}" type="slidenum">
+              <a:rPr lang="en-US" smtClean="0"/>
+              <a:t>‹#›</a:t>
+            </a:fld>
+            <a:endParaRPr lang="en-US"/>
+          </a:p>
+        </p:txBody>
+      </p:sp>
+    </p:spTree>
+    <p:extLst>
+      <p:ext uri="{BB962C8B-B14F-4D97-AF65-F5344CB8AC3E}">
+        <p14:creationId xmlns:p14="http://schemas.microsoft.com/office/powerpoint/2010/main" val="3704545409"/>
+      </p:ext>
+    </p:extLst>
+  </p:cSld>
+  <p:clrMapOvr>
+    <a:masterClrMapping/>
+  </p:clrMapOvr>
+</p:sldLayout>
+</file>
+
+<file path=ppt/slideLayouts/slideLayout16.xml><?xml version="1.0" encoding="utf-8"?>
+<p:sldLayout xmlns:a="http://schemas.openxmlformats.org/drawingml/2006/main" xmlns:r="http://schemas.openxmlformats.org/officeDocument/2006/relationships" xmlns:p="http://schemas.openxmlformats.org/presentationml/2006/main" type="twoTxTwoObj" preserve="1">
+  <p:cSld name="Comparison">
+    <p:spTree>
+      <p:nvGrpSpPr>
+        <p:cNvPr id="1" name=""/>
+        <p:cNvGrpSpPr/>
+        <p:nvPr/>
+      </p:nvGrpSpPr>
+      <p:grpSpPr>
+        <a:xfrm>
+          <a:off x="0" y="0"/>
+          <a:ext cx="0" cy="0"/>
+          <a:chOff x="0" y="0"/>
+          <a:chExt cx="0" cy="0"/>
+        </a:xfrm>
+      </p:grpSpPr>
+      <p:sp>
+        <p:nvSpPr>
+          <p:cNvPr id="2" name="Title 1"/>
+          <p:cNvSpPr>
+            <a:spLocks noGrp="1"/>
+          </p:cNvSpPr>
+          <p:nvPr>
+            <p:ph type="title"/>
+          </p:nvPr>
+        </p:nvSpPr>
+        <p:spPr/>
+        <p:txBody>
+          <a:bodyPr/>
+          <a:lstStyle>
+            <a:lvl1pPr>
+              <a:defRPr/>
+            </a:lvl1pPr>
+          </a:lstStyle>
+          <a:p>
+            <a:r>
+              <a:rPr lang="en-US"/>
+              <a:t>Click to edit Master title style</a:t>
+            </a:r>
+          </a:p>
+        </p:txBody>
+      </p:sp>
+      <p:sp>
+        <p:nvSpPr>
+          <p:cNvPr id="3" name="Text Placeholder 2"/>
+          <p:cNvSpPr>
+            <a:spLocks noGrp="1"/>
+          </p:cNvSpPr>
+          <p:nvPr>
+            <p:ph type="body" idx="1"/>
+          </p:nvPr>
+        </p:nvSpPr>
+        <p:spPr>
+          <a:xfrm>
+            <a:off x="457200" y="1535113"/>
+            <a:ext cx="4040188" cy="639762"/>
+          </a:xfrm>
+        </p:spPr>
+        <p:txBody>
+          <a:bodyPr anchor="b"/>
+          <a:lstStyle>
+            <a:lvl1pPr marL="0" indent="0">
+              <a:buNone/>
+              <a:defRPr sz="2400" b="1"/>
+            </a:lvl1pPr>
+            <a:lvl2pPr marL="457200" indent="0">
+              <a:buNone/>
+              <a:defRPr sz="2000" b="1"/>
+            </a:lvl2pPr>
+            <a:lvl3pPr marL="914400" indent="0">
+              <a:buNone/>
+              <a:defRPr sz="1800" b="1"/>
+            </a:lvl3pPr>
+            <a:lvl4pPr marL="1371600" indent="0">
+              <a:buNone/>
+              <a:defRPr sz="1600" b="1"/>
+            </a:lvl4pPr>
+            <a:lvl5pPr marL="1828800" indent="0">
+              <a:buNone/>
+              <a:defRPr sz="1600" b="1"/>
+            </a:lvl5pPr>
+            <a:lvl6pPr marL="2286000" indent="0">
+              <a:buNone/>
+              <a:defRPr sz="1600" b="1"/>
+            </a:lvl6pPr>
+            <a:lvl7pPr marL="2743200" indent="0">
+              <a:buNone/>
+              <a:defRPr sz="1600" b="1"/>
+            </a:lvl7pPr>
+            <a:lvl8pPr marL="3200400" indent="0">
+              <a:buNone/>
+              <a:defRPr sz="1600" b="1"/>
+            </a:lvl8pPr>
+            <a:lvl9pPr marL="3657600" indent="0">
+              <a:buNone/>
+              <a:defRPr sz="1600" b="1"/>
+            </a:lvl9pPr>
+          </a:lstStyle>
+          <a:p>
+            <a:pPr lvl="0"/>
+            <a:r>
+              <a:rPr lang="en-US"/>
+              <a:t>Click to edit Master text styles</a:t>
+            </a:r>
+          </a:p>
+        </p:txBody>
+      </p:sp>
+      <p:sp>
+        <p:nvSpPr>
+          <p:cNvPr id="4" name="Content Placeholder 3"/>
+          <p:cNvSpPr>
+            <a:spLocks noGrp="1"/>
+          </p:cNvSpPr>
+          <p:nvPr>
+            <p:ph sz="half" idx="2"/>
+          </p:nvPr>
+        </p:nvSpPr>
+        <p:spPr>
+          <a:xfrm>
+            <a:off x="457200" y="2174875"/>
+            <a:ext cx="4040188" cy="3951288"/>
+          </a:xfrm>
+        </p:spPr>
+        <p:txBody>
+          <a:bodyPr/>
+          <a:lstStyle>
+            <a:lvl1pPr>
+              <a:defRPr sz="2400"/>
+            </a:lvl1pPr>
+            <a:lvl2pPr>
+              <a:defRPr sz="2000"/>
+            </a:lvl2pPr>
+            <a:lvl3pPr>
+              <a:defRPr sz="1800"/>
+            </a:lvl3pPr>
+            <a:lvl4pPr>
+              <a:defRPr sz="1600"/>
+            </a:lvl4pPr>
+            <a:lvl5pPr>
+              <a:defRPr sz="1600"/>
+            </a:lvl5pPr>
+            <a:lvl6pPr>
+              <a:defRPr sz="1600"/>
+            </a:lvl6pPr>
+            <a:lvl7pPr>
+              <a:defRPr sz="1600"/>
+            </a:lvl7pPr>
+            <a:lvl8pPr>
+              <a:defRPr sz="1600"/>
+            </a:lvl8pPr>
+            <a:lvl9pPr>
+              <a:defRPr sz="1600"/>
+            </a:lvl9pPr>
+          </a:lstStyle>
+          <a:p>
+            <a:pPr lvl="0"/>
+            <a:r>
+              <a:rPr lang="en-US"/>
+              <a:t>Click to edit Master text styles</a:t>
+            </a:r>
+          </a:p>
+          <a:p>
+            <a:pPr lvl="1"/>
+            <a:r>
+              <a:rPr lang="en-US"/>
+              <a:t>Second level</a:t>
+            </a:r>
+          </a:p>
+          <a:p>
+            <a:pPr lvl="2"/>
+            <a:r>
+              <a:rPr lang="en-US"/>
+              <a:t>Third level</a:t>
+            </a:r>
+          </a:p>
+          <a:p>
+            <a:pPr lvl="3"/>
+            <a:r>
+              <a:rPr lang="en-US"/>
+              <a:t>Fourth level</a:t>
+            </a:r>
+          </a:p>
+          <a:p>
+            <a:pPr lvl="4"/>
+            <a:r>
+              <a:rPr lang="en-US"/>
+              <a:t>Fifth level</a:t>
+            </a:r>
+          </a:p>
+        </p:txBody>
+      </p:sp>
+      <p:sp>
+        <p:nvSpPr>
+          <p:cNvPr id="5" name="Text Placeholder 4"/>
+          <p:cNvSpPr>
+            <a:spLocks noGrp="1"/>
+          </p:cNvSpPr>
+          <p:nvPr>
+            <p:ph type="body" sz="quarter" idx="3"/>
+          </p:nvPr>
+        </p:nvSpPr>
+        <p:spPr>
+          <a:xfrm>
+            <a:off x="4645025" y="1535113"/>
+            <a:ext cx="4041775" cy="639762"/>
+          </a:xfrm>
+        </p:spPr>
+        <p:txBody>
+          <a:bodyPr anchor="b"/>
+          <a:lstStyle>
+            <a:lvl1pPr marL="0" indent="0">
+              <a:buNone/>
+              <a:defRPr sz="2400" b="1"/>
+            </a:lvl1pPr>
+            <a:lvl2pPr marL="457200" indent="0">
+              <a:buNone/>
+              <a:defRPr sz="2000" b="1"/>
+            </a:lvl2pPr>
+            <a:lvl3pPr marL="914400" indent="0">
+              <a:buNone/>
+              <a:defRPr sz="1800" b="1"/>
+            </a:lvl3pPr>
+            <a:lvl4pPr marL="1371600" indent="0">
+              <a:buNone/>
+              <a:defRPr sz="1600" b="1"/>
+            </a:lvl4pPr>
+            <a:lvl5pPr marL="1828800" indent="0">
+              <a:buNone/>
+              <a:defRPr sz="1600" b="1"/>
+            </a:lvl5pPr>
+            <a:lvl6pPr marL="2286000" indent="0">
+              <a:buNone/>
+              <a:defRPr sz="1600" b="1"/>
+            </a:lvl6pPr>
+            <a:lvl7pPr marL="2743200" indent="0">
+              <a:buNone/>
+              <a:defRPr sz="1600" b="1"/>
+            </a:lvl7pPr>
+            <a:lvl8pPr marL="3200400" indent="0">
+              <a:buNone/>
+              <a:defRPr sz="1600" b="1"/>
+            </a:lvl8pPr>
+            <a:lvl9pPr marL="3657600" indent="0">
+              <a:buNone/>
+              <a:defRPr sz="1600" b="1"/>
+            </a:lvl9pPr>
+          </a:lstStyle>
+          <a:p>
+            <a:pPr lvl="0"/>
+            <a:r>
+              <a:rPr lang="en-US"/>
+              <a:t>Click to edit Master text styles</a:t>
+            </a:r>
+          </a:p>
+        </p:txBody>
+      </p:sp>
+      <p:sp>
+        <p:nvSpPr>
+          <p:cNvPr id="6" name="Content Placeholder 5"/>
+          <p:cNvSpPr>
+            <a:spLocks noGrp="1"/>
+          </p:cNvSpPr>
+          <p:nvPr>
+            <p:ph sz="quarter" idx="4"/>
+          </p:nvPr>
+        </p:nvSpPr>
+        <p:spPr>
+          <a:xfrm>
+            <a:off x="4645025" y="2174875"/>
+            <a:ext cx="4041775" cy="3951288"/>
+          </a:xfrm>
+        </p:spPr>
+        <p:txBody>
+          <a:bodyPr/>
+          <a:lstStyle>
+            <a:lvl1pPr>
+              <a:defRPr sz="2400"/>
+            </a:lvl1pPr>
+            <a:lvl2pPr>
+              <a:defRPr sz="2000"/>
+            </a:lvl2pPr>
+            <a:lvl3pPr>
+              <a:defRPr sz="1800"/>
+            </a:lvl3pPr>
+            <a:lvl4pPr>
+              <a:defRPr sz="1600"/>
+            </a:lvl4pPr>
+            <a:lvl5pPr>
+              <a:defRPr sz="1600"/>
+            </a:lvl5pPr>
+            <a:lvl6pPr>
+              <a:defRPr sz="1600"/>
+            </a:lvl6pPr>
+            <a:lvl7pPr>
+              <a:defRPr sz="1600"/>
+            </a:lvl7pPr>
+            <a:lvl8pPr>
+              <a:defRPr sz="1600"/>
+            </a:lvl8pPr>
+            <a:lvl9pPr>
+              <a:defRPr sz="1600"/>
+            </a:lvl9pPr>
+          </a:lstStyle>
+          <a:p>
+            <a:pPr lvl="0"/>
+            <a:r>
+              <a:rPr lang="en-US"/>
+              <a:t>Click to edit Master text styles</a:t>
+            </a:r>
+          </a:p>
+          <a:p>
+            <a:pPr lvl="1"/>
+            <a:r>
+              <a:rPr lang="en-US"/>
+              <a:t>Second level</a:t>
+            </a:r>
+          </a:p>
+          <a:p>
+            <a:pPr lvl="2"/>
+            <a:r>
+              <a:rPr lang="en-US"/>
+              <a:t>Third level</a:t>
+            </a:r>
+          </a:p>
+          <a:p>
+            <a:pPr lvl="3"/>
+            <a:r>
+              <a:rPr lang="en-US"/>
+              <a:t>Fourth level</a:t>
+            </a:r>
+          </a:p>
+          <a:p>
+            <a:pPr lvl="4"/>
+            <a:r>
+              <a:rPr lang="en-US"/>
+              <a:t>Fifth level</a:t>
+            </a:r>
+          </a:p>
+        </p:txBody>
+      </p:sp>
+      <p:sp>
+        <p:nvSpPr>
+          <p:cNvPr id="7" name="Date Placeholder 6"/>
+          <p:cNvSpPr>
+            <a:spLocks noGrp="1"/>
+          </p:cNvSpPr>
+          <p:nvPr>
+            <p:ph type="dt" sz="half" idx="10"/>
+          </p:nvPr>
+        </p:nvSpPr>
+        <p:spPr/>
+        <p:txBody>
+          <a:bodyPr/>
+          <a:lstStyle/>
+          <a:p>
+            <a:fld id="{5BCAD085-E8A6-8845-BD4E-CB4CCA059FC4}" type="datetimeFigureOut">
+              <a:rPr lang="en-US" smtClean="0"/>
+              <a:t>8/21/2026</a:t>
+            </a:fld>
+            <a:endParaRPr lang="en-US"/>
+          </a:p>
+        </p:txBody>
+      </p:sp>
+      <p:sp>
+        <p:nvSpPr>
+          <p:cNvPr id="8" name="Footer Placeholder 7"/>
+          <p:cNvSpPr>
+            <a:spLocks noGrp="1"/>
+          </p:cNvSpPr>
+          <p:nvPr>
+            <p:ph type="ftr" sz="quarter" idx="11"/>
+          </p:nvPr>
+        </p:nvSpPr>
+        <p:spPr/>
+        <p:txBody>
+          <a:bodyPr/>
+          <a:lstStyle/>
+          <a:p>
+            <a:endParaRPr lang="en-US"/>
+          </a:p>
+        </p:txBody>
+      </p:sp>
+      <p:sp>
+        <p:nvSpPr>
+          <p:cNvPr id="9" name="Slide Number Placeholder 8"/>
+          <p:cNvSpPr>
+            <a:spLocks noGrp="1"/>
+          </p:cNvSpPr>
+          <p:nvPr>
+            <p:ph type="sldNum" sz="quarter" idx="12"/>
+          </p:nvPr>
+        </p:nvSpPr>
+        <p:spPr/>
+        <p:txBody>
+          <a:bodyPr/>
+          <a:lstStyle/>
+          <a:p>
+            <a:fld id="{C1FF6DA9-008F-8B48-92A6-B652298478BF}" type="slidenum">
+              <a:rPr lang="en-US" smtClean="0"/>
+              <a:t>‹#›</a:t>
+            </a:fld>
+            <a:endParaRPr lang="en-US"/>
+          </a:p>
+        </p:txBody>
+      </p:sp>
+    </p:spTree>
+    <p:extLst>
+      <p:ext uri="{BB962C8B-B14F-4D97-AF65-F5344CB8AC3E}">
+        <p14:creationId xmlns:p14="http://schemas.microsoft.com/office/powerpoint/2010/main" val="1808977177"/>
+      </p:ext>
+    </p:extLst>
+  </p:cSld>
+  <p:clrMapOvr>
+    <a:masterClrMapping/>
+  </p:clrMapOvr>
+</p:sldLayout>
+</file>
+
+<file path=ppt/slideLayouts/slideLayout17.xml><?xml version="1.0" encoding="utf-8"?>
+<p:sldLayout xmlns:a="http://schemas.openxmlformats.org/drawingml/2006/main" xmlns:r="http://schemas.openxmlformats.org/officeDocument/2006/relationships" xmlns:p="http://schemas.openxmlformats.org/presentationml/2006/main" type="titleOnly" preserve="1">
+  <p:cSld name="Title Only">
+    <p:spTree>
+      <p:nvGrpSpPr>
+        <p:cNvPr id="1" name=""/>
+        <p:cNvGrpSpPr/>
+        <p:nvPr/>
+      </p:nvGrpSpPr>
+      <p:grpSpPr>
+        <a:xfrm>
+          <a:off x="0" y="0"/>
+          <a:ext cx="0" cy="0"/>
+          <a:chOff x="0" y="0"/>
+          <a:chExt cx="0" cy="0"/>
+        </a:xfrm>
+      </p:grpSpPr>
+      <p:sp>
+        <p:nvSpPr>
+          <p:cNvPr id="2" name="Title 1"/>
+          <p:cNvSpPr>
+            <a:spLocks noGrp="1"/>
+          </p:cNvSpPr>
+          <p:nvPr>
+            <p:ph type="title"/>
+          </p:nvPr>
+        </p:nvSpPr>
+        <p:spPr/>
+        <p:txBody>
+          <a:bodyPr/>
+          <a:lstStyle/>
+          <a:p>
+            <a:r>
+              <a:rPr lang="en-US"/>
+              <a:t>Click to edit Master title style</a:t>
+            </a:r>
+          </a:p>
+        </p:txBody>
+      </p:sp>
+      <p:sp>
+        <p:nvSpPr>
+          <p:cNvPr id="3" name="Date Placeholder 2"/>
+          <p:cNvSpPr>
+            <a:spLocks noGrp="1"/>
+          </p:cNvSpPr>
+          <p:nvPr>
+            <p:ph type="dt" sz="half" idx="10"/>
+          </p:nvPr>
+        </p:nvSpPr>
+        <p:spPr/>
+        <p:txBody>
+          <a:bodyPr/>
+          <a:lstStyle/>
+          <a:p>
+            <a:fld id="{5BCAD085-E8A6-8845-BD4E-CB4CCA059FC4}" type="datetimeFigureOut">
+              <a:rPr lang="en-US" smtClean="0"/>
+              <a:t>8/21/2026</a:t>
+            </a:fld>
+            <a:endParaRPr lang="en-US"/>
+          </a:p>
+        </p:txBody>
+      </p:sp>
+      <p:sp>
+        <p:nvSpPr>
+          <p:cNvPr id="4" name="Footer Placeholder 3"/>
+          <p:cNvSpPr>
+            <a:spLocks noGrp="1"/>
+          </p:cNvSpPr>
+          <p:nvPr>
+            <p:ph type="ftr" sz="quarter" idx="11"/>
+          </p:nvPr>
+        </p:nvSpPr>
+        <p:spPr/>
+        <p:txBody>
+          <a:bodyPr/>
+          <a:lstStyle/>
+          <a:p>
+            <a:endParaRPr lang="en-US"/>
+          </a:p>
+        </p:txBody>
+      </p:sp>
+      <p:sp>
+        <p:nvSpPr>
+          <p:cNvPr id="5" name="Slide Number Placeholder 4"/>
+          <p:cNvSpPr>
+            <a:spLocks noGrp="1"/>
+          </p:cNvSpPr>
+          <p:nvPr>
+            <p:ph type="sldNum" sz="quarter" idx="12"/>
+          </p:nvPr>
+        </p:nvSpPr>
+        <p:spPr/>
+        <p:txBody>
+          <a:bodyPr/>
+          <a:lstStyle/>
+          <a:p>
+            <a:fld id="{C1FF6DA9-008F-8B48-92A6-B652298478BF}" type="slidenum">
+              <a:rPr lang="en-US" smtClean="0"/>
+              <a:t>‹#›</a:t>
+            </a:fld>
+            <a:endParaRPr lang="en-US"/>
+          </a:p>
+        </p:txBody>
+      </p:sp>
+    </p:spTree>
+    <p:extLst>
+      <p:ext uri="{BB962C8B-B14F-4D97-AF65-F5344CB8AC3E}">
+        <p14:creationId xmlns:p14="http://schemas.microsoft.com/office/powerpoint/2010/main" val="1330549199"/>
+      </p:ext>
+    </p:extLst>
+  </p:cSld>
+  <p:clrMapOvr>
+    <a:masterClrMapping/>
+  </p:clrMapOvr>
+</p:sldLayout>
+</file>
+
+<file path=ppt/slideLayouts/slideLayout18.xml><?xml version="1.0" encoding="utf-8"?>
+<p:sldLayout xmlns:a="http://schemas.openxmlformats.org/drawingml/2006/main" xmlns:r="http://schemas.openxmlformats.org/officeDocument/2006/relationships" xmlns:p="http://schemas.openxmlformats.org/presentationml/2006/main" type="blank" preserve="1">
+  <p:cSld name="Blank">
+    <p:spTree>
+      <p:nvGrpSpPr>
+        <p:cNvPr id="1" name=""/>
+        <p:cNvGrpSpPr/>
+        <p:nvPr/>
+      </p:nvGrpSpPr>
+      <p:grpSpPr>
+        <a:xfrm>
+          <a:off x="0" y="0"/>
+          <a:ext cx="0" cy="0"/>
+          <a:chOff x="0" y="0"/>
+          <a:chExt cx="0" cy="0"/>
+        </a:xfrm>
+      </p:grpSpPr>
+      <p:sp>
+        <p:nvSpPr>
+          <p:cNvPr id="2" name="Date Placeholder 1"/>
+          <p:cNvSpPr>
+            <a:spLocks noGrp="1"/>
+          </p:cNvSpPr>
+          <p:nvPr>
+            <p:ph type="dt" sz="half" idx="10"/>
+          </p:nvPr>
+        </p:nvSpPr>
+        <p:spPr/>
+        <p:txBody>
+          <a:bodyPr/>
+          <a:lstStyle/>
+          <a:p>
+            <a:fld id="{5BCAD085-E8A6-8845-BD4E-CB4CCA059FC4}" type="datetimeFigureOut">
+              <a:rPr lang="en-US" smtClean="0"/>
+              <a:t>8/21/2026</a:t>
+            </a:fld>
+            <a:endParaRPr lang="en-US"/>
+          </a:p>
+        </p:txBody>
+      </p:sp>
+      <p:sp>
+        <p:nvSpPr>
+          <p:cNvPr id="3" name="Footer Placeholder 2"/>
+          <p:cNvSpPr>
+            <a:spLocks noGrp="1"/>
+          </p:cNvSpPr>
+          <p:nvPr>
+            <p:ph type="ftr" sz="quarter" idx="11"/>
+          </p:nvPr>
+        </p:nvSpPr>
+        <p:spPr/>
+        <p:txBody>
+          <a:bodyPr/>
+          <a:lstStyle/>
+          <a:p>
+            <a:endParaRPr lang="en-US"/>
+          </a:p>
+        </p:txBody>
+      </p:sp>
+      <p:sp>
+        <p:nvSpPr>
+          <p:cNvPr id="4" name="Slide Number Placeholder 3"/>
+          <p:cNvSpPr>
+            <a:spLocks noGrp="1"/>
+          </p:cNvSpPr>
+          <p:nvPr>
+            <p:ph type="sldNum" sz="quarter" idx="12"/>
+          </p:nvPr>
+        </p:nvSpPr>
+        <p:spPr/>
+        <p:txBody>
+          <a:bodyPr/>
+          <a:lstStyle/>
+          <a:p>
+            <a:fld id="{C1FF6DA9-008F-8B48-92A6-B652298478BF}" type="slidenum">
+              <a:rPr lang="en-US" smtClean="0"/>
+              <a:t>‹#›</a:t>
+            </a:fld>
+            <a:endParaRPr lang="en-US"/>
+          </a:p>
+        </p:txBody>
+      </p:sp>
+    </p:spTree>
+    <p:extLst>
+      <p:ext uri="{BB962C8B-B14F-4D97-AF65-F5344CB8AC3E}">
+        <p14:creationId xmlns:p14="http://schemas.microsoft.com/office/powerpoint/2010/main" val="1627598014"/>
+      </p:ext>
+    </p:extLst>
+  </p:cSld>
+  <p:clrMapOvr>
+    <a:masterClrMapping/>
+  </p:clrMapOvr>
+</p:sldLayout>
+</file>
+
+<file path=ppt/slideLayouts/slideLayout19.xml><?xml version="1.0" encoding="utf-8"?>
+<p:sldLayout xmlns:a="http://schemas.openxmlformats.org/drawingml/2006/main" xmlns:r="http://schemas.openxmlformats.org/officeDocument/2006/relationships" xmlns:p="http://schemas.openxmlformats.org/presentationml/2006/main" type="objTx" preserve="1">
+  <p:cSld name="Content with Caption">
+    <p:spTree>
+      <p:nvGrpSpPr>
+        <p:cNvPr id="1" name=""/>
+        <p:cNvGrpSpPr/>
+        <p:nvPr/>
+      </p:nvGrpSpPr>
+      <p:grpSpPr>
+        <a:xfrm>
+          <a:off x="0" y="0"/>
+          <a:ext cx="0" cy="0"/>
+          <a:chOff x="0" y="0"/>
+          <a:chExt cx="0" cy="0"/>
+        </a:xfrm>
+      </p:grpSpPr>
+      <p:sp>
+        <p:nvSpPr>
+          <p:cNvPr id="2" name="Title 1"/>
+          <p:cNvSpPr>
+            <a:spLocks noGrp="1"/>
+          </p:cNvSpPr>
+          <p:nvPr>
+            <p:ph type="title"/>
+          </p:nvPr>
+        </p:nvSpPr>
+        <p:spPr>
+          <a:xfrm>
+            <a:off x="457200" y="273050"/>
+            <a:ext cx="3008313" cy="1162050"/>
+          </a:xfrm>
+        </p:spPr>
+        <p:txBody>
+          <a:bodyPr anchor="b"/>
+          <a:lstStyle>
+            <a:lvl1pPr algn="l">
+              <a:defRPr sz="2000" b="1"/>
+            </a:lvl1pPr>
+          </a:lstStyle>
+          <a:p>
+            <a:r>
+              <a:rPr lang="en-US"/>
+              <a:t>Click to edit Master title style</a:t>
+            </a:r>
+          </a:p>
+        </p:txBody>
+      </p:sp>
+      <p:sp>
+        <p:nvSpPr>
+          <p:cNvPr id="3" name="Content Placeholder 2"/>
+          <p:cNvSpPr>
+            <a:spLocks noGrp="1"/>
+          </p:cNvSpPr>
+          <p:nvPr>
+            <p:ph idx="1"/>
+          </p:nvPr>
+        </p:nvSpPr>
+        <p:spPr>
+          <a:xfrm>
+            <a:off x="3575050" y="273050"/>
+            <a:ext cx="5111750" cy="5853113"/>
+          </a:xfrm>
+        </p:spPr>
+        <p:txBody>
+          <a:bodyPr/>
+          <a:lstStyle>
+            <a:lvl1pPr>
+              <a:defRPr sz="3200"/>
+            </a:lvl1pPr>
+            <a:lvl2pPr>
+              <a:defRPr sz="2800"/>
+            </a:lvl2pPr>
+            <a:lvl3pPr>
+              <a:defRPr sz="2400"/>
+            </a:lvl3pPr>
+            <a:lvl4pPr>
+              <a:defRPr sz="2000"/>
+            </a:lvl4pPr>
+            <a:lvl5pPr>
+              <a:defRPr sz="2000"/>
+            </a:lvl5pPr>
+            <a:lvl6pPr>
+              <a:defRPr sz="2000"/>
+            </a:lvl6pPr>
+            <a:lvl7pPr>
+              <a:defRPr sz="2000"/>
+            </a:lvl7pPr>
+            <a:lvl8pPr>
+              <a:defRPr sz="2000"/>
+            </a:lvl8pPr>
+            <a:lvl9pPr>
+              <a:defRPr sz="2000"/>
+            </a:lvl9pPr>
+          </a:lstStyle>
+          <a:p>
+            <a:pPr lvl="0"/>
+            <a:r>
+              <a:rPr lang="en-US"/>
+              <a:t>Click to edit Master text styles</a:t>
+            </a:r>
+          </a:p>
+          <a:p>
+            <a:pPr lvl="1"/>
+            <a:r>
+              <a:rPr lang="en-US"/>
+              <a:t>Second level</a:t>
+            </a:r>
+          </a:p>
+          <a:p>
+            <a:pPr lvl="2"/>
+            <a:r>
+              <a:rPr lang="en-US"/>
+              <a:t>Third level</a:t>
+            </a:r>
+          </a:p>
+          <a:p>
+            <a:pPr lvl="3"/>
+            <a:r>
+              <a:rPr lang="en-US"/>
+              <a:t>Fourth level</a:t>
+            </a:r>
+          </a:p>
+          <a:p>
+            <a:pPr lvl="4"/>
+            <a:r>
+              <a:rPr lang="en-US"/>
+              <a:t>Fifth level</a:t>
+            </a:r>
+          </a:p>
+        </p:txBody>
+      </p:sp>
+      <p:sp>
+        <p:nvSpPr>
+          <p:cNvPr id="4" name="Text Placeholder 3"/>
+          <p:cNvSpPr>
+            <a:spLocks noGrp="1"/>
+          </p:cNvSpPr>
+          <p:nvPr>
+            <p:ph type="body" sz="half" idx="2"/>
+          </p:nvPr>
+        </p:nvSpPr>
+        <p:spPr>
+          <a:xfrm>
+            <a:off x="457200" y="1435100"/>
+            <a:ext cx="3008313" cy="4691063"/>
+          </a:xfrm>
+        </p:spPr>
+        <p:txBody>
+          <a:bodyPr/>
+          <a:lstStyle>
+            <a:lvl1pPr marL="0" indent="0">
+              <a:buNone/>
+              <a:defRPr sz="1400"/>
+            </a:lvl1pPr>
+            <a:lvl2pPr marL="457200" indent="0">
+              <a:buNone/>
+              <a:defRPr sz="1200"/>
+            </a:lvl2pPr>
+            <a:lvl3pPr marL="914400" indent="0">
+              <a:buNone/>
+              <a:defRPr sz="1000"/>
+            </a:lvl3pPr>
+            <a:lvl4pPr marL="1371600" indent="0">
+              <a:buNone/>
+              <a:defRPr sz="900"/>
+            </a:lvl4pPr>
+            <a:lvl5pPr marL="1828800" indent="0">
+              <a:buNone/>
+              <a:defRPr sz="900"/>
+            </a:lvl5pPr>
+            <a:lvl6pPr marL="2286000" indent="0">
+              <a:buNone/>
+              <a:defRPr sz="900"/>
+            </a:lvl6pPr>
+            <a:lvl7pPr marL="2743200" indent="0">
+              <a:buNone/>
+              <a:defRPr sz="900"/>
+            </a:lvl7pPr>
+            <a:lvl8pPr marL="3200400" indent="0">
+              <a:buNone/>
+              <a:defRPr sz="900"/>
+            </a:lvl8pPr>
+            <a:lvl9pPr marL="3657600" indent="0">
+              <a:buNone/>
+              <a:defRPr sz="900"/>
+            </a:lvl9pPr>
+          </a:lstStyle>
+          <a:p>
+            <a:pPr lvl="0"/>
+            <a:r>
+              <a:rPr lang="en-US"/>
+              <a:t>Click to edit Master text styles</a:t>
+            </a:r>
+          </a:p>
+        </p:txBody>
+      </p:sp>
+      <p:sp>
+        <p:nvSpPr>
+          <p:cNvPr id="5" name="Date Placeholder 4"/>
+          <p:cNvSpPr>
+            <a:spLocks noGrp="1"/>
+          </p:cNvSpPr>
+          <p:nvPr>
+            <p:ph type="dt" sz="half" idx="10"/>
+          </p:nvPr>
+        </p:nvSpPr>
+        <p:spPr/>
+        <p:txBody>
+          <a:bodyPr/>
+          <a:lstStyle/>
+          <a:p>
+            <a:fld id="{5BCAD085-E8A6-8845-BD4E-CB4CCA059FC4}" type="datetimeFigureOut">
+              <a:rPr lang="en-US" smtClean="0"/>
+              <a:t>8/21/2026</a:t>
+            </a:fld>
+            <a:endParaRPr lang="en-US"/>
+          </a:p>
+        </p:txBody>
+      </p:sp>
+      <p:sp>
+        <p:nvSpPr>
+          <p:cNvPr id="6" name="Footer Placeholder 5"/>
+          <p:cNvSpPr>
+            <a:spLocks noGrp="1"/>
+          </p:cNvSpPr>
+          <p:nvPr>
+            <p:ph type="ftr" sz="quarter" idx="11"/>
+          </p:nvPr>
+        </p:nvSpPr>
+        <p:spPr/>
+        <p:txBody>
+          <a:bodyPr/>
+          <a:lstStyle/>
+          <a:p>
+            <a:endParaRPr lang="en-US"/>
+          </a:p>
+        </p:txBody>
+      </p:sp>
+      <p:sp>
+        <p:nvSpPr>
+          <p:cNvPr id="7" name="Slide Number Placeholder 6"/>
+          <p:cNvSpPr>
+            <a:spLocks noGrp="1"/>
+          </p:cNvSpPr>
+          <p:nvPr>
+            <p:ph type="sldNum" sz="quarter" idx="12"/>
+          </p:nvPr>
+        </p:nvSpPr>
+        <p:spPr/>
+        <p:txBody>
+          <a:bodyPr/>
+          <a:lstStyle/>
+          <a:p>
+            <a:fld id="{C1FF6DA9-008F-8B48-92A6-B652298478BF}" type="slidenum">
+              <a:rPr lang="en-US" smtClean="0"/>
+              <a:t>‹#›</a:t>
+            </a:fld>
+            <a:endParaRPr lang="en-US"/>
+          </a:p>
+        </p:txBody>
+      </p:sp>
+    </p:spTree>
+    <p:extLst>
+      <p:ext uri="{BB962C8B-B14F-4D97-AF65-F5344CB8AC3E}">
+        <p14:creationId xmlns:p14="http://schemas.microsoft.com/office/powerpoint/2010/main" val="537514359"/>
       </p:ext>
     </p:extLst>
   </p:cSld>
@@ -1238,7 +3391,7 @@
           <a:p>
             <a:fld id="{C2084FD7-7AF8-460D-9715-A4E08247DCDC}" type="datetimeFigureOut">
               <a:rPr lang="ko-KR" altLang="en-US" smtClean="0"/>
-              <a:t>2026-08-20</a:t>
+              <a:t>2026-08-21</a:t>
             </a:fld>
             <a:endParaRPr lang="ko-KR" altLang="en-US"/>
           </a:p>
@@ -1302,6 +3455,604 @@
     <p:extLst>
       <p:ext uri="{BB962C8B-B14F-4D97-AF65-F5344CB8AC3E}">
         <p14:creationId xmlns:p14="http://schemas.microsoft.com/office/powerpoint/2010/main" val="1956789125"/>
+      </p:ext>
+    </p:extLst>
+  </p:cSld>
+  <p:clrMapOvr>
+    <a:masterClrMapping/>
+  </p:clrMapOvr>
+</p:sldLayout>
+</file>
+
+<file path=ppt/slideLayouts/slideLayout20.xml><?xml version="1.0" encoding="utf-8"?>
+<p:sldLayout xmlns:a="http://schemas.openxmlformats.org/drawingml/2006/main" xmlns:r="http://schemas.openxmlformats.org/officeDocument/2006/relationships" xmlns:p="http://schemas.openxmlformats.org/presentationml/2006/main" type="picTx" preserve="1">
+  <p:cSld name="Picture with Caption">
+    <p:spTree>
+      <p:nvGrpSpPr>
+        <p:cNvPr id="1" name=""/>
+        <p:cNvGrpSpPr/>
+        <p:nvPr/>
+      </p:nvGrpSpPr>
+      <p:grpSpPr>
+        <a:xfrm>
+          <a:off x="0" y="0"/>
+          <a:ext cx="0" cy="0"/>
+          <a:chOff x="0" y="0"/>
+          <a:chExt cx="0" cy="0"/>
+        </a:xfrm>
+      </p:grpSpPr>
+      <p:sp>
+        <p:nvSpPr>
+          <p:cNvPr id="2" name="Title 1"/>
+          <p:cNvSpPr>
+            <a:spLocks noGrp="1"/>
+          </p:cNvSpPr>
+          <p:nvPr>
+            <p:ph type="title"/>
+          </p:nvPr>
+        </p:nvSpPr>
+        <p:spPr>
+          <a:xfrm>
+            <a:off x="1792288" y="4800600"/>
+            <a:ext cx="5486400" cy="566738"/>
+          </a:xfrm>
+        </p:spPr>
+        <p:txBody>
+          <a:bodyPr anchor="b"/>
+          <a:lstStyle>
+            <a:lvl1pPr algn="l">
+              <a:defRPr sz="2000" b="1"/>
+            </a:lvl1pPr>
+          </a:lstStyle>
+          <a:p>
+            <a:r>
+              <a:rPr lang="en-US"/>
+              <a:t>Click to edit Master title style</a:t>
+            </a:r>
+          </a:p>
+        </p:txBody>
+      </p:sp>
+      <p:sp>
+        <p:nvSpPr>
+          <p:cNvPr id="3" name="Picture Placeholder 2"/>
+          <p:cNvSpPr>
+            <a:spLocks noGrp="1"/>
+          </p:cNvSpPr>
+          <p:nvPr>
+            <p:ph type="pic" idx="1"/>
+          </p:nvPr>
+        </p:nvSpPr>
+        <p:spPr>
+          <a:xfrm>
+            <a:off x="1792288" y="612775"/>
+            <a:ext cx="5486400" cy="4114800"/>
+          </a:xfrm>
+        </p:spPr>
+        <p:txBody>
+          <a:bodyPr/>
+          <a:lstStyle>
+            <a:lvl1pPr marL="0" indent="0">
+              <a:buNone/>
+              <a:defRPr sz="3200"/>
+            </a:lvl1pPr>
+            <a:lvl2pPr marL="457200" indent="0">
+              <a:buNone/>
+              <a:defRPr sz="2800"/>
+            </a:lvl2pPr>
+            <a:lvl3pPr marL="914400" indent="0">
+              <a:buNone/>
+              <a:defRPr sz="2400"/>
+            </a:lvl3pPr>
+            <a:lvl4pPr marL="1371600" indent="0">
+              <a:buNone/>
+              <a:defRPr sz="2000"/>
+            </a:lvl4pPr>
+            <a:lvl5pPr marL="1828800" indent="0">
+              <a:buNone/>
+              <a:defRPr sz="2000"/>
+            </a:lvl5pPr>
+            <a:lvl6pPr marL="2286000" indent="0">
+              <a:buNone/>
+              <a:defRPr sz="2000"/>
+            </a:lvl6pPr>
+            <a:lvl7pPr marL="2743200" indent="0">
+              <a:buNone/>
+              <a:defRPr sz="2000"/>
+            </a:lvl7pPr>
+            <a:lvl8pPr marL="3200400" indent="0">
+              <a:buNone/>
+              <a:defRPr sz="2000"/>
+            </a:lvl8pPr>
+            <a:lvl9pPr marL="3657600" indent="0">
+              <a:buNone/>
+              <a:defRPr sz="2000"/>
+            </a:lvl9pPr>
+          </a:lstStyle>
+          <a:p>
+            <a:endParaRPr lang="en-US"/>
+          </a:p>
+        </p:txBody>
+      </p:sp>
+      <p:sp>
+        <p:nvSpPr>
+          <p:cNvPr id="4" name="Text Placeholder 3"/>
+          <p:cNvSpPr>
+            <a:spLocks noGrp="1"/>
+          </p:cNvSpPr>
+          <p:nvPr>
+            <p:ph type="body" sz="half" idx="2"/>
+          </p:nvPr>
+        </p:nvSpPr>
+        <p:spPr>
+          <a:xfrm>
+            <a:off x="1792288" y="5367338"/>
+            <a:ext cx="5486400" cy="804862"/>
+          </a:xfrm>
+        </p:spPr>
+        <p:txBody>
+          <a:bodyPr/>
+          <a:lstStyle>
+            <a:lvl1pPr marL="0" indent="0">
+              <a:buNone/>
+              <a:defRPr sz="1400"/>
+            </a:lvl1pPr>
+            <a:lvl2pPr marL="457200" indent="0">
+              <a:buNone/>
+              <a:defRPr sz="1200"/>
+            </a:lvl2pPr>
+            <a:lvl3pPr marL="914400" indent="0">
+              <a:buNone/>
+              <a:defRPr sz="1000"/>
+            </a:lvl3pPr>
+            <a:lvl4pPr marL="1371600" indent="0">
+              <a:buNone/>
+              <a:defRPr sz="900"/>
+            </a:lvl4pPr>
+            <a:lvl5pPr marL="1828800" indent="0">
+              <a:buNone/>
+              <a:defRPr sz="900"/>
+            </a:lvl5pPr>
+            <a:lvl6pPr marL="2286000" indent="0">
+              <a:buNone/>
+              <a:defRPr sz="900"/>
+            </a:lvl6pPr>
+            <a:lvl7pPr marL="2743200" indent="0">
+              <a:buNone/>
+              <a:defRPr sz="900"/>
+            </a:lvl7pPr>
+            <a:lvl8pPr marL="3200400" indent="0">
+              <a:buNone/>
+              <a:defRPr sz="900"/>
+            </a:lvl8pPr>
+            <a:lvl9pPr marL="3657600" indent="0">
+              <a:buNone/>
+              <a:defRPr sz="900"/>
+            </a:lvl9pPr>
+          </a:lstStyle>
+          <a:p>
+            <a:pPr lvl="0"/>
+            <a:r>
+              <a:rPr lang="en-US"/>
+              <a:t>Click to edit Master text styles</a:t>
+            </a:r>
+          </a:p>
+        </p:txBody>
+      </p:sp>
+      <p:sp>
+        <p:nvSpPr>
+          <p:cNvPr id="5" name="Date Placeholder 4"/>
+          <p:cNvSpPr>
+            <a:spLocks noGrp="1"/>
+          </p:cNvSpPr>
+          <p:nvPr>
+            <p:ph type="dt" sz="half" idx="10"/>
+          </p:nvPr>
+        </p:nvSpPr>
+        <p:spPr/>
+        <p:txBody>
+          <a:bodyPr/>
+          <a:lstStyle/>
+          <a:p>
+            <a:fld id="{5BCAD085-E8A6-8845-BD4E-CB4CCA059FC4}" type="datetimeFigureOut">
+              <a:rPr lang="en-US" smtClean="0"/>
+              <a:t>8/21/2026</a:t>
+            </a:fld>
+            <a:endParaRPr lang="en-US"/>
+          </a:p>
+        </p:txBody>
+      </p:sp>
+      <p:sp>
+        <p:nvSpPr>
+          <p:cNvPr id="6" name="Footer Placeholder 5"/>
+          <p:cNvSpPr>
+            <a:spLocks noGrp="1"/>
+          </p:cNvSpPr>
+          <p:nvPr>
+            <p:ph type="ftr" sz="quarter" idx="11"/>
+          </p:nvPr>
+        </p:nvSpPr>
+        <p:spPr/>
+        <p:txBody>
+          <a:bodyPr/>
+          <a:lstStyle/>
+          <a:p>
+            <a:endParaRPr lang="en-US"/>
+          </a:p>
+        </p:txBody>
+      </p:sp>
+      <p:sp>
+        <p:nvSpPr>
+          <p:cNvPr id="7" name="Slide Number Placeholder 6"/>
+          <p:cNvSpPr>
+            <a:spLocks noGrp="1"/>
+          </p:cNvSpPr>
+          <p:nvPr>
+            <p:ph type="sldNum" sz="quarter" idx="12"/>
+          </p:nvPr>
+        </p:nvSpPr>
+        <p:spPr/>
+        <p:txBody>
+          <a:bodyPr/>
+          <a:lstStyle/>
+          <a:p>
+            <a:fld id="{C1FF6DA9-008F-8B48-92A6-B652298478BF}" type="slidenum">
+              <a:rPr lang="en-US" smtClean="0"/>
+              <a:t>‹#›</a:t>
+            </a:fld>
+            <a:endParaRPr lang="en-US"/>
+          </a:p>
+        </p:txBody>
+      </p:sp>
+    </p:spTree>
+    <p:extLst>
+      <p:ext uri="{BB962C8B-B14F-4D97-AF65-F5344CB8AC3E}">
+        <p14:creationId xmlns:p14="http://schemas.microsoft.com/office/powerpoint/2010/main" val="3736135913"/>
+      </p:ext>
+    </p:extLst>
+  </p:cSld>
+  <p:clrMapOvr>
+    <a:masterClrMapping/>
+  </p:clrMapOvr>
+</p:sldLayout>
+</file>
+
+<file path=ppt/slideLayouts/slideLayout21.xml><?xml version="1.0" encoding="utf-8"?>
+<p:sldLayout xmlns:a="http://schemas.openxmlformats.org/drawingml/2006/main" xmlns:r="http://schemas.openxmlformats.org/officeDocument/2006/relationships" xmlns:p="http://schemas.openxmlformats.org/presentationml/2006/main" type="vertTx" preserve="1">
+  <p:cSld name="Title and Vertical Text">
+    <p:spTree>
+      <p:nvGrpSpPr>
+        <p:cNvPr id="1" name=""/>
+        <p:cNvGrpSpPr/>
+        <p:nvPr/>
+      </p:nvGrpSpPr>
+      <p:grpSpPr>
+        <a:xfrm>
+          <a:off x="0" y="0"/>
+          <a:ext cx="0" cy="0"/>
+          <a:chOff x="0" y="0"/>
+          <a:chExt cx="0" cy="0"/>
+        </a:xfrm>
+      </p:grpSpPr>
+      <p:sp>
+        <p:nvSpPr>
+          <p:cNvPr id="2" name="Title 1"/>
+          <p:cNvSpPr>
+            <a:spLocks noGrp="1"/>
+          </p:cNvSpPr>
+          <p:nvPr>
+            <p:ph type="title"/>
+          </p:nvPr>
+        </p:nvSpPr>
+        <p:spPr/>
+        <p:txBody>
+          <a:bodyPr/>
+          <a:lstStyle/>
+          <a:p>
+            <a:r>
+              <a:rPr lang="en-US"/>
+              <a:t>Click to edit Master title style</a:t>
+            </a:r>
+          </a:p>
+        </p:txBody>
+      </p:sp>
+      <p:sp>
+        <p:nvSpPr>
+          <p:cNvPr id="3" name="Vertical Text Placeholder 2"/>
+          <p:cNvSpPr>
+            <a:spLocks noGrp="1"/>
+          </p:cNvSpPr>
+          <p:nvPr>
+            <p:ph type="body" orient="vert" idx="1"/>
+          </p:nvPr>
+        </p:nvSpPr>
+        <p:spPr/>
+        <p:txBody>
+          <a:bodyPr vert="eaVert"/>
+          <a:lstStyle/>
+          <a:p>
+            <a:pPr lvl="0"/>
+            <a:r>
+              <a:rPr lang="en-US"/>
+              <a:t>Click to edit Master text styles</a:t>
+            </a:r>
+          </a:p>
+          <a:p>
+            <a:pPr lvl="1"/>
+            <a:r>
+              <a:rPr lang="en-US"/>
+              <a:t>Second level</a:t>
+            </a:r>
+          </a:p>
+          <a:p>
+            <a:pPr lvl="2"/>
+            <a:r>
+              <a:rPr lang="en-US"/>
+              <a:t>Third level</a:t>
+            </a:r>
+          </a:p>
+          <a:p>
+            <a:pPr lvl="3"/>
+            <a:r>
+              <a:rPr lang="en-US"/>
+              <a:t>Fourth level</a:t>
+            </a:r>
+          </a:p>
+          <a:p>
+            <a:pPr lvl="4"/>
+            <a:r>
+              <a:rPr lang="en-US"/>
+              <a:t>Fifth level</a:t>
+            </a:r>
+          </a:p>
+        </p:txBody>
+      </p:sp>
+      <p:sp>
+        <p:nvSpPr>
+          <p:cNvPr id="4" name="Date Placeholder 3"/>
+          <p:cNvSpPr>
+            <a:spLocks noGrp="1"/>
+          </p:cNvSpPr>
+          <p:nvPr>
+            <p:ph type="dt" sz="half" idx="10"/>
+          </p:nvPr>
+        </p:nvSpPr>
+        <p:spPr/>
+        <p:txBody>
+          <a:bodyPr/>
+          <a:lstStyle/>
+          <a:p>
+            <a:fld id="{5BCAD085-E8A6-8845-BD4E-CB4CCA059FC4}" type="datetimeFigureOut">
+              <a:rPr lang="en-US" smtClean="0"/>
+              <a:t>8/21/2026</a:t>
+            </a:fld>
+            <a:endParaRPr lang="en-US"/>
+          </a:p>
+        </p:txBody>
+      </p:sp>
+      <p:sp>
+        <p:nvSpPr>
+          <p:cNvPr id="5" name="Footer Placeholder 4"/>
+          <p:cNvSpPr>
+            <a:spLocks noGrp="1"/>
+          </p:cNvSpPr>
+          <p:nvPr>
+            <p:ph type="ftr" sz="quarter" idx="11"/>
+          </p:nvPr>
+        </p:nvSpPr>
+        <p:spPr/>
+        <p:txBody>
+          <a:bodyPr/>
+          <a:lstStyle/>
+          <a:p>
+            <a:endParaRPr lang="en-US"/>
+          </a:p>
+        </p:txBody>
+      </p:sp>
+      <p:sp>
+        <p:nvSpPr>
+          <p:cNvPr id="6" name="Slide Number Placeholder 5"/>
+          <p:cNvSpPr>
+            <a:spLocks noGrp="1"/>
+          </p:cNvSpPr>
+          <p:nvPr>
+            <p:ph type="sldNum" sz="quarter" idx="12"/>
+          </p:nvPr>
+        </p:nvSpPr>
+        <p:spPr/>
+        <p:txBody>
+          <a:bodyPr/>
+          <a:lstStyle/>
+          <a:p>
+            <a:fld id="{C1FF6DA9-008F-8B48-92A6-B652298478BF}" type="slidenum">
+              <a:rPr lang="en-US" smtClean="0"/>
+              <a:t>‹#›</a:t>
+            </a:fld>
+            <a:endParaRPr lang="en-US"/>
+          </a:p>
+        </p:txBody>
+      </p:sp>
+    </p:spTree>
+    <p:extLst>
+      <p:ext uri="{BB962C8B-B14F-4D97-AF65-F5344CB8AC3E}">
+        <p14:creationId xmlns:p14="http://schemas.microsoft.com/office/powerpoint/2010/main" val="2519327987"/>
+      </p:ext>
+    </p:extLst>
+  </p:cSld>
+  <p:clrMapOvr>
+    <a:masterClrMapping/>
+  </p:clrMapOvr>
+</p:sldLayout>
+</file>
+
+<file path=ppt/slideLayouts/slideLayout22.xml><?xml version="1.0" encoding="utf-8"?>
+<p:sldLayout xmlns:a="http://schemas.openxmlformats.org/drawingml/2006/main" xmlns:r="http://schemas.openxmlformats.org/officeDocument/2006/relationships" xmlns:p="http://schemas.openxmlformats.org/presentationml/2006/main" type="vertTitleAndTx" preserve="1">
+  <p:cSld name="Vertical Title and Text">
+    <p:spTree>
+      <p:nvGrpSpPr>
+        <p:cNvPr id="1" name=""/>
+        <p:cNvGrpSpPr/>
+        <p:nvPr/>
+      </p:nvGrpSpPr>
+      <p:grpSpPr>
+        <a:xfrm>
+          <a:off x="0" y="0"/>
+          <a:ext cx="0" cy="0"/>
+          <a:chOff x="0" y="0"/>
+          <a:chExt cx="0" cy="0"/>
+        </a:xfrm>
+      </p:grpSpPr>
+      <p:sp>
+        <p:nvSpPr>
+          <p:cNvPr id="2" name="Vertical Title 1"/>
+          <p:cNvSpPr>
+            <a:spLocks noGrp="1"/>
+          </p:cNvSpPr>
+          <p:nvPr>
+            <p:ph type="title" orient="vert"/>
+          </p:nvPr>
+        </p:nvSpPr>
+        <p:spPr>
+          <a:xfrm>
+            <a:off x="6629400" y="274638"/>
+            <a:ext cx="2057400" cy="5851525"/>
+          </a:xfrm>
+        </p:spPr>
+        <p:txBody>
+          <a:bodyPr vert="eaVert"/>
+          <a:lstStyle/>
+          <a:p>
+            <a:r>
+              <a:rPr lang="en-US"/>
+              <a:t>Click to edit Master title style</a:t>
+            </a:r>
+          </a:p>
+        </p:txBody>
+      </p:sp>
+      <p:sp>
+        <p:nvSpPr>
+          <p:cNvPr id="3" name="Vertical Text Placeholder 2"/>
+          <p:cNvSpPr>
+            <a:spLocks noGrp="1"/>
+          </p:cNvSpPr>
+          <p:nvPr>
+            <p:ph type="body" orient="vert" idx="1"/>
+          </p:nvPr>
+        </p:nvSpPr>
+        <p:spPr>
+          <a:xfrm>
+            <a:off x="457200" y="274638"/>
+            <a:ext cx="6019800" cy="5851525"/>
+          </a:xfrm>
+        </p:spPr>
+        <p:txBody>
+          <a:bodyPr vert="eaVert"/>
+          <a:lstStyle/>
+          <a:p>
+            <a:pPr lvl="0"/>
+            <a:r>
+              <a:rPr lang="en-US"/>
+              <a:t>Click to edit Master text styles</a:t>
+            </a:r>
+          </a:p>
+          <a:p>
+            <a:pPr lvl="1"/>
+            <a:r>
+              <a:rPr lang="en-US"/>
+              <a:t>Second level</a:t>
+            </a:r>
+          </a:p>
+          <a:p>
+            <a:pPr lvl="2"/>
+            <a:r>
+              <a:rPr lang="en-US"/>
+              <a:t>Third level</a:t>
+            </a:r>
+          </a:p>
+          <a:p>
+            <a:pPr lvl="3"/>
+            <a:r>
+              <a:rPr lang="en-US"/>
+              <a:t>Fourth level</a:t>
+            </a:r>
+          </a:p>
+          <a:p>
+            <a:pPr lvl="4"/>
+            <a:r>
+              <a:rPr lang="en-US"/>
+              <a:t>Fifth level</a:t>
+            </a:r>
+          </a:p>
+        </p:txBody>
+      </p:sp>
+      <p:sp>
+        <p:nvSpPr>
+          <p:cNvPr id="4" name="Date Placeholder 3"/>
+          <p:cNvSpPr>
+            <a:spLocks noGrp="1"/>
+          </p:cNvSpPr>
+          <p:nvPr>
+            <p:ph type="dt" sz="half" idx="10"/>
+          </p:nvPr>
+        </p:nvSpPr>
+        <p:spPr/>
+        <p:txBody>
+          <a:bodyPr/>
+          <a:lstStyle/>
+          <a:p>
+            <a:fld id="{5BCAD085-E8A6-8845-BD4E-CB4CCA059FC4}" type="datetimeFigureOut">
+              <a:rPr lang="en-US" smtClean="0"/>
+              <a:t>8/21/2026</a:t>
+            </a:fld>
+            <a:endParaRPr lang="en-US"/>
+          </a:p>
+        </p:txBody>
+      </p:sp>
+      <p:sp>
+        <p:nvSpPr>
+          <p:cNvPr id="5" name="Footer Placeholder 4"/>
+          <p:cNvSpPr>
+            <a:spLocks noGrp="1"/>
+          </p:cNvSpPr>
+          <p:nvPr>
+            <p:ph type="ftr" sz="quarter" idx="11"/>
+          </p:nvPr>
+        </p:nvSpPr>
+        <p:spPr/>
+        <p:txBody>
+          <a:bodyPr/>
+          <a:lstStyle/>
+          <a:p>
+            <a:endParaRPr lang="en-US"/>
+          </a:p>
+        </p:txBody>
+      </p:sp>
+      <p:sp>
+        <p:nvSpPr>
+          <p:cNvPr id="6" name="Slide Number Placeholder 5"/>
+          <p:cNvSpPr>
+            <a:spLocks noGrp="1"/>
+          </p:cNvSpPr>
+          <p:nvPr>
+            <p:ph type="sldNum" sz="quarter" idx="12"/>
+          </p:nvPr>
+        </p:nvSpPr>
+        <p:spPr/>
+        <p:txBody>
+          <a:bodyPr/>
+          <a:lstStyle/>
+          <a:p>
+            <a:fld id="{C1FF6DA9-008F-8B48-92A6-B652298478BF}" type="slidenum">
+              <a:rPr lang="en-US" smtClean="0"/>
+              <a:t>‹#›</a:t>
+            </a:fld>
+            <a:endParaRPr lang="en-US"/>
+          </a:p>
+        </p:txBody>
+      </p:sp>
+    </p:spTree>
+    <p:extLst>
+      <p:ext uri="{BB962C8B-B14F-4D97-AF65-F5344CB8AC3E}">
+        <p14:creationId xmlns:p14="http://schemas.microsoft.com/office/powerpoint/2010/main" val="2293826821"/>
       </p:ext>
     </p:extLst>
   </p:cSld>
@@ -1513,7 +4264,7 @@
           <a:p>
             <a:fld id="{C2084FD7-7AF8-460D-9715-A4E08247DCDC}" type="datetimeFigureOut">
               <a:rPr lang="ko-KR" altLang="en-US" smtClean="0"/>
-              <a:t>2026-08-20</a:t>
+              <a:t>2026-08-21</a:t>
             </a:fld>
             <a:endParaRPr lang="ko-KR" altLang="en-US"/>
           </a:p>
@@ -1778,7 +4529,7 @@
           <a:p>
             <a:fld id="{C2084FD7-7AF8-460D-9715-A4E08247DCDC}" type="datetimeFigureOut">
               <a:rPr lang="ko-KR" altLang="en-US" smtClean="0"/>
-              <a:t>2026-08-20</a:t>
+              <a:t>2026-08-21</a:t>
             </a:fld>
             <a:endParaRPr lang="ko-KR" altLang="en-US"/>
           </a:p>
@@ -2190,7 +4941,7 @@
           <a:p>
             <a:fld id="{C2084FD7-7AF8-460D-9715-A4E08247DCDC}" type="datetimeFigureOut">
               <a:rPr lang="ko-KR" altLang="en-US" smtClean="0"/>
-              <a:t>2026-08-20</a:t>
+              <a:t>2026-08-21</a:t>
             </a:fld>
             <a:endParaRPr lang="ko-KR" altLang="en-US"/>
           </a:p>
@@ -2331,7 +5082,7 @@
           <a:p>
             <a:fld id="{C2084FD7-7AF8-460D-9715-A4E08247DCDC}" type="datetimeFigureOut">
               <a:rPr lang="ko-KR" altLang="en-US" smtClean="0"/>
-              <a:t>2026-08-20</a:t>
+              <a:t>2026-08-21</a:t>
             </a:fld>
             <a:endParaRPr lang="ko-KR" altLang="en-US"/>
           </a:p>
@@ -2444,7 +5195,7 @@
           <a:p>
             <a:fld id="{C2084FD7-7AF8-460D-9715-A4E08247DCDC}" type="datetimeFigureOut">
               <a:rPr lang="ko-KR" altLang="en-US" smtClean="0"/>
-              <a:t>2026-08-20</a:t>
+              <a:t>2026-08-21</a:t>
             </a:fld>
             <a:endParaRPr lang="ko-KR" altLang="en-US"/>
           </a:p>
@@ -2755,7 +5506,7 @@
           <a:p>
             <a:fld id="{C2084FD7-7AF8-460D-9715-A4E08247DCDC}" type="datetimeFigureOut">
               <a:rPr lang="ko-KR" altLang="en-US" smtClean="0"/>
-              <a:t>2026-08-20</a:t>
+              <a:t>2026-08-21</a:t>
             </a:fld>
             <a:endParaRPr lang="ko-KR" altLang="en-US"/>
           </a:p>
@@ -3043,7 +5794,7 @@
           <a:p>
             <a:fld id="{C2084FD7-7AF8-460D-9715-A4E08247DCDC}" type="datetimeFigureOut">
               <a:rPr lang="ko-KR" altLang="en-US" smtClean="0"/>
-              <a:t>2026-08-20</a:t>
+              <a:t>2026-08-21</a:t>
             </a:fld>
             <a:endParaRPr lang="ko-KR" altLang="en-US"/>
           </a:p>
@@ -3284,7 +6035,7 @@
           <a:p>
             <a:fld id="{C2084FD7-7AF8-460D-9715-A4E08247DCDC}" type="datetimeFigureOut">
               <a:rPr lang="ko-KR" altLang="en-US" smtClean="0"/>
-              <a:t>2026-08-20</a:t>
+              <a:t>2026-08-21</a:t>
             </a:fld>
             <a:endParaRPr lang="ko-KR" altLang="en-US"/>
           </a:p>
@@ -3684,6 +6435,514 @@
 </p:sldMaster>
 </file>
 
+<file path=ppt/slideMasters/slideMaster2.xml><?xml version="1.0" encoding="utf-8"?>
+<p:sldMaster xmlns:a="http://schemas.openxmlformats.org/drawingml/2006/main" xmlns:r="http://schemas.openxmlformats.org/officeDocument/2006/relationships" xmlns:p="http://schemas.openxmlformats.org/presentationml/2006/main">
+  <p:cSld>
+    <p:bg>
+      <p:bgRef idx="1001">
+        <a:schemeClr val="bg1"/>
+      </p:bgRef>
+    </p:bg>
+    <p:spTree>
+      <p:nvGrpSpPr>
+        <p:cNvPr id="1" name=""/>
+        <p:cNvGrpSpPr/>
+        <p:nvPr/>
+      </p:nvGrpSpPr>
+      <p:grpSpPr>
+        <a:xfrm>
+          <a:off x="0" y="0"/>
+          <a:ext cx="0" cy="0"/>
+          <a:chOff x="0" y="0"/>
+          <a:chExt cx="0" cy="0"/>
+        </a:xfrm>
+      </p:grpSpPr>
+      <p:sp>
+        <p:nvSpPr>
+          <p:cNvPr id="2" name="Title Placeholder 1"/>
+          <p:cNvSpPr>
+            <a:spLocks noGrp="1"/>
+          </p:cNvSpPr>
+          <p:nvPr>
+            <p:ph type="title"/>
+          </p:nvPr>
+        </p:nvSpPr>
+        <p:spPr>
+          <a:xfrm>
+            <a:off x="457200" y="274638"/>
+            <a:ext cx="8229600" cy="1143000"/>
+          </a:xfrm>
+          <a:prstGeom prst="rect">
+            <a:avLst/>
+          </a:prstGeom>
+        </p:spPr>
+        <p:txBody>
+          <a:bodyPr vert="horz" lIns="91440" tIns="45720" rIns="91440" bIns="45720" rtlCol="0" anchor="ctr">
+            <a:normAutofit/>
+          </a:bodyPr>
+          <a:lstStyle/>
+          <a:p>
+            <a:r>
+              <a:rPr lang="en-US"/>
+              <a:t>Click to edit Master title style</a:t>
+            </a:r>
+          </a:p>
+        </p:txBody>
+      </p:sp>
+      <p:sp>
+        <p:nvSpPr>
+          <p:cNvPr id="3" name="Text Placeholder 2"/>
+          <p:cNvSpPr>
+            <a:spLocks noGrp="1"/>
+          </p:cNvSpPr>
+          <p:nvPr>
+            <p:ph type="body" idx="1"/>
+          </p:nvPr>
+        </p:nvSpPr>
+        <p:spPr>
+          <a:xfrm>
+            <a:off x="457200" y="1600200"/>
+            <a:ext cx="8229600" cy="4525963"/>
+          </a:xfrm>
+          <a:prstGeom prst="rect">
+            <a:avLst/>
+          </a:prstGeom>
+        </p:spPr>
+        <p:txBody>
+          <a:bodyPr vert="horz" lIns="91440" tIns="45720" rIns="91440" bIns="45720" rtlCol="0">
+            <a:normAutofit/>
+          </a:bodyPr>
+          <a:lstStyle/>
+          <a:p>
+            <a:pPr lvl="0"/>
+            <a:r>
+              <a:rPr lang="en-US"/>
+              <a:t>Click to edit Master text styles</a:t>
+            </a:r>
+          </a:p>
+          <a:p>
+            <a:pPr lvl="1"/>
+            <a:r>
+              <a:rPr lang="en-US"/>
+              <a:t>Second level</a:t>
+            </a:r>
+          </a:p>
+          <a:p>
+            <a:pPr lvl="2"/>
+            <a:r>
+              <a:rPr lang="en-US"/>
+              <a:t>Third level</a:t>
+            </a:r>
+          </a:p>
+          <a:p>
+            <a:pPr lvl="3"/>
+            <a:r>
+              <a:rPr lang="en-US"/>
+              <a:t>Fourth level</a:t>
+            </a:r>
+          </a:p>
+          <a:p>
+            <a:pPr lvl="4"/>
+            <a:r>
+              <a:rPr lang="en-US"/>
+              <a:t>Fifth level</a:t>
+            </a:r>
+          </a:p>
+        </p:txBody>
+      </p:sp>
+      <p:sp>
+        <p:nvSpPr>
+          <p:cNvPr id="4" name="Date Placeholder 3"/>
+          <p:cNvSpPr>
+            <a:spLocks noGrp="1"/>
+          </p:cNvSpPr>
+          <p:nvPr>
+            <p:ph type="dt" sz="half" idx="2"/>
+          </p:nvPr>
+        </p:nvSpPr>
+        <p:spPr>
+          <a:xfrm>
+            <a:off x="457200" y="6356350"/>
+            <a:ext cx="2133600" cy="365125"/>
+          </a:xfrm>
+          <a:prstGeom prst="rect">
+            <a:avLst/>
+          </a:prstGeom>
+        </p:spPr>
+        <p:txBody>
+          <a:bodyPr vert="horz" lIns="91440" tIns="45720" rIns="91440" bIns="45720" rtlCol="0" anchor="ctr"/>
+          <a:lstStyle>
+            <a:lvl1pPr algn="l">
+              <a:defRPr sz="1200">
+                <a:solidFill>
+                  <a:schemeClr val="tx1">
+                    <a:tint val="75000"/>
+                  </a:schemeClr>
+                </a:solidFill>
+              </a:defRPr>
+            </a:lvl1pPr>
+          </a:lstStyle>
+          <a:p>
+            <a:fld id="{5BCAD085-E8A6-8845-BD4E-CB4CCA059FC4}" type="datetimeFigureOut">
+              <a:rPr lang="en-US" smtClean="0"/>
+              <a:t>8/21/2026</a:t>
+            </a:fld>
+            <a:endParaRPr lang="en-US"/>
+          </a:p>
+        </p:txBody>
+      </p:sp>
+      <p:sp>
+        <p:nvSpPr>
+          <p:cNvPr id="5" name="Footer Placeholder 4"/>
+          <p:cNvSpPr>
+            <a:spLocks noGrp="1"/>
+          </p:cNvSpPr>
+          <p:nvPr>
+            <p:ph type="ftr" sz="quarter" idx="3"/>
+          </p:nvPr>
+        </p:nvSpPr>
+        <p:spPr>
+          <a:xfrm>
+            <a:off x="3124200" y="6356350"/>
+            <a:ext cx="2895600" cy="365125"/>
+          </a:xfrm>
+          <a:prstGeom prst="rect">
+            <a:avLst/>
+          </a:prstGeom>
+        </p:spPr>
+        <p:txBody>
+          <a:bodyPr vert="horz" lIns="91440" tIns="45720" rIns="91440" bIns="45720" rtlCol="0" anchor="ctr"/>
+          <a:lstStyle>
+            <a:lvl1pPr algn="ctr">
+              <a:defRPr sz="1200">
+                <a:solidFill>
+                  <a:schemeClr val="tx1">
+                    <a:tint val="75000"/>
+                  </a:schemeClr>
+                </a:solidFill>
+              </a:defRPr>
+            </a:lvl1pPr>
+          </a:lstStyle>
+          <a:p>
+            <a:endParaRPr lang="en-US"/>
+          </a:p>
+        </p:txBody>
+      </p:sp>
+      <p:sp>
+        <p:nvSpPr>
+          <p:cNvPr id="6" name="Slide Number Placeholder 5"/>
+          <p:cNvSpPr>
+            <a:spLocks noGrp="1"/>
+          </p:cNvSpPr>
+          <p:nvPr>
+            <p:ph type="sldNum" sz="quarter" idx="4"/>
+          </p:nvPr>
+        </p:nvSpPr>
+        <p:spPr>
+          <a:xfrm>
+            <a:off x="6553200" y="6356350"/>
+            <a:ext cx="2133600" cy="365125"/>
+          </a:xfrm>
+          <a:prstGeom prst="rect">
+            <a:avLst/>
+          </a:prstGeom>
+        </p:spPr>
+        <p:txBody>
+          <a:bodyPr vert="horz" lIns="91440" tIns="45720" rIns="91440" bIns="45720" rtlCol="0" anchor="ctr"/>
+          <a:lstStyle>
+            <a:lvl1pPr algn="r">
+              <a:defRPr sz="1200">
+                <a:solidFill>
+                  <a:schemeClr val="tx1">
+                    <a:tint val="75000"/>
+                  </a:schemeClr>
+                </a:solidFill>
+              </a:defRPr>
+            </a:lvl1pPr>
+          </a:lstStyle>
+          <a:p>
+            <a:fld id="{C1FF6DA9-008F-8B48-92A6-B652298478BF}" type="slidenum">
+              <a:rPr lang="en-US" smtClean="0"/>
+              <a:t>‹#›</a:t>
+            </a:fld>
+            <a:endParaRPr lang="en-US"/>
+          </a:p>
+        </p:txBody>
+      </p:sp>
+    </p:spTree>
+    <p:extLst>
+      <p:ext uri="{BB962C8B-B14F-4D97-AF65-F5344CB8AC3E}">
+        <p14:creationId xmlns:p14="http://schemas.microsoft.com/office/powerpoint/2010/main" val="669930587"/>
+      </p:ext>
+    </p:extLst>
+  </p:cSld>
+  <p:clrMap bg1="lt1" tx1="dk1" bg2="lt2" tx2="dk2" accent1="accent1" accent2="accent2" accent3="accent3" accent4="accent4" accent5="accent5" accent6="accent6" hlink="hlink" folHlink="folHlink"/>
+  <p:sldLayoutIdLst>
+    <p:sldLayoutId id="2147483661" r:id="rId1"/>
+    <p:sldLayoutId id="2147483662" r:id="rId2"/>
+    <p:sldLayoutId id="2147483663" r:id="rId3"/>
+    <p:sldLayoutId id="2147483664" r:id="rId4"/>
+    <p:sldLayoutId id="2147483665" r:id="rId5"/>
+    <p:sldLayoutId id="2147483666" r:id="rId6"/>
+    <p:sldLayoutId id="2147483667" r:id="rId7"/>
+    <p:sldLayoutId id="2147483668" r:id="rId8"/>
+    <p:sldLayoutId id="2147483669" r:id="rId9"/>
+    <p:sldLayoutId id="2147483670" r:id="rId10"/>
+    <p:sldLayoutId id="2147483671" r:id="rId11"/>
+  </p:sldLayoutIdLst>
+  <p:txStyles>
+    <p:titleStyle>
+      <a:lvl1pPr algn="ctr" defTabSz="457200" rtl="0" eaLnBrk="1" latinLnBrk="0" hangingPunct="1">
+        <a:spcBef>
+          <a:spcPct val="0"/>
+        </a:spcBef>
+        <a:buNone/>
+        <a:defRPr sz="4400" kern="1200">
+          <a:solidFill>
+            <a:schemeClr val="tx1"/>
+          </a:solidFill>
+          <a:latin typeface="+mj-lt"/>
+          <a:ea typeface="+mj-ea"/>
+          <a:cs typeface="+mj-cs"/>
+        </a:defRPr>
+      </a:lvl1pPr>
+    </p:titleStyle>
+    <p:bodyStyle>
+      <a:lvl1pPr marL="342900" indent="-342900" algn="l" defTabSz="457200" rtl="0" eaLnBrk="1" latinLnBrk="0" hangingPunct="1">
+        <a:spcBef>
+          <a:spcPct val="20000"/>
+        </a:spcBef>
+        <a:buFont typeface="Arial"/>
+        <a:buChar char="•"/>
+        <a:defRPr sz="3200" kern="1200">
+          <a:solidFill>
+            <a:schemeClr val="tx1"/>
+          </a:solidFill>
+          <a:latin typeface="+mn-lt"/>
+          <a:ea typeface="+mn-ea"/>
+          <a:cs typeface="+mn-cs"/>
+        </a:defRPr>
+      </a:lvl1pPr>
+      <a:lvl2pPr marL="742950" indent="-285750" algn="l" defTabSz="457200" rtl="0" eaLnBrk="1" latinLnBrk="0" hangingPunct="1">
+        <a:spcBef>
+          <a:spcPct val="20000"/>
+        </a:spcBef>
+        <a:buFont typeface="Arial"/>
+        <a:buChar char="–"/>
+        <a:defRPr sz="2800" kern="1200">
+          <a:solidFill>
+            <a:schemeClr val="tx1"/>
+          </a:solidFill>
+          <a:latin typeface="+mn-lt"/>
+          <a:ea typeface="+mn-ea"/>
+          <a:cs typeface="+mn-cs"/>
+        </a:defRPr>
+      </a:lvl2pPr>
+      <a:lvl3pPr marL="1143000" indent="-228600" algn="l" defTabSz="457200" rtl="0" eaLnBrk="1" latinLnBrk="0" hangingPunct="1">
+        <a:spcBef>
+          <a:spcPct val="20000"/>
+        </a:spcBef>
+        <a:buFont typeface="Arial"/>
+        <a:buChar char="•"/>
+        <a:defRPr sz="2400" kern="1200">
+          <a:solidFill>
+            <a:schemeClr val="tx1"/>
+          </a:solidFill>
+          <a:latin typeface="+mn-lt"/>
+          <a:ea typeface="+mn-ea"/>
+          <a:cs typeface="+mn-cs"/>
+        </a:defRPr>
+      </a:lvl3pPr>
+      <a:lvl4pPr marL="1600200" indent="-228600" algn="l" defTabSz="457200" rtl="0" eaLnBrk="1" latinLnBrk="0" hangingPunct="1">
+        <a:spcBef>
+          <a:spcPct val="20000"/>
+        </a:spcBef>
+        <a:buFont typeface="Arial"/>
+        <a:buChar char="–"/>
+        <a:defRPr sz="2000" kern="1200">
+          <a:solidFill>
+            <a:schemeClr val="tx1"/>
+          </a:solidFill>
+          <a:latin typeface="+mn-lt"/>
+          <a:ea typeface="+mn-ea"/>
+          <a:cs typeface="+mn-cs"/>
+        </a:defRPr>
+      </a:lvl4pPr>
+      <a:lvl5pPr marL="2057400" indent="-228600" algn="l" defTabSz="457200" rtl="0" eaLnBrk="1" latinLnBrk="0" hangingPunct="1">
+        <a:spcBef>
+          <a:spcPct val="20000"/>
+        </a:spcBef>
+        <a:buFont typeface="Arial"/>
+        <a:buChar char="»"/>
+        <a:defRPr sz="2000" kern="1200">
+          <a:solidFill>
+            <a:schemeClr val="tx1"/>
+          </a:solidFill>
+          <a:latin typeface="+mn-lt"/>
+          <a:ea typeface="+mn-ea"/>
+          <a:cs typeface="+mn-cs"/>
+        </a:defRPr>
+      </a:lvl5pPr>
+      <a:lvl6pPr marL="2514600" indent="-228600" algn="l" defTabSz="457200" rtl="0" eaLnBrk="1" latinLnBrk="0" hangingPunct="1">
+        <a:spcBef>
+          <a:spcPct val="20000"/>
+        </a:spcBef>
+        <a:buFont typeface="Arial"/>
+        <a:buChar char="•"/>
+        <a:defRPr sz="2000" kern="1200">
+          <a:solidFill>
+            <a:schemeClr val="tx1"/>
+          </a:solidFill>
+          <a:latin typeface="+mn-lt"/>
+          <a:ea typeface="+mn-ea"/>
+          <a:cs typeface="+mn-cs"/>
+        </a:defRPr>
+      </a:lvl6pPr>
+      <a:lvl7pPr marL="2971800" indent="-228600" algn="l" defTabSz="457200" rtl="0" eaLnBrk="1" latinLnBrk="0" hangingPunct="1">
+        <a:spcBef>
+          <a:spcPct val="20000"/>
+        </a:spcBef>
+        <a:buFont typeface="Arial"/>
+        <a:buChar char="•"/>
+        <a:defRPr sz="2000" kern="1200">
+          <a:solidFill>
+            <a:schemeClr val="tx1"/>
+          </a:solidFill>
+          <a:latin typeface="+mn-lt"/>
+          <a:ea typeface="+mn-ea"/>
+          <a:cs typeface="+mn-cs"/>
+        </a:defRPr>
+      </a:lvl7pPr>
+      <a:lvl8pPr marL="3429000" indent="-228600" algn="l" defTabSz="457200" rtl="0" eaLnBrk="1" latinLnBrk="0" hangingPunct="1">
+        <a:spcBef>
+          <a:spcPct val="20000"/>
+        </a:spcBef>
+        <a:buFont typeface="Arial"/>
+        <a:buChar char="•"/>
+        <a:defRPr sz="2000" kern="1200">
+          <a:solidFill>
+            <a:schemeClr val="tx1"/>
+          </a:solidFill>
+          <a:latin typeface="+mn-lt"/>
+          <a:ea typeface="+mn-ea"/>
+          <a:cs typeface="+mn-cs"/>
+        </a:defRPr>
+      </a:lvl8pPr>
+      <a:lvl9pPr marL="3886200" indent="-228600" algn="l" defTabSz="457200" rtl="0" eaLnBrk="1" latinLnBrk="0" hangingPunct="1">
+        <a:spcBef>
+          <a:spcPct val="20000"/>
+        </a:spcBef>
+        <a:buFont typeface="Arial"/>
+        <a:buChar char="•"/>
+        <a:defRPr sz="2000" kern="1200">
+          <a:solidFill>
+            <a:schemeClr val="tx1"/>
+          </a:solidFill>
+          <a:latin typeface="+mn-lt"/>
+          <a:ea typeface="+mn-ea"/>
+          <a:cs typeface="+mn-cs"/>
+        </a:defRPr>
+      </a:lvl9pPr>
+    </p:bodyStyle>
+    <p:otherStyle>
+      <a:defPPr>
+        <a:defRPr lang="en-US"/>
+      </a:defPPr>
+      <a:lvl1pPr marL="0" algn="l" defTabSz="457200" rtl="0" eaLnBrk="1" latinLnBrk="0" hangingPunct="1">
+        <a:defRPr sz="1800" kern="1200">
+          <a:solidFill>
+            <a:schemeClr val="tx1"/>
+          </a:solidFill>
+          <a:latin typeface="+mn-lt"/>
+          <a:ea typeface="+mn-ea"/>
+          <a:cs typeface="+mn-cs"/>
+        </a:defRPr>
+      </a:lvl1pPr>
+      <a:lvl2pPr marL="457200" algn="l" defTabSz="457200" rtl="0" eaLnBrk="1" latinLnBrk="0" hangingPunct="1">
+        <a:defRPr sz="1800" kern="1200">
+          <a:solidFill>
+            <a:schemeClr val="tx1"/>
+          </a:solidFill>
+          <a:latin typeface="+mn-lt"/>
+          <a:ea typeface="+mn-ea"/>
+          <a:cs typeface="+mn-cs"/>
+        </a:defRPr>
+      </a:lvl2pPr>
+      <a:lvl3pPr marL="914400" algn="l" defTabSz="457200" rtl="0" eaLnBrk="1" latinLnBrk="0" hangingPunct="1">
+        <a:defRPr sz="1800" kern="1200">
+          <a:solidFill>
+            <a:schemeClr val="tx1"/>
+          </a:solidFill>
+          <a:latin typeface="+mn-lt"/>
+          <a:ea typeface="+mn-ea"/>
+          <a:cs typeface="+mn-cs"/>
+        </a:defRPr>
+      </a:lvl3pPr>
+      <a:lvl4pPr marL="1371600" algn="l" defTabSz="457200" rtl="0" eaLnBrk="1" latinLnBrk="0" hangingPunct="1">
+        <a:defRPr sz="1800" kern="1200">
+          <a:solidFill>
+            <a:schemeClr val="tx1"/>
+          </a:solidFill>
+          <a:latin typeface="+mn-lt"/>
+          <a:ea typeface="+mn-ea"/>
+          <a:cs typeface="+mn-cs"/>
+        </a:defRPr>
+      </a:lvl4pPr>
+      <a:lvl5pPr marL="1828800" algn="l" defTabSz="457200" rtl="0" eaLnBrk="1" latinLnBrk="0" hangingPunct="1">
+        <a:defRPr sz="1800" kern="1200">
+          <a:solidFill>
+            <a:schemeClr val="tx1"/>
+          </a:solidFill>
+          <a:latin typeface="+mn-lt"/>
+          <a:ea typeface="+mn-ea"/>
+          <a:cs typeface="+mn-cs"/>
+        </a:defRPr>
+      </a:lvl5pPr>
+      <a:lvl6pPr marL="2286000" algn="l" defTabSz="457200" rtl="0" eaLnBrk="1" latinLnBrk="0" hangingPunct="1">
+        <a:defRPr sz="1800" kern="1200">
+          <a:solidFill>
+            <a:schemeClr val="tx1"/>
+          </a:solidFill>
+          <a:latin typeface="+mn-lt"/>
+          <a:ea typeface="+mn-ea"/>
+          <a:cs typeface="+mn-cs"/>
+        </a:defRPr>
+      </a:lvl6pPr>
+      <a:lvl7pPr marL="2743200" algn="l" defTabSz="457200" rtl="0" eaLnBrk="1" latinLnBrk="0" hangingPunct="1">
+        <a:defRPr sz="1800" kern="1200">
+          <a:solidFill>
+            <a:schemeClr val="tx1"/>
+          </a:solidFill>
+          <a:latin typeface="+mn-lt"/>
+          <a:ea typeface="+mn-ea"/>
+          <a:cs typeface="+mn-cs"/>
+        </a:defRPr>
+      </a:lvl7pPr>
+      <a:lvl8pPr marL="3200400" algn="l" defTabSz="457200" rtl="0" eaLnBrk="1" latinLnBrk="0" hangingPunct="1">
+        <a:defRPr sz="1800" kern="1200">
+          <a:solidFill>
+            <a:schemeClr val="tx1"/>
+          </a:solidFill>
+          <a:latin typeface="+mn-lt"/>
+          <a:ea typeface="+mn-ea"/>
+          <a:cs typeface="+mn-cs"/>
+        </a:defRPr>
+      </a:lvl8pPr>
+      <a:lvl9pPr marL="3657600" algn="l" defTabSz="457200" rtl="0" eaLnBrk="1" latinLnBrk="0" hangingPunct="1">
+        <a:defRPr sz="1800" kern="1200">
+          <a:solidFill>
+            <a:schemeClr val="tx1"/>
+          </a:solidFill>
+          <a:latin typeface="+mn-lt"/>
+          <a:ea typeface="+mn-ea"/>
+          <a:cs typeface="+mn-cs"/>
+        </a:defRPr>
+      </a:lvl9pPr>
+    </p:otherStyle>
+  </p:txStyles>
+</p:sldMaster>
+</file>
+
 <file path=ppt/slides/slide1.xml><?xml version="1.0" encoding="utf-8"?>
 <p:sld xmlns:a="http://schemas.openxmlformats.org/drawingml/2006/main" xmlns:r="http://schemas.openxmlformats.org/officeDocument/2006/relationships" xmlns:p="http://schemas.openxmlformats.org/presentationml/2006/main">
   <p:cSld>
@@ -3701,456 +6960,6 @@
           <a:chExt cx="0" cy="0"/>
         </a:xfrm>
       </p:grpSpPr>
-      <p:sp>
-        <p:nvSpPr>
-          <p:cNvPr id="2" name="제목 1">
-            <a:extLst>
-              <a:ext uri="{FF2B5EF4-FFF2-40B4-BE49-F238E27FC236}">
-                <a16:creationId xmlns:a16="http://schemas.microsoft.com/office/drawing/2014/main" id="{9087F190-AF04-3CAF-D892-F9146164ED6B}"/>
-              </a:ext>
-            </a:extLst>
-          </p:cNvPr>
-          <p:cNvSpPr>
-            <a:spLocks noGrp="1"/>
-          </p:cNvSpPr>
-          <p:nvPr>
-            <p:ph type="ctrTitle"/>
-          </p:nvPr>
-        </p:nvSpPr>
-        <p:spPr>
-          <a:xfrm>
-            <a:off x="759012" y="406400"/>
-            <a:ext cx="6992471" cy="2387600"/>
-          </a:xfrm>
-        </p:spPr>
-        <p:txBody>
-          <a:bodyPr>
-            <a:normAutofit/>
-          </a:bodyPr>
-          <a:lstStyle/>
-          <a:p>
-            <a:pPr algn="l"/>
-            <a:r>
-              <a:rPr lang="en-US" altLang="ko-KR" sz="5200" dirty="0"/>
-              <a:t>AI</a:t>
-            </a:r>
-            <a:r>
-              <a:rPr lang="ko-KR" altLang="en-US" sz="5200" dirty="0"/>
-              <a:t>를 활용한 전하 분포 </a:t>
-            </a:r>
-            <a:r>
-              <a:rPr lang="ko-KR" altLang="en-US" sz="5200" dirty="0" err="1"/>
-              <a:t>역추정</a:t>
-            </a:r>
-            <a:endParaRPr lang="ko-KR" altLang="en-US" sz="5200" dirty="0"/>
-          </a:p>
-        </p:txBody>
-      </p:sp>
-      <p:sp>
-        <p:nvSpPr>
-          <p:cNvPr id="3" name="부제목 2">
-            <a:extLst>
-              <a:ext uri="{FF2B5EF4-FFF2-40B4-BE49-F238E27FC236}">
-                <a16:creationId xmlns:a16="http://schemas.microsoft.com/office/drawing/2014/main" id="{76452ABD-CDF8-B89F-0707-5D1691B6D25A}"/>
-              </a:ext>
-            </a:extLst>
-          </p:cNvPr>
-          <p:cNvSpPr>
-            <a:spLocks noGrp="1"/>
-          </p:cNvSpPr>
-          <p:nvPr>
-            <p:ph type="subTitle" idx="1"/>
-          </p:nvPr>
-        </p:nvSpPr>
-        <p:spPr>
-          <a:xfrm>
-            <a:off x="7512424" y="3659982"/>
-            <a:ext cx="3287058" cy="1655762"/>
-          </a:xfrm>
-        </p:spPr>
-        <p:txBody>
-          <a:bodyPr>
-            <a:normAutofit/>
-          </a:bodyPr>
-          <a:lstStyle/>
-          <a:p>
-            <a:pPr algn="r"/>
-            <a:r>
-              <a:rPr lang="ko-KR" altLang="en-US" sz="1500" dirty="0" err="1"/>
-              <a:t>단국대학교부속소프트웨어고등학교</a:t>
-            </a:r>
-            <a:endParaRPr lang="en-US" altLang="ko-KR" sz="1500" dirty="0"/>
-          </a:p>
-          <a:p>
-            <a:pPr algn="r"/>
-            <a:r>
-              <a:rPr lang="ko-KR" altLang="en-US" sz="1500" dirty="0"/>
-              <a:t>인공지능 소프트웨어학과</a:t>
-            </a:r>
-            <a:endParaRPr lang="en-US" altLang="ko-KR" sz="1500" dirty="0"/>
-          </a:p>
-          <a:p>
-            <a:pPr algn="r"/>
-            <a:r>
-              <a:rPr lang="en-US" altLang="ko-KR" sz="1500" dirty="0"/>
-              <a:t>2</a:t>
-            </a:r>
-            <a:r>
-              <a:rPr lang="ko-KR" altLang="en-US" sz="1500" dirty="0"/>
-              <a:t>학년 </a:t>
-            </a:r>
-            <a:r>
-              <a:rPr lang="en-US" altLang="ko-KR" sz="1500" dirty="0"/>
-              <a:t>2</a:t>
-            </a:r>
-            <a:r>
-              <a:rPr lang="ko-KR" altLang="en-US" sz="1500" dirty="0"/>
-              <a:t>반 </a:t>
-            </a:r>
-            <a:r>
-              <a:rPr lang="en-US" altLang="ko-KR" sz="1500" dirty="0"/>
-              <a:t>12</a:t>
-            </a:r>
-            <a:r>
-              <a:rPr lang="ko-KR" altLang="en-US" sz="1500" dirty="0"/>
-              <a:t>번 </a:t>
-            </a:r>
-            <a:endParaRPr lang="en-US" altLang="ko-KR" sz="1500" dirty="0"/>
-          </a:p>
-          <a:p>
-            <a:pPr algn="r"/>
-            <a:r>
-              <a:rPr lang="ko-KR" altLang="en-US" sz="1500" dirty="0"/>
-              <a:t>오연우</a:t>
-            </a:r>
-            <a:endParaRPr lang="en-US" altLang="ko-KR" sz="1500" dirty="0"/>
-          </a:p>
-          <a:p>
-            <a:pPr algn="r"/>
-            <a:r>
-              <a:rPr lang="en-US" altLang="ko-KR" sz="1500" dirty="0"/>
-              <a:t>010-3740-4325</a:t>
-            </a:r>
-            <a:endParaRPr lang="ko-KR" altLang="en-US" sz="1500" dirty="0"/>
-          </a:p>
-        </p:txBody>
-      </p:sp>
-      <p:sp>
-        <p:nvSpPr>
-          <p:cNvPr id="4" name="TextBox 3">
-            <a:extLst>
-              <a:ext uri="{FF2B5EF4-FFF2-40B4-BE49-F238E27FC236}">
-                <a16:creationId xmlns:a16="http://schemas.microsoft.com/office/drawing/2014/main" id="{A0F1D0AE-0809-55A2-50D5-E07C23A03EBA}"/>
-              </a:ext>
-            </a:extLst>
-          </p:cNvPr>
-          <p:cNvSpPr txBox="1"/>
-          <p:nvPr/>
-        </p:nvSpPr>
-        <p:spPr>
-          <a:xfrm>
-            <a:off x="759012" y="914399"/>
-            <a:ext cx="1635384" cy="369332"/>
-          </a:xfrm>
-          <a:prstGeom prst="rect">
-            <a:avLst/>
-          </a:prstGeom>
-          <a:noFill/>
-        </p:spPr>
-        <p:txBody>
-          <a:bodyPr wrap="none" rtlCol="0">
-            <a:spAutoFit/>
-          </a:bodyPr>
-          <a:lstStyle/>
-          <a:p>
-            <a:r>
-              <a:rPr lang="en-US" altLang="ko-KR" dirty="0">
-                <a:solidFill>
-                  <a:schemeClr val="accent2"/>
-                </a:solidFill>
-              </a:rPr>
-              <a:t>[AI &amp; Physics]</a:t>
-            </a:r>
-            <a:endParaRPr lang="ko-KR" altLang="en-US" dirty="0">
-              <a:solidFill>
-                <a:schemeClr val="accent2"/>
-              </a:solidFill>
-            </a:endParaRPr>
-          </a:p>
-        </p:txBody>
-      </p:sp>
-      <p:sp>
-        <p:nvSpPr>
-          <p:cNvPr id="5" name="TextBox 4">
-            <a:extLst>
-              <a:ext uri="{FF2B5EF4-FFF2-40B4-BE49-F238E27FC236}">
-                <a16:creationId xmlns:a16="http://schemas.microsoft.com/office/drawing/2014/main" id="{B9F36D4F-DDBA-7F6D-D1CB-92EF3AA6C5F7}"/>
-              </a:ext>
-            </a:extLst>
-          </p:cNvPr>
-          <p:cNvSpPr txBox="1"/>
-          <p:nvPr/>
-        </p:nvSpPr>
-        <p:spPr>
-          <a:xfrm>
-            <a:off x="950259" y="2828687"/>
-            <a:ext cx="5843395" cy="369332"/>
-          </a:xfrm>
-          <a:prstGeom prst="rect">
-            <a:avLst/>
-          </a:prstGeom>
-          <a:noFill/>
-        </p:spPr>
-        <p:txBody>
-          <a:bodyPr wrap="none" rtlCol="0">
-            <a:spAutoFit/>
-          </a:bodyPr>
-          <a:lstStyle/>
-          <a:p>
-            <a:r>
-              <a:rPr lang="en-US" altLang="ko-KR" dirty="0"/>
-              <a:t>Electric Charge Distribution Inverse Estimating with AI</a:t>
-            </a:r>
-            <a:endParaRPr lang="ko-KR" altLang="en-US" dirty="0"/>
-          </a:p>
-        </p:txBody>
-      </p:sp>
-      <p:sp>
-        <p:nvSpPr>
-          <p:cNvPr id="6" name="부제목 2">
-            <a:extLst>
-              <a:ext uri="{FF2B5EF4-FFF2-40B4-BE49-F238E27FC236}">
-                <a16:creationId xmlns:a16="http://schemas.microsoft.com/office/drawing/2014/main" id="{6081D9EA-CF99-AFD1-53CC-472B830753FD}"/>
-              </a:ext>
-            </a:extLst>
-          </p:cNvPr>
-          <p:cNvSpPr txBox="1">
-            <a:spLocks/>
-          </p:cNvSpPr>
-          <p:nvPr/>
-        </p:nvSpPr>
-        <p:spPr>
-          <a:xfrm>
-            <a:off x="6793654" y="3659982"/>
-            <a:ext cx="3287058" cy="1655762"/>
-          </a:xfrm>
-          <a:prstGeom prst="rect">
-            <a:avLst/>
-          </a:prstGeom>
-        </p:spPr>
-        <p:txBody>
-          <a:bodyPr vert="horz" lIns="91440" tIns="45720" rIns="91440" bIns="45720" rtlCol="0">
-            <a:normAutofit/>
-          </a:bodyPr>
-          <a:lstStyle>
-            <a:lvl1pPr marL="0" indent="0" algn="ctr" defTabSz="914400" rtl="0" eaLnBrk="1" latinLnBrk="1" hangingPunct="1">
-              <a:lnSpc>
-                <a:spcPct val="90000"/>
-              </a:lnSpc>
-              <a:spcBef>
-                <a:spcPts val="1000"/>
-              </a:spcBef>
-              <a:buFont typeface="Arial" panose="020B0604020202020204" pitchFamily="34" charset="0"/>
-              <a:buNone/>
-              <a:defRPr sz="2400" kern="1200">
-                <a:solidFill>
-                  <a:schemeClr val="tx1"/>
-                </a:solidFill>
-                <a:latin typeface="+mn-lt"/>
-                <a:ea typeface="+mn-ea"/>
-                <a:cs typeface="+mn-cs"/>
-              </a:defRPr>
-            </a:lvl1pPr>
-            <a:lvl2pPr marL="457200" indent="0" algn="ctr" defTabSz="914400" rtl="0" eaLnBrk="1" latinLnBrk="1" hangingPunct="1">
-              <a:lnSpc>
-                <a:spcPct val="90000"/>
-              </a:lnSpc>
-              <a:spcBef>
-                <a:spcPts val="500"/>
-              </a:spcBef>
-              <a:buFont typeface="Arial" panose="020B0604020202020204" pitchFamily="34" charset="0"/>
-              <a:buNone/>
-              <a:defRPr sz="2000" kern="1200">
-                <a:solidFill>
-                  <a:schemeClr val="tx1"/>
-                </a:solidFill>
-                <a:latin typeface="+mn-lt"/>
-                <a:ea typeface="+mn-ea"/>
-                <a:cs typeface="+mn-cs"/>
-              </a:defRPr>
-            </a:lvl2pPr>
-            <a:lvl3pPr marL="914400" indent="0" algn="ctr" defTabSz="914400" rtl="0" eaLnBrk="1" latinLnBrk="1" hangingPunct="1">
-              <a:lnSpc>
-                <a:spcPct val="90000"/>
-              </a:lnSpc>
-              <a:spcBef>
-                <a:spcPts val="500"/>
-              </a:spcBef>
-              <a:buFont typeface="Arial" panose="020B0604020202020204" pitchFamily="34" charset="0"/>
-              <a:buNone/>
-              <a:defRPr sz="1800" kern="1200">
-                <a:solidFill>
-                  <a:schemeClr val="tx1"/>
-                </a:solidFill>
-                <a:latin typeface="+mn-lt"/>
-                <a:ea typeface="+mn-ea"/>
-                <a:cs typeface="+mn-cs"/>
-              </a:defRPr>
-            </a:lvl3pPr>
-            <a:lvl4pPr marL="1371600" indent="0" algn="ctr" defTabSz="914400" rtl="0" eaLnBrk="1" latinLnBrk="1" hangingPunct="1">
-              <a:lnSpc>
-                <a:spcPct val="90000"/>
-              </a:lnSpc>
-              <a:spcBef>
-                <a:spcPts val="500"/>
-              </a:spcBef>
-              <a:buFont typeface="Arial" panose="020B0604020202020204" pitchFamily="34" charset="0"/>
-              <a:buNone/>
-              <a:defRPr sz="1600" kern="1200">
-                <a:solidFill>
-                  <a:schemeClr val="tx1"/>
-                </a:solidFill>
-                <a:latin typeface="+mn-lt"/>
-                <a:ea typeface="+mn-ea"/>
-                <a:cs typeface="+mn-cs"/>
-              </a:defRPr>
-            </a:lvl4pPr>
-            <a:lvl5pPr marL="1828800" indent="0" algn="ctr" defTabSz="914400" rtl="0" eaLnBrk="1" latinLnBrk="1" hangingPunct="1">
-              <a:lnSpc>
-                <a:spcPct val="90000"/>
-              </a:lnSpc>
-              <a:spcBef>
-                <a:spcPts val="500"/>
-              </a:spcBef>
-              <a:buFont typeface="Arial" panose="020B0604020202020204" pitchFamily="34" charset="0"/>
-              <a:buNone/>
-              <a:defRPr sz="1600" kern="1200">
-                <a:solidFill>
-                  <a:schemeClr val="tx1"/>
-                </a:solidFill>
-                <a:latin typeface="+mn-lt"/>
-                <a:ea typeface="+mn-ea"/>
-                <a:cs typeface="+mn-cs"/>
-              </a:defRPr>
-            </a:lvl5pPr>
-            <a:lvl6pPr marL="2286000" indent="0" algn="ctr" defTabSz="914400" rtl="0" eaLnBrk="1" latinLnBrk="1" hangingPunct="1">
-              <a:lnSpc>
-                <a:spcPct val="90000"/>
-              </a:lnSpc>
-              <a:spcBef>
-                <a:spcPts val="500"/>
-              </a:spcBef>
-              <a:buFont typeface="Arial" panose="020B0604020202020204" pitchFamily="34" charset="0"/>
-              <a:buNone/>
-              <a:defRPr sz="1600" kern="1200">
-                <a:solidFill>
-                  <a:schemeClr val="tx1"/>
-                </a:solidFill>
-                <a:latin typeface="+mn-lt"/>
-                <a:ea typeface="+mn-ea"/>
-                <a:cs typeface="+mn-cs"/>
-              </a:defRPr>
-            </a:lvl6pPr>
-            <a:lvl7pPr marL="2743200" indent="0" algn="ctr" defTabSz="914400" rtl="0" eaLnBrk="1" latinLnBrk="1" hangingPunct="1">
-              <a:lnSpc>
-                <a:spcPct val="90000"/>
-              </a:lnSpc>
-              <a:spcBef>
-                <a:spcPts val="500"/>
-              </a:spcBef>
-              <a:buFont typeface="Arial" panose="020B0604020202020204" pitchFamily="34" charset="0"/>
-              <a:buNone/>
-              <a:defRPr sz="1600" kern="1200">
-                <a:solidFill>
-                  <a:schemeClr val="tx1"/>
-                </a:solidFill>
-                <a:latin typeface="+mn-lt"/>
-                <a:ea typeface="+mn-ea"/>
-                <a:cs typeface="+mn-cs"/>
-              </a:defRPr>
-            </a:lvl7pPr>
-            <a:lvl8pPr marL="3200400" indent="0" algn="ctr" defTabSz="914400" rtl="0" eaLnBrk="1" latinLnBrk="1" hangingPunct="1">
-              <a:lnSpc>
-                <a:spcPct val="90000"/>
-              </a:lnSpc>
-              <a:spcBef>
-                <a:spcPts val="500"/>
-              </a:spcBef>
-              <a:buFont typeface="Arial" panose="020B0604020202020204" pitchFamily="34" charset="0"/>
-              <a:buNone/>
-              <a:defRPr sz="1600" kern="1200">
-                <a:solidFill>
-                  <a:schemeClr val="tx1"/>
-                </a:solidFill>
-                <a:latin typeface="+mn-lt"/>
-                <a:ea typeface="+mn-ea"/>
-                <a:cs typeface="+mn-cs"/>
-              </a:defRPr>
-            </a:lvl8pPr>
-            <a:lvl9pPr marL="3657600" indent="0" algn="ctr" defTabSz="914400" rtl="0" eaLnBrk="1" latinLnBrk="1" hangingPunct="1">
-              <a:lnSpc>
-                <a:spcPct val="90000"/>
-              </a:lnSpc>
-              <a:spcBef>
-                <a:spcPts val="500"/>
-              </a:spcBef>
-              <a:buFont typeface="Arial" panose="020B0604020202020204" pitchFamily="34" charset="0"/>
-              <a:buNone/>
-              <a:defRPr sz="1600" kern="1200">
-                <a:solidFill>
-                  <a:schemeClr val="tx1"/>
-                </a:solidFill>
-                <a:latin typeface="+mn-lt"/>
-                <a:ea typeface="+mn-ea"/>
-                <a:cs typeface="+mn-cs"/>
-              </a:defRPr>
-            </a:lvl9pPr>
-          </a:lstStyle>
-          <a:p>
-            <a:pPr algn="l"/>
-            <a:r>
-              <a:rPr lang="en-US" altLang="ko-KR" sz="1500" dirty="0"/>
-              <a:t>School:</a:t>
-            </a:r>
-          </a:p>
-          <a:p>
-            <a:pPr algn="l"/>
-            <a:r>
-              <a:rPr lang="en-US" altLang="ko-KR" sz="1500" dirty="0"/>
-              <a:t>Department:</a:t>
-            </a:r>
-          </a:p>
-          <a:p>
-            <a:pPr algn="l"/>
-            <a:r>
-              <a:rPr lang="en-US" altLang="ko-KR" sz="1500" dirty="0"/>
-              <a:t>Class and</a:t>
-            </a:r>
-            <a:r>
-              <a:rPr lang="ko-KR" altLang="en-US" sz="1500" dirty="0"/>
-              <a:t> </a:t>
-            </a:r>
-            <a:r>
-              <a:rPr lang="en-US" altLang="ko-KR" sz="1500" dirty="0"/>
-              <a:t>Number:</a:t>
-            </a:r>
-          </a:p>
-          <a:p>
-            <a:pPr algn="l"/>
-            <a:r>
-              <a:rPr lang="en-US" altLang="ko-KR" sz="1500" dirty="0"/>
-              <a:t>Name:</a:t>
-            </a:r>
-          </a:p>
-          <a:p>
-            <a:pPr algn="l"/>
-            <a:r>
-              <a:rPr lang="en-US" altLang="ko-KR" sz="1500" dirty="0"/>
-              <a:t>H.P:</a:t>
-            </a:r>
-          </a:p>
-        </p:txBody>
-      </p:sp>
       <p:pic>
         <p:nvPicPr>
           <p:cNvPr id="183" name="그림 182" descr="GitHub - tomduck/electrostatics: Electrostatic field line and equipotential  contour diagrams · GitHub">
@@ -4173,14 +6982,539 @@
         </p:blipFill>
         <p:spPr>
           <a:xfrm>
-            <a:off x="2483220" y="488433"/>
-            <a:ext cx="7225559" cy="5419169"/>
+            <a:off x="-1545771" y="-64886"/>
+            <a:ext cx="9775371" cy="7331528"/>
+          </a:xfrm>
+          <a:prstGeom prst="rect">
+            <a:avLst/>
+          </a:prstGeom>
+          <a:noFill/>
+        </p:spPr>
+      </p:pic>
+      <p:sp>
+        <p:nvSpPr>
+          <p:cNvPr id="7" name="직사각형 6">
+            <a:extLst>
+              <a:ext uri="{FF2B5EF4-FFF2-40B4-BE49-F238E27FC236}">
+                <a16:creationId xmlns:a16="http://schemas.microsoft.com/office/drawing/2014/main" id="{1988447A-651A-7674-B384-7B128617E260}"/>
+              </a:ext>
+            </a:extLst>
+          </p:cNvPr>
+          <p:cNvSpPr/>
+          <p:nvPr/>
+        </p:nvSpPr>
+        <p:spPr>
+          <a:xfrm>
+            <a:off x="-1" y="0"/>
+            <a:ext cx="11584641" cy="6858000"/>
+          </a:xfrm>
+          <a:prstGeom prst="rect">
+            <a:avLst/>
+          </a:prstGeom>
+          <a:gradFill>
+            <a:gsLst>
+              <a:gs pos="0">
+                <a:schemeClr val="bg1">
+                  <a:alpha val="88000"/>
+                </a:schemeClr>
+              </a:gs>
+              <a:gs pos="8000">
+                <a:schemeClr val="bg1">
+                  <a:alpha val="70000"/>
+                </a:schemeClr>
+              </a:gs>
+              <a:gs pos="19000">
+                <a:schemeClr val="bg1">
+                  <a:alpha val="60000"/>
+                </a:schemeClr>
+              </a:gs>
+              <a:gs pos="40000">
+                <a:schemeClr val="bg1"/>
+              </a:gs>
+            </a:gsLst>
+            <a:lin ang="18900000" scaled="0"/>
+          </a:gradFill>
+          <a:ln>
+            <a:solidFill>
+              <a:schemeClr val="bg1"/>
+            </a:solidFill>
+          </a:ln>
+        </p:spPr>
+        <p:style>
+          <a:lnRef idx="2">
+            <a:schemeClr val="accent1">
+              <a:shade val="15000"/>
+            </a:schemeClr>
+          </a:lnRef>
+          <a:fillRef idx="1">
+            <a:schemeClr val="accent1"/>
+          </a:fillRef>
+          <a:effectRef idx="0">
+            <a:schemeClr val="accent1"/>
+          </a:effectRef>
+          <a:fontRef idx="minor">
+            <a:schemeClr val="lt1"/>
+          </a:fontRef>
+        </p:style>
+        <p:txBody>
+          <a:bodyPr rtlCol="0" anchor="ctr"/>
+          <a:lstStyle/>
+          <a:p>
+            <a:pPr algn="ctr"/>
+            <a:endParaRPr lang="ko-KR" altLang="en-US"/>
+          </a:p>
+        </p:txBody>
+      </p:sp>
+      <p:sp>
+        <p:nvSpPr>
+          <p:cNvPr id="2" name="제목 1">
+            <a:extLst>
+              <a:ext uri="{FF2B5EF4-FFF2-40B4-BE49-F238E27FC236}">
+                <a16:creationId xmlns:a16="http://schemas.microsoft.com/office/drawing/2014/main" id="{9087F190-AF04-3CAF-D892-F9146164ED6B}"/>
+              </a:ext>
+            </a:extLst>
+          </p:cNvPr>
+          <p:cNvSpPr>
+            <a:spLocks noGrp="1"/>
+          </p:cNvSpPr>
+          <p:nvPr>
+            <p:ph type="ctrTitle"/>
+          </p:nvPr>
+        </p:nvSpPr>
+        <p:spPr>
+          <a:xfrm>
+            <a:off x="759012" y="406400"/>
+            <a:ext cx="6992471" cy="2387600"/>
+          </a:xfrm>
+        </p:spPr>
+        <p:txBody>
+          <a:bodyPr>
+            <a:normAutofit/>
+          </a:bodyPr>
+          <a:lstStyle/>
+          <a:p>
+            <a:pPr algn="l"/>
+            <a:r>
+              <a:rPr lang="en-US" altLang="ko-KR" sz="5200" dirty="0"/>
+              <a:t>AI</a:t>
+            </a:r>
+            <a:r>
+              <a:rPr lang="ko-KR" altLang="en-US" sz="5200" dirty="0"/>
+              <a:t>를 활용한 전하 분포 </a:t>
+            </a:r>
+            <a:r>
+              <a:rPr lang="ko-KR" altLang="en-US" sz="5200" dirty="0" err="1"/>
+              <a:t>역추정</a:t>
+            </a:r>
+            <a:endParaRPr lang="ko-KR" altLang="en-US" sz="5200" dirty="0"/>
+          </a:p>
+        </p:txBody>
+      </p:sp>
+      <p:sp>
+        <p:nvSpPr>
+          <p:cNvPr id="3" name="부제목 2">
+            <a:extLst>
+              <a:ext uri="{FF2B5EF4-FFF2-40B4-BE49-F238E27FC236}">
+                <a16:creationId xmlns:a16="http://schemas.microsoft.com/office/drawing/2014/main" id="{76452ABD-CDF8-B89F-0707-5D1691B6D25A}"/>
+              </a:ext>
+            </a:extLst>
+          </p:cNvPr>
+          <p:cNvSpPr>
+            <a:spLocks noGrp="1"/>
+          </p:cNvSpPr>
+          <p:nvPr>
+            <p:ph type="subTitle" idx="1"/>
+          </p:nvPr>
+        </p:nvSpPr>
+        <p:spPr>
+          <a:xfrm>
+            <a:off x="7512424" y="3659982"/>
+            <a:ext cx="3287058" cy="1655762"/>
+          </a:xfrm>
+        </p:spPr>
+        <p:txBody>
+          <a:bodyPr>
+            <a:normAutofit/>
+          </a:bodyPr>
+          <a:lstStyle/>
+          <a:p>
+            <a:pPr algn="r"/>
+            <a:r>
+              <a:rPr lang="ko-KR" altLang="en-US" sz="1500" dirty="0" err="1"/>
+              <a:t>단국대학교부속소프트웨어고등학교</a:t>
+            </a:r>
+            <a:endParaRPr lang="en-US" altLang="ko-KR" sz="1500" dirty="0"/>
+          </a:p>
+          <a:p>
+            <a:pPr algn="r"/>
+            <a:r>
+              <a:rPr lang="ko-KR" altLang="en-US" sz="1500" dirty="0"/>
+              <a:t>인공지능 소프트웨어학과</a:t>
+            </a:r>
+            <a:endParaRPr lang="en-US" altLang="ko-KR" sz="1500" dirty="0"/>
+          </a:p>
+          <a:p>
+            <a:pPr algn="r"/>
+            <a:r>
+              <a:rPr lang="en-US" altLang="ko-KR" sz="1500" dirty="0"/>
+              <a:t>2</a:t>
+            </a:r>
+            <a:r>
+              <a:rPr lang="ko-KR" altLang="en-US" sz="1500" dirty="0"/>
+              <a:t>학년 </a:t>
+            </a:r>
+            <a:r>
+              <a:rPr lang="en-US" altLang="ko-KR" sz="1500" dirty="0"/>
+              <a:t>2</a:t>
+            </a:r>
+            <a:r>
+              <a:rPr lang="ko-KR" altLang="en-US" sz="1500" dirty="0"/>
+              <a:t>반 </a:t>
+            </a:r>
+            <a:r>
+              <a:rPr lang="en-US" altLang="ko-KR" sz="1500" dirty="0"/>
+              <a:t>12</a:t>
+            </a:r>
+            <a:r>
+              <a:rPr lang="ko-KR" altLang="en-US" sz="1500" dirty="0"/>
+              <a:t>번 </a:t>
+            </a:r>
+            <a:endParaRPr lang="en-US" altLang="ko-KR" sz="1500" dirty="0"/>
+          </a:p>
+          <a:p>
+            <a:pPr algn="r"/>
+            <a:r>
+              <a:rPr lang="ko-KR" altLang="en-US" sz="1500" dirty="0"/>
+              <a:t>오연우</a:t>
+            </a:r>
+            <a:endParaRPr lang="en-US" altLang="ko-KR" sz="1500" dirty="0"/>
+          </a:p>
+          <a:p>
+            <a:pPr algn="r"/>
+            <a:r>
+              <a:rPr lang="en-US" altLang="ko-KR" sz="1500" dirty="0"/>
+              <a:t>010-3740-4325</a:t>
+            </a:r>
+            <a:endParaRPr lang="ko-KR" altLang="en-US" sz="1500" dirty="0"/>
+          </a:p>
+        </p:txBody>
+      </p:sp>
+      <p:sp>
+        <p:nvSpPr>
+          <p:cNvPr id="4" name="TextBox 3">
+            <a:extLst>
+              <a:ext uri="{FF2B5EF4-FFF2-40B4-BE49-F238E27FC236}">
+                <a16:creationId xmlns:a16="http://schemas.microsoft.com/office/drawing/2014/main" id="{A0F1D0AE-0809-55A2-50D5-E07C23A03EBA}"/>
+              </a:ext>
+            </a:extLst>
+          </p:cNvPr>
+          <p:cNvSpPr txBox="1"/>
+          <p:nvPr/>
+        </p:nvSpPr>
+        <p:spPr>
+          <a:xfrm>
+            <a:off x="759012" y="914399"/>
+            <a:ext cx="1635384" cy="369332"/>
+          </a:xfrm>
+          <a:prstGeom prst="rect">
+            <a:avLst/>
+          </a:prstGeom>
+          <a:noFill/>
+        </p:spPr>
+        <p:txBody>
+          <a:bodyPr wrap="none" rtlCol="0">
+            <a:spAutoFit/>
+          </a:bodyPr>
+          <a:lstStyle/>
+          <a:p>
+            <a:r>
+              <a:rPr lang="en-US" altLang="ko-KR" dirty="0">
+                <a:solidFill>
+                  <a:schemeClr val="accent2"/>
+                </a:solidFill>
+              </a:rPr>
+              <a:t>[AI &amp; Physics]</a:t>
+            </a:r>
+            <a:endParaRPr lang="ko-KR" altLang="en-US" dirty="0">
+              <a:solidFill>
+                <a:schemeClr val="accent2"/>
+              </a:solidFill>
+            </a:endParaRPr>
+          </a:p>
+        </p:txBody>
+      </p:sp>
+      <p:sp>
+        <p:nvSpPr>
+          <p:cNvPr id="5" name="TextBox 4">
+            <a:extLst>
+              <a:ext uri="{FF2B5EF4-FFF2-40B4-BE49-F238E27FC236}">
+                <a16:creationId xmlns:a16="http://schemas.microsoft.com/office/drawing/2014/main" id="{B9F36D4F-DDBA-7F6D-D1CB-92EF3AA6C5F7}"/>
+              </a:ext>
+            </a:extLst>
+          </p:cNvPr>
+          <p:cNvSpPr txBox="1"/>
+          <p:nvPr/>
+        </p:nvSpPr>
+        <p:spPr>
+          <a:xfrm>
+            <a:off x="950259" y="2828687"/>
+            <a:ext cx="5843395" cy="369332"/>
+          </a:xfrm>
+          <a:prstGeom prst="rect">
+            <a:avLst/>
+          </a:prstGeom>
+          <a:noFill/>
+        </p:spPr>
+        <p:txBody>
+          <a:bodyPr wrap="none" rtlCol="0">
+            <a:spAutoFit/>
+          </a:bodyPr>
+          <a:lstStyle/>
+          <a:p>
+            <a:r>
+              <a:rPr lang="en-US" altLang="ko-KR" dirty="0"/>
+              <a:t>Electric Charge Distribution Inverse Estimating with AI</a:t>
+            </a:r>
+            <a:endParaRPr lang="ko-KR" altLang="en-US" dirty="0"/>
+          </a:p>
+        </p:txBody>
+      </p:sp>
+      <p:sp>
+        <p:nvSpPr>
+          <p:cNvPr id="6" name="부제목 2">
+            <a:extLst>
+              <a:ext uri="{FF2B5EF4-FFF2-40B4-BE49-F238E27FC236}">
+                <a16:creationId xmlns:a16="http://schemas.microsoft.com/office/drawing/2014/main" id="{6081D9EA-CF99-AFD1-53CC-472B830753FD}"/>
+              </a:ext>
+            </a:extLst>
+          </p:cNvPr>
+          <p:cNvSpPr txBox="1">
+            <a:spLocks/>
+          </p:cNvSpPr>
+          <p:nvPr/>
+        </p:nvSpPr>
+        <p:spPr>
+          <a:xfrm>
+            <a:off x="6793654" y="3659982"/>
+            <a:ext cx="3287058" cy="1655762"/>
           </a:xfrm>
           <a:prstGeom prst="rect">
             <a:avLst/>
           </a:prstGeom>
         </p:spPr>
-      </p:pic>
+        <p:txBody>
+          <a:bodyPr vert="horz" lIns="91440" tIns="45720" rIns="91440" bIns="45720" rtlCol="0">
+            <a:normAutofit/>
+          </a:bodyPr>
+          <a:lstStyle>
+            <a:lvl1pPr marL="0" indent="0" algn="ctr" defTabSz="914400" rtl="0" eaLnBrk="1" latinLnBrk="1" hangingPunct="1">
+              <a:lnSpc>
+                <a:spcPct val="90000"/>
+              </a:lnSpc>
+              <a:spcBef>
+                <a:spcPts val="1000"/>
+              </a:spcBef>
+              <a:buFont typeface="Arial" panose="020B0604020202020204" pitchFamily="34" charset="0"/>
+              <a:buNone/>
+              <a:defRPr sz="2400" kern="1200">
+                <a:solidFill>
+                  <a:schemeClr val="tx1"/>
+                </a:solidFill>
+                <a:latin typeface="+mn-lt"/>
+                <a:ea typeface="+mn-ea"/>
+                <a:cs typeface="+mn-cs"/>
+              </a:defRPr>
+            </a:lvl1pPr>
+            <a:lvl2pPr marL="457200" indent="0" algn="ctr" defTabSz="914400" rtl="0" eaLnBrk="1" latinLnBrk="1" hangingPunct="1">
+              <a:lnSpc>
+                <a:spcPct val="90000"/>
+              </a:lnSpc>
+              <a:spcBef>
+                <a:spcPts val="500"/>
+              </a:spcBef>
+              <a:buFont typeface="Arial" panose="020B0604020202020204" pitchFamily="34" charset="0"/>
+              <a:buNone/>
+              <a:defRPr sz="2000" kern="1200">
+                <a:solidFill>
+                  <a:schemeClr val="tx1"/>
+                </a:solidFill>
+                <a:latin typeface="+mn-lt"/>
+                <a:ea typeface="+mn-ea"/>
+                <a:cs typeface="+mn-cs"/>
+              </a:defRPr>
+            </a:lvl2pPr>
+            <a:lvl3pPr marL="914400" indent="0" algn="ctr" defTabSz="914400" rtl="0" eaLnBrk="1" latinLnBrk="1" hangingPunct="1">
+              <a:lnSpc>
+                <a:spcPct val="90000"/>
+              </a:lnSpc>
+              <a:spcBef>
+                <a:spcPts val="500"/>
+              </a:spcBef>
+              <a:buFont typeface="Arial" panose="020B0604020202020204" pitchFamily="34" charset="0"/>
+              <a:buNone/>
+              <a:defRPr sz="1800" kern="1200">
+                <a:solidFill>
+                  <a:schemeClr val="tx1"/>
+                </a:solidFill>
+                <a:latin typeface="+mn-lt"/>
+                <a:ea typeface="+mn-ea"/>
+                <a:cs typeface="+mn-cs"/>
+              </a:defRPr>
+            </a:lvl3pPr>
+            <a:lvl4pPr marL="1371600" indent="0" algn="ctr" defTabSz="914400" rtl="0" eaLnBrk="1" latinLnBrk="1" hangingPunct="1">
+              <a:lnSpc>
+                <a:spcPct val="90000"/>
+              </a:lnSpc>
+              <a:spcBef>
+                <a:spcPts val="500"/>
+              </a:spcBef>
+              <a:buFont typeface="Arial" panose="020B0604020202020204" pitchFamily="34" charset="0"/>
+              <a:buNone/>
+              <a:defRPr sz="1600" kern="1200">
+                <a:solidFill>
+                  <a:schemeClr val="tx1"/>
+                </a:solidFill>
+                <a:latin typeface="+mn-lt"/>
+                <a:ea typeface="+mn-ea"/>
+                <a:cs typeface="+mn-cs"/>
+              </a:defRPr>
+            </a:lvl4pPr>
+            <a:lvl5pPr marL="1828800" indent="0" algn="ctr" defTabSz="914400" rtl="0" eaLnBrk="1" latinLnBrk="1" hangingPunct="1">
+              <a:lnSpc>
+                <a:spcPct val="90000"/>
+              </a:lnSpc>
+              <a:spcBef>
+                <a:spcPts val="500"/>
+              </a:spcBef>
+              <a:buFont typeface="Arial" panose="020B0604020202020204" pitchFamily="34" charset="0"/>
+              <a:buNone/>
+              <a:defRPr sz="1600" kern="1200">
+                <a:solidFill>
+                  <a:schemeClr val="tx1"/>
+                </a:solidFill>
+                <a:latin typeface="+mn-lt"/>
+                <a:ea typeface="+mn-ea"/>
+                <a:cs typeface="+mn-cs"/>
+              </a:defRPr>
+            </a:lvl5pPr>
+            <a:lvl6pPr marL="2286000" indent="0" algn="ctr" defTabSz="914400" rtl="0" eaLnBrk="1" latinLnBrk="1" hangingPunct="1">
+              <a:lnSpc>
+                <a:spcPct val="90000"/>
+              </a:lnSpc>
+              <a:spcBef>
+                <a:spcPts val="500"/>
+              </a:spcBef>
+              <a:buFont typeface="Arial" panose="020B0604020202020204" pitchFamily="34" charset="0"/>
+              <a:buNone/>
+              <a:defRPr sz="1600" kern="1200">
+                <a:solidFill>
+                  <a:schemeClr val="tx1"/>
+                </a:solidFill>
+                <a:latin typeface="+mn-lt"/>
+                <a:ea typeface="+mn-ea"/>
+                <a:cs typeface="+mn-cs"/>
+              </a:defRPr>
+            </a:lvl6pPr>
+            <a:lvl7pPr marL="2743200" indent="0" algn="ctr" defTabSz="914400" rtl="0" eaLnBrk="1" latinLnBrk="1" hangingPunct="1">
+              <a:lnSpc>
+                <a:spcPct val="90000"/>
+              </a:lnSpc>
+              <a:spcBef>
+                <a:spcPts val="500"/>
+              </a:spcBef>
+              <a:buFont typeface="Arial" panose="020B0604020202020204" pitchFamily="34" charset="0"/>
+              <a:buNone/>
+              <a:defRPr sz="1600" kern="1200">
+                <a:solidFill>
+                  <a:schemeClr val="tx1"/>
+                </a:solidFill>
+                <a:latin typeface="+mn-lt"/>
+                <a:ea typeface="+mn-ea"/>
+                <a:cs typeface="+mn-cs"/>
+              </a:defRPr>
+            </a:lvl7pPr>
+            <a:lvl8pPr marL="3200400" indent="0" algn="ctr" defTabSz="914400" rtl="0" eaLnBrk="1" latinLnBrk="1" hangingPunct="1">
+              <a:lnSpc>
+                <a:spcPct val="90000"/>
+              </a:lnSpc>
+              <a:spcBef>
+                <a:spcPts val="500"/>
+              </a:spcBef>
+              <a:buFont typeface="Arial" panose="020B0604020202020204" pitchFamily="34" charset="0"/>
+              <a:buNone/>
+              <a:defRPr sz="1600" kern="1200">
+                <a:solidFill>
+                  <a:schemeClr val="tx1"/>
+                </a:solidFill>
+                <a:latin typeface="+mn-lt"/>
+                <a:ea typeface="+mn-ea"/>
+                <a:cs typeface="+mn-cs"/>
+              </a:defRPr>
+            </a:lvl8pPr>
+            <a:lvl9pPr marL="3657600" indent="0" algn="ctr" defTabSz="914400" rtl="0" eaLnBrk="1" latinLnBrk="1" hangingPunct="1">
+              <a:lnSpc>
+                <a:spcPct val="90000"/>
+              </a:lnSpc>
+              <a:spcBef>
+                <a:spcPts val="500"/>
+              </a:spcBef>
+              <a:buFont typeface="Arial" panose="020B0604020202020204" pitchFamily="34" charset="0"/>
+              <a:buNone/>
+              <a:defRPr sz="1600" kern="1200">
+                <a:solidFill>
+                  <a:schemeClr val="tx1"/>
+                </a:solidFill>
+                <a:latin typeface="+mn-lt"/>
+                <a:ea typeface="+mn-ea"/>
+                <a:cs typeface="+mn-cs"/>
+              </a:defRPr>
+            </a:lvl9pPr>
+          </a:lstStyle>
+          <a:p>
+            <a:pPr algn="l"/>
+            <a:r>
+              <a:rPr lang="en-US" altLang="ko-KR" sz="1500" dirty="0"/>
+              <a:t>School:</a:t>
+            </a:r>
+          </a:p>
+          <a:p>
+            <a:pPr algn="l"/>
+            <a:r>
+              <a:rPr lang="en-US" altLang="ko-KR" sz="1500" dirty="0"/>
+              <a:t>Department:</a:t>
+            </a:r>
+          </a:p>
+          <a:p>
+            <a:pPr algn="l"/>
+            <a:r>
+              <a:rPr lang="en-US" altLang="ko-KR" sz="1500" dirty="0"/>
+              <a:t>Class and</a:t>
+            </a:r>
+            <a:r>
+              <a:rPr lang="ko-KR" altLang="en-US" sz="1500" dirty="0"/>
+              <a:t> </a:t>
+            </a:r>
+            <a:r>
+              <a:rPr lang="en-US" altLang="ko-KR" sz="1500" dirty="0"/>
+              <a:t>Number:</a:t>
+            </a:r>
+          </a:p>
+          <a:p>
+            <a:pPr algn="l"/>
+            <a:r>
+              <a:rPr lang="en-US" altLang="ko-KR" sz="1500" dirty="0"/>
+              <a:t>Name:</a:t>
+            </a:r>
+          </a:p>
+          <a:p>
+            <a:pPr algn="l"/>
+            <a:r>
+              <a:rPr lang="en-US" altLang="ko-KR" sz="1500" dirty="0"/>
+              <a:t>H.P:</a:t>
+            </a:r>
+          </a:p>
+        </p:txBody>
+      </p:sp>
     </p:spTree>
     <p:extLst>
       <p:ext uri="{BB962C8B-B14F-4D97-AF65-F5344CB8AC3E}">
@@ -4370,8 +7704,22 @@
               </a:defRPr>
             </a:pPr>
             <a:r>
-              <a:t>1. 탐구 동기</a:t>
-            </a:r>
+              <a:rPr dirty="0"/>
+              <a:t>1. </a:t>
+            </a:r>
+            <a:r>
+              <a:rPr dirty="0" err="1"/>
+              <a:t>탐구</a:t>
+            </a:r>
+            <a:r>
+              <a:rPr dirty="0"/>
+              <a:t> </a:t>
+            </a:r>
+            <a:r>
+              <a:rPr dirty="0" err="1"/>
+              <a:t>동기</a:t>
+            </a:r>
+            <a:endParaRPr dirty="0"/>
           </a:p>
         </p:txBody>
       </p:sp>
@@ -4528,7 +7876,7 @@
         </p:nvSpPr>
         <p:spPr>
           <a:xfrm>
-            <a:off x="777240" y="1737360"/>
+            <a:off x="743858" y="1737360"/>
             <a:ext cx="3267635" cy="4811358"/>
           </a:xfrm>
           <a:prstGeom prst="roundRect">
@@ -4664,7 +8012,7 @@
         <p:spPr>
           <a:xfrm>
             <a:off x="973295" y="2240506"/>
-            <a:ext cx="3007033" cy="2646878"/>
+            <a:ext cx="3007033" cy="1128514"/>
           </a:xfrm>
           <a:prstGeom prst="rect">
             <a:avLst/>
@@ -4792,86 +8140,6 @@
               <a:t>.</a:t>
             </a:r>
             <a:endParaRPr lang="en-US" dirty="0"/>
-          </a:p>
-          <a:p>
-            <a:pPr>
-              <a:spcAft>
-                <a:spcPts val="800"/>
-              </a:spcAft>
-              <a:defRPr sz="1800">
-                <a:solidFill>
-                  <a:srgbClr val="5C6574"/>
-                </a:solidFill>
-              </a:defRPr>
-            </a:pPr>
-            <a:endParaRPr lang="en-US" dirty="0"/>
-          </a:p>
-          <a:p>
-            <a:pPr>
-              <a:spcAft>
-                <a:spcPts val="800"/>
-              </a:spcAft>
-              <a:defRPr sz="1800">
-                <a:solidFill>
-                  <a:srgbClr val="5C6574"/>
-                </a:solidFill>
-              </a:defRPr>
-            </a:pPr>
-            <a:r>
-              <a:rPr lang="ko-KR" altLang="en-US" dirty="0"/>
-              <a:t>난이도 ★★☆☆☆</a:t>
-            </a:r>
-            <a:endParaRPr lang="en-US" altLang="ko-KR" dirty="0"/>
-          </a:p>
-          <a:p>
-            <a:pPr>
-              <a:spcAft>
-                <a:spcPts val="800"/>
-              </a:spcAft>
-              <a:defRPr sz="1800">
-                <a:solidFill>
-                  <a:srgbClr val="5C6574"/>
-                </a:solidFill>
-              </a:defRPr>
-            </a:pPr>
-            <a:r>
-              <a:rPr lang="en-US" dirty="0"/>
-              <a:t>-</a:t>
-            </a:r>
-            <a:r>
-              <a:rPr lang="ko-KR" altLang="en-US" dirty="0"/>
-              <a:t>고등학교 물리학 </a:t>
-            </a:r>
-            <a:r>
-              <a:rPr lang="en-US" altLang="ko-KR" dirty="0"/>
-              <a:t>1 </a:t>
-            </a:r>
-            <a:r>
-              <a:rPr lang="ko-KR" altLang="en-US" dirty="0"/>
-              <a:t>과정</a:t>
-            </a:r>
-            <a:endParaRPr lang="en-US" altLang="ko-KR" dirty="0"/>
-          </a:p>
-          <a:p>
-            <a:pPr>
-              <a:spcAft>
-                <a:spcPts val="800"/>
-              </a:spcAft>
-              <a:defRPr sz="1800">
-                <a:solidFill>
-                  <a:srgbClr val="5C6574"/>
-                </a:solidFill>
-              </a:defRPr>
-            </a:pPr>
-            <a:r>
-              <a:rPr lang="en-US" dirty="0"/>
-              <a:t>-</a:t>
-            </a:r>
-            <a:r>
-              <a:rPr lang="ko-KR" altLang="en-US" dirty="0"/>
-              <a:t>탐구의 시작점</a:t>
-            </a:r>
-            <a:endParaRPr dirty="0"/>
           </a:p>
         </p:txBody>
       </p:sp>
@@ -5011,7 +8279,7 @@
         <p:spPr>
           <a:xfrm>
             <a:off x="4585177" y="2240506"/>
-            <a:ext cx="2875519" cy="3200876"/>
+            <a:ext cx="2875519" cy="2062103"/>
           </a:xfrm>
           <a:prstGeom prst="rect">
             <a:avLst/>
@@ -5157,68 +8425,6 @@
             <a:r>
               <a:rPr dirty="0"/>
               <a:t>.</a:t>
-            </a:r>
-            <a:endParaRPr lang="en-US" dirty="0"/>
-          </a:p>
-          <a:p>
-            <a:pPr>
-              <a:spcAft>
-                <a:spcPts val="800"/>
-              </a:spcAft>
-              <a:defRPr sz="1800">
-                <a:solidFill>
-                  <a:srgbClr val="5C6574"/>
-                </a:solidFill>
-              </a:defRPr>
-            </a:pPr>
-            <a:r>
-              <a:rPr lang="ko-KR" altLang="en-US" dirty="0"/>
-              <a:t>난이도 ★★★☆☆</a:t>
-            </a:r>
-          </a:p>
-          <a:p>
-            <a:pPr>
-              <a:spcAft>
-                <a:spcPts val="800"/>
-              </a:spcAft>
-              <a:defRPr sz="1800">
-                <a:solidFill>
-                  <a:srgbClr val="5C6574"/>
-                </a:solidFill>
-              </a:defRPr>
-            </a:pPr>
-            <a:r>
-              <a:rPr lang="en-US" altLang="ko-KR" dirty="0"/>
-              <a:t>-</a:t>
-            </a:r>
-            <a:r>
-              <a:rPr lang="ko-KR" altLang="en-US" dirty="0"/>
-              <a:t>단순 </a:t>
-            </a:r>
-            <a:r>
-              <a:rPr lang="ko-KR" altLang="en-US"/>
-              <a:t>고전적 계산</a:t>
-            </a:r>
-            <a:endParaRPr lang="en-US" altLang="ko-KR" dirty="0"/>
-          </a:p>
-          <a:p>
-            <a:pPr>
-              <a:spcAft>
-                <a:spcPts val="800"/>
-              </a:spcAft>
-              <a:defRPr sz="1800">
-                <a:solidFill>
-                  <a:srgbClr val="5C6574"/>
-                </a:solidFill>
-              </a:defRPr>
-            </a:pPr>
-            <a:r>
-              <a:rPr lang="en-US" dirty="0"/>
-              <a:t>-AI</a:t>
-            </a:r>
-            <a:r>
-              <a:rPr lang="ko-KR" altLang="en-US" dirty="0"/>
-              <a:t>의 도입이 불필요</a:t>
             </a:r>
             <a:endParaRPr lang="en-US" dirty="0"/>
           </a:p>
@@ -5335,7 +8541,7 @@
         </p:nvSpPr>
         <p:spPr>
           <a:xfrm>
-            <a:off x="8229599" y="1901952"/>
+            <a:off x="8197057" y="1752192"/>
             <a:ext cx="2875519" cy="338554"/>
           </a:xfrm>
           <a:prstGeom prst="rect">
@@ -5349,7 +8555,7 @@
           </a:bodyPr>
           <a:lstStyle/>
           <a:p>
-            <a:pPr>
+            <a:pPr algn="ctr">
               <a:defRPr sz="1600" b="1">
                 <a:solidFill>
                   <a:srgbClr val="18233A"/>
@@ -5357,8 +8563,18 @@
               </a:defRPr>
             </a:pPr>
             <a:r>
-              <a:t>탐구의 출발점</a:t>
-            </a:r>
+              <a:rPr dirty="0" err="1"/>
+              <a:t>탐구의</a:t>
+            </a:r>
+            <a:r>
+              <a:rPr dirty="0"/>
+              <a:t> </a:t>
+            </a:r>
+            <a:r>
+              <a:rPr dirty="0" err="1"/>
+              <a:t>출발점</a:t>
+            </a:r>
+            <a:endParaRPr dirty="0"/>
           </a:p>
         </p:txBody>
       </p:sp>
@@ -5370,8 +8586,8 @@
         </p:nvSpPr>
         <p:spPr>
           <a:xfrm>
-            <a:off x="8229599" y="2377439"/>
-            <a:ext cx="2875519" cy="1302921"/>
+            <a:off x="8197056" y="2240506"/>
+            <a:ext cx="2875519" cy="1579920"/>
           </a:xfrm>
           <a:prstGeom prst="rect">
             <a:avLst/>
@@ -5395,8 +8611,42 @@
               </a:defRPr>
             </a:pPr>
             <a:r>
-              <a:t>관측 과정에서 정보가 일부 소실된다면?</a:t>
-            </a:r>
+              <a:rPr dirty="0" err="1"/>
+              <a:t>관측</a:t>
+            </a:r>
+            <a:r>
+              <a:rPr dirty="0"/>
+              <a:t> </a:t>
+            </a:r>
+            <a:r>
+              <a:rPr dirty="0" err="1"/>
+              <a:t>과정에서</a:t>
+            </a:r>
+            <a:r>
+              <a:rPr dirty="0"/>
+              <a:t> </a:t>
+            </a:r>
+            <a:r>
+              <a:rPr dirty="0" err="1"/>
+              <a:t>정보가</a:t>
+            </a:r>
+            <a:r>
+              <a:rPr dirty="0"/>
+              <a:t> </a:t>
+            </a:r>
+            <a:r>
+              <a:rPr dirty="0" err="1"/>
+              <a:t>일부</a:t>
+            </a:r>
+            <a:r>
+              <a:rPr dirty="0"/>
+              <a:t> </a:t>
+            </a:r>
+            <a:r>
+              <a:rPr dirty="0" err="1"/>
+              <a:t>소실된다</a:t>
+            </a:r>
+            <a:endParaRPr lang="en-US" altLang="en-US" dirty="0"/>
           </a:p>
           <a:p>
             <a:pPr>
@@ -5410,12 +8660,4756 @@
               </a:defRPr>
             </a:pPr>
             <a:r>
-              <a:t>고전적 역산보다 AI가 유리한 구간이 존재할까?</a:t>
-            </a:r>
+              <a:rPr lang="en-US" dirty="0"/>
+              <a:t>→</a:t>
+            </a:r>
+            <a:r>
+              <a:rPr lang="en-US" altLang="ko-KR" dirty="0"/>
+              <a:t>AI</a:t>
+            </a:r>
+            <a:r>
+              <a:rPr lang="ko-KR" altLang="en-US" dirty="0"/>
+              <a:t>라면 고전적 역산보다 해를 도출하는 데 유리하지 않을까</a:t>
+            </a:r>
+            <a:r>
+              <a:rPr lang="en-US" altLang="ko-KR" dirty="0"/>
+              <a:t>?</a:t>
+            </a:r>
+            <a:endParaRPr lang="ko-KR" altLang="en-US" dirty="0"/>
+          </a:p>
+        </p:txBody>
+      </p:sp>
+      <p:sp>
+        <p:nvSpPr>
+          <p:cNvPr id="5" name="TextBox 4">
+            <a:extLst>
+              <a:ext uri="{FF2B5EF4-FFF2-40B4-BE49-F238E27FC236}">
+                <a16:creationId xmlns:a16="http://schemas.microsoft.com/office/drawing/2014/main" id="{3D16C7EE-5C35-F897-8E04-A4EF9675D001}"/>
+              </a:ext>
+            </a:extLst>
+          </p:cNvPr>
+          <p:cNvSpPr txBox="1"/>
+          <p:nvPr/>
+        </p:nvSpPr>
+        <p:spPr>
+          <a:xfrm>
+            <a:off x="973295" y="4143039"/>
+            <a:ext cx="3007033" cy="1128514"/>
+          </a:xfrm>
+          <a:prstGeom prst="rect">
+            <a:avLst/>
+          </a:prstGeom>
+          <a:noFill/>
+        </p:spPr>
+        <p:txBody>
+          <a:bodyPr wrap="square">
+            <a:spAutoFit/>
+          </a:bodyPr>
+          <a:lstStyle/>
+          <a:p>
+            <a:pPr>
+              <a:spcAft>
+                <a:spcPts val="800"/>
+              </a:spcAft>
+              <a:defRPr sz="1800">
+                <a:solidFill>
+                  <a:srgbClr val="5C6574"/>
+                </a:solidFill>
+              </a:defRPr>
+            </a:pPr>
+            <a:r>
+              <a:rPr lang="ko-KR" altLang="en-US" dirty="0"/>
+              <a:t>체감 난이도 ★☆☆☆☆</a:t>
+            </a:r>
+            <a:endParaRPr lang="en-US" altLang="ko-KR" dirty="0"/>
+          </a:p>
+          <a:p>
+            <a:pPr>
+              <a:spcAft>
+                <a:spcPts val="800"/>
+              </a:spcAft>
+              <a:defRPr sz="1800">
+                <a:solidFill>
+                  <a:srgbClr val="5C6574"/>
+                </a:solidFill>
+              </a:defRPr>
+            </a:pPr>
+            <a:r>
+              <a:rPr lang="en-US" dirty="0"/>
+              <a:t>-</a:t>
+            </a:r>
+            <a:r>
+              <a:rPr lang="ko-KR" altLang="en-US" dirty="0"/>
+              <a:t>고등학교 물리학 </a:t>
+            </a:r>
+            <a:r>
+              <a:rPr lang="en-US" altLang="ko-KR" dirty="0"/>
+              <a:t>1 </a:t>
+            </a:r>
+            <a:r>
+              <a:rPr lang="ko-KR" altLang="en-US" dirty="0"/>
+              <a:t>과정</a:t>
+            </a:r>
+            <a:endParaRPr lang="en-US" altLang="ko-KR" dirty="0"/>
+          </a:p>
+          <a:p>
+            <a:pPr>
+              <a:spcAft>
+                <a:spcPts val="800"/>
+              </a:spcAft>
+              <a:defRPr sz="1800">
+                <a:solidFill>
+                  <a:srgbClr val="5C6574"/>
+                </a:solidFill>
+              </a:defRPr>
+            </a:pPr>
+            <a:r>
+              <a:rPr lang="en-US" dirty="0"/>
+              <a:t>-</a:t>
+            </a:r>
+            <a:r>
+              <a:rPr lang="ko-KR" altLang="en-US" dirty="0"/>
+              <a:t>탐구의 시작점</a:t>
+            </a:r>
+            <a:endParaRPr dirty="0"/>
+          </a:p>
+        </p:txBody>
+      </p:sp>
+      <p:sp>
+        <p:nvSpPr>
+          <p:cNvPr id="20" name="TextBox 19">
+            <a:extLst>
+              <a:ext uri="{FF2B5EF4-FFF2-40B4-BE49-F238E27FC236}">
+                <a16:creationId xmlns:a16="http://schemas.microsoft.com/office/drawing/2014/main" id="{AB951590-A76B-7674-ECB6-6D577AC5EF34}"/>
+              </a:ext>
+            </a:extLst>
+          </p:cNvPr>
+          <p:cNvSpPr txBox="1"/>
+          <p:nvPr/>
+        </p:nvSpPr>
+        <p:spPr>
+          <a:xfrm>
+            <a:off x="4585177" y="4143039"/>
+            <a:ext cx="2875519" cy="1508105"/>
+          </a:xfrm>
+          <a:prstGeom prst="rect">
+            <a:avLst/>
+          </a:prstGeom>
+          <a:noFill/>
+        </p:spPr>
+        <p:txBody>
+          <a:bodyPr wrap="square">
+            <a:spAutoFit/>
+          </a:bodyPr>
+          <a:lstStyle/>
+          <a:p>
+            <a:pPr>
+              <a:spcAft>
+                <a:spcPts val="800"/>
+              </a:spcAft>
+              <a:defRPr sz="1800">
+                <a:solidFill>
+                  <a:srgbClr val="5C6574"/>
+                </a:solidFill>
+              </a:defRPr>
+            </a:pPr>
+            <a:r>
+              <a:rPr lang="ko-KR" altLang="en-US" dirty="0"/>
+              <a:t>체감 난이도 ★★★☆☆</a:t>
+            </a:r>
+          </a:p>
+          <a:p>
+            <a:pPr>
+              <a:spcAft>
+                <a:spcPts val="800"/>
+              </a:spcAft>
+              <a:defRPr sz="1800">
+                <a:solidFill>
+                  <a:srgbClr val="5C6574"/>
+                </a:solidFill>
+              </a:defRPr>
+            </a:pPr>
+            <a:r>
+              <a:rPr lang="en-US" altLang="ko-KR" dirty="0"/>
+              <a:t>-</a:t>
+            </a:r>
+            <a:r>
+              <a:rPr lang="ko-KR" altLang="en-US" dirty="0"/>
+              <a:t>단순 고전적 계산</a:t>
+            </a:r>
+            <a:endParaRPr lang="en-US" altLang="ko-KR" dirty="0"/>
+          </a:p>
+          <a:p>
+            <a:pPr>
+              <a:spcAft>
+                <a:spcPts val="800"/>
+              </a:spcAft>
+              <a:defRPr sz="1800">
+                <a:solidFill>
+                  <a:srgbClr val="5C6574"/>
+                </a:solidFill>
+              </a:defRPr>
+            </a:pPr>
+            <a:r>
+              <a:rPr lang="en-US" dirty="0"/>
+              <a:t>-AI</a:t>
+            </a:r>
+            <a:r>
+              <a:rPr lang="ko-KR" altLang="en-US" dirty="0"/>
+              <a:t>의 도입이 불필요</a:t>
+            </a:r>
+            <a:endParaRPr lang="en-US" dirty="0"/>
+          </a:p>
+          <a:p>
+            <a:pPr>
+              <a:spcAft>
+                <a:spcPts val="800"/>
+              </a:spcAft>
+              <a:defRPr sz="1800">
+                <a:solidFill>
+                  <a:srgbClr val="5C6574"/>
+                </a:solidFill>
+              </a:defRPr>
+            </a:pPr>
+            <a:endParaRPr dirty="0"/>
+          </a:p>
+        </p:txBody>
+      </p:sp>
+      <p:sp>
+        <p:nvSpPr>
+          <p:cNvPr id="22" name="TextBox 21">
+            <a:extLst>
+              <a:ext uri="{FF2B5EF4-FFF2-40B4-BE49-F238E27FC236}">
+                <a16:creationId xmlns:a16="http://schemas.microsoft.com/office/drawing/2014/main" id="{D64DE112-81C7-D038-4DD6-E76A7D30FE2A}"/>
+              </a:ext>
+            </a:extLst>
+          </p:cNvPr>
+          <p:cNvSpPr txBox="1"/>
+          <p:nvPr/>
+        </p:nvSpPr>
+        <p:spPr>
+          <a:xfrm>
+            <a:off x="8231913" y="4143039"/>
+            <a:ext cx="2875519" cy="1128514"/>
+          </a:xfrm>
+          <a:prstGeom prst="rect">
+            <a:avLst/>
+          </a:prstGeom>
+          <a:noFill/>
+        </p:spPr>
+        <p:txBody>
+          <a:bodyPr wrap="square">
+            <a:spAutoFit/>
+          </a:bodyPr>
+          <a:lstStyle/>
+          <a:p>
+            <a:pPr>
+              <a:spcAft>
+                <a:spcPts val="800"/>
+              </a:spcAft>
+              <a:defRPr sz="1800">
+                <a:solidFill>
+                  <a:srgbClr val="5C6574"/>
+                </a:solidFill>
+              </a:defRPr>
+            </a:pPr>
+            <a:r>
+              <a:rPr lang="ko-KR" altLang="en-US" dirty="0"/>
+              <a:t>난이도 ★★★★★</a:t>
+            </a:r>
+            <a:endParaRPr lang="en-US" altLang="ko-KR" dirty="0"/>
+          </a:p>
+          <a:p>
+            <a:pPr>
+              <a:spcAft>
+                <a:spcPts val="800"/>
+              </a:spcAft>
+              <a:defRPr sz="1800">
+                <a:solidFill>
+                  <a:srgbClr val="5C6574"/>
+                </a:solidFill>
+              </a:defRPr>
+            </a:pPr>
+            <a:r>
+              <a:rPr lang="en-US" dirty="0"/>
+              <a:t>-</a:t>
+            </a:r>
+            <a:r>
+              <a:rPr lang="ko-KR" altLang="en-US" dirty="0"/>
+              <a:t>자체 생산 데이터 사용</a:t>
+            </a:r>
+            <a:endParaRPr lang="en-US" altLang="ko-KR" dirty="0"/>
+          </a:p>
+          <a:p>
+            <a:pPr>
+              <a:spcAft>
+                <a:spcPts val="800"/>
+              </a:spcAft>
+              <a:defRPr sz="1800">
+                <a:solidFill>
+                  <a:srgbClr val="5C6574"/>
+                </a:solidFill>
+              </a:defRPr>
+            </a:pPr>
+            <a:r>
+              <a:rPr lang="en-US" dirty="0"/>
+              <a:t>-</a:t>
+            </a:r>
+            <a:r>
+              <a:rPr lang="ko-KR" altLang="en-US" dirty="0"/>
+              <a:t>데이터로 통계적 추정</a:t>
+            </a:r>
+            <a:endParaRPr dirty="0"/>
           </a:p>
         </p:txBody>
       </p:sp>
     </p:spTree>
+  </p:cSld>
+  <p:clrMapOvr>
+    <a:masterClrMapping/>
+  </p:clrMapOvr>
+</p:sld>
+</file>
+
+<file path=ppt/slides/slide4.xml><?xml version="1.0" encoding="utf-8"?>
+<p:sld xmlns:a="http://schemas.openxmlformats.org/drawingml/2006/main" xmlns:r="http://schemas.openxmlformats.org/officeDocument/2006/relationships" xmlns:p="http://schemas.openxmlformats.org/presentationml/2006/main">
+  <p:cSld>
+    <p:spTree>
+      <p:nvGrpSpPr>
+        <p:cNvPr id="1" name=""/>
+        <p:cNvGrpSpPr/>
+        <p:nvPr/>
+      </p:nvGrpSpPr>
+      <p:grpSpPr>
+        <a:xfrm>
+          <a:off x="0" y="0"/>
+          <a:ext cx="0" cy="0"/>
+          <a:chOff x="0" y="0"/>
+          <a:chExt cx="0" cy="0"/>
+        </a:xfrm>
+      </p:grpSpPr>
+      <p:sp>
+        <p:nvSpPr>
+          <p:cNvPr id="2" name="Rectangle 1"/>
+          <p:cNvSpPr/>
+          <p:nvPr/>
+        </p:nvSpPr>
+        <p:spPr>
+          <a:xfrm>
+            <a:off x="30632" y="0"/>
+            <a:ext cx="12191695" cy="6858000"/>
+          </a:xfrm>
+          <a:prstGeom prst="rect">
+            <a:avLst/>
+          </a:prstGeom>
+          <a:solidFill>
+            <a:srgbClr val="F8F9FC"/>
+          </a:solidFill>
+          <a:ln>
+            <a:noFill/>
+          </a:ln>
+        </p:spPr>
+        <p:style>
+          <a:lnRef idx="1">
+            <a:schemeClr val="accent1"/>
+          </a:lnRef>
+          <a:fillRef idx="3">
+            <a:schemeClr val="accent1"/>
+          </a:fillRef>
+          <a:effectRef idx="2">
+            <a:schemeClr val="accent1"/>
+          </a:effectRef>
+          <a:fontRef idx="minor">
+            <a:schemeClr val="lt1"/>
+          </a:fontRef>
+        </p:style>
+        <p:txBody>
+          <a:bodyPr rtlCol="0" anchor="ctr"/>
+          <a:lstStyle/>
+          <a:p>
+            <a:pPr marL="0" marR="0" lvl="0" indent="0" algn="ctr" defTabSz="457200" rtl="0" eaLnBrk="1" fontAlgn="auto" latinLnBrk="0" hangingPunct="1">
+              <a:lnSpc>
+                <a:spcPct val="100000"/>
+              </a:lnSpc>
+              <a:spcBef>
+                <a:spcPts val="0"/>
+              </a:spcBef>
+              <a:spcAft>
+                <a:spcPts val="0"/>
+              </a:spcAft>
+              <a:buClrTx/>
+              <a:buSzTx/>
+              <a:buFontTx/>
+              <a:buNone/>
+              <a:tabLst/>
+              <a:defRPr/>
+            </a:pPr>
+            <a:endParaRPr kumimoji="0" sz="1800" b="0" i="0" u="none" strike="noStrike" kern="1200" cap="none" spc="0" normalizeH="0" baseline="0" noProof="0" dirty="0">
+              <a:ln>
+                <a:noFill/>
+              </a:ln>
+              <a:solidFill>
+                <a:prstClr val="white"/>
+              </a:solidFill>
+              <a:effectLst/>
+              <a:uLnTx/>
+              <a:uFillTx/>
+              <a:latin typeface="Calibri"/>
+              <a:ea typeface="+mn-ea"/>
+              <a:cs typeface="+mn-cs"/>
+            </a:endParaRPr>
+          </a:p>
+        </p:txBody>
+      </p:sp>
+      <p:sp>
+        <p:nvSpPr>
+          <p:cNvPr id="3" name="TextBox 2"/>
+          <p:cNvSpPr txBox="1"/>
+          <p:nvPr/>
+        </p:nvSpPr>
+        <p:spPr>
+          <a:xfrm>
+            <a:off x="658368" y="384048"/>
+            <a:ext cx="3433953" cy="523220"/>
+          </a:xfrm>
+          <a:prstGeom prst="rect">
+            <a:avLst/>
+          </a:prstGeom>
+          <a:noFill/>
+        </p:spPr>
+        <p:txBody>
+          <a:bodyPr wrap="none">
+            <a:spAutoFit/>
+          </a:bodyPr>
+          <a:lstStyle/>
+          <a:p>
+            <a:pPr marL="0" marR="0" lvl="0" indent="0" algn="l" defTabSz="457200" rtl="0" eaLnBrk="1" fontAlgn="auto" latinLnBrk="0" hangingPunct="1">
+              <a:lnSpc>
+                <a:spcPct val="100000"/>
+              </a:lnSpc>
+              <a:spcBef>
+                <a:spcPts val="0"/>
+              </a:spcBef>
+              <a:spcAft>
+                <a:spcPts val="0"/>
+              </a:spcAft>
+              <a:buClrTx/>
+              <a:buSzTx/>
+              <a:buFontTx/>
+              <a:buNone/>
+              <a:tabLst/>
+              <a:defRPr sz="2800" b="1">
+                <a:solidFill>
+                  <a:srgbClr val="18233A"/>
+                </a:solidFill>
+              </a:defRPr>
+            </a:pPr>
+            <a:r>
+              <a:rPr lang="en-US" sz="2800" b="1" dirty="0">
+                <a:solidFill>
+                  <a:srgbClr val="18233A"/>
+                </a:solidFill>
+                <a:latin typeface="Calibri"/>
+              </a:rPr>
+              <a:t>1-1</a:t>
+            </a:r>
+            <a:r>
+              <a:rPr kumimoji="0" sz="2800" b="1" i="0" u="none" strike="noStrike" kern="1200" cap="none" spc="0" normalizeH="0" baseline="0" noProof="0" dirty="0">
+                <a:ln>
+                  <a:noFill/>
+                </a:ln>
+                <a:solidFill>
+                  <a:srgbClr val="18233A"/>
+                </a:solidFill>
+                <a:effectLst/>
+                <a:uLnTx/>
+                <a:uFillTx/>
+                <a:latin typeface="Calibri"/>
+                <a:ea typeface="+mn-ea"/>
+                <a:cs typeface="+mn-cs"/>
+              </a:rPr>
+              <a:t>. </a:t>
+            </a:r>
+            <a:r>
+              <a:rPr lang="ko-KR" altLang="en-US" sz="2800" b="1" dirty="0">
+                <a:solidFill>
+                  <a:srgbClr val="18233A"/>
+                </a:solidFill>
+                <a:latin typeface="Calibri"/>
+              </a:rPr>
+              <a:t>교과 물리로부터</a:t>
+            </a:r>
+            <a:endParaRPr kumimoji="0" sz="2800" b="1" i="0" u="none" strike="noStrike" kern="1200" cap="none" spc="0" normalizeH="0" baseline="0" noProof="0" dirty="0">
+              <a:ln>
+                <a:noFill/>
+              </a:ln>
+              <a:solidFill>
+                <a:srgbClr val="18233A"/>
+              </a:solidFill>
+              <a:effectLst/>
+              <a:uLnTx/>
+              <a:uFillTx/>
+              <a:latin typeface="Calibri"/>
+              <a:ea typeface="+mn-ea"/>
+              <a:cs typeface="+mn-cs"/>
+            </a:endParaRPr>
+          </a:p>
+        </p:txBody>
+      </p:sp>
+      <p:sp>
+        <p:nvSpPr>
+          <p:cNvPr id="4" name="TextBox 3"/>
+          <p:cNvSpPr txBox="1"/>
+          <p:nvPr/>
+        </p:nvSpPr>
+        <p:spPr>
+          <a:xfrm>
+            <a:off x="676656" y="987552"/>
+            <a:ext cx="10607040" cy="384048"/>
+          </a:xfrm>
+          <a:prstGeom prst="rect">
+            <a:avLst/>
+          </a:prstGeom>
+          <a:noFill/>
+        </p:spPr>
+        <p:txBody>
+          <a:bodyPr wrap="none">
+            <a:spAutoFit/>
+          </a:bodyPr>
+          <a:lstStyle/>
+          <a:p>
+            <a:pPr marL="0" marR="0" lvl="0" indent="0" algn="l" defTabSz="457200" rtl="0" eaLnBrk="1" fontAlgn="auto" latinLnBrk="0" hangingPunct="1">
+              <a:lnSpc>
+                <a:spcPct val="100000"/>
+              </a:lnSpc>
+              <a:spcBef>
+                <a:spcPts val="0"/>
+              </a:spcBef>
+              <a:spcAft>
+                <a:spcPts val="0"/>
+              </a:spcAft>
+              <a:buClrTx/>
+              <a:buSzTx/>
+              <a:buFontTx/>
+              <a:buNone/>
+              <a:tabLst/>
+              <a:defRPr sz="1250">
+                <a:solidFill>
+                  <a:srgbClr val="5C6574"/>
+                </a:solidFill>
+              </a:defRPr>
+            </a:pPr>
+            <a:r>
+              <a:rPr kumimoji="0" sz="1250" b="0" i="0" u="none" strike="noStrike" kern="1200" cap="none" spc="0" normalizeH="0" baseline="0" noProof="0">
+                <a:ln>
+                  <a:noFill/>
+                </a:ln>
+                <a:solidFill>
+                  <a:srgbClr val="5C6574"/>
+                </a:solidFill>
+                <a:effectLst/>
+                <a:uLnTx/>
+                <a:uFillTx/>
+                <a:latin typeface="Calibri"/>
+                <a:ea typeface="+mn-ea"/>
+                <a:cs typeface="+mn-cs"/>
+              </a:rPr>
+              <a:t>점전하가 만드는 전기 퍼텐셜을 3차원에 배치하고 z=0 평면에서 관측한다.</a:t>
+            </a:r>
+          </a:p>
+        </p:txBody>
+      </p:sp>
+      <p:sp>
+        <p:nvSpPr>
+          <p:cNvPr id="6" name="Rectangle 5"/>
+          <p:cNvSpPr/>
+          <p:nvPr/>
+        </p:nvSpPr>
+        <p:spPr>
+          <a:xfrm>
+            <a:off x="676656" y="1353312"/>
+            <a:ext cx="566928" cy="41148"/>
+          </a:xfrm>
+          <a:prstGeom prst="rect">
+            <a:avLst/>
+          </a:prstGeom>
+          <a:solidFill>
+            <a:srgbClr val="315EBE"/>
+          </a:solidFill>
+          <a:ln>
+            <a:noFill/>
+          </a:ln>
+        </p:spPr>
+        <p:style>
+          <a:lnRef idx="1">
+            <a:schemeClr val="accent1"/>
+          </a:lnRef>
+          <a:fillRef idx="3">
+            <a:schemeClr val="accent1"/>
+          </a:fillRef>
+          <a:effectRef idx="2">
+            <a:schemeClr val="accent1"/>
+          </a:effectRef>
+          <a:fontRef idx="minor">
+            <a:schemeClr val="lt1"/>
+          </a:fontRef>
+        </p:style>
+        <p:txBody>
+          <a:bodyPr rtlCol="0" anchor="ctr"/>
+          <a:lstStyle/>
+          <a:p>
+            <a:pPr marL="0" marR="0" lvl="0" indent="0" algn="ctr" defTabSz="457200" rtl="0" eaLnBrk="1" fontAlgn="auto" latinLnBrk="0" hangingPunct="1">
+              <a:lnSpc>
+                <a:spcPct val="100000"/>
+              </a:lnSpc>
+              <a:spcBef>
+                <a:spcPts val="0"/>
+              </a:spcBef>
+              <a:spcAft>
+                <a:spcPts val="0"/>
+              </a:spcAft>
+              <a:buClrTx/>
+              <a:buSzTx/>
+              <a:buFontTx/>
+              <a:buNone/>
+              <a:tabLst/>
+              <a:defRPr/>
+            </a:pPr>
+            <a:endParaRPr kumimoji="0" sz="1800" b="0" i="0" u="none" strike="noStrike" kern="1200" cap="none" spc="0" normalizeH="0" baseline="0" noProof="0">
+              <a:ln>
+                <a:noFill/>
+              </a:ln>
+              <a:solidFill>
+                <a:prstClr val="white"/>
+              </a:solidFill>
+              <a:effectLst/>
+              <a:uLnTx/>
+              <a:uFillTx/>
+              <a:latin typeface="Calibri"/>
+              <a:ea typeface="+mn-ea"/>
+              <a:cs typeface="+mn-cs"/>
+            </a:endParaRPr>
+          </a:p>
+        </p:txBody>
+      </p:sp>
+      <p:sp>
+        <p:nvSpPr>
+          <p:cNvPr id="7" name="Rounded Rectangle 6"/>
+          <p:cNvSpPr/>
+          <p:nvPr/>
+        </p:nvSpPr>
+        <p:spPr>
+          <a:xfrm>
+            <a:off x="1097280" y="1828800"/>
+            <a:ext cx="9966960" cy="822960"/>
+          </a:xfrm>
+          <a:prstGeom prst="roundRect">
+            <a:avLst/>
+          </a:prstGeom>
+          <a:solidFill>
+            <a:srgbClr val="FFFFFF"/>
+          </a:solidFill>
+          <a:ln>
+            <a:solidFill>
+              <a:srgbClr val="E6EBF4"/>
+            </a:solidFill>
+          </a:ln>
+        </p:spPr>
+        <p:style>
+          <a:lnRef idx="1">
+            <a:schemeClr val="accent1"/>
+          </a:lnRef>
+          <a:fillRef idx="3">
+            <a:schemeClr val="accent1"/>
+          </a:fillRef>
+          <a:effectRef idx="2">
+            <a:schemeClr val="accent1"/>
+          </a:effectRef>
+          <a:fontRef idx="minor">
+            <a:schemeClr val="lt1"/>
+          </a:fontRef>
+        </p:style>
+        <p:txBody>
+          <a:bodyPr rtlCol="0" anchor="ctr"/>
+          <a:lstStyle/>
+          <a:p>
+            <a:pPr marL="0" marR="0" lvl="0" indent="0" algn="ctr" defTabSz="457200" rtl="0" eaLnBrk="1" fontAlgn="auto" latinLnBrk="0" hangingPunct="1">
+              <a:lnSpc>
+                <a:spcPct val="100000"/>
+              </a:lnSpc>
+              <a:spcBef>
+                <a:spcPts val="0"/>
+              </a:spcBef>
+              <a:spcAft>
+                <a:spcPts val="0"/>
+              </a:spcAft>
+              <a:buClrTx/>
+              <a:buSzTx/>
+              <a:buFontTx/>
+              <a:buNone/>
+              <a:tabLst/>
+              <a:defRPr/>
+            </a:pPr>
+            <a:endParaRPr kumimoji="0" sz="1800" b="0" i="0" u="none" strike="noStrike" kern="1200" cap="none" spc="0" normalizeH="0" baseline="0" noProof="0">
+              <a:ln>
+                <a:noFill/>
+              </a:ln>
+              <a:solidFill>
+                <a:prstClr val="white"/>
+              </a:solidFill>
+              <a:effectLst/>
+              <a:uLnTx/>
+              <a:uFillTx/>
+              <a:latin typeface="Calibri"/>
+              <a:ea typeface="+mn-ea"/>
+              <a:cs typeface="+mn-cs"/>
+            </a:endParaRPr>
+          </a:p>
+        </p:txBody>
+      </p:sp>
+      <mc:AlternateContent xmlns:mc="http://schemas.openxmlformats.org/markup-compatibility/2006">
+        <mc:Choice xmlns:a14="http://schemas.microsoft.com/office/drawing/2010/main" Requires="a14">
+          <p:sp>
+            <p:nvSpPr>
+              <p:cNvPr id="8" name="TextBox 7"/>
+              <p:cNvSpPr txBox="1"/>
+              <p:nvPr/>
+            </p:nvSpPr>
+            <p:spPr>
+              <a:xfrm>
+                <a:off x="2779793" y="1975104"/>
+                <a:ext cx="6601936" cy="913648"/>
+              </a:xfrm>
+              <a:prstGeom prst="rect">
+                <a:avLst/>
+              </a:prstGeom>
+              <a:noFill/>
+            </p:spPr>
+            <p:txBody>
+              <a:bodyPr wrap="none">
+                <a:spAutoFit/>
+              </a:bodyPr>
+              <a:lstStyle/>
+              <a:p>
+                <a:pPr lvl="0" algn="ctr" defTabSz="457200" latinLnBrk="0">
+                  <a:defRPr sz="2200" b="1">
+                    <a:solidFill>
+                      <a:srgbClr val="1F8987"/>
+                    </a:solidFill>
+                    <a:latin typeface="Cambria Math"/>
+                  </a:defRPr>
+                </a:pPr>
+                <a14:m>
+                  <m:oMathPara xmlns:m="http://schemas.openxmlformats.org/officeDocument/2006/math">
+                    <m:oMath>
+                      <m:r>
+                        <a:rPr kumimoji="0" lang="en-US" sz="2200" b="1" i="1" u="none" strike="noStrike" kern="1200" cap="none" spc="0" normalizeH="0" baseline="0" noProof="0" dirty="0" smtClean="0">
+                          <a:ln>
+                            <a:noFill/>
+                          </a:ln>
+                          <a:solidFill>
+                            <a:srgbClr val="1F8987"/>
+                          </a:solidFill>
+                          <a:effectLst/>
+                          <a:uLnTx/>
+                          <a:uFillTx/>
+                          <a:latin typeface="Cambria Math" panose="02040503050406030204" pitchFamily="18" charset="0"/>
+                          <a:ea typeface="+mn-ea"/>
+                          <a:cs typeface="+mn-cs"/>
+                        </a:rPr>
+                        <m:t>𝑽</m:t>
+                      </m:r>
+                      <m:r>
+                        <a:rPr kumimoji="0" lang="en-US" sz="2200" b="1" i="1" u="none" strike="noStrike" kern="1200" cap="none" spc="0" normalizeH="0" baseline="0" noProof="0" dirty="0">
+                          <a:ln>
+                            <a:noFill/>
+                          </a:ln>
+                          <a:solidFill>
+                            <a:srgbClr val="1F8987"/>
+                          </a:solidFill>
+                          <a:effectLst/>
+                          <a:uLnTx/>
+                          <a:uFillTx/>
+                          <a:latin typeface="Cambria Math" panose="02040503050406030204" pitchFamily="18" charset="0"/>
+                          <a:ea typeface="+mn-ea"/>
+                          <a:cs typeface="+mn-cs"/>
+                        </a:rPr>
+                        <m:t>(</m:t>
+                      </m:r>
+                      <m:r>
+                        <a:rPr kumimoji="0" lang="en-US" sz="2200" b="1" i="1" u="none" strike="noStrike" kern="1200" cap="none" spc="0" normalizeH="0" baseline="0" noProof="0" dirty="0">
+                          <a:ln>
+                            <a:noFill/>
+                          </a:ln>
+                          <a:solidFill>
+                            <a:srgbClr val="1F8987"/>
+                          </a:solidFill>
+                          <a:effectLst/>
+                          <a:uLnTx/>
+                          <a:uFillTx/>
+                          <a:latin typeface="Cambria Math" panose="02040503050406030204" pitchFamily="18" charset="0"/>
+                          <a:ea typeface="+mn-ea"/>
+                          <a:cs typeface="+mn-cs"/>
+                        </a:rPr>
+                        <m:t>𝒙</m:t>
+                      </m:r>
+                      <m:r>
+                        <a:rPr kumimoji="0" lang="en-US" sz="2200" b="1" i="1" u="none" strike="noStrike" kern="1200" cap="none" spc="0" normalizeH="0" baseline="0" noProof="0" dirty="0">
+                          <a:ln>
+                            <a:noFill/>
+                          </a:ln>
+                          <a:solidFill>
+                            <a:srgbClr val="1F8987"/>
+                          </a:solidFill>
+                          <a:effectLst/>
+                          <a:uLnTx/>
+                          <a:uFillTx/>
+                          <a:latin typeface="Cambria Math" panose="02040503050406030204" pitchFamily="18" charset="0"/>
+                          <a:ea typeface="+mn-ea"/>
+                          <a:cs typeface="+mn-cs"/>
+                        </a:rPr>
+                        <m:t>,</m:t>
+                      </m:r>
+                      <m:r>
+                        <a:rPr kumimoji="0" lang="en-US" sz="2200" b="1" i="1" u="none" strike="noStrike" kern="1200" cap="none" spc="0" normalizeH="0" baseline="0" noProof="0" dirty="0">
+                          <a:ln>
+                            <a:noFill/>
+                          </a:ln>
+                          <a:solidFill>
+                            <a:srgbClr val="1F8987"/>
+                          </a:solidFill>
+                          <a:effectLst/>
+                          <a:uLnTx/>
+                          <a:uFillTx/>
+                          <a:latin typeface="Cambria Math" panose="02040503050406030204" pitchFamily="18" charset="0"/>
+                          <a:ea typeface="+mn-ea"/>
+                          <a:cs typeface="+mn-cs"/>
+                        </a:rPr>
+                        <m:t>𝒚</m:t>
+                      </m:r>
+                      <m:r>
+                        <a:rPr kumimoji="0" lang="en-US" sz="2200" b="1" i="1" u="none" strike="noStrike" kern="1200" cap="none" spc="0" normalizeH="0" baseline="0" noProof="0" dirty="0">
+                          <a:ln>
+                            <a:noFill/>
+                          </a:ln>
+                          <a:solidFill>
+                            <a:srgbClr val="1F8987"/>
+                          </a:solidFill>
+                          <a:effectLst/>
+                          <a:uLnTx/>
+                          <a:uFillTx/>
+                          <a:latin typeface="Cambria Math" panose="02040503050406030204" pitchFamily="18" charset="0"/>
+                          <a:ea typeface="+mn-ea"/>
+                          <a:cs typeface="+mn-cs"/>
+                        </a:rPr>
+                        <m:t>,</m:t>
+                      </m:r>
+                      <m:r>
+                        <a:rPr kumimoji="0" lang="en-US" sz="2200" b="1" i="1" u="none" strike="noStrike" kern="1200" cap="none" spc="0" normalizeH="0" baseline="0" noProof="0" dirty="0" smtClean="0">
+                          <a:ln>
+                            <a:noFill/>
+                          </a:ln>
+                          <a:solidFill>
+                            <a:srgbClr val="1F8987"/>
+                          </a:solidFill>
+                          <a:effectLst/>
+                          <a:uLnTx/>
+                          <a:uFillTx/>
+                          <a:latin typeface="Cambria Math" panose="02040503050406030204" pitchFamily="18" charset="0"/>
+                          <a:ea typeface="+mn-ea"/>
+                          <a:cs typeface="+mn-cs"/>
+                        </a:rPr>
+                        <m:t>𝒛</m:t>
+                      </m:r>
+                      <m:r>
+                        <a:rPr kumimoji="0" lang="en-US" sz="2200" b="1" i="1" u="none" strike="noStrike" kern="1200" cap="none" spc="0" normalizeH="0" baseline="0" noProof="0" dirty="0">
+                          <a:ln>
+                            <a:noFill/>
+                          </a:ln>
+                          <a:solidFill>
+                            <a:srgbClr val="1F8987"/>
+                          </a:solidFill>
+                          <a:effectLst/>
+                          <a:uLnTx/>
+                          <a:uFillTx/>
+                          <a:latin typeface="Cambria Math" panose="02040503050406030204" pitchFamily="18" charset="0"/>
+                          <a:ea typeface="+mn-ea"/>
+                          <a:cs typeface="+mn-cs"/>
+                        </a:rPr>
+                        <m:t>) </m:t>
+                      </m:r>
+                      <m:r>
+                        <a:rPr kumimoji="0" lang="en-US" sz="2200" b="1" i="1" u="none" strike="noStrike" kern="1200" cap="none" spc="0" normalizeH="0" baseline="0" noProof="0" dirty="0" smtClean="0">
+                          <a:ln>
+                            <a:noFill/>
+                          </a:ln>
+                          <a:solidFill>
+                            <a:srgbClr val="1F8987"/>
+                          </a:solidFill>
+                          <a:effectLst/>
+                          <a:uLnTx/>
+                          <a:uFillTx/>
+                          <a:latin typeface="Cambria Math" panose="02040503050406030204" pitchFamily="18" charset="0"/>
+                          <a:ea typeface="+mn-ea"/>
+                          <a:cs typeface="+mn-cs"/>
+                        </a:rPr>
+                        <m:t>  </m:t>
+                      </m:r>
+                      <m:r>
+                        <a:rPr kumimoji="0" lang="en-US" sz="2200" b="1" i="1" u="none" strike="noStrike" kern="1200" cap="none" spc="0" normalizeH="0" baseline="0" noProof="0" dirty="0">
+                          <a:ln>
+                            <a:noFill/>
+                          </a:ln>
+                          <a:solidFill>
+                            <a:srgbClr val="1F8987"/>
+                          </a:solidFill>
+                          <a:effectLst/>
+                          <a:uLnTx/>
+                          <a:uFillTx/>
+                          <a:latin typeface="Cambria Math" panose="02040503050406030204" pitchFamily="18" charset="0"/>
+                          <a:ea typeface="+mn-ea"/>
+                          <a:cs typeface="+mn-cs"/>
+                        </a:rPr>
+                        <m:t>=</m:t>
+                      </m:r>
+                      <m:nary>
+                        <m:naryPr>
+                          <m:chr m:val="∑"/>
+                          <m:supHide m:val="on"/>
+                          <m:ctrlPr>
+                            <a:rPr lang="en-US" altLang="ko-KR" sz="2200" b="1" i="1" dirty="0" smtClean="0">
+                              <a:solidFill>
+                                <a:srgbClr val="1F8987"/>
+                              </a:solidFill>
+                              <a:latin typeface="Cambria Math" panose="02040503050406030204" pitchFamily="18" charset="0"/>
+                            </a:rPr>
+                          </m:ctrlPr>
+                        </m:naryPr>
+                        <m:sub>
+                          <m:r>
+                            <m:rPr>
+                              <m:brk m:alnAt="7"/>
+                            </m:rPr>
+                            <a:rPr lang="en-US" altLang="ko-KR" sz="2200" b="1" i="1" dirty="0" smtClean="0">
+                              <a:solidFill>
+                                <a:srgbClr val="1F8987"/>
+                              </a:solidFill>
+                              <a:latin typeface="Cambria Math" panose="02040503050406030204" pitchFamily="18" charset="0"/>
+                            </a:rPr>
+                            <m:t>𝒊</m:t>
+                          </m:r>
+                        </m:sub>
+                        <m:sup/>
+                        <m:e>
+                          <m:f>
+                            <m:fPr>
+                              <m:ctrlPr>
+                                <a:rPr lang="en-US" altLang="ko-KR" sz="2200" b="1" i="1" dirty="0">
+                                  <a:solidFill>
+                                    <a:srgbClr val="1F8987"/>
+                                  </a:solidFill>
+                                  <a:latin typeface="Cambria Math" panose="02040503050406030204" pitchFamily="18" charset="0"/>
+                                </a:rPr>
+                              </m:ctrlPr>
+                            </m:fPr>
+                            <m:num>
+                              <m:r>
+                                <a:rPr lang="en-US" altLang="ko-KR" sz="2200" b="1" i="1" dirty="0">
+                                  <a:solidFill>
+                                    <a:srgbClr val="1F8987"/>
+                                  </a:solidFill>
+                                  <a:latin typeface="Cambria Math" panose="02040503050406030204" pitchFamily="18" charset="0"/>
+                                </a:rPr>
+                                <m:t>𝒒</m:t>
+                              </m:r>
+                              <m:r>
+                                <a:rPr lang="en-US" altLang="ko-KR" sz="2200" b="1" i="1" dirty="0">
+                                  <a:solidFill>
+                                    <a:srgbClr val="1F8987"/>
+                                  </a:solidFill>
+                                  <a:latin typeface="Cambria Math" panose="02040503050406030204" pitchFamily="18" charset="0"/>
+                                </a:rPr>
+                                <m:t>ᵢ</m:t>
+                              </m:r>
+                            </m:num>
+                            <m:den>
+                              <m:rad>
+                                <m:radPr>
+                                  <m:degHide m:val="on"/>
+                                  <m:ctrlPr>
+                                    <a:rPr lang="en-US" altLang="ko-KR" sz="2200" b="1" i="1" dirty="0">
+                                      <a:solidFill>
+                                        <a:srgbClr val="1F8987"/>
+                                      </a:solidFill>
+                                      <a:latin typeface="Cambria Math" panose="02040503050406030204" pitchFamily="18" charset="0"/>
+                                    </a:rPr>
+                                  </m:ctrlPr>
+                                </m:radPr>
+                                <m:deg/>
+                                <m:e>
+                                  <m:r>
+                                    <a:rPr lang="en-US" altLang="ko-KR" sz="2200" b="1" i="1" dirty="0">
+                                      <a:solidFill>
+                                        <a:srgbClr val="1F8987"/>
+                                      </a:solidFill>
+                                      <a:latin typeface="Cambria Math" panose="02040503050406030204" pitchFamily="18" charset="0"/>
+                                    </a:rPr>
+                                    <m:t>(</m:t>
+                                  </m:r>
+                                  <m:r>
+                                    <a:rPr lang="en-US" altLang="ko-KR" sz="2200" b="1" i="1" dirty="0">
+                                      <a:solidFill>
+                                        <a:srgbClr val="1F8987"/>
+                                      </a:solidFill>
+                                      <a:latin typeface="Cambria Math" panose="02040503050406030204" pitchFamily="18" charset="0"/>
+                                    </a:rPr>
+                                    <m:t>𝒙</m:t>
+                                  </m:r>
+                                  <m:r>
+                                    <a:rPr lang="en-US" altLang="ko-KR" sz="2200" b="1" i="1" dirty="0">
+                                      <a:solidFill>
+                                        <a:srgbClr val="1F8987"/>
+                                      </a:solidFill>
+                                      <a:latin typeface="Cambria Math" panose="02040503050406030204" pitchFamily="18" charset="0"/>
+                                    </a:rPr>
+                                    <m:t>−</m:t>
+                                  </m:r>
+                                  <m:r>
+                                    <a:rPr lang="en-US" altLang="ko-KR" sz="2200" b="1" i="1" dirty="0">
+                                      <a:solidFill>
+                                        <a:srgbClr val="1F8987"/>
+                                      </a:solidFill>
+                                      <a:latin typeface="Cambria Math" panose="02040503050406030204" pitchFamily="18" charset="0"/>
+                                    </a:rPr>
+                                    <m:t>𝒙</m:t>
+                                  </m:r>
+                                  <m:r>
+                                    <a:rPr lang="en-US" altLang="ko-KR" sz="2200" b="1" i="1" dirty="0">
+                                      <a:solidFill>
+                                        <a:srgbClr val="1F8987"/>
+                                      </a:solidFill>
+                                      <a:latin typeface="Cambria Math" panose="02040503050406030204" pitchFamily="18" charset="0"/>
+                                    </a:rPr>
+                                    <m:t>ᵢ)² + (</m:t>
+                                  </m:r>
+                                  <m:r>
+                                    <a:rPr lang="en-US" altLang="ko-KR" sz="2200" b="1" i="1" dirty="0">
+                                      <a:solidFill>
+                                        <a:srgbClr val="1F8987"/>
+                                      </a:solidFill>
+                                      <a:latin typeface="Cambria Math" panose="02040503050406030204" pitchFamily="18" charset="0"/>
+                                    </a:rPr>
+                                    <m:t>𝒚</m:t>
+                                  </m:r>
+                                  <m:r>
+                                    <a:rPr lang="en-US" altLang="ko-KR" sz="2200" b="1" i="1" dirty="0">
+                                      <a:solidFill>
+                                        <a:srgbClr val="1F8987"/>
+                                      </a:solidFill>
+                                      <a:latin typeface="Cambria Math" panose="02040503050406030204" pitchFamily="18" charset="0"/>
+                                    </a:rPr>
+                                    <m:t>−</m:t>
+                                  </m:r>
+                                  <m:r>
+                                    <a:rPr lang="en-US" altLang="ko-KR" sz="2200" b="1" i="1" dirty="0">
+                                      <a:solidFill>
+                                        <a:srgbClr val="1F8987"/>
+                                      </a:solidFill>
+                                      <a:latin typeface="Cambria Math" panose="02040503050406030204" pitchFamily="18" charset="0"/>
+                                    </a:rPr>
+                                    <m:t>𝒚</m:t>
+                                  </m:r>
+                                  <m:r>
+                                    <a:rPr lang="en-US" altLang="ko-KR" sz="2200" b="1" i="1" dirty="0">
+                                      <a:solidFill>
+                                        <a:srgbClr val="1F8987"/>
+                                      </a:solidFill>
+                                      <a:latin typeface="Cambria Math" panose="02040503050406030204" pitchFamily="18" charset="0"/>
+                                    </a:rPr>
+                                    <m:t>ᵢ)² +(</m:t>
+                                  </m:r>
+                                  <m:r>
+                                    <a:rPr lang="en-US" altLang="ko-KR" sz="2200" b="1" i="1" dirty="0">
+                                      <a:solidFill>
+                                        <a:srgbClr val="1F8987"/>
+                                      </a:solidFill>
+                                      <a:latin typeface="Cambria Math" panose="02040503050406030204" pitchFamily="18" charset="0"/>
+                                    </a:rPr>
+                                    <m:t>𝒛</m:t>
+                                  </m:r>
+                                  <m:r>
+                                    <a:rPr lang="en-US" altLang="ko-KR" sz="2200" b="1" i="1" dirty="0">
+                                      <a:solidFill>
+                                        <a:srgbClr val="1F8987"/>
+                                      </a:solidFill>
+                                      <a:latin typeface="Cambria Math" panose="02040503050406030204" pitchFamily="18" charset="0"/>
+                                    </a:rPr>
+                                    <m:t>−</m:t>
+                                  </m:r>
+                                  <m:r>
+                                    <a:rPr lang="en-US" altLang="ko-KR" sz="2200" b="1" i="1" dirty="0">
+                                      <a:solidFill>
+                                        <a:srgbClr val="1F8987"/>
+                                      </a:solidFill>
+                                      <a:latin typeface="Cambria Math" panose="02040503050406030204" pitchFamily="18" charset="0"/>
+                                    </a:rPr>
+                                    <m:t>𝒛</m:t>
+                                  </m:r>
+                                  <m:sSup>
+                                    <m:sSupPr>
+                                      <m:ctrlPr>
+                                        <a:rPr lang="en-US" altLang="ko-KR" sz="2200" b="1" i="1" dirty="0">
+                                          <a:solidFill>
+                                            <a:srgbClr val="1F8987"/>
+                                          </a:solidFill>
+                                          <a:latin typeface="Cambria Math" panose="02040503050406030204" pitchFamily="18" charset="0"/>
+                                        </a:rPr>
+                                      </m:ctrlPr>
+                                    </m:sSupPr>
+                                    <m:e>
+                                      <m:r>
+                                        <a:rPr lang="en-US" altLang="ko-KR" sz="2200" b="1" i="1" dirty="0">
+                                          <a:solidFill>
+                                            <a:srgbClr val="1F8987"/>
+                                          </a:solidFill>
+                                          <a:latin typeface="Cambria Math" panose="02040503050406030204" pitchFamily="18" charset="0"/>
+                                        </a:rPr>
+                                        <m:t>ᵢ</m:t>
+                                      </m:r>
+                                    </m:e>
+                                    <m:sup>
+                                      <m:r>
+                                        <a:rPr lang="en-US" altLang="ko-KR" sz="2200" b="1" i="1" dirty="0">
+                                          <a:solidFill>
+                                            <a:srgbClr val="1F8987"/>
+                                          </a:solidFill>
+                                          <a:latin typeface="Cambria Math" panose="02040503050406030204" pitchFamily="18" charset="0"/>
+                                        </a:rPr>
+                                        <m:t>2</m:t>
+                                      </m:r>
+                                    </m:sup>
+                                  </m:sSup>
+                                  <m:r>
+                                    <a:rPr lang="en-US" altLang="ko-KR" sz="2200" b="1" i="1" dirty="0">
+                                      <a:solidFill>
+                                        <a:srgbClr val="1F8987"/>
+                                      </a:solidFill>
+                                      <a:latin typeface="Cambria Math" panose="02040503050406030204" pitchFamily="18" charset="0"/>
+                                    </a:rPr>
+                                    <m:t>)</m:t>
+                                  </m:r>
+                                </m:e>
+                              </m:rad>
+                            </m:den>
+                          </m:f>
+                        </m:e>
+                      </m:nary>
+                    </m:oMath>
+                  </m:oMathPara>
+                </a14:m>
+              </a:p>
+            </p:txBody>
+          </p:sp>
+        </mc:Choice>
+        <mc:Fallback>
+          <p:sp>
+            <p:nvSpPr>
+              <p:cNvPr id="8" name="TextBox 7"/>
+              <p:cNvSpPr txBox="1">
+                <a:spLocks noRot="1" noChangeAspect="1" noMove="1" noResize="1" noEditPoints="1" noAdjustHandles="1" noChangeArrowheads="1" noChangeShapeType="1" noTextEdit="1"/>
+              </p:cNvSpPr>
+              <p:nvPr/>
+            </p:nvSpPr>
+            <p:spPr>
+              <a:xfrm>
+                <a:off x="2779793" y="1975104"/>
+                <a:ext cx="6601936" cy="913648"/>
+              </a:xfrm>
+              <a:prstGeom prst="rect">
+                <a:avLst/>
+              </a:prstGeom>
+              <a:blipFill>
+                <a:blip r:embed="rId2"/>
+                <a:stretch>
+                  <a:fillRect/>
+                </a:stretch>
+              </a:blipFill>
+            </p:spPr>
+            <p:txBody>
+              <a:bodyPr/>
+              <a:lstStyle/>
+              <a:p>
+                <a:r>
+                  <a:rPr lang="ko-KR" altLang="en-US">
+                    <a:noFill/>
+                  </a:rPr>
+                  <a:t> </a:t>
+                </a:r>
+              </a:p>
+            </p:txBody>
+          </p:sp>
+        </mc:Fallback>
+      </mc:AlternateContent>
+      <p:sp>
+        <p:nvSpPr>
+          <p:cNvPr id="9" name="TextBox 8"/>
+          <p:cNvSpPr txBox="1"/>
+          <p:nvPr/>
+        </p:nvSpPr>
+        <p:spPr>
+          <a:xfrm>
+            <a:off x="1280160" y="2697480"/>
+            <a:ext cx="9601200" cy="365760"/>
+          </a:xfrm>
+          <a:prstGeom prst="rect">
+            <a:avLst/>
+          </a:prstGeom>
+          <a:noFill/>
+        </p:spPr>
+        <p:txBody>
+          <a:bodyPr wrap="none">
+            <a:spAutoFit/>
+          </a:bodyPr>
+          <a:lstStyle/>
+          <a:p>
+            <a:pPr marL="0" marR="0" lvl="0" indent="0" algn="ctr" defTabSz="457200" rtl="0" eaLnBrk="1" fontAlgn="auto" latinLnBrk="0" hangingPunct="1">
+              <a:lnSpc>
+                <a:spcPct val="100000"/>
+              </a:lnSpc>
+              <a:spcBef>
+                <a:spcPts val="0"/>
+              </a:spcBef>
+              <a:spcAft>
+                <a:spcPts val="0"/>
+              </a:spcAft>
+              <a:buClrTx/>
+              <a:buSzTx/>
+              <a:buFontTx/>
+              <a:buNone/>
+              <a:tabLst/>
+              <a:defRPr sz="1250">
+                <a:solidFill>
+                  <a:srgbClr val="5C6574"/>
+                </a:solidFill>
+              </a:defRPr>
+            </a:pPr>
+            <a:r>
+              <a:rPr kumimoji="0" sz="1250" b="0" i="0" u="none" strike="noStrike" kern="1200" cap="none" spc="0" normalizeH="0" baseline="0" noProof="0">
+                <a:ln>
+                  <a:noFill/>
+                </a:ln>
+                <a:solidFill>
+                  <a:srgbClr val="5C6574"/>
+                </a:solidFill>
+                <a:effectLst/>
+                <a:uLnTx/>
+                <a:uFillTx/>
+                <a:latin typeface="Calibri"/>
+                <a:ea typeface="+mn-ea"/>
+                <a:cs typeface="+mn-cs"/>
+              </a:rPr>
+              <a:t>편의를 위해 전체 비례상수는 정규화한다.</a:t>
+            </a:r>
+          </a:p>
+        </p:txBody>
+      </p:sp>
+      <p:sp>
+        <p:nvSpPr>
+          <p:cNvPr id="10" name="TextBox 9"/>
+          <p:cNvSpPr txBox="1"/>
+          <p:nvPr/>
+        </p:nvSpPr>
+        <p:spPr>
+          <a:xfrm>
+            <a:off x="822960" y="3063240"/>
+            <a:ext cx="10607040" cy="825867"/>
+          </a:xfrm>
+          <a:prstGeom prst="rect">
+            <a:avLst/>
+          </a:prstGeom>
+          <a:noFill/>
+        </p:spPr>
+        <p:txBody>
+          <a:bodyPr wrap="square">
+            <a:spAutoFit/>
+          </a:bodyPr>
+          <a:lstStyle/>
+          <a:p>
+            <a:pPr marL="0" marR="0" lvl="0" indent="0" algn="l" defTabSz="457200" rtl="0" eaLnBrk="1" fontAlgn="auto" latinLnBrk="0" hangingPunct="1">
+              <a:lnSpc>
+                <a:spcPct val="100000"/>
+              </a:lnSpc>
+              <a:spcBef>
+                <a:spcPts val="0"/>
+              </a:spcBef>
+              <a:spcAft>
+                <a:spcPts val="1400"/>
+              </a:spcAft>
+              <a:buClrTx/>
+              <a:buSzTx/>
+              <a:buFontTx/>
+              <a:buNone/>
+              <a:tabLst/>
+              <a:defRPr sz="1800">
+                <a:solidFill>
+                  <a:srgbClr val="18233A"/>
+                </a:solidFill>
+              </a:defRPr>
+            </a:pPr>
+            <a:r>
+              <a:rPr kumimoji="0" lang="ko-KR" altLang="en-US" sz="1800" b="0" i="0" u="none" strike="noStrike" kern="1200" cap="none" spc="0" normalizeH="0" baseline="0" noProof="0" dirty="0">
+                <a:ln>
+                  <a:noFill/>
+                </a:ln>
+                <a:solidFill>
+                  <a:srgbClr val="18233A"/>
+                </a:solidFill>
+                <a:effectLst/>
+                <a:uLnTx/>
+                <a:uFillTx/>
+                <a:latin typeface="Calibri"/>
+                <a:ea typeface="+mn-ea"/>
+                <a:cs typeface="+mn-cs"/>
+              </a:rPr>
+              <a:t>물리학 교과서는 </a:t>
+            </a:r>
+            <a:r>
+              <a:rPr kumimoji="0" lang="en-US" altLang="ko-KR" sz="1800" b="0" i="0" u="none" strike="noStrike" kern="1200" cap="none" spc="0" normalizeH="0" baseline="0" noProof="0" dirty="0">
+                <a:ln>
+                  <a:noFill/>
+                </a:ln>
+                <a:solidFill>
+                  <a:srgbClr val="18233A"/>
+                </a:solidFill>
+                <a:effectLst/>
+                <a:uLnTx/>
+                <a:uFillTx/>
+                <a:latin typeface="Calibri"/>
+                <a:ea typeface="+mn-ea"/>
+                <a:cs typeface="+mn-cs"/>
+              </a:rPr>
+              <a:t>2</a:t>
+            </a:r>
+            <a:r>
+              <a:rPr kumimoji="0" lang="ko-KR" altLang="en-US" sz="1800" b="0" i="0" u="none" strike="noStrike" kern="1200" cap="none" spc="0" normalizeH="0" baseline="0" noProof="0" dirty="0">
+                <a:ln>
+                  <a:noFill/>
+                </a:ln>
+                <a:solidFill>
+                  <a:srgbClr val="18233A"/>
+                </a:solidFill>
+                <a:effectLst/>
+                <a:uLnTx/>
+                <a:uFillTx/>
+                <a:latin typeface="Calibri"/>
+                <a:ea typeface="+mn-ea"/>
+                <a:cs typeface="+mn-cs"/>
+              </a:rPr>
+              <a:t>차원 평면에서의 전하만을 설명한다</a:t>
+            </a:r>
+            <a:r>
+              <a:rPr kumimoji="0" lang="en-US" altLang="ko-KR" sz="1800" b="0" i="0" u="none" strike="noStrike" kern="1200" cap="none" spc="0" normalizeH="0" baseline="0" noProof="0" dirty="0">
+                <a:ln>
+                  <a:noFill/>
+                </a:ln>
+                <a:solidFill>
+                  <a:srgbClr val="18233A"/>
+                </a:solidFill>
+                <a:effectLst/>
+                <a:uLnTx/>
+                <a:uFillTx/>
+                <a:latin typeface="Calibri"/>
+                <a:ea typeface="+mn-ea"/>
+                <a:cs typeface="+mn-cs"/>
+              </a:rPr>
+              <a:t>.</a:t>
+            </a:r>
+          </a:p>
+          <a:p>
+            <a:pPr marL="0" marR="0" lvl="0" indent="0" algn="l" defTabSz="457200" rtl="0" eaLnBrk="1" fontAlgn="auto" latinLnBrk="0" hangingPunct="1">
+              <a:lnSpc>
+                <a:spcPct val="100000"/>
+              </a:lnSpc>
+              <a:spcBef>
+                <a:spcPts val="0"/>
+              </a:spcBef>
+              <a:spcAft>
+                <a:spcPts val="1400"/>
+              </a:spcAft>
+              <a:buClrTx/>
+              <a:buSzTx/>
+              <a:buFontTx/>
+              <a:buNone/>
+              <a:tabLst/>
+              <a:defRPr sz="1800">
+                <a:solidFill>
+                  <a:srgbClr val="18233A"/>
+                </a:solidFill>
+              </a:defRPr>
+            </a:pPr>
+            <a:r>
+              <a:rPr kumimoji="0" lang="ko-KR" altLang="en-US" sz="1800" b="0" i="0" u="none" strike="noStrike" kern="1200" cap="none" spc="0" normalizeH="0" baseline="0" noProof="0" dirty="0">
+                <a:ln>
+                  <a:noFill/>
+                </a:ln>
+                <a:solidFill>
+                  <a:srgbClr val="18233A"/>
+                </a:solidFill>
+                <a:effectLst/>
+                <a:uLnTx/>
+                <a:uFillTx/>
+                <a:latin typeface="Calibri"/>
+                <a:ea typeface="+mn-ea"/>
+                <a:cs typeface="+mn-cs"/>
+              </a:rPr>
+              <a:t>조금만 확장해 </a:t>
+            </a:r>
+            <a:r>
+              <a:rPr kumimoji="0" lang="en-US" altLang="ko-KR" sz="1800" b="0" i="0" u="none" strike="noStrike" kern="1200" cap="none" spc="0" normalizeH="0" baseline="0" noProof="0" dirty="0">
+                <a:ln>
+                  <a:noFill/>
+                </a:ln>
+                <a:solidFill>
+                  <a:srgbClr val="18233A"/>
+                </a:solidFill>
+                <a:effectLst/>
+                <a:uLnTx/>
+                <a:uFillTx/>
+                <a:latin typeface="Calibri"/>
+                <a:ea typeface="+mn-ea"/>
+                <a:cs typeface="+mn-cs"/>
+              </a:rPr>
+              <a:t>z</a:t>
+            </a:r>
+            <a:r>
+              <a:rPr kumimoji="0" lang="ko-KR" altLang="en-US" sz="1800" b="0" i="0" u="none" strike="noStrike" kern="1200" cap="none" spc="0" normalizeH="0" baseline="0" noProof="0" dirty="0">
+                <a:ln>
+                  <a:noFill/>
+                </a:ln>
+                <a:solidFill>
+                  <a:srgbClr val="18233A"/>
+                </a:solidFill>
+                <a:effectLst/>
+                <a:uLnTx/>
+                <a:uFillTx/>
+                <a:latin typeface="Calibri"/>
+                <a:ea typeface="+mn-ea"/>
+                <a:cs typeface="+mn-cs"/>
+              </a:rPr>
+              <a:t>축을 추가하면 </a:t>
+            </a:r>
+            <a:r>
+              <a:rPr kumimoji="0" lang="en-US" altLang="ko-KR" sz="1800" b="0" i="0" u="none" strike="noStrike" kern="1200" cap="none" spc="0" normalizeH="0" baseline="0" noProof="0" dirty="0">
+                <a:ln>
+                  <a:noFill/>
+                </a:ln>
+                <a:solidFill>
+                  <a:srgbClr val="18233A"/>
+                </a:solidFill>
+                <a:effectLst/>
+                <a:uLnTx/>
+                <a:uFillTx/>
+                <a:latin typeface="Calibri"/>
+                <a:ea typeface="+mn-ea"/>
+                <a:cs typeface="+mn-cs"/>
+              </a:rPr>
+              <a:t>3</a:t>
+            </a:r>
+            <a:r>
+              <a:rPr kumimoji="0" lang="ko-KR" altLang="en-US" sz="1800" b="0" i="0" u="none" strike="noStrike" kern="1200" cap="none" spc="0" normalizeH="0" baseline="0" noProof="0" dirty="0">
+                <a:ln>
+                  <a:noFill/>
+                </a:ln>
+                <a:solidFill>
+                  <a:srgbClr val="18233A"/>
+                </a:solidFill>
+                <a:effectLst/>
+                <a:uLnTx/>
+                <a:uFillTx/>
+                <a:latin typeface="Calibri"/>
+                <a:ea typeface="+mn-ea"/>
+                <a:cs typeface="+mn-cs"/>
+              </a:rPr>
+              <a:t>차원 공간에서도 전하들에 의한 전위를 구할 수 </a:t>
+            </a:r>
+            <a:r>
+              <a:rPr lang="ko-KR" altLang="en-US" dirty="0">
+                <a:solidFill>
+                  <a:srgbClr val="18233A"/>
+                </a:solidFill>
+                <a:latin typeface="Calibri"/>
+              </a:rPr>
+              <a:t>있다</a:t>
+            </a:r>
+            <a:r>
+              <a:rPr lang="en-US" altLang="ko-KR" dirty="0">
+                <a:solidFill>
+                  <a:srgbClr val="18233A"/>
+                </a:solidFill>
+                <a:latin typeface="Calibri"/>
+              </a:rPr>
+              <a:t>.</a:t>
+            </a:r>
+            <a:endParaRPr kumimoji="0" lang="en-US" sz="1800" b="0" i="0" u="none" strike="noStrike" kern="1200" cap="none" spc="0" normalizeH="0" baseline="0" noProof="0" dirty="0">
+              <a:ln>
+                <a:noFill/>
+              </a:ln>
+              <a:solidFill>
+                <a:srgbClr val="18233A"/>
+              </a:solidFill>
+              <a:effectLst/>
+              <a:uLnTx/>
+              <a:uFillTx/>
+              <a:latin typeface="Calibri"/>
+              <a:ea typeface="+mn-ea"/>
+              <a:cs typeface="+mn-cs"/>
+            </a:endParaRPr>
+          </a:p>
+        </p:txBody>
+      </p:sp>
+      <p:pic>
+        <p:nvPicPr>
+          <p:cNvPr id="12" name="그림 11" descr="전위, 전기 퍼텐셜 (Electric Potential)">
+            <a:extLst>
+              <a:ext uri="{FF2B5EF4-FFF2-40B4-BE49-F238E27FC236}">
+                <a16:creationId xmlns:a16="http://schemas.microsoft.com/office/drawing/2014/main" id="{6F836141-F320-57A3-36AA-AD246B1F6298}"/>
+              </a:ext>
+            </a:extLst>
+          </p:cNvPr>
+          <p:cNvPicPr>
+            <a:picLocks noChangeAspect="1"/>
+          </p:cNvPicPr>
+          <p:nvPr/>
+        </p:nvPicPr>
+        <p:blipFill>
+          <a:blip r:embed="rId3"/>
+          <a:stretch>
+            <a:fillRect/>
+          </a:stretch>
+        </p:blipFill>
+        <p:spPr>
+          <a:xfrm>
+            <a:off x="8570480" y="3066112"/>
+            <a:ext cx="3731164" cy="3791888"/>
+          </a:xfrm>
+          <a:prstGeom prst="rect">
+            <a:avLst/>
+          </a:prstGeom>
+        </p:spPr>
+      </p:pic>
+    </p:spTree>
+  </p:cSld>
+  <p:clrMapOvr>
+    <a:masterClrMapping/>
+  </p:clrMapOvr>
+</p:sld>
+</file>
+
+<file path=ppt/slides/slide5.xml><?xml version="1.0" encoding="utf-8"?>
+<p:sld xmlns:a="http://schemas.openxmlformats.org/drawingml/2006/main" xmlns:r="http://schemas.openxmlformats.org/officeDocument/2006/relationships" xmlns:p="http://schemas.openxmlformats.org/presentationml/2006/main">
+  <p:cSld>
+    <p:spTree>
+      <p:nvGrpSpPr>
+        <p:cNvPr id="1" name=""/>
+        <p:cNvGrpSpPr/>
+        <p:nvPr/>
+      </p:nvGrpSpPr>
+      <p:grpSpPr>
+        <a:xfrm>
+          <a:off x="0" y="0"/>
+          <a:ext cx="0" cy="0"/>
+          <a:chOff x="0" y="0"/>
+          <a:chExt cx="0" cy="0"/>
+        </a:xfrm>
+      </p:grpSpPr>
+      <p:sp>
+        <p:nvSpPr>
+          <p:cNvPr id="2" name="Rectangle 1"/>
+          <p:cNvSpPr/>
+          <p:nvPr/>
+        </p:nvSpPr>
+        <p:spPr>
+          <a:xfrm>
+            <a:off x="0" y="0"/>
+            <a:ext cx="12191695" cy="6858000"/>
+          </a:xfrm>
+          <a:prstGeom prst="rect">
+            <a:avLst/>
+          </a:prstGeom>
+          <a:solidFill>
+            <a:srgbClr val="F8F9FC"/>
+          </a:solidFill>
+          <a:ln>
+            <a:noFill/>
+          </a:ln>
+        </p:spPr>
+        <p:style>
+          <a:lnRef idx="1">
+            <a:schemeClr val="accent1"/>
+          </a:lnRef>
+          <a:fillRef idx="3">
+            <a:schemeClr val="accent1"/>
+          </a:fillRef>
+          <a:effectRef idx="2">
+            <a:schemeClr val="accent1"/>
+          </a:effectRef>
+          <a:fontRef idx="minor">
+            <a:schemeClr val="lt1"/>
+          </a:fontRef>
+        </p:style>
+        <p:txBody>
+          <a:bodyPr rtlCol="0" anchor="ctr"/>
+          <a:lstStyle/>
+          <a:p>
+            <a:pPr marL="0" marR="0" lvl="0" indent="0" algn="ctr" defTabSz="457200" rtl="0" eaLnBrk="1" fontAlgn="auto" latinLnBrk="0" hangingPunct="1">
+              <a:lnSpc>
+                <a:spcPct val="100000"/>
+              </a:lnSpc>
+              <a:spcBef>
+                <a:spcPts val="0"/>
+              </a:spcBef>
+              <a:spcAft>
+                <a:spcPts val="0"/>
+              </a:spcAft>
+              <a:buClrTx/>
+              <a:buSzTx/>
+              <a:buFontTx/>
+              <a:buNone/>
+              <a:tabLst/>
+              <a:defRPr/>
+            </a:pPr>
+            <a:endParaRPr kumimoji="0" sz="1800" b="0" i="0" u="none" strike="noStrike" kern="1200" cap="none" spc="0" normalizeH="0" baseline="0" noProof="0">
+              <a:ln>
+                <a:noFill/>
+              </a:ln>
+              <a:solidFill>
+                <a:prstClr val="white"/>
+              </a:solidFill>
+              <a:effectLst/>
+              <a:uLnTx/>
+              <a:uFillTx/>
+              <a:latin typeface="Calibri"/>
+              <a:ea typeface="+mn-ea"/>
+              <a:cs typeface="+mn-cs"/>
+            </a:endParaRPr>
+          </a:p>
+        </p:txBody>
+      </p:sp>
+      <p:sp>
+        <p:nvSpPr>
+          <p:cNvPr id="3" name="TextBox 2"/>
+          <p:cNvSpPr txBox="1"/>
+          <p:nvPr/>
+        </p:nvSpPr>
+        <p:spPr>
+          <a:xfrm>
+            <a:off x="658368" y="384048"/>
+            <a:ext cx="6209264" cy="523220"/>
+          </a:xfrm>
+          <a:prstGeom prst="rect">
+            <a:avLst/>
+          </a:prstGeom>
+          <a:noFill/>
+        </p:spPr>
+        <p:txBody>
+          <a:bodyPr wrap="none">
+            <a:spAutoFit/>
+          </a:bodyPr>
+          <a:lstStyle/>
+          <a:p>
+            <a:pPr marL="0" marR="0" lvl="0" indent="0" algn="l" defTabSz="457200" rtl="0" eaLnBrk="1" fontAlgn="auto" latinLnBrk="0" hangingPunct="1">
+              <a:lnSpc>
+                <a:spcPct val="100000"/>
+              </a:lnSpc>
+              <a:spcBef>
+                <a:spcPts val="0"/>
+              </a:spcBef>
+              <a:spcAft>
+                <a:spcPts val="0"/>
+              </a:spcAft>
+              <a:buClrTx/>
+              <a:buSzTx/>
+              <a:buFontTx/>
+              <a:buNone/>
+              <a:tabLst/>
+              <a:defRPr sz="2800" b="1">
+                <a:solidFill>
+                  <a:srgbClr val="18233A"/>
+                </a:solidFill>
+              </a:defRPr>
+            </a:pPr>
+            <a:r>
+              <a:rPr lang="en-US" sz="2800" b="1" dirty="0">
+                <a:solidFill>
+                  <a:srgbClr val="18233A"/>
+                </a:solidFill>
+                <a:latin typeface="Calibri"/>
+              </a:rPr>
+              <a:t>1-2</a:t>
+            </a:r>
+            <a:r>
+              <a:rPr kumimoji="0" sz="2800" b="1" i="0" u="none" strike="noStrike" kern="1200" cap="none" spc="0" normalizeH="0" baseline="0" noProof="0" dirty="0">
+                <a:ln>
+                  <a:noFill/>
+                </a:ln>
+                <a:solidFill>
+                  <a:srgbClr val="18233A"/>
+                </a:solidFill>
+                <a:effectLst/>
+                <a:uLnTx/>
+                <a:uFillTx/>
+                <a:latin typeface="Calibri"/>
+                <a:ea typeface="+mn-ea"/>
+                <a:cs typeface="+mn-cs"/>
+              </a:rPr>
+              <a:t>. Kaluza–Klein </a:t>
+            </a:r>
+            <a:r>
+              <a:rPr kumimoji="0" sz="2800" b="1" i="0" u="none" strike="noStrike" kern="1200" cap="none" spc="0" normalizeH="0" baseline="0" noProof="0" dirty="0" err="1">
+                <a:ln>
+                  <a:noFill/>
+                </a:ln>
+                <a:solidFill>
+                  <a:srgbClr val="18233A"/>
+                </a:solidFill>
+                <a:effectLst/>
+                <a:uLnTx/>
+                <a:uFillTx/>
+                <a:latin typeface="Calibri"/>
+                <a:ea typeface="+mn-ea"/>
+                <a:cs typeface="+mn-cs"/>
+              </a:rPr>
+              <a:t>관점으로</a:t>
+            </a:r>
+            <a:r>
+              <a:rPr kumimoji="0" sz="2800" b="1" i="0" u="none" strike="noStrike" kern="1200" cap="none" spc="0" normalizeH="0" baseline="0" noProof="0" dirty="0">
+                <a:ln>
+                  <a:noFill/>
+                </a:ln>
+                <a:solidFill>
+                  <a:srgbClr val="18233A"/>
+                </a:solidFill>
+                <a:effectLst/>
+                <a:uLnTx/>
+                <a:uFillTx/>
+                <a:latin typeface="Calibri"/>
+                <a:ea typeface="+mn-ea"/>
+                <a:cs typeface="+mn-cs"/>
+              </a:rPr>
+              <a:t> </a:t>
+            </a:r>
+            <a:r>
+              <a:rPr kumimoji="0" sz="2800" b="1" i="0" u="none" strike="noStrike" kern="1200" cap="none" spc="0" normalizeH="0" baseline="0" noProof="0" dirty="0" err="1">
+                <a:ln>
+                  <a:noFill/>
+                </a:ln>
+                <a:solidFill>
+                  <a:srgbClr val="18233A"/>
+                </a:solidFill>
+                <a:effectLst/>
+                <a:uLnTx/>
+                <a:uFillTx/>
+                <a:latin typeface="Calibri"/>
+                <a:ea typeface="+mn-ea"/>
+                <a:cs typeface="+mn-cs"/>
+              </a:rPr>
+              <a:t>관측량</a:t>
+            </a:r>
+            <a:r>
+              <a:rPr kumimoji="0" sz="2800" b="1" i="0" u="none" strike="noStrike" kern="1200" cap="none" spc="0" normalizeH="0" baseline="0" noProof="0" dirty="0">
+                <a:ln>
+                  <a:noFill/>
+                </a:ln>
+                <a:solidFill>
+                  <a:srgbClr val="18233A"/>
+                </a:solidFill>
+                <a:effectLst/>
+                <a:uLnTx/>
+                <a:uFillTx/>
+                <a:latin typeface="Calibri"/>
+                <a:ea typeface="+mn-ea"/>
+                <a:cs typeface="+mn-cs"/>
+              </a:rPr>
+              <a:t> </a:t>
+            </a:r>
+            <a:r>
+              <a:rPr kumimoji="0" sz="2800" b="1" i="0" u="none" strike="noStrike" kern="1200" cap="none" spc="0" normalizeH="0" baseline="0" noProof="0" dirty="0" err="1">
+                <a:ln>
+                  <a:noFill/>
+                </a:ln>
+                <a:solidFill>
+                  <a:srgbClr val="18233A"/>
+                </a:solidFill>
+                <a:effectLst/>
+                <a:uLnTx/>
+                <a:uFillTx/>
+                <a:latin typeface="Calibri"/>
+                <a:ea typeface="+mn-ea"/>
+                <a:cs typeface="+mn-cs"/>
+              </a:rPr>
+              <a:t>구성</a:t>
+            </a:r>
+            <a:endParaRPr kumimoji="0" sz="2800" b="1" i="0" u="none" strike="noStrike" kern="1200" cap="none" spc="0" normalizeH="0" baseline="0" noProof="0" dirty="0">
+              <a:ln>
+                <a:noFill/>
+              </a:ln>
+              <a:solidFill>
+                <a:srgbClr val="18233A"/>
+              </a:solidFill>
+              <a:effectLst/>
+              <a:uLnTx/>
+              <a:uFillTx/>
+              <a:latin typeface="Calibri"/>
+              <a:ea typeface="+mn-ea"/>
+              <a:cs typeface="+mn-cs"/>
+            </a:endParaRPr>
+          </a:p>
+        </p:txBody>
+      </p:sp>
+      <p:sp>
+        <p:nvSpPr>
+          <p:cNvPr id="4" name="TextBox 3"/>
+          <p:cNvSpPr txBox="1"/>
+          <p:nvPr/>
+        </p:nvSpPr>
+        <p:spPr>
+          <a:xfrm>
+            <a:off x="676656" y="987552"/>
+            <a:ext cx="10607040" cy="384048"/>
+          </a:xfrm>
+          <a:prstGeom prst="rect">
+            <a:avLst/>
+          </a:prstGeom>
+          <a:noFill/>
+        </p:spPr>
+        <p:txBody>
+          <a:bodyPr wrap="none">
+            <a:spAutoFit/>
+          </a:bodyPr>
+          <a:lstStyle/>
+          <a:p>
+            <a:pPr marL="0" marR="0" lvl="0" indent="0" algn="l" defTabSz="457200" rtl="0" eaLnBrk="1" fontAlgn="auto" latinLnBrk="0" hangingPunct="1">
+              <a:lnSpc>
+                <a:spcPct val="100000"/>
+              </a:lnSpc>
+              <a:spcBef>
+                <a:spcPts val="0"/>
+              </a:spcBef>
+              <a:spcAft>
+                <a:spcPts val="0"/>
+              </a:spcAft>
+              <a:buClrTx/>
+              <a:buSzTx/>
+              <a:buFontTx/>
+              <a:buNone/>
+              <a:tabLst/>
+              <a:defRPr sz="1250">
+                <a:solidFill>
+                  <a:srgbClr val="5C6574"/>
+                </a:solidFill>
+              </a:defRPr>
+            </a:pPr>
+            <a:r>
+              <a:rPr kumimoji="0" sz="1250" b="0" i="0" u="none" strike="noStrike" kern="1200" cap="none" spc="0" normalizeH="0" baseline="0" noProof="0" dirty="0" err="1">
+                <a:ln>
+                  <a:noFill/>
+                </a:ln>
+                <a:solidFill>
+                  <a:srgbClr val="5C6574"/>
+                </a:solidFill>
+                <a:effectLst/>
+                <a:uLnTx/>
+                <a:uFillTx/>
+                <a:latin typeface="Calibri"/>
+                <a:ea typeface="+mn-ea"/>
+                <a:cs typeface="+mn-cs"/>
+              </a:rPr>
+              <a:t>전자기</a:t>
+            </a:r>
+            <a:r>
+              <a:rPr kumimoji="0" sz="1250" b="0" i="0" u="none" strike="noStrike" kern="1200" cap="none" spc="0" normalizeH="0" baseline="0" noProof="0" dirty="0">
+                <a:ln>
+                  <a:noFill/>
+                </a:ln>
+                <a:solidFill>
+                  <a:srgbClr val="5C6574"/>
+                </a:solidFill>
+                <a:effectLst/>
+                <a:uLnTx/>
+                <a:uFillTx/>
+                <a:latin typeface="Calibri"/>
+                <a:ea typeface="+mn-ea"/>
+                <a:cs typeface="+mn-cs"/>
+              </a:rPr>
+              <a:t> </a:t>
+            </a:r>
+            <a:r>
+              <a:rPr kumimoji="0" sz="1250" b="0" i="0" u="none" strike="noStrike" kern="1200" cap="none" spc="0" normalizeH="0" baseline="0" noProof="0" dirty="0" err="1">
+                <a:ln>
+                  <a:noFill/>
+                </a:ln>
+                <a:solidFill>
+                  <a:srgbClr val="5C6574"/>
+                </a:solidFill>
+                <a:effectLst/>
+                <a:uLnTx/>
+                <a:uFillTx/>
+                <a:latin typeface="Calibri"/>
+                <a:ea typeface="+mn-ea"/>
+                <a:cs typeface="+mn-cs"/>
+              </a:rPr>
+              <a:t>퍼텐셜을</a:t>
+            </a:r>
+            <a:r>
+              <a:rPr kumimoji="0" sz="1250" b="0" i="0" u="none" strike="noStrike" kern="1200" cap="none" spc="0" normalizeH="0" baseline="0" noProof="0" dirty="0">
+                <a:ln>
+                  <a:noFill/>
+                </a:ln>
+                <a:solidFill>
+                  <a:srgbClr val="5C6574"/>
+                </a:solidFill>
+                <a:effectLst/>
+                <a:uLnTx/>
+                <a:uFillTx/>
+                <a:latin typeface="Calibri"/>
+                <a:ea typeface="+mn-ea"/>
+                <a:cs typeface="+mn-cs"/>
+              </a:rPr>
+              <a:t> </a:t>
+            </a:r>
+            <a:r>
+              <a:rPr kumimoji="0" sz="1250" b="0" i="0" u="none" strike="noStrike" kern="1200" cap="none" spc="0" normalizeH="0" baseline="0" noProof="0" dirty="0" err="1">
+                <a:ln>
+                  <a:noFill/>
+                </a:ln>
+                <a:solidFill>
+                  <a:srgbClr val="5C6574"/>
+                </a:solidFill>
+                <a:effectLst/>
+                <a:uLnTx/>
+                <a:uFillTx/>
+                <a:latin typeface="Calibri"/>
+                <a:ea typeface="+mn-ea"/>
+                <a:cs typeface="+mn-cs"/>
+              </a:rPr>
+              <a:t>고차원</a:t>
+            </a:r>
+            <a:r>
+              <a:rPr kumimoji="0" sz="1250" b="0" i="0" u="none" strike="noStrike" kern="1200" cap="none" spc="0" normalizeH="0" baseline="0" noProof="0" dirty="0">
+                <a:ln>
+                  <a:noFill/>
+                </a:ln>
+                <a:solidFill>
+                  <a:srgbClr val="5C6574"/>
+                </a:solidFill>
+                <a:effectLst/>
+                <a:uLnTx/>
+                <a:uFillTx/>
+                <a:latin typeface="Calibri"/>
+                <a:ea typeface="+mn-ea"/>
+                <a:cs typeface="+mn-cs"/>
+              </a:rPr>
+              <a:t> </a:t>
+            </a:r>
+            <a:r>
+              <a:rPr kumimoji="0" sz="1250" b="0" i="0" u="none" strike="noStrike" kern="1200" cap="none" spc="0" normalizeH="0" baseline="0" noProof="0" dirty="0" err="1">
+                <a:ln>
+                  <a:noFill/>
+                </a:ln>
+                <a:solidFill>
+                  <a:srgbClr val="5C6574"/>
+                </a:solidFill>
+                <a:effectLst/>
+                <a:uLnTx/>
+                <a:uFillTx/>
+                <a:latin typeface="Calibri"/>
+                <a:ea typeface="+mn-ea"/>
+                <a:cs typeface="+mn-cs"/>
+              </a:rPr>
+              <a:t>계량의</a:t>
+            </a:r>
+            <a:r>
+              <a:rPr kumimoji="0" sz="1250" b="0" i="0" u="none" strike="noStrike" kern="1200" cap="none" spc="0" normalizeH="0" baseline="0" noProof="0" dirty="0">
+                <a:ln>
+                  <a:noFill/>
+                </a:ln>
+                <a:solidFill>
+                  <a:srgbClr val="5C6574"/>
+                </a:solidFill>
+                <a:effectLst/>
+                <a:uLnTx/>
+                <a:uFillTx/>
+                <a:latin typeface="Calibri"/>
+                <a:ea typeface="+mn-ea"/>
+                <a:cs typeface="+mn-cs"/>
+              </a:rPr>
+              <a:t> </a:t>
+            </a:r>
+            <a:r>
+              <a:rPr kumimoji="0" sz="1250" b="0" i="0" u="none" strike="noStrike" kern="1200" cap="none" spc="0" normalizeH="0" baseline="0" noProof="0" dirty="0" err="1">
+                <a:ln>
+                  <a:noFill/>
+                </a:ln>
+                <a:solidFill>
+                  <a:srgbClr val="5C6574"/>
+                </a:solidFill>
+                <a:effectLst/>
+                <a:uLnTx/>
+                <a:uFillTx/>
+                <a:latin typeface="Calibri"/>
+                <a:ea typeface="+mn-ea"/>
+                <a:cs typeface="+mn-cs"/>
+              </a:rPr>
+              <a:t>성분으로</a:t>
+            </a:r>
+            <a:r>
+              <a:rPr kumimoji="0" sz="1250" b="0" i="0" u="none" strike="noStrike" kern="1200" cap="none" spc="0" normalizeH="0" baseline="0" noProof="0" dirty="0">
+                <a:ln>
+                  <a:noFill/>
+                </a:ln>
+                <a:solidFill>
+                  <a:srgbClr val="5C6574"/>
+                </a:solidFill>
+                <a:effectLst/>
+                <a:uLnTx/>
+                <a:uFillTx/>
+                <a:latin typeface="Calibri"/>
+                <a:ea typeface="+mn-ea"/>
+                <a:cs typeface="+mn-cs"/>
+              </a:rPr>
+              <a:t> </a:t>
+            </a:r>
+            <a:r>
+              <a:rPr kumimoji="0" sz="1250" b="0" i="0" u="none" strike="noStrike" kern="1200" cap="none" spc="0" normalizeH="0" baseline="0" noProof="0" dirty="0" err="1">
+                <a:ln>
+                  <a:noFill/>
+                </a:ln>
+                <a:solidFill>
+                  <a:srgbClr val="5C6574"/>
+                </a:solidFill>
+                <a:effectLst/>
+                <a:uLnTx/>
+                <a:uFillTx/>
+                <a:latin typeface="Calibri"/>
+                <a:ea typeface="+mn-ea"/>
+                <a:cs typeface="+mn-cs"/>
+              </a:rPr>
+              <a:t>해석해</a:t>
+            </a:r>
+            <a:r>
+              <a:rPr kumimoji="0" sz="1250" b="0" i="0" u="none" strike="noStrike" kern="1200" cap="none" spc="0" normalizeH="0" baseline="0" noProof="0" dirty="0">
+                <a:ln>
+                  <a:noFill/>
+                </a:ln>
+                <a:solidFill>
+                  <a:srgbClr val="5C6574"/>
+                </a:solidFill>
+                <a:effectLst/>
+                <a:uLnTx/>
+                <a:uFillTx/>
+                <a:latin typeface="Calibri"/>
+                <a:ea typeface="+mn-ea"/>
+                <a:cs typeface="+mn-cs"/>
+              </a:rPr>
+              <a:t> </a:t>
+            </a:r>
+            <a:r>
+              <a:rPr kumimoji="0" sz="1250" b="0" i="0" u="none" strike="noStrike" kern="1200" cap="none" spc="0" normalizeH="0" baseline="0" noProof="0" dirty="0" err="1">
+                <a:ln>
+                  <a:noFill/>
+                </a:ln>
+                <a:solidFill>
+                  <a:srgbClr val="5C6574"/>
+                </a:solidFill>
+                <a:effectLst/>
+                <a:uLnTx/>
+                <a:uFillTx/>
+                <a:latin typeface="Calibri"/>
+                <a:ea typeface="+mn-ea"/>
+                <a:cs typeface="+mn-cs"/>
+              </a:rPr>
+              <a:t>서로</a:t>
+            </a:r>
+            <a:r>
+              <a:rPr kumimoji="0" sz="1250" b="0" i="0" u="none" strike="noStrike" kern="1200" cap="none" spc="0" normalizeH="0" baseline="0" noProof="0" dirty="0">
+                <a:ln>
+                  <a:noFill/>
+                </a:ln>
+                <a:solidFill>
+                  <a:srgbClr val="5C6574"/>
+                </a:solidFill>
+                <a:effectLst/>
+                <a:uLnTx/>
+                <a:uFillTx/>
+                <a:latin typeface="Calibri"/>
+                <a:ea typeface="+mn-ea"/>
+                <a:cs typeface="+mn-cs"/>
+              </a:rPr>
+              <a:t> </a:t>
+            </a:r>
+            <a:r>
+              <a:rPr kumimoji="0" sz="1250" b="0" i="0" u="none" strike="noStrike" kern="1200" cap="none" spc="0" normalizeH="0" baseline="0" noProof="0" dirty="0" err="1">
+                <a:ln>
+                  <a:noFill/>
+                </a:ln>
+                <a:solidFill>
+                  <a:srgbClr val="5C6574"/>
+                </a:solidFill>
+                <a:effectLst/>
+                <a:uLnTx/>
+                <a:uFillTx/>
+                <a:latin typeface="Calibri"/>
+                <a:ea typeface="+mn-ea"/>
+                <a:cs typeface="+mn-cs"/>
+              </a:rPr>
+              <a:t>다른</a:t>
+            </a:r>
+            <a:r>
+              <a:rPr kumimoji="0" sz="1250" b="0" i="0" u="none" strike="noStrike" kern="1200" cap="none" spc="0" normalizeH="0" baseline="0" noProof="0" dirty="0">
+                <a:ln>
+                  <a:noFill/>
+                </a:ln>
+                <a:solidFill>
+                  <a:srgbClr val="5C6574"/>
+                </a:solidFill>
+                <a:effectLst/>
+                <a:uLnTx/>
+                <a:uFillTx/>
+                <a:latin typeface="Calibri"/>
+                <a:ea typeface="+mn-ea"/>
+                <a:cs typeface="+mn-cs"/>
+              </a:rPr>
+              <a:t> </a:t>
+            </a:r>
+            <a:r>
+              <a:rPr kumimoji="0" sz="1250" b="0" i="0" u="none" strike="noStrike" kern="1200" cap="none" spc="0" normalizeH="0" baseline="0" noProof="0" dirty="0" err="1">
+                <a:ln>
+                  <a:noFill/>
+                </a:ln>
+                <a:solidFill>
+                  <a:srgbClr val="5C6574"/>
+                </a:solidFill>
+                <a:effectLst/>
+                <a:uLnTx/>
+                <a:uFillTx/>
+                <a:latin typeface="Calibri"/>
+                <a:ea typeface="+mn-ea"/>
+                <a:cs typeface="+mn-cs"/>
+              </a:rPr>
+              <a:t>정보량을</a:t>
+            </a:r>
+            <a:r>
+              <a:rPr kumimoji="0" sz="1250" b="0" i="0" u="none" strike="noStrike" kern="1200" cap="none" spc="0" normalizeH="0" baseline="0" noProof="0" dirty="0">
+                <a:ln>
+                  <a:noFill/>
+                </a:ln>
+                <a:solidFill>
+                  <a:srgbClr val="5C6574"/>
+                </a:solidFill>
+                <a:effectLst/>
+                <a:uLnTx/>
+                <a:uFillTx/>
+                <a:latin typeface="Calibri"/>
+                <a:ea typeface="+mn-ea"/>
+                <a:cs typeface="+mn-cs"/>
+              </a:rPr>
+              <a:t> </a:t>
+            </a:r>
+            <a:r>
+              <a:rPr kumimoji="0" sz="1250" b="0" i="0" u="none" strike="noStrike" kern="1200" cap="none" spc="0" normalizeH="0" baseline="0" noProof="0" dirty="0" err="1">
+                <a:ln>
+                  <a:noFill/>
+                </a:ln>
+                <a:solidFill>
+                  <a:srgbClr val="5C6574"/>
+                </a:solidFill>
+                <a:effectLst/>
+                <a:uLnTx/>
+                <a:uFillTx/>
+                <a:latin typeface="Calibri"/>
+                <a:ea typeface="+mn-ea"/>
+                <a:cs typeface="+mn-cs"/>
+              </a:rPr>
+              <a:t>만든다</a:t>
+            </a:r>
+            <a:r>
+              <a:rPr kumimoji="0" sz="1250" b="0" i="0" u="none" strike="noStrike" kern="1200" cap="none" spc="0" normalizeH="0" baseline="0" noProof="0" dirty="0">
+                <a:ln>
+                  <a:noFill/>
+                </a:ln>
+                <a:solidFill>
+                  <a:srgbClr val="5C6574"/>
+                </a:solidFill>
+                <a:effectLst/>
+                <a:uLnTx/>
+                <a:uFillTx/>
+                <a:latin typeface="Calibri"/>
+                <a:ea typeface="+mn-ea"/>
+                <a:cs typeface="+mn-cs"/>
+              </a:rPr>
+              <a:t>.</a:t>
+            </a:r>
+          </a:p>
+        </p:txBody>
+      </p:sp>
+      <p:sp>
+        <p:nvSpPr>
+          <p:cNvPr id="5" name="TextBox 4"/>
+          <p:cNvSpPr txBox="1"/>
+          <p:nvPr/>
+        </p:nvSpPr>
+        <p:spPr>
+          <a:xfrm>
+            <a:off x="11109960" y="411480"/>
+            <a:ext cx="457200" cy="274320"/>
+          </a:xfrm>
+          <a:prstGeom prst="rect">
+            <a:avLst/>
+          </a:prstGeom>
+          <a:noFill/>
+        </p:spPr>
+        <p:txBody>
+          <a:bodyPr wrap="none">
+            <a:spAutoFit/>
+          </a:bodyPr>
+          <a:lstStyle/>
+          <a:p>
+            <a:pPr marL="0" marR="0" lvl="0" indent="0" algn="r" defTabSz="457200" rtl="0" eaLnBrk="1" fontAlgn="auto" latinLnBrk="0" hangingPunct="1">
+              <a:lnSpc>
+                <a:spcPct val="100000"/>
+              </a:lnSpc>
+              <a:spcBef>
+                <a:spcPts val="0"/>
+              </a:spcBef>
+              <a:spcAft>
+                <a:spcPts val="0"/>
+              </a:spcAft>
+              <a:buClrTx/>
+              <a:buSzTx/>
+              <a:buFontTx/>
+              <a:buNone/>
+              <a:tabLst/>
+              <a:defRPr sz="1100" b="1">
+                <a:solidFill>
+                  <a:srgbClr val="315EBE"/>
+                </a:solidFill>
+              </a:defRPr>
+            </a:pPr>
+            <a:r>
+              <a:rPr kumimoji="0" sz="1100" b="1" i="0" u="none" strike="noStrike" kern="1200" cap="none" spc="0" normalizeH="0" baseline="0" noProof="0">
+                <a:ln>
+                  <a:noFill/>
+                </a:ln>
+                <a:solidFill>
+                  <a:srgbClr val="315EBE"/>
+                </a:solidFill>
+                <a:effectLst/>
+                <a:uLnTx/>
+                <a:uFillTx/>
+                <a:latin typeface="Calibri"/>
+                <a:ea typeface="+mn-ea"/>
+                <a:cs typeface="+mn-cs"/>
+              </a:rPr>
+              <a:t>04</a:t>
+            </a:r>
+          </a:p>
+        </p:txBody>
+      </p:sp>
+      <p:sp>
+        <p:nvSpPr>
+          <p:cNvPr id="6" name="Rectangle 5"/>
+          <p:cNvSpPr/>
+          <p:nvPr/>
+        </p:nvSpPr>
+        <p:spPr>
+          <a:xfrm>
+            <a:off x="676656" y="1353312"/>
+            <a:ext cx="566928" cy="41148"/>
+          </a:xfrm>
+          <a:prstGeom prst="rect">
+            <a:avLst/>
+          </a:prstGeom>
+          <a:solidFill>
+            <a:srgbClr val="315EBE"/>
+          </a:solidFill>
+          <a:ln>
+            <a:noFill/>
+          </a:ln>
+        </p:spPr>
+        <p:style>
+          <a:lnRef idx="1">
+            <a:schemeClr val="accent1"/>
+          </a:lnRef>
+          <a:fillRef idx="3">
+            <a:schemeClr val="accent1"/>
+          </a:fillRef>
+          <a:effectRef idx="2">
+            <a:schemeClr val="accent1"/>
+          </a:effectRef>
+          <a:fontRef idx="minor">
+            <a:schemeClr val="lt1"/>
+          </a:fontRef>
+        </p:style>
+        <p:txBody>
+          <a:bodyPr rtlCol="0" anchor="ctr"/>
+          <a:lstStyle/>
+          <a:p>
+            <a:pPr marL="0" marR="0" lvl="0" indent="0" algn="ctr" defTabSz="457200" rtl="0" eaLnBrk="1" fontAlgn="auto" latinLnBrk="0" hangingPunct="1">
+              <a:lnSpc>
+                <a:spcPct val="100000"/>
+              </a:lnSpc>
+              <a:spcBef>
+                <a:spcPts val="0"/>
+              </a:spcBef>
+              <a:spcAft>
+                <a:spcPts val="0"/>
+              </a:spcAft>
+              <a:buClrTx/>
+              <a:buSzTx/>
+              <a:buFontTx/>
+              <a:buNone/>
+              <a:tabLst/>
+              <a:defRPr/>
+            </a:pPr>
+            <a:endParaRPr kumimoji="0" sz="1800" b="0" i="0" u="none" strike="noStrike" kern="1200" cap="none" spc="0" normalizeH="0" baseline="0" noProof="0">
+              <a:ln>
+                <a:noFill/>
+              </a:ln>
+              <a:solidFill>
+                <a:prstClr val="white"/>
+              </a:solidFill>
+              <a:effectLst/>
+              <a:uLnTx/>
+              <a:uFillTx/>
+              <a:latin typeface="Calibri"/>
+              <a:ea typeface="+mn-ea"/>
+              <a:cs typeface="+mn-cs"/>
+            </a:endParaRPr>
+          </a:p>
+        </p:txBody>
+      </p:sp>
+      <p:sp>
+        <p:nvSpPr>
+          <p:cNvPr id="7" name="Rounded Rectangle 6"/>
+          <p:cNvSpPr/>
+          <p:nvPr/>
+        </p:nvSpPr>
+        <p:spPr>
+          <a:xfrm>
+            <a:off x="1097280" y="1828800"/>
+            <a:ext cx="9966960" cy="822960"/>
+          </a:xfrm>
+          <a:prstGeom prst="roundRect">
+            <a:avLst/>
+          </a:prstGeom>
+          <a:solidFill>
+            <a:srgbClr val="FFFFFF"/>
+          </a:solidFill>
+          <a:ln>
+            <a:solidFill>
+              <a:srgbClr val="E6EBF4"/>
+            </a:solidFill>
+          </a:ln>
+        </p:spPr>
+        <p:style>
+          <a:lnRef idx="1">
+            <a:schemeClr val="accent1"/>
+          </a:lnRef>
+          <a:fillRef idx="3">
+            <a:schemeClr val="accent1"/>
+          </a:fillRef>
+          <a:effectRef idx="2">
+            <a:schemeClr val="accent1"/>
+          </a:effectRef>
+          <a:fontRef idx="minor">
+            <a:schemeClr val="lt1"/>
+          </a:fontRef>
+        </p:style>
+        <p:txBody>
+          <a:bodyPr rtlCol="0" anchor="ctr"/>
+          <a:lstStyle/>
+          <a:p>
+            <a:pPr marL="0" marR="0" lvl="0" indent="0" algn="ctr" defTabSz="457200" rtl="0" eaLnBrk="1" fontAlgn="auto" latinLnBrk="0" hangingPunct="1">
+              <a:lnSpc>
+                <a:spcPct val="100000"/>
+              </a:lnSpc>
+              <a:spcBef>
+                <a:spcPts val="0"/>
+              </a:spcBef>
+              <a:spcAft>
+                <a:spcPts val="0"/>
+              </a:spcAft>
+              <a:buClrTx/>
+              <a:buSzTx/>
+              <a:buFontTx/>
+              <a:buNone/>
+              <a:tabLst/>
+              <a:defRPr/>
+            </a:pPr>
+            <a:endParaRPr kumimoji="0" sz="1800" b="0" i="0" u="none" strike="noStrike" kern="1200" cap="none" spc="0" normalizeH="0" baseline="0" noProof="0">
+              <a:ln>
+                <a:noFill/>
+              </a:ln>
+              <a:solidFill>
+                <a:prstClr val="white"/>
+              </a:solidFill>
+              <a:effectLst/>
+              <a:uLnTx/>
+              <a:uFillTx/>
+              <a:latin typeface="Calibri"/>
+              <a:ea typeface="+mn-ea"/>
+              <a:cs typeface="+mn-cs"/>
+            </a:endParaRPr>
+          </a:p>
+        </p:txBody>
+      </p:sp>
+      <p:sp>
+        <p:nvSpPr>
+          <p:cNvPr id="8" name="TextBox 7"/>
+          <p:cNvSpPr txBox="1"/>
+          <p:nvPr/>
+        </p:nvSpPr>
+        <p:spPr>
+          <a:xfrm>
+            <a:off x="1325880" y="1975104"/>
+            <a:ext cx="9509760" cy="411480"/>
+          </a:xfrm>
+          <a:prstGeom prst="rect">
+            <a:avLst/>
+          </a:prstGeom>
+          <a:noFill/>
+        </p:spPr>
+        <p:txBody>
+          <a:bodyPr wrap="none">
+            <a:spAutoFit/>
+          </a:bodyPr>
+          <a:lstStyle/>
+          <a:p>
+            <a:pPr marL="0" marR="0" lvl="0" indent="0" algn="ctr" defTabSz="457200" rtl="0" eaLnBrk="1" fontAlgn="auto" latinLnBrk="0" hangingPunct="1">
+              <a:lnSpc>
+                <a:spcPct val="100000"/>
+              </a:lnSpc>
+              <a:spcBef>
+                <a:spcPts val="0"/>
+              </a:spcBef>
+              <a:spcAft>
+                <a:spcPts val="0"/>
+              </a:spcAft>
+              <a:buClrTx/>
+              <a:buSzTx/>
+              <a:buFontTx/>
+              <a:buNone/>
+              <a:tabLst/>
+              <a:defRPr sz="2200" b="1">
+                <a:solidFill>
+                  <a:srgbClr val="315EBE"/>
+                </a:solidFill>
+                <a:latin typeface="Cambria Math"/>
+              </a:defRPr>
+            </a:pPr>
+            <a:r>
+              <a:rPr kumimoji="0" sz="2200" b="1" i="0" u="none" strike="noStrike" kern="1200" cap="none" spc="0" normalizeH="0" baseline="0" noProof="0">
+                <a:ln>
+                  <a:noFill/>
+                </a:ln>
+                <a:solidFill>
+                  <a:srgbClr val="315EBE"/>
+                </a:solidFill>
+                <a:effectLst/>
+                <a:uLnTx/>
+                <a:uFillTx/>
+                <a:latin typeface="Cambria Math"/>
+                <a:ea typeface="+mn-ea"/>
+                <a:cs typeface="+mn-cs"/>
+              </a:rPr>
+              <a:t>G₀₀ ∝ V²</a:t>
+            </a:r>
+          </a:p>
+        </p:txBody>
+      </p:sp>
+      <p:sp>
+        <p:nvSpPr>
+          <p:cNvPr id="9" name="TextBox 8"/>
+          <p:cNvSpPr txBox="1"/>
+          <p:nvPr/>
+        </p:nvSpPr>
+        <p:spPr>
+          <a:xfrm>
+            <a:off x="1280160" y="2697480"/>
+            <a:ext cx="9601200" cy="365760"/>
+          </a:xfrm>
+          <a:prstGeom prst="rect">
+            <a:avLst/>
+          </a:prstGeom>
+          <a:noFill/>
+        </p:spPr>
+        <p:txBody>
+          <a:bodyPr wrap="none">
+            <a:spAutoFit/>
+          </a:bodyPr>
+          <a:lstStyle/>
+          <a:p>
+            <a:pPr marL="0" marR="0" lvl="0" indent="0" algn="ctr" defTabSz="457200" rtl="0" eaLnBrk="1" fontAlgn="auto" latinLnBrk="0" hangingPunct="1">
+              <a:lnSpc>
+                <a:spcPct val="100000"/>
+              </a:lnSpc>
+              <a:spcBef>
+                <a:spcPts val="0"/>
+              </a:spcBef>
+              <a:spcAft>
+                <a:spcPts val="0"/>
+              </a:spcAft>
+              <a:buClrTx/>
+              <a:buSzTx/>
+              <a:buFontTx/>
+              <a:buNone/>
+              <a:tabLst/>
+              <a:defRPr sz="1250">
+                <a:solidFill>
+                  <a:srgbClr val="5C6574"/>
+                </a:solidFill>
+              </a:defRPr>
+            </a:pPr>
+            <a:r>
+              <a:rPr kumimoji="0" sz="1250" b="0" i="0" u="none" strike="noStrike" kern="1200" cap="none" spc="0" normalizeH="0" baseline="0" noProof="0">
+                <a:ln>
+                  <a:noFill/>
+                </a:ln>
+                <a:solidFill>
+                  <a:srgbClr val="5C6574"/>
+                </a:solidFill>
+                <a:effectLst/>
+                <a:uLnTx/>
+                <a:uFillTx/>
+                <a:latin typeface="Calibri"/>
+                <a:ea typeface="+mn-ea"/>
+                <a:cs typeface="+mn-cs"/>
+              </a:rPr>
+              <a:t>전위의 크기 정보는 남지만 V → −V에 대해 값이 변하지 않는다.</a:t>
+            </a:r>
+          </a:p>
+        </p:txBody>
+      </p:sp>
+      <p:sp>
+        <p:nvSpPr>
+          <p:cNvPr id="10" name="Rounded Rectangle 9"/>
+          <p:cNvSpPr/>
+          <p:nvPr/>
+        </p:nvSpPr>
+        <p:spPr>
+          <a:xfrm>
+            <a:off x="1097280" y="3154680"/>
+            <a:ext cx="9966960" cy="822960"/>
+          </a:xfrm>
+          <a:prstGeom prst="roundRect">
+            <a:avLst/>
+          </a:prstGeom>
+          <a:solidFill>
+            <a:srgbClr val="FFFFFF"/>
+          </a:solidFill>
+          <a:ln>
+            <a:solidFill>
+              <a:srgbClr val="E6EBF4"/>
+            </a:solidFill>
+          </a:ln>
+        </p:spPr>
+        <p:style>
+          <a:lnRef idx="1">
+            <a:schemeClr val="accent1"/>
+          </a:lnRef>
+          <a:fillRef idx="3">
+            <a:schemeClr val="accent1"/>
+          </a:fillRef>
+          <a:effectRef idx="2">
+            <a:schemeClr val="accent1"/>
+          </a:effectRef>
+          <a:fontRef idx="minor">
+            <a:schemeClr val="lt1"/>
+          </a:fontRef>
+        </p:style>
+        <p:txBody>
+          <a:bodyPr rtlCol="0" anchor="ctr"/>
+          <a:lstStyle/>
+          <a:p>
+            <a:pPr marL="0" marR="0" lvl="0" indent="0" algn="ctr" defTabSz="457200" rtl="0" eaLnBrk="1" fontAlgn="auto" latinLnBrk="0" hangingPunct="1">
+              <a:lnSpc>
+                <a:spcPct val="100000"/>
+              </a:lnSpc>
+              <a:spcBef>
+                <a:spcPts val="0"/>
+              </a:spcBef>
+              <a:spcAft>
+                <a:spcPts val="0"/>
+              </a:spcAft>
+              <a:buClrTx/>
+              <a:buSzTx/>
+              <a:buFontTx/>
+              <a:buNone/>
+              <a:tabLst/>
+              <a:defRPr/>
+            </a:pPr>
+            <a:endParaRPr kumimoji="0" sz="1800" b="0" i="0" u="none" strike="noStrike" kern="1200" cap="none" spc="0" normalizeH="0" baseline="0" noProof="0">
+              <a:ln>
+                <a:noFill/>
+              </a:ln>
+              <a:solidFill>
+                <a:prstClr val="white"/>
+              </a:solidFill>
+              <a:effectLst/>
+              <a:uLnTx/>
+              <a:uFillTx/>
+              <a:latin typeface="Calibri"/>
+              <a:ea typeface="+mn-ea"/>
+              <a:cs typeface="+mn-cs"/>
+            </a:endParaRPr>
+          </a:p>
+        </p:txBody>
+      </p:sp>
+      <p:sp>
+        <p:nvSpPr>
+          <p:cNvPr id="11" name="TextBox 10"/>
+          <p:cNvSpPr txBox="1"/>
+          <p:nvPr/>
+        </p:nvSpPr>
+        <p:spPr>
+          <a:xfrm>
+            <a:off x="1325880" y="3300984"/>
+            <a:ext cx="9509760" cy="411480"/>
+          </a:xfrm>
+          <a:prstGeom prst="rect">
+            <a:avLst/>
+          </a:prstGeom>
+          <a:noFill/>
+        </p:spPr>
+        <p:txBody>
+          <a:bodyPr wrap="none">
+            <a:spAutoFit/>
+          </a:bodyPr>
+          <a:lstStyle/>
+          <a:p>
+            <a:pPr marL="0" marR="0" lvl="0" indent="0" algn="ctr" defTabSz="457200" rtl="0" eaLnBrk="1" fontAlgn="auto" latinLnBrk="0" hangingPunct="1">
+              <a:lnSpc>
+                <a:spcPct val="100000"/>
+              </a:lnSpc>
+              <a:spcBef>
+                <a:spcPts val="0"/>
+              </a:spcBef>
+              <a:spcAft>
+                <a:spcPts val="0"/>
+              </a:spcAft>
+              <a:buClrTx/>
+              <a:buSzTx/>
+              <a:buFontTx/>
+              <a:buNone/>
+              <a:tabLst/>
+              <a:defRPr sz="2200" b="1">
+                <a:solidFill>
+                  <a:srgbClr val="1F8987"/>
+                </a:solidFill>
+                <a:latin typeface="Cambria Math"/>
+              </a:defRPr>
+            </a:pPr>
+            <a:r>
+              <a:rPr kumimoji="0" sz="2200" b="1" i="0" u="none" strike="noStrike" kern="1200" cap="none" spc="0" normalizeH="0" baseline="0" noProof="0">
+                <a:ln>
+                  <a:noFill/>
+                </a:ln>
+                <a:solidFill>
+                  <a:srgbClr val="1F8987"/>
+                </a:solidFill>
+                <a:effectLst/>
+                <a:uLnTx/>
+                <a:uFillTx/>
+                <a:latin typeface="Cambria Math"/>
+                <a:ea typeface="+mn-ea"/>
+                <a:cs typeface="+mn-cs"/>
+              </a:rPr>
+              <a:t>G₀₅ ∝ V</a:t>
+            </a:r>
+          </a:p>
+        </p:txBody>
+      </p:sp>
+      <p:sp>
+        <p:nvSpPr>
+          <p:cNvPr id="12" name="TextBox 11"/>
+          <p:cNvSpPr txBox="1"/>
+          <p:nvPr/>
+        </p:nvSpPr>
+        <p:spPr>
+          <a:xfrm>
+            <a:off x="1280160" y="4023360"/>
+            <a:ext cx="9601200" cy="365760"/>
+          </a:xfrm>
+          <a:prstGeom prst="rect">
+            <a:avLst/>
+          </a:prstGeom>
+          <a:noFill/>
+        </p:spPr>
+        <p:txBody>
+          <a:bodyPr wrap="none">
+            <a:spAutoFit/>
+          </a:bodyPr>
+          <a:lstStyle/>
+          <a:p>
+            <a:pPr marL="0" marR="0" lvl="0" indent="0" algn="ctr" defTabSz="457200" rtl="0" eaLnBrk="1" fontAlgn="auto" latinLnBrk="0" hangingPunct="1">
+              <a:lnSpc>
+                <a:spcPct val="100000"/>
+              </a:lnSpc>
+              <a:spcBef>
+                <a:spcPts val="0"/>
+              </a:spcBef>
+              <a:spcAft>
+                <a:spcPts val="0"/>
+              </a:spcAft>
+              <a:buClrTx/>
+              <a:buSzTx/>
+              <a:buFontTx/>
+              <a:buNone/>
+              <a:tabLst/>
+              <a:defRPr sz="1250">
+                <a:solidFill>
+                  <a:srgbClr val="5C6574"/>
+                </a:solidFill>
+              </a:defRPr>
+            </a:pPr>
+            <a:r>
+              <a:rPr kumimoji="0" sz="1250" b="0" i="0" u="none" strike="noStrike" kern="1200" cap="none" spc="0" normalizeH="0" baseline="0" noProof="0">
+                <a:ln>
+                  <a:noFill/>
+                </a:ln>
+                <a:solidFill>
+                  <a:srgbClr val="5C6574"/>
+                </a:solidFill>
+                <a:effectLst/>
+                <a:uLnTx/>
+                <a:uFillTx/>
+                <a:latin typeface="Calibri"/>
+                <a:ea typeface="+mn-ea"/>
+                <a:cs typeface="+mn-cs"/>
+              </a:rPr>
+              <a:t>전위의 부호 정보까지 포함하므로 전하 부호 판별에 직접적인 단서를 준다.</a:t>
+            </a:r>
+          </a:p>
+        </p:txBody>
+      </p:sp>
+      <p:sp>
+        <p:nvSpPr>
+          <p:cNvPr id="13" name="Rounded Rectangle 12"/>
+          <p:cNvSpPr/>
+          <p:nvPr/>
+        </p:nvSpPr>
+        <p:spPr>
+          <a:xfrm>
+            <a:off x="1828800" y="4709160"/>
+            <a:ext cx="8503920" cy="1051560"/>
+          </a:xfrm>
+          <a:prstGeom prst="roundRect">
+            <a:avLst/>
+          </a:prstGeom>
+          <a:solidFill>
+            <a:srgbClr val="FFFFFF"/>
+          </a:solidFill>
+          <a:ln>
+            <a:solidFill>
+              <a:srgbClr val="E6EBF4"/>
+            </a:solidFill>
+          </a:ln>
+        </p:spPr>
+        <p:style>
+          <a:lnRef idx="1">
+            <a:schemeClr val="accent1"/>
+          </a:lnRef>
+          <a:fillRef idx="3">
+            <a:schemeClr val="accent1"/>
+          </a:fillRef>
+          <a:effectRef idx="2">
+            <a:schemeClr val="accent1"/>
+          </a:effectRef>
+          <a:fontRef idx="minor">
+            <a:schemeClr val="lt1"/>
+          </a:fontRef>
+        </p:style>
+        <p:txBody>
+          <a:bodyPr rtlCol="0" anchor="ctr"/>
+          <a:lstStyle/>
+          <a:p>
+            <a:pPr marL="0" marR="0" lvl="0" indent="0" algn="ctr" defTabSz="457200" rtl="0" eaLnBrk="1" fontAlgn="auto" latinLnBrk="0" hangingPunct="1">
+              <a:lnSpc>
+                <a:spcPct val="100000"/>
+              </a:lnSpc>
+              <a:spcBef>
+                <a:spcPts val="0"/>
+              </a:spcBef>
+              <a:spcAft>
+                <a:spcPts val="0"/>
+              </a:spcAft>
+              <a:buClrTx/>
+              <a:buSzTx/>
+              <a:buFontTx/>
+              <a:buNone/>
+              <a:tabLst/>
+              <a:defRPr/>
+            </a:pPr>
+            <a:endParaRPr kumimoji="0" sz="1800" b="0" i="0" u="none" strike="noStrike" kern="1200" cap="none" spc="0" normalizeH="0" baseline="0" noProof="0">
+              <a:ln>
+                <a:noFill/>
+              </a:ln>
+              <a:solidFill>
+                <a:prstClr val="white"/>
+              </a:solidFill>
+              <a:effectLst/>
+              <a:uLnTx/>
+              <a:uFillTx/>
+              <a:latin typeface="Calibri"/>
+              <a:ea typeface="+mn-ea"/>
+              <a:cs typeface="+mn-cs"/>
+            </a:endParaRPr>
+          </a:p>
+        </p:txBody>
+      </p:sp>
+      <p:sp>
+        <p:nvSpPr>
+          <p:cNvPr id="14" name="Rectangle 13"/>
+          <p:cNvSpPr/>
+          <p:nvPr/>
+        </p:nvSpPr>
+        <p:spPr>
+          <a:xfrm>
+            <a:off x="1828800" y="4709160"/>
+            <a:ext cx="73152" cy="1051560"/>
+          </a:xfrm>
+          <a:prstGeom prst="rect">
+            <a:avLst/>
+          </a:prstGeom>
+          <a:solidFill>
+            <a:srgbClr val="BE4141"/>
+          </a:solidFill>
+          <a:ln>
+            <a:noFill/>
+          </a:ln>
+        </p:spPr>
+        <p:style>
+          <a:lnRef idx="1">
+            <a:schemeClr val="accent1"/>
+          </a:lnRef>
+          <a:fillRef idx="3">
+            <a:schemeClr val="accent1"/>
+          </a:fillRef>
+          <a:effectRef idx="2">
+            <a:schemeClr val="accent1"/>
+          </a:effectRef>
+          <a:fontRef idx="minor">
+            <a:schemeClr val="lt1"/>
+          </a:fontRef>
+        </p:style>
+        <p:txBody>
+          <a:bodyPr rtlCol="0" anchor="ctr"/>
+          <a:lstStyle/>
+          <a:p>
+            <a:pPr marL="0" marR="0" lvl="0" indent="0" algn="ctr" defTabSz="457200" rtl="0" eaLnBrk="1" fontAlgn="auto" latinLnBrk="0" hangingPunct="1">
+              <a:lnSpc>
+                <a:spcPct val="100000"/>
+              </a:lnSpc>
+              <a:spcBef>
+                <a:spcPts val="0"/>
+              </a:spcBef>
+              <a:spcAft>
+                <a:spcPts val="0"/>
+              </a:spcAft>
+              <a:buClrTx/>
+              <a:buSzTx/>
+              <a:buFontTx/>
+              <a:buNone/>
+              <a:tabLst/>
+              <a:defRPr/>
+            </a:pPr>
+            <a:endParaRPr kumimoji="0" sz="1800" b="0" i="0" u="none" strike="noStrike" kern="1200" cap="none" spc="0" normalizeH="0" baseline="0" noProof="0">
+              <a:ln>
+                <a:noFill/>
+              </a:ln>
+              <a:solidFill>
+                <a:prstClr val="white"/>
+              </a:solidFill>
+              <a:effectLst/>
+              <a:uLnTx/>
+              <a:uFillTx/>
+              <a:latin typeface="Calibri"/>
+              <a:ea typeface="+mn-ea"/>
+              <a:cs typeface="+mn-cs"/>
+            </a:endParaRPr>
+          </a:p>
+        </p:txBody>
+      </p:sp>
+      <p:sp>
+        <p:nvSpPr>
+          <p:cNvPr id="15" name="TextBox 14"/>
+          <p:cNvSpPr txBox="1"/>
+          <p:nvPr/>
+        </p:nvSpPr>
+        <p:spPr>
+          <a:xfrm>
+            <a:off x="2057400" y="4873752"/>
+            <a:ext cx="8092440" cy="347472"/>
+          </a:xfrm>
+          <a:prstGeom prst="rect">
+            <a:avLst/>
+          </a:prstGeom>
+          <a:noFill/>
+        </p:spPr>
+        <p:txBody>
+          <a:bodyPr wrap="none">
+            <a:spAutoFit/>
+          </a:bodyPr>
+          <a:lstStyle/>
+          <a:p>
+            <a:pPr marL="0" marR="0" lvl="0" indent="0" algn="l" defTabSz="457200" rtl="0" eaLnBrk="1" fontAlgn="auto" latinLnBrk="0" hangingPunct="1">
+              <a:lnSpc>
+                <a:spcPct val="100000"/>
+              </a:lnSpc>
+              <a:spcBef>
+                <a:spcPts val="0"/>
+              </a:spcBef>
+              <a:spcAft>
+                <a:spcPts val="0"/>
+              </a:spcAft>
+              <a:buClrTx/>
+              <a:buSzTx/>
+              <a:buFontTx/>
+              <a:buNone/>
+              <a:tabLst/>
+              <a:defRPr sz="1600" b="1">
+                <a:solidFill>
+                  <a:srgbClr val="18233A"/>
+                </a:solidFill>
+              </a:defRPr>
+            </a:pPr>
+            <a:r>
+              <a:rPr kumimoji="0" sz="1600" b="1" i="0" u="none" strike="noStrike" kern="1200" cap="none" spc="0" normalizeH="0" baseline="0" noProof="0">
+                <a:ln>
+                  <a:noFill/>
+                </a:ln>
+                <a:solidFill>
+                  <a:srgbClr val="18233A"/>
+                </a:solidFill>
+                <a:effectLst/>
+                <a:uLnTx/>
+                <a:uFillTx/>
+                <a:latin typeface="Calibri"/>
+                <a:ea typeface="+mn-ea"/>
+                <a:cs typeface="+mn-cs"/>
+              </a:rPr>
+              <a:t>중요한 해석</a:t>
+            </a:r>
+          </a:p>
+        </p:txBody>
+      </p:sp>
+      <p:sp>
+        <p:nvSpPr>
+          <p:cNvPr id="16" name="TextBox 15"/>
+          <p:cNvSpPr txBox="1"/>
+          <p:nvPr/>
+        </p:nvSpPr>
+        <p:spPr>
+          <a:xfrm>
+            <a:off x="2057400" y="5349240"/>
+            <a:ext cx="8092440" cy="274319"/>
+          </a:xfrm>
+          <a:prstGeom prst="rect">
+            <a:avLst/>
+          </a:prstGeom>
+          <a:noFill/>
+        </p:spPr>
+        <p:txBody>
+          <a:bodyPr wrap="square">
+            <a:spAutoFit/>
+          </a:bodyPr>
+          <a:lstStyle/>
+          <a:p>
+            <a:pPr marL="0" marR="0" lvl="0" indent="0" algn="l" defTabSz="457200" rtl="0" eaLnBrk="1" fontAlgn="auto" latinLnBrk="0" hangingPunct="1">
+              <a:lnSpc>
+                <a:spcPct val="100000"/>
+              </a:lnSpc>
+              <a:spcBef>
+                <a:spcPts val="0"/>
+              </a:spcBef>
+              <a:spcAft>
+                <a:spcPts val="800"/>
+              </a:spcAft>
+              <a:buClrTx/>
+              <a:buSzTx/>
+              <a:buFontTx/>
+              <a:buNone/>
+              <a:tabLst/>
+              <a:defRPr sz="1400">
+                <a:solidFill>
+                  <a:srgbClr val="5C6574"/>
+                </a:solidFill>
+              </a:defRPr>
+            </a:pPr>
+            <a:r>
+              <a:rPr kumimoji="0" sz="1400" b="0" i="0" u="none" strike="noStrike" kern="1200" cap="none" spc="0" normalizeH="0" baseline="0" noProof="0">
+                <a:ln>
+                  <a:noFill/>
+                </a:ln>
+                <a:solidFill>
+                  <a:srgbClr val="5C6574"/>
+                </a:solidFill>
+                <a:effectLst/>
+                <a:uLnTx/>
+                <a:uFillTx/>
+                <a:latin typeface="Calibri"/>
+                <a:ea typeface="+mn-ea"/>
+                <a:cs typeface="+mn-cs"/>
+              </a:rPr>
+              <a:t>이 탐구에서 KK 이론은 ‘고차원 이론 자체를 검증’하는 것이 아니라, 동일한 전자기 정보를 서로 다른 계량 성분으로 표현해 정보 손실 조건을 설계하는 틀로 사용한다.</a:t>
+            </a:r>
+          </a:p>
+        </p:txBody>
+      </p:sp>
+    </p:spTree>
+  </p:cSld>
+  <p:clrMapOvr>
+    <a:masterClrMapping/>
+  </p:clrMapOvr>
+</p:sld>
+</file>
+
+<file path=ppt/slides/slide6.xml><?xml version="1.0" encoding="utf-8"?>
+<p:sld xmlns:a="http://schemas.openxmlformats.org/drawingml/2006/main" xmlns:r="http://schemas.openxmlformats.org/officeDocument/2006/relationships" xmlns:p="http://schemas.openxmlformats.org/presentationml/2006/main">
+  <p:cSld>
+    <p:spTree>
+      <p:nvGrpSpPr>
+        <p:cNvPr id="1" name="">
+          <a:extLst>
+            <a:ext uri="{FF2B5EF4-FFF2-40B4-BE49-F238E27FC236}">
+              <a16:creationId xmlns:a16="http://schemas.microsoft.com/office/drawing/2014/main" id="{18642E79-B05D-AD68-CFB3-9856AF2CD632}"/>
+            </a:ext>
+          </a:extLst>
+        </p:cNvPr>
+        <p:cNvGrpSpPr/>
+        <p:nvPr/>
+      </p:nvGrpSpPr>
+      <p:grpSpPr>
+        <a:xfrm>
+          <a:off x="0" y="0"/>
+          <a:ext cx="0" cy="0"/>
+          <a:chOff x="0" y="0"/>
+          <a:chExt cx="0" cy="0"/>
+        </a:xfrm>
+      </p:grpSpPr>
+      <p:sp>
+        <p:nvSpPr>
+          <p:cNvPr id="3" name="TextBox 2">
+            <a:extLst>
+              <a:ext uri="{FF2B5EF4-FFF2-40B4-BE49-F238E27FC236}">
+                <a16:creationId xmlns:a16="http://schemas.microsoft.com/office/drawing/2014/main" id="{7EE4ACB2-F959-E9D2-A40A-1C915F49DE1E}"/>
+              </a:ext>
+            </a:extLst>
+          </p:cNvPr>
+          <p:cNvSpPr txBox="1"/>
+          <p:nvPr/>
+        </p:nvSpPr>
+        <p:spPr>
+          <a:xfrm>
+            <a:off x="658368" y="384048"/>
+            <a:ext cx="10881360" cy="523220"/>
+          </a:xfrm>
+          <a:prstGeom prst="rect">
+            <a:avLst/>
+          </a:prstGeom>
+          <a:noFill/>
+        </p:spPr>
+        <p:txBody>
+          <a:bodyPr wrap="square">
+            <a:spAutoFit/>
+          </a:bodyPr>
+          <a:lstStyle/>
+          <a:p>
+            <a:pPr>
+              <a:defRPr sz="2800" b="1">
+                <a:solidFill>
+                  <a:srgbClr val="18233A"/>
+                </a:solidFill>
+              </a:defRPr>
+            </a:pPr>
+            <a:r>
+              <a:t>1. 탐구 동기</a:t>
+            </a:r>
+          </a:p>
+        </p:txBody>
+      </p:sp>
+      <p:sp>
+        <p:nvSpPr>
+          <p:cNvPr id="4" name="TextBox 3">
+            <a:extLst>
+              <a:ext uri="{FF2B5EF4-FFF2-40B4-BE49-F238E27FC236}">
+                <a16:creationId xmlns:a16="http://schemas.microsoft.com/office/drawing/2014/main" id="{59F4001F-BA6C-532E-10A9-66CDD732F330}"/>
+              </a:ext>
+            </a:extLst>
+          </p:cNvPr>
+          <p:cNvSpPr txBox="1"/>
+          <p:nvPr/>
+        </p:nvSpPr>
+        <p:spPr>
+          <a:xfrm>
+            <a:off x="676656" y="987552"/>
+            <a:ext cx="6482865" cy="284693"/>
+          </a:xfrm>
+          <a:prstGeom prst="rect">
+            <a:avLst/>
+          </a:prstGeom>
+          <a:noFill/>
+        </p:spPr>
+        <p:txBody>
+          <a:bodyPr wrap="square">
+            <a:spAutoFit/>
+          </a:bodyPr>
+          <a:lstStyle/>
+          <a:p>
+            <a:pPr>
+              <a:defRPr sz="1250">
+                <a:solidFill>
+                  <a:srgbClr val="5C6574"/>
+                </a:solidFill>
+              </a:defRPr>
+            </a:pPr>
+            <a:r>
+              <a:rPr dirty="0" err="1"/>
+              <a:t>정방향</a:t>
+            </a:r>
+            <a:r>
+              <a:rPr dirty="0"/>
+              <a:t> </a:t>
+            </a:r>
+            <a:r>
+              <a:rPr dirty="0" err="1"/>
+              <a:t>문제는</a:t>
+            </a:r>
+            <a:r>
+              <a:rPr dirty="0"/>
+              <a:t> </a:t>
+            </a:r>
+            <a:r>
+              <a:rPr dirty="0" err="1"/>
+              <a:t>쉽지만</a:t>
+            </a:r>
+            <a:r>
+              <a:rPr dirty="0"/>
+              <a:t>, </a:t>
+            </a:r>
+            <a:r>
+              <a:rPr dirty="0" err="1"/>
+              <a:t>역방향</a:t>
+            </a:r>
+            <a:r>
+              <a:rPr dirty="0"/>
+              <a:t> </a:t>
+            </a:r>
+            <a:r>
+              <a:rPr dirty="0" err="1"/>
+              <a:t>문제는</a:t>
+            </a:r>
+            <a:r>
+              <a:rPr dirty="0"/>
+              <a:t> </a:t>
+            </a:r>
+            <a:r>
+              <a:rPr dirty="0" err="1"/>
+              <a:t>정보</a:t>
+            </a:r>
+            <a:r>
+              <a:rPr dirty="0"/>
+              <a:t> </a:t>
+            </a:r>
+            <a:r>
+              <a:rPr dirty="0" err="1"/>
+              <a:t>손실</a:t>
+            </a:r>
+            <a:r>
+              <a:rPr lang="ko-KR" altLang="en-US" dirty="0"/>
+              <a:t>로 인해 유일한 해를 구하기</a:t>
+            </a:r>
+            <a:r>
+              <a:rPr dirty="0"/>
+              <a:t> </a:t>
+            </a:r>
+            <a:r>
+              <a:rPr dirty="0" err="1"/>
+              <a:t>어려워진다</a:t>
+            </a:r>
+            <a:r>
+              <a:rPr lang="en-US" dirty="0"/>
+              <a:t>.</a:t>
+            </a:r>
+            <a:endParaRPr dirty="0"/>
+          </a:p>
+        </p:txBody>
+      </p:sp>
+      <p:sp>
+        <p:nvSpPr>
+          <p:cNvPr id="6" name="Rectangle 5">
+            <a:extLst>
+              <a:ext uri="{FF2B5EF4-FFF2-40B4-BE49-F238E27FC236}">
+                <a16:creationId xmlns:a16="http://schemas.microsoft.com/office/drawing/2014/main" id="{369894CF-34BD-25C8-16BE-CAB2E5C74455}"/>
+              </a:ext>
+            </a:extLst>
+          </p:cNvPr>
+          <p:cNvSpPr/>
+          <p:nvPr/>
+        </p:nvSpPr>
+        <p:spPr>
+          <a:xfrm>
+            <a:off x="777240" y="1281389"/>
+            <a:ext cx="566928" cy="41148"/>
+          </a:xfrm>
+          <a:prstGeom prst="rect">
+            <a:avLst/>
+          </a:prstGeom>
+          <a:solidFill>
+            <a:srgbClr val="315EBE"/>
+          </a:solidFill>
+          <a:ln>
+            <a:noFill/>
+          </a:ln>
+        </p:spPr>
+        <p:style>
+          <a:lnRef idx="1">
+            <a:schemeClr val="accent1"/>
+          </a:lnRef>
+          <a:fillRef idx="3">
+            <a:schemeClr val="accent1"/>
+          </a:fillRef>
+          <a:effectRef idx="2">
+            <a:schemeClr val="accent1"/>
+          </a:effectRef>
+          <a:fontRef idx="minor">
+            <a:schemeClr val="lt1"/>
+          </a:fontRef>
+        </p:style>
+        <p:txBody>
+          <a:bodyPr rtlCol="0" anchor="ctr"/>
+          <a:lstStyle/>
+          <a:p>
+            <a:pPr algn="ctr"/>
+            <a:endParaRPr/>
+          </a:p>
+        </p:txBody>
+      </p:sp>
+      <p:pic>
+        <p:nvPicPr>
+          <p:cNvPr id="23" name="그림 22">
+            <a:extLst>
+              <a:ext uri="{FF2B5EF4-FFF2-40B4-BE49-F238E27FC236}">
+                <a16:creationId xmlns:a16="http://schemas.microsoft.com/office/drawing/2014/main" id="{05524E77-A1EB-D065-EA8F-171494E12CF0}"/>
+              </a:ext>
+            </a:extLst>
+          </p:cNvPr>
+          <p:cNvPicPr>
+            <a:picLocks noChangeAspect="1"/>
+          </p:cNvPicPr>
+          <p:nvPr/>
+        </p:nvPicPr>
+        <p:blipFill>
+          <a:blip r:embed="rId2"/>
+          <a:stretch>
+            <a:fillRect/>
+          </a:stretch>
+        </p:blipFill>
+        <p:spPr>
+          <a:xfrm>
+            <a:off x="846950" y="1714556"/>
+            <a:ext cx="3197925" cy="4856965"/>
+          </a:xfrm>
+          <a:prstGeom prst="rect">
+            <a:avLst/>
+          </a:prstGeom>
+        </p:spPr>
+      </p:pic>
+      <p:pic>
+        <p:nvPicPr>
+          <p:cNvPr id="25" name="그림 24">
+            <a:extLst>
+              <a:ext uri="{FF2B5EF4-FFF2-40B4-BE49-F238E27FC236}">
+                <a16:creationId xmlns:a16="http://schemas.microsoft.com/office/drawing/2014/main" id="{A84239FD-D2E2-72D2-DD3E-A77EA2982FBC}"/>
+              </a:ext>
+            </a:extLst>
+          </p:cNvPr>
+          <p:cNvPicPr>
+            <a:picLocks noChangeAspect="1"/>
+          </p:cNvPicPr>
+          <p:nvPr/>
+        </p:nvPicPr>
+        <p:blipFill>
+          <a:blip r:embed="rId3"/>
+          <a:stretch>
+            <a:fillRect/>
+          </a:stretch>
+        </p:blipFill>
+        <p:spPr>
+          <a:xfrm>
+            <a:off x="4328545" y="1755759"/>
+            <a:ext cx="3254089" cy="4774558"/>
+          </a:xfrm>
+          <a:prstGeom prst="rect">
+            <a:avLst/>
+          </a:prstGeom>
+        </p:spPr>
+      </p:pic>
+      <p:pic>
+        <p:nvPicPr>
+          <p:cNvPr id="27" name="그림 26">
+            <a:extLst>
+              <a:ext uri="{FF2B5EF4-FFF2-40B4-BE49-F238E27FC236}">
+                <a16:creationId xmlns:a16="http://schemas.microsoft.com/office/drawing/2014/main" id="{82318D07-84B4-2C48-9B36-6D6931692162}"/>
+              </a:ext>
+            </a:extLst>
+          </p:cNvPr>
+          <p:cNvPicPr>
+            <a:picLocks noChangeAspect="1"/>
+          </p:cNvPicPr>
+          <p:nvPr/>
+        </p:nvPicPr>
+        <p:blipFill>
+          <a:blip r:embed="rId4"/>
+          <a:stretch>
+            <a:fillRect/>
+          </a:stretch>
+        </p:blipFill>
+        <p:spPr>
+          <a:xfrm>
+            <a:off x="8034796" y="1786778"/>
+            <a:ext cx="3197925" cy="4716061"/>
+          </a:xfrm>
+          <a:prstGeom prst="rect">
+            <a:avLst/>
+          </a:prstGeom>
+        </p:spPr>
+      </p:pic>
+    </p:spTree>
+    <p:extLst>
+      <p:ext uri="{BB962C8B-B14F-4D97-AF65-F5344CB8AC3E}">
+        <p14:creationId xmlns:p14="http://schemas.microsoft.com/office/powerpoint/2010/main" val="328680156"/>
+      </p:ext>
+    </p:extLst>
+  </p:cSld>
+  <p:clrMapOvr>
+    <a:masterClrMapping/>
+  </p:clrMapOvr>
+</p:sld>
+</file>
+
+<file path=ppt/slides/slide7.xml><?xml version="1.0" encoding="utf-8"?>
+<p:sld xmlns:a="http://schemas.openxmlformats.org/drawingml/2006/main" xmlns:r="http://schemas.openxmlformats.org/officeDocument/2006/relationships" xmlns:p="http://schemas.openxmlformats.org/presentationml/2006/main">
+  <p:cSld>
+    <p:spTree>
+      <p:nvGrpSpPr>
+        <p:cNvPr id="1" name="">
+          <a:extLst>
+            <a:ext uri="{FF2B5EF4-FFF2-40B4-BE49-F238E27FC236}">
+              <a16:creationId xmlns:a16="http://schemas.microsoft.com/office/drawing/2014/main" id="{12F6A21B-5101-7D32-2BAC-6AF1B3150663}"/>
+            </a:ext>
+          </a:extLst>
+        </p:cNvPr>
+        <p:cNvGrpSpPr/>
+        <p:nvPr/>
+      </p:nvGrpSpPr>
+      <p:grpSpPr>
+        <a:xfrm>
+          <a:off x="0" y="0"/>
+          <a:ext cx="0" cy="0"/>
+          <a:chOff x="0" y="0"/>
+          <a:chExt cx="0" cy="0"/>
+        </a:xfrm>
+      </p:grpSpPr>
+      <p:sp>
+        <p:nvSpPr>
+          <p:cNvPr id="3" name="TextBox 2">
+            <a:extLst>
+              <a:ext uri="{FF2B5EF4-FFF2-40B4-BE49-F238E27FC236}">
+                <a16:creationId xmlns:a16="http://schemas.microsoft.com/office/drawing/2014/main" id="{16517C86-CA02-3849-4FF8-2ED94D3D56F4}"/>
+              </a:ext>
+            </a:extLst>
+          </p:cNvPr>
+          <p:cNvSpPr txBox="1"/>
+          <p:nvPr/>
+        </p:nvSpPr>
+        <p:spPr>
+          <a:xfrm>
+            <a:off x="658368" y="384048"/>
+            <a:ext cx="10881360" cy="523220"/>
+          </a:xfrm>
+          <a:prstGeom prst="rect">
+            <a:avLst/>
+          </a:prstGeom>
+          <a:noFill/>
+        </p:spPr>
+        <p:txBody>
+          <a:bodyPr wrap="square">
+            <a:spAutoFit/>
+          </a:bodyPr>
+          <a:lstStyle/>
+          <a:p>
+            <a:pPr>
+              <a:defRPr sz="2800" b="1">
+                <a:solidFill>
+                  <a:srgbClr val="18233A"/>
+                </a:solidFill>
+              </a:defRPr>
+            </a:pPr>
+            <a:r>
+              <a:rPr lang="en-US" dirty="0"/>
+              <a:t>2</a:t>
+            </a:r>
+            <a:r>
+              <a:rPr dirty="0"/>
+              <a:t>. </a:t>
+            </a:r>
+            <a:r>
+              <a:rPr dirty="0" err="1"/>
+              <a:t>탐구</a:t>
+            </a:r>
+            <a:r>
+              <a:rPr dirty="0"/>
+              <a:t> </a:t>
+            </a:r>
+            <a:r>
+              <a:rPr lang="ko-KR" altLang="en-US" dirty="0"/>
+              <a:t>목적</a:t>
+            </a:r>
+            <a:endParaRPr dirty="0"/>
+          </a:p>
+        </p:txBody>
+      </p:sp>
+      <p:sp>
+        <p:nvSpPr>
+          <p:cNvPr id="4" name="TextBox 3">
+            <a:extLst>
+              <a:ext uri="{FF2B5EF4-FFF2-40B4-BE49-F238E27FC236}">
+                <a16:creationId xmlns:a16="http://schemas.microsoft.com/office/drawing/2014/main" id="{941AF4E9-004A-445C-816A-EF4CDCB5CA79}"/>
+              </a:ext>
+            </a:extLst>
+          </p:cNvPr>
+          <p:cNvSpPr txBox="1"/>
+          <p:nvPr/>
+        </p:nvSpPr>
+        <p:spPr>
+          <a:xfrm>
+            <a:off x="676656" y="987552"/>
+            <a:ext cx="6482865" cy="284693"/>
+          </a:xfrm>
+          <a:prstGeom prst="rect">
+            <a:avLst/>
+          </a:prstGeom>
+          <a:noFill/>
+        </p:spPr>
+        <p:txBody>
+          <a:bodyPr wrap="square">
+            <a:spAutoFit/>
+          </a:bodyPr>
+          <a:lstStyle/>
+          <a:p>
+            <a:pPr>
+              <a:defRPr sz="1250">
+                <a:solidFill>
+                  <a:srgbClr val="5C6574"/>
+                </a:solidFill>
+              </a:defRPr>
+            </a:pPr>
+            <a:r>
+              <a:rPr dirty="0" err="1"/>
+              <a:t>정방향</a:t>
+            </a:r>
+            <a:r>
+              <a:rPr dirty="0"/>
+              <a:t> </a:t>
+            </a:r>
+            <a:r>
+              <a:rPr dirty="0" err="1"/>
+              <a:t>문제는</a:t>
+            </a:r>
+            <a:r>
+              <a:rPr dirty="0"/>
+              <a:t> </a:t>
+            </a:r>
+            <a:r>
+              <a:rPr dirty="0" err="1"/>
+              <a:t>쉽지만</a:t>
+            </a:r>
+            <a:r>
+              <a:rPr dirty="0"/>
+              <a:t>, </a:t>
+            </a:r>
+            <a:r>
+              <a:rPr dirty="0" err="1"/>
+              <a:t>역방향</a:t>
+            </a:r>
+            <a:r>
+              <a:rPr dirty="0"/>
+              <a:t> </a:t>
+            </a:r>
+            <a:r>
+              <a:rPr dirty="0" err="1"/>
+              <a:t>문제는</a:t>
+            </a:r>
+            <a:r>
+              <a:rPr dirty="0"/>
+              <a:t> </a:t>
+            </a:r>
+            <a:r>
+              <a:rPr dirty="0" err="1"/>
+              <a:t>정보</a:t>
+            </a:r>
+            <a:r>
+              <a:rPr dirty="0"/>
+              <a:t> </a:t>
+            </a:r>
+            <a:r>
+              <a:rPr dirty="0" err="1"/>
+              <a:t>손실</a:t>
+            </a:r>
+            <a:r>
+              <a:rPr lang="ko-KR" altLang="en-US" dirty="0"/>
+              <a:t>로 인해 유일한 해를 구하기</a:t>
+            </a:r>
+            <a:r>
+              <a:rPr dirty="0"/>
+              <a:t> </a:t>
+            </a:r>
+            <a:r>
+              <a:rPr dirty="0" err="1"/>
+              <a:t>어려워진다</a:t>
+            </a:r>
+            <a:r>
+              <a:rPr lang="en-US" dirty="0"/>
+              <a:t>.</a:t>
+            </a:r>
+            <a:endParaRPr dirty="0"/>
+          </a:p>
+        </p:txBody>
+      </p:sp>
+      <p:sp>
+        <p:nvSpPr>
+          <p:cNvPr id="6" name="Rectangle 5">
+            <a:extLst>
+              <a:ext uri="{FF2B5EF4-FFF2-40B4-BE49-F238E27FC236}">
+                <a16:creationId xmlns:a16="http://schemas.microsoft.com/office/drawing/2014/main" id="{D31CCD96-2EBB-B6BC-6419-BE691B04AA48}"/>
+              </a:ext>
+            </a:extLst>
+          </p:cNvPr>
+          <p:cNvSpPr/>
+          <p:nvPr/>
+        </p:nvSpPr>
+        <p:spPr>
+          <a:xfrm>
+            <a:off x="777240" y="1281389"/>
+            <a:ext cx="566928" cy="41148"/>
+          </a:xfrm>
+          <a:prstGeom prst="rect">
+            <a:avLst/>
+          </a:prstGeom>
+          <a:solidFill>
+            <a:srgbClr val="315EBE"/>
+          </a:solidFill>
+          <a:ln>
+            <a:noFill/>
+          </a:ln>
+        </p:spPr>
+        <p:style>
+          <a:lnRef idx="1">
+            <a:schemeClr val="accent1"/>
+          </a:lnRef>
+          <a:fillRef idx="3">
+            <a:schemeClr val="accent1"/>
+          </a:fillRef>
+          <a:effectRef idx="2">
+            <a:schemeClr val="accent1"/>
+          </a:effectRef>
+          <a:fontRef idx="minor">
+            <a:schemeClr val="lt1"/>
+          </a:fontRef>
+        </p:style>
+        <p:txBody>
+          <a:bodyPr rtlCol="0" anchor="ctr"/>
+          <a:lstStyle/>
+          <a:p>
+            <a:pPr algn="ctr"/>
+            <a:endParaRPr/>
+          </a:p>
+        </p:txBody>
+      </p:sp>
+      <p:sp>
+        <p:nvSpPr>
+          <p:cNvPr id="7" name="Rounded Rectangle 6">
+            <a:extLst>
+              <a:ext uri="{FF2B5EF4-FFF2-40B4-BE49-F238E27FC236}">
+                <a16:creationId xmlns:a16="http://schemas.microsoft.com/office/drawing/2014/main" id="{C8587134-6A59-E0E6-8465-FA13D0FFCEE1}"/>
+              </a:ext>
+            </a:extLst>
+          </p:cNvPr>
+          <p:cNvSpPr/>
+          <p:nvPr/>
+        </p:nvSpPr>
+        <p:spPr>
+          <a:xfrm>
+            <a:off x="743858" y="1737360"/>
+            <a:ext cx="3267635" cy="4811358"/>
+          </a:xfrm>
+          <a:prstGeom prst="roundRect">
+            <a:avLst/>
+          </a:prstGeom>
+          <a:solidFill>
+            <a:srgbClr val="FFFFFF"/>
+          </a:solidFill>
+          <a:ln>
+            <a:solidFill>
+              <a:srgbClr val="E6EBF4"/>
+            </a:solidFill>
+          </a:ln>
+        </p:spPr>
+        <p:style>
+          <a:lnRef idx="1">
+            <a:schemeClr val="accent1"/>
+          </a:lnRef>
+          <a:fillRef idx="3">
+            <a:schemeClr val="accent1"/>
+          </a:fillRef>
+          <a:effectRef idx="2">
+            <a:schemeClr val="accent1"/>
+          </a:effectRef>
+          <a:fontRef idx="minor">
+            <a:schemeClr val="lt1"/>
+          </a:fontRef>
+        </p:style>
+        <p:txBody>
+          <a:bodyPr rtlCol="0" anchor="ctr"/>
+          <a:lstStyle/>
+          <a:p>
+            <a:pPr algn="ctr"/>
+            <a:endParaRPr/>
+          </a:p>
+        </p:txBody>
+      </p:sp>
+      <p:sp>
+        <p:nvSpPr>
+          <p:cNvPr id="8" name="Rectangle 7">
+            <a:extLst>
+              <a:ext uri="{FF2B5EF4-FFF2-40B4-BE49-F238E27FC236}">
+                <a16:creationId xmlns:a16="http://schemas.microsoft.com/office/drawing/2014/main" id="{1610BEEA-8393-D5C0-D099-E403D872AC5D}"/>
+              </a:ext>
+            </a:extLst>
+          </p:cNvPr>
+          <p:cNvSpPr/>
+          <p:nvPr/>
+        </p:nvSpPr>
+        <p:spPr>
+          <a:xfrm>
+            <a:off x="777240" y="1737360"/>
+            <a:ext cx="69710" cy="4811358"/>
+          </a:xfrm>
+          <a:prstGeom prst="rect">
+            <a:avLst/>
+          </a:prstGeom>
+          <a:solidFill>
+            <a:srgbClr val="315EBE"/>
+          </a:solidFill>
+          <a:ln>
+            <a:noFill/>
+          </a:ln>
+        </p:spPr>
+        <p:style>
+          <a:lnRef idx="1">
+            <a:schemeClr val="accent1"/>
+          </a:lnRef>
+          <a:fillRef idx="3">
+            <a:schemeClr val="accent1"/>
+          </a:fillRef>
+          <a:effectRef idx="2">
+            <a:schemeClr val="accent1"/>
+          </a:effectRef>
+          <a:fontRef idx="minor">
+            <a:schemeClr val="lt1"/>
+          </a:fontRef>
+        </p:style>
+        <p:txBody>
+          <a:bodyPr rtlCol="0" anchor="ctr"/>
+          <a:lstStyle/>
+          <a:p>
+            <a:pPr algn="ctr"/>
+            <a:endParaRPr/>
+          </a:p>
+        </p:txBody>
+      </p:sp>
+      <p:sp>
+        <p:nvSpPr>
+          <p:cNvPr id="9" name="TextBox 8">
+            <a:extLst>
+              <a:ext uri="{FF2B5EF4-FFF2-40B4-BE49-F238E27FC236}">
+                <a16:creationId xmlns:a16="http://schemas.microsoft.com/office/drawing/2014/main" id="{2269FDBA-6257-2822-1DB9-6A17C6326891}"/>
+              </a:ext>
+            </a:extLst>
+          </p:cNvPr>
+          <p:cNvSpPr txBox="1"/>
+          <p:nvPr/>
+        </p:nvSpPr>
+        <p:spPr>
+          <a:xfrm>
+            <a:off x="973297" y="1747693"/>
+            <a:ext cx="2875519" cy="338554"/>
+          </a:xfrm>
+          <a:prstGeom prst="rect">
+            <a:avLst/>
+          </a:prstGeom>
+          <a:noFill/>
+        </p:spPr>
+        <p:txBody>
+          <a:bodyPr wrap="square">
+            <a:spAutoFit/>
+          </a:bodyPr>
+          <a:lstStyle/>
+          <a:p>
+            <a:pPr algn="ctr">
+              <a:defRPr sz="1600" b="1">
+                <a:solidFill>
+                  <a:srgbClr val="18233A"/>
+                </a:solidFill>
+              </a:defRPr>
+            </a:pPr>
+            <a:r>
+              <a:rPr dirty="0" err="1"/>
+              <a:t>정방향</a:t>
+            </a:r>
+            <a:r>
+              <a:rPr dirty="0"/>
+              <a:t> </a:t>
+            </a:r>
+            <a:r>
+              <a:rPr dirty="0" err="1"/>
+              <a:t>문제</a:t>
+            </a:r>
+            <a:endParaRPr dirty="0"/>
+          </a:p>
+        </p:txBody>
+      </p:sp>
+      <p:sp>
+        <p:nvSpPr>
+          <p:cNvPr id="10" name="TextBox 9">
+            <a:extLst>
+              <a:ext uri="{FF2B5EF4-FFF2-40B4-BE49-F238E27FC236}">
+                <a16:creationId xmlns:a16="http://schemas.microsoft.com/office/drawing/2014/main" id="{85706990-1EFE-917D-9841-9463A3AC118C}"/>
+              </a:ext>
+            </a:extLst>
+          </p:cNvPr>
+          <p:cNvSpPr txBox="1"/>
+          <p:nvPr/>
+        </p:nvSpPr>
+        <p:spPr>
+          <a:xfrm>
+            <a:off x="973295" y="2240506"/>
+            <a:ext cx="3007033" cy="1128514"/>
+          </a:xfrm>
+          <a:prstGeom prst="rect">
+            <a:avLst/>
+          </a:prstGeom>
+          <a:noFill/>
+        </p:spPr>
+        <p:txBody>
+          <a:bodyPr wrap="square">
+            <a:spAutoFit/>
+          </a:bodyPr>
+          <a:lstStyle/>
+          <a:p>
+            <a:pPr>
+              <a:spcAft>
+                <a:spcPts val="800"/>
+              </a:spcAft>
+              <a:defRPr sz="1800">
+                <a:solidFill>
+                  <a:srgbClr val="5C6574"/>
+                </a:solidFill>
+              </a:defRPr>
+            </a:pPr>
+            <a:r>
+              <a:rPr dirty="0" err="1"/>
+              <a:t>전하의</a:t>
+            </a:r>
+            <a:r>
+              <a:rPr dirty="0"/>
+              <a:t> </a:t>
+            </a:r>
+            <a:r>
+              <a:rPr dirty="0" err="1"/>
+              <a:t>위치와</a:t>
+            </a:r>
+            <a:r>
+              <a:rPr dirty="0"/>
+              <a:t> </a:t>
+            </a:r>
+            <a:r>
+              <a:rPr dirty="0" err="1"/>
+              <a:t>크기를</a:t>
+            </a:r>
+            <a:r>
+              <a:rPr dirty="0"/>
+              <a:t> </a:t>
+            </a:r>
+            <a:r>
+              <a:rPr dirty="0" err="1"/>
+              <a:t>안다</a:t>
+            </a:r>
+            <a:r>
+              <a:rPr dirty="0"/>
+              <a:t>.</a:t>
+            </a:r>
+          </a:p>
+          <a:p>
+            <a:pPr>
+              <a:spcAft>
+                <a:spcPts val="800"/>
+              </a:spcAft>
+              <a:defRPr sz="1800">
+                <a:solidFill>
+                  <a:srgbClr val="5C6574"/>
+                </a:solidFill>
+              </a:defRPr>
+            </a:pPr>
+            <a:r>
+              <a:rPr dirty="0"/>
+              <a:t>→ </a:t>
+            </a:r>
+            <a:r>
+              <a:rPr dirty="0" err="1"/>
+              <a:t>퍼텐셜</a:t>
+            </a:r>
+            <a:r>
+              <a:rPr dirty="0"/>
+              <a:t> </a:t>
+            </a:r>
+            <a:r>
+              <a:rPr dirty="0" err="1"/>
+              <a:t>V를</a:t>
+            </a:r>
+            <a:r>
+              <a:rPr dirty="0"/>
+              <a:t> </a:t>
+            </a:r>
+            <a:r>
+              <a:rPr dirty="0" err="1"/>
+              <a:t>계산한다</a:t>
+            </a:r>
+            <a:r>
+              <a:rPr dirty="0"/>
+              <a:t>.</a:t>
+            </a:r>
+          </a:p>
+          <a:p>
+            <a:pPr>
+              <a:spcAft>
+                <a:spcPts val="800"/>
+              </a:spcAft>
+              <a:defRPr sz="1800">
+                <a:solidFill>
+                  <a:srgbClr val="5C6574"/>
+                </a:solidFill>
+              </a:defRPr>
+            </a:pPr>
+            <a:r>
+              <a:rPr dirty="0"/>
+              <a:t>→ </a:t>
+            </a:r>
+            <a:r>
+              <a:rPr dirty="0" err="1"/>
+              <a:t>물리량을</a:t>
+            </a:r>
+            <a:r>
+              <a:rPr dirty="0"/>
+              <a:t> </a:t>
+            </a:r>
+            <a:r>
+              <a:rPr dirty="0" err="1"/>
+              <a:t>얻는다</a:t>
+            </a:r>
+            <a:r>
+              <a:rPr dirty="0"/>
+              <a:t>.</a:t>
+            </a:r>
+            <a:endParaRPr lang="en-US" dirty="0"/>
+          </a:p>
+        </p:txBody>
+      </p:sp>
+      <p:sp>
+        <p:nvSpPr>
+          <p:cNvPr id="11" name="Rounded Rectangle 10">
+            <a:extLst>
+              <a:ext uri="{FF2B5EF4-FFF2-40B4-BE49-F238E27FC236}">
+                <a16:creationId xmlns:a16="http://schemas.microsoft.com/office/drawing/2014/main" id="{770E77B7-505A-AF98-CC22-853CC8DFB258}"/>
+              </a:ext>
+            </a:extLst>
+          </p:cNvPr>
+          <p:cNvSpPr/>
+          <p:nvPr/>
+        </p:nvSpPr>
+        <p:spPr>
+          <a:xfrm>
+            <a:off x="4389120" y="1737360"/>
+            <a:ext cx="3267635" cy="4811358"/>
+          </a:xfrm>
+          <a:prstGeom prst="roundRect">
+            <a:avLst/>
+          </a:prstGeom>
+          <a:solidFill>
+            <a:srgbClr val="FFFFFF"/>
+          </a:solidFill>
+          <a:ln>
+            <a:solidFill>
+              <a:srgbClr val="E6EBF4"/>
+            </a:solidFill>
+          </a:ln>
+        </p:spPr>
+        <p:style>
+          <a:lnRef idx="1">
+            <a:schemeClr val="accent1"/>
+          </a:lnRef>
+          <a:fillRef idx="3">
+            <a:schemeClr val="accent1"/>
+          </a:fillRef>
+          <a:effectRef idx="2">
+            <a:schemeClr val="accent1"/>
+          </a:effectRef>
+          <a:fontRef idx="minor">
+            <a:schemeClr val="lt1"/>
+          </a:fontRef>
+        </p:style>
+        <p:txBody>
+          <a:bodyPr rtlCol="0" anchor="ctr"/>
+          <a:lstStyle/>
+          <a:p>
+            <a:pPr algn="ctr"/>
+            <a:endParaRPr/>
+          </a:p>
+        </p:txBody>
+      </p:sp>
+      <p:sp>
+        <p:nvSpPr>
+          <p:cNvPr id="12" name="Rectangle 11">
+            <a:extLst>
+              <a:ext uri="{FF2B5EF4-FFF2-40B4-BE49-F238E27FC236}">
+                <a16:creationId xmlns:a16="http://schemas.microsoft.com/office/drawing/2014/main" id="{833D8D5A-F5F0-2AA8-3416-C5F41F65922E}"/>
+              </a:ext>
+            </a:extLst>
+          </p:cNvPr>
+          <p:cNvSpPr/>
+          <p:nvPr/>
+        </p:nvSpPr>
+        <p:spPr>
+          <a:xfrm>
+            <a:off x="4389120" y="1737360"/>
+            <a:ext cx="69710" cy="4811358"/>
+          </a:xfrm>
+          <a:prstGeom prst="rect">
+            <a:avLst/>
+          </a:prstGeom>
+          <a:solidFill>
+            <a:srgbClr val="1F8987"/>
+          </a:solidFill>
+          <a:ln>
+            <a:noFill/>
+          </a:ln>
+        </p:spPr>
+        <p:style>
+          <a:lnRef idx="1">
+            <a:schemeClr val="accent1"/>
+          </a:lnRef>
+          <a:fillRef idx="3">
+            <a:schemeClr val="accent1"/>
+          </a:fillRef>
+          <a:effectRef idx="2">
+            <a:schemeClr val="accent1"/>
+          </a:effectRef>
+          <a:fontRef idx="minor">
+            <a:schemeClr val="lt1"/>
+          </a:fontRef>
+        </p:style>
+        <p:txBody>
+          <a:bodyPr rtlCol="0" anchor="ctr"/>
+          <a:lstStyle/>
+          <a:p>
+            <a:pPr algn="ctr"/>
+            <a:endParaRPr/>
+          </a:p>
+        </p:txBody>
+      </p:sp>
+      <p:sp>
+        <p:nvSpPr>
+          <p:cNvPr id="13" name="TextBox 12">
+            <a:extLst>
+              <a:ext uri="{FF2B5EF4-FFF2-40B4-BE49-F238E27FC236}">
+                <a16:creationId xmlns:a16="http://schemas.microsoft.com/office/drawing/2014/main" id="{AC03FDC8-815E-6764-2D49-45FFD083E783}"/>
+              </a:ext>
+            </a:extLst>
+          </p:cNvPr>
+          <p:cNvSpPr txBox="1"/>
+          <p:nvPr/>
+        </p:nvSpPr>
+        <p:spPr>
+          <a:xfrm>
+            <a:off x="4658240" y="1732675"/>
+            <a:ext cx="2875519" cy="338554"/>
+          </a:xfrm>
+          <a:prstGeom prst="rect">
+            <a:avLst/>
+          </a:prstGeom>
+          <a:noFill/>
+        </p:spPr>
+        <p:txBody>
+          <a:bodyPr wrap="square">
+            <a:spAutoFit/>
+          </a:bodyPr>
+          <a:lstStyle/>
+          <a:p>
+            <a:pPr algn="ctr">
+              <a:defRPr sz="1600" b="1">
+                <a:solidFill>
+                  <a:srgbClr val="18233A"/>
+                </a:solidFill>
+              </a:defRPr>
+            </a:pPr>
+            <a:r>
+              <a:rPr dirty="0" err="1"/>
+              <a:t>역문제</a:t>
+            </a:r>
+            <a:endParaRPr dirty="0"/>
+          </a:p>
+        </p:txBody>
+      </p:sp>
+      <p:sp>
+        <p:nvSpPr>
+          <p:cNvPr id="14" name="TextBox 13">
+            <a:extLst>
+              <a:ext uri="{FF2B5EF4-FFF2-40B4-BE49-F238E27FC236}">
+                <a16:creationId xmlns:a16="http://schemas.microsoft.com/office/drawing/2014/main" id="{60AEF9A8-0005-B6E1-3617-41D51120C277}"/>
+              </a:ext>
+            </a:extLst>
+          </p:cNvPr>
+          <p:cNvSpPr txBox="1"/>
+          <p:nvPr/>
+        </p:nvSpPr>
+        <p:spPr>
+          <a:xfrm>
+            <a:off x="4585177" y="2240506"/>
+            <a:ext cx="2875519" cy="2062103"/>
+          </a:xfrm>
+          <a:prstGeom prst="rect">
+            <a:avLst/>
+          </a:prstGeom>
+          <a:noFill/>
+        </p:spPr>
+        <p:txBody>
+          <a:bodyPr wrap="square">
+            <a:spAutoFit/>
+          </a:bodyPr>
+          <a:lstStyle/>
+          <a:p>
+            <a:pPr>
+              <a:spcAft>
+                <a:spcPts val="800"/>
+              </a:spcAft>
+              <a:defRPr sz="1800">
+                <a:solidFill>
+                  <a:srgbClr val="5C6574"/>
+                </a:solidFill>
+              </a:defRPr>
+            </a:pPr>
+            <a:r>
+              <a:rPr dirty="0" err="1"/>
+              <a:t>관측</a:t>
+            </a:r>
+            <a:r>
+              <a:rPr dirty="0"/>
+              <a:t> </a:t>
+            </a:r>
+            <a:r>
+              <a:rPr dirty="0" err="1"/>
+              <a:t>결과만</a:t>
+            </a:r>
+            <a:r>
+              <a:rPr dirty="0"/>
+              <a:t> </a:t>
+            </a:r>
+            <a:r>
+              <a:rPr dirty="0" err="1"/>
+              <a:t>주어진다</a:t>
+            </a:r>
+            <a:r>
+              <a:rPr dirty="0"/>
+              <a:t>.</a:t>
+            </a:r>
+          </a:p>
+          <a:p>
+            <a:pPr>
+              <a:spcAft>
+                <a:spcPts val="800"/>
+              </a:spcAft>
+              <a:defRPr sz="1800">
+                <a:solidFill>
+                  <a:srgbClr val="5C6574"/>
+                </a:solidFill>
+              </a:defRPr>
+            </a:pPr>
+            <a:r>
+              <a:rPr dirty="0"/>
+              <a:t>→ </a:t>
+            </a:r>
+            <a:r>
+              <a:rPr dirty="0" err="1"/>
+              <a:t>어떤</a:t>
+            </a:r>
+            <a:r>
+              <a:rPr dirty="0"/>
+              <a:t> </a:t>
+            </a:r>
+            <a:r>
+              <a:rPr dirty="0" err="1"/>
+              <a:t>전하가</a:t>
+            </a:r>
+            <a:r>
+              <a:rPr dirty="0"/>
+              <a:t> </a:t>
+            </a:r>
+            <a:r>
+              <a:rPr dirty="0" err="1"/>
+              <a:t>만들었는지</a:t>
+            </a:r>
+            <a:r>
+              <a:rPr dirty="0"/>
+              <a:t> </a:t>
+            </a:r>
+            <a:r>
+              <a:rPr dirty="0" err="1"/>
+              <a:t>추정</a:t>
+            </a:r>
+            <a:r>
+              <a:rPr lang="ko-KR" altLang="en-US" dirty="0"/>
+              <a:t>할 수 있다</a:t>
+            </a:r>
+            <a:r>
+              <a:rPr dirty="0"/>
+              <a:t>.</a:t>
+            </a:r>
+          </a:p>
+          <a:p>
+            <a:pPr>
+              <a:spcAft>
+                <a:spcPts val="800"/>
+              </a:spcAft>
+              <a:defRPr sz="1800">
+                <a:solidFill>
+                  <a:srgbClr val="5C6574"/>
+                </a:solidFill>
+              </a:defRPr>
+            </a:pPr>
+            <a:r>
+              <a:rPr dirty="0"/>
+              <a:t>→ </a:t>
+            </a:r>
+            <a:r>
+              <a:rPr dirty="0" err="1"/>
+              <a:t>여러</a:t>
+            </a:r>
+            <a:r>
+              <a:rPr dirty="0"/>
+              <a:t> </a:t>
+            </a:r>
+            <a:r>
+              <a:rPr dirty="0" err="1"/>
+              <a:t>해가</a:t>
+            </a:r>
+            <a:r>
+              <a:rPr dirty="0"/>
+              <a:t> </a:t>
+            </a:r>
+            <a:r>
+              <a:rPr dirty="0" err="1"/>
+              <a:t>가능할</a:t>
+            </a:r>
+            <a:r>
+              <a:rPr dirty="0"/>
+              <a:t> 수 </a:t>
+            </a:r>
+            <a:r>
+              <a:rPr dirty="0" err="1"/>
+              <a:t>있다</a:t>
+            </a:r>
+            <a:r>
+              <a:rPr dirty="0"/>
+              <a:t>.</a:t>
+            </a:r>
+            <a:endParaRPr lang="en-US" dirty="0"/>
+          </a:p>
+          <a:p>
+            <a:pPr>
+              <a:spcAft>
+                <a:spcPts val="800"/>
+              </a:spcAft>
+              <a:defRPr sz="1800">
+                <a:solidFill>
+                  <a:srgbClr val="5C6574"/>
+                </a:solidFill>
+              </a:defRPr>
+            </a:pPr>
+            <a:endParaRPr dirty="0"/>
+          </a:p>
+        </p:txBody>
+      </p:sp>
+      <p:sp>
+        <p:nvSpPr>
+          <p:cNvPr id="15" name="Rounded Rectangle 14">
+            <a:extLst>
+              <a:ext uri="{FF2B5EF4-FFF2-40B4-BE49-F238E27FC236}">
+                <a16:creationId xmlns:a16="http://schemas.microsoft.com/office/drawing/2014/main" id="{4BE9F272-132A-6595-E0E3-208BA994C766}"/>
+              </a:ext>
+            </a:extLst>
+          </p:cNvPr>
+          <p:cNvSpPr/>
+          <p:nvPr/>
+        </p:nvSpPr>
+        <p:spPr>
+          <a:xfrm>
+            <a:off x="8001000" y="1737360"/>
+            <a:ext cx="3267635" cy="4811358"/>
+          </a:xfrm>
+          <a:prstGeom prst="roundRect">
+            <a:avLst/>
+          </a:prstGeom>
+          <a:solidFill>
+            <a:srgbClr val="FFFFFF"/>
+          </a:solidFill>
+          <a:ln>
+            <a:solidFill>
+              <a:srgbClr val="E6EBF4"/>
+            </a:solidFill>
+          </a:ln>
+        </p:spPr>
+        <p:style>
+          <a:lnRef idx="1">
+            <a:schemeClr val="accent1"/>
+          </a:lnRef>
+          <a:fillRef idx="3">
+            <a:schemeClr val="accent1"/>
+          </a:fillRef>
+          <a:effectRef idx="2">
+            <a:schemeClr val="accent1"/>
+          </a:effectRef>
+          <a:fontRef idx="minor">
+            <a:schemeClr val="lt1"/>
+          </a:fontRef>
+        </p:style>
+        <p:txBody>
+          <a:bodyPr rtlCol="0" anchor="ctr"/>
+          <a:lstStyle/>
+          <a:p>
+            <a:pPr algn="ctr"/>
+            <a:endParaRPr/>
+          </a:p>
+        </p:txBody>
+      </p:sp>
+      <p:sp>
+        <p:nvSpPr>
+          <p:cNvPr id="16" name="Rectangle 15">
+            <a:extLst>
+              <a:ext uri="{FF2B5EF4-FFF2-40B4-BE49-F238E27FC236}">
+                <a16:creationId xmlns:a16="http://schemas.microsoft.com/office/drawing/2014/main" id="{A800B837-6E40-51FC-5E1A-58BD8998A8B6}"/>
+              </a:ext>
+            </a:extLst>
+          </p:cNvPr>
+          <p:cNvSpPr/>
+          <p:nvPr/>
+        </p:nvSpPr>
+        <p:spPr>
+          <a:xfrm>
+            <a:off x="8001000" y="1737360"/>
+            <a:ext cx="69710" cy="4811358"/>
+          </a:xfrm>
+          <a:prstGeom prst="rect">
+            <a:avLst/>
+          </a:prstGeom>
+          <a:solidFill>
+            <a:srgbClr val="BE4141"/>
+          </a:solidFill>
+          <a:ln>
+            <a:noFill/>
+          </a:ln>
+        </p:spPr>
+        <p:style>
+          <a:lnRef idx="1">
+            <a:schemeClr val="accent1"/>
+          </a:lnRef>
+          <a:fillRef idx="3">
+            <a:schemeClr val="accent1"/>
+          </a:fillRef>
+          <a:effectRef idx="2">
+            <a:schemeClr val="accent1"/>
+          </a:effectRef>
+          <a:fontRef idx="minor">
+            <a:schemeClr val="lt1"/>
+          </a:fontRef>
+        </p:style>
+        <p:txBody>
+          <a:bodyPr rtlCol="0" anchor="ctr"/>
+          <a:lstStyle/>
+          <a:p>
+            <a:pPr algn="ctr"/>
+            <a:endParaRPr/>
+          </a:p>
+        </p:txBody>
+      </p:sp>
+      <p:sp>
+        <p:nvSpPr>
+          <p:cNvPr id="17" name="TextBox 16">
+            <a:extLst>
+              <a:ext uri="{FF2B5EF4-FFF2-40B4-BE49-F238E27FC236}">
+                <a16:creationId xmlns:a16="http://schemas.microsoft.com/office/drawing/2014/main" id="{B5DD347A-567E-6FC5-BAF2-3334364BEC60}"/>
+              </a:ext>
+            </a:extLst>
+          </p:cNvPr>
+          <p:cNvSpPr txBox="1"/>
+          <p:nvPr/>
+        </p:nvSpPr>
+        <p:spPr>
+          <a:xfrm>
+            <a:off x="8197057" y="1752192"/>
+            <a:ext cx="2875519" cy="338554"/>
+          </a:xfrm>
+          <a:prstGeom prst="rect">
+            <a:avLst/>
+          </a:prstGeom>
+          <a:noFill/>
+        </p:spPr>
+        <p:txBody>
+          <a:bodyPr wrap="square">
+            <a:spAutoFit/>
+          </a:bodyPr>
+          <a:lstStyle/>
+          <a:p>
+            <a:pPr algn="ctr">
+              <a:defRPr sz="1600" b="1">
+                <a:solidFill>
+                  <a:srgbClr val="18233A"/>
+                </a:solidFill>
+              </a:defRPr>
+            </a:pPr>
+            <a:r>
+              <a:rPr dirty="0" err="1"/>
+              <a:t>탐구의</a:t>
+            </a:r>
+            <a:r>
+              <a:rPr dirty="0"/>
+              <a:t> </a:t>
+            </a:r>
+            <a:r>
+              <a:rPr dirty="0" err="1"/>
+              <a:t>출발점</a:t>
+            </a:r>
+            <a:endParaRPr dirty="0"/>
+          </a:p>
+        </p:txBody>
+      </p:sp>
+      <p:sp>
+        <p:nvSpPr>
+          <p:cNvPr id="18" name="TextBox 17">
+            <a:extLst>
+              <a:ext uri="{FF2B5EF4-FFF2-40B4-BE49-F238E27FC236}">
+                <a16:creationId xmlns:a16="http://schemas.microsoft.com/office/drawing/2014/main" id="{1B128E67-95F8-EEE7-83F4-488B424A9F2D}"/>
+              </a:ext>
+            </a:extLst>
+          </p:cNvPr>
+          <p:cNvSpPr txBox="1"/>
+          <p:nvPr/>
+        </p:nvSpPr>
+        <p:spPr>
+          <a:xfrm>
+            <a:off x="8197056" y="2240506"/>
+            <a:ext cx="2875519" cy="1579920"/>
+          </a:xfrm>
+          <a:prstGeom prst="rect">
+            <a:avLst/>
+          </a:prstGeom>
+          <a:noFill/>
+        </p:spPr>
+        <p:txBody>
+          <a:bodyPr wrap="square">
+            <a:spAutoFit/>
+          </a:bodyPr>
+          <a:lstStyle/>
+          <a:p>
+            <a:pPr>
+              <a:spcAft>
+                <a:spcPts val="800"/>
+              </a:spcAft>
+              <a:defRPr sz="1800">
+                <a:solidFill>
+                  <a:srgbClr val="5C6574"/>
+                </a:solidFill>
+              </a:defRPr>
+            </a:pPr>
+            <a:r>
+              <a:rPr dirty="0" err="1"/>
+              <a:t>관측</a:t>
+            </a:r>
+            <a:r>
+              <a:rPr dirty="0"/>
+              <a:t> </a:t>
+            </a:r>
+            <a:r>
+              <a:rPr dirty="0" err="1"/>
+              <a:t>과정에서</a:t>
+            </a:r>
+            <a:r>
+              <a:rPr dirty="0"/>
+              <a:t> </a:t>
+            </a:r>
+            <a:r>
+              <a:rPr dirty="0" err="1"/>
+              <a:t>정보가</a:t>
+            </a:r>
+            <a:r>
+              <a:rPr dirty="0"/>
+              <a:t> </a:t>
+            </a:r>
+            <a:r>
+              <a:rPr dirty="0" err="1"/>
+              <a:t>일부</a:t>
+            </a:r>
+            <a:r>
+              <a:rPr dirty="0"/>
+              <a:t> </a:t>
+            </a:r>
+            <a:r>
+              <a:rPr dirty="0" err="1"/>
+              <a:t>소실된다</a:t>
+            </a:r>
+            <a:endParaRPr lang="en-US" altLang="en-US" dirty="0"/>
+          </a:p>
+          <a:p>
+            <a:pPr>
+              <a:spcAft>
+                <a:spcPts val="800"/>
+              </a:spcAft>
+              <a:defRPr sz="1800">
+                <a:solidFill>
+                  <a:srgbClr val="5C6574"/>
+                </a:solidFill>
+              </a:defRPr>
+            </a:pPr>
+            <a:r>
+              <a:rPr lang="en-US" dirty="0"/>
+              <a:t>→</a:t>
+            </a:r>
+            <a:r>
+              <a:rPr lang="en-US" altLang="ko-KR" dirty="0"/>
+              <a:t>AI</a:t>
+            </a:r>
+            <a:r>
+              <a:rPr lang="ko-KR" altLang="en-US" dirty="0"/>
+              <a:t>라면 고전적 역산보다 해를 도출하는 데 유리하지 않을까</a:t>
+            </a:r>
+            <a:r>
+              <a:rPr lang="en-US" altLang="ko-KR" dirty="0"/>
+              <a:t>?</a:t>
+            </a:r>
+            <a:endParaRPr lang="ko-KR" altLang="en-US" dirty="0"/>
+          </a:p>
+        </p:txBody>
+      </p:sp>
+      <p:sp>
+        <p:nvSpPr>
+          <p:cNvPr id="5" name="TextBox 4">
+            <a:extLst>
+              <a:ext uri="{FF2B5EF4-FFF2-40B4-BE49-F238E27FC236}">
+                <a16:creationId xmlns:a16="http://schemas.microsoft.com/office/drawing/2014/main" id="{42160646-3987-9D7F-1BCB-DD4BD7268671}"/>
+              </a:ext>
+            </a:extLst>
+          </p:cNvPr>
+          <p:cNvSpPr txBox="1"/>
+          <p:nvPr/>
+        </p:nvSpPr>
+        <p:spPr>
+          <a:xfrm>
+            <a:off x="973295" y="4143039"/>
+            <a:ext cx="3007033" cy="1128514"/>
+          </a:xfrm>
+          <a:prstGeom prst="rect">
+            <a:avLst/>
+          </a:prstGeom>
+          <a:noFill/>
+        </p:spPr>
+        <p:txBody>
+          <a:bodyPr wrap="square">
+            <a:spAutoFit/>
+          </a:bodyPr>
+          <a:lstStyle/>
+          <a:p>
+            <a:pPr>
+              <a:spcAft>
+                <a:spcPts val="800"/>
+              </a:spcAft>
+              <a:defRPr sz="1800">
+                <a:solidFill>
+                  <a:srgbClr val="5C6574"/>
+                </a:solidFill>
+              </a:defRPr>
+            </a:pPr>
+            <a:r>
+              <a:rPr lang="ko-KR" altLang="en-US" dirty="0"/>
+              <a:t>체감 난이도 ★☆☆☆☆</a:t>
+            </a:r>
+            <a:endParaRPr lang="en-US" altLang="ko-KR" dirty="0"/>
+          </a:p>
+          <a:p>
+            <a:pPr>
+              <a:spcAft>
+                <a:spcPts val="800"/>
+              </a:spcAft>
+              <a:defRPr sz="1800">
+                <a:solidFill>
+                  <a:srgbClr val="5C6574"/>
+                </a:solidFill>
+              </a:defRPr>
+            </a:pPr>
+            <a:r>
+              <a:rPr lang="en-US" dirty="0"/>
+              <a:t>-</a:t>
+            </a:r>
+            <a:r>
+              <a:rPr lang="ko-KR" altLang="en-US" dirty="0"/>
+              <a:t>고등학교 물리학 </a:t>
+            </a:r>
+            <a:r>
+              <a:rPr lang="en-US" altLang="ko-KR" dirty="0"/>
+              <a:t>1 </a:t>
+            </a:r>
+            <a:r>
+              <a:rPr lang="ko-KR" altLang="en-US" dirty="0"/>
+              <a:t>과정</a:t>
+            </a:r>
+            <a:endParaRPr lang="en-US" altLang="ko-KR" dirty="0"/>
+          </a:p>
+          <a:p>
+            <a:pPr>
+              <a:spcAft>
+                <a:spcPts val="800"/>
+              </a:spcAft>
+              <a:defRPr sz="1800">
+                <a:solidFill>
+                  <a:srgbClr val="5C6574"/>
+                </a:solidFill>
+              </a:defRPr>
+            </a:pPr>
+            <a:r>
+              <a:rPr lang="en-US" dirty="0"/>
+              <a:t>-</a:t>
+            </a:r>
+            <a:r>
+              <a:rPr lang="ko-KR" altLang="en-US" dirty="0"/>
+              <a:t>탐구의 시작점</a:t>
+            </a:r>
+            <a:endParaRPr dirty="0"/>
+          </a:p>
+        </p:txBody>
+      </p:sp>
+      <p:sp>
+        <p:nvSpPr>
+          <p:cNvPr id="20" name="TextBox 19">
+            <a:extLst>
+              <a:ext uri="{FF2B5EF4-FFF2-40B4-BE49-F238E27FC236}">
+                <a16:creationId xmlns:a16="http://schemas.microsoft.com/office/drawing/2014/main" id="{1ABAC3B3-AED9-45BC-D0F6-2D1CFECEDA6A}"/>
+              </a:ext>
+            </a:extLst>
+          </p:cNvPr>
+          <p:cNvSpPr txBox="1"/>
+          <p:nvPr/>
+        </p:nvSpPr>
+        <p:spPr>
+          <a:xfrm>
+            <a:off x="4585177" y="4143039"/>
+            <a:ext cx="2875519" cy="1508105"/>
+          </a:xfrm>
+          <a:prstGeom prst="rect">
+            <a:avLst/>
+          </a:prstGeom>
+          <a:noFill/>
+        </p:spPr>
+        <p:txBody>
+          <a:bodyPr wrap="square">
+            <a:spAutoFit/>
+          </a:bodyPr>
+          <a:lstStyle/>
+          <a:p>
+            <a:pPr>
+              <a:spcAft>
+                <a:spcPts val="800"/>
+              </a:spcAft>
+              <a:defRPr sz="1800">
+                <a:solidFill>
+                  <a:srgbClr val="5C6574"/>
+                </a:solidFill>
+              </a:defRPr>
+            </a:pPr>
+            <a:r>
+              <a:rPr lang="ko-KR" altLang="en-US" dirty="0"/>
+              <a:t>체감 난이도 ★★★☆☆</a:t>
+            </a:r>
+          </a:p>
+          <a:p>
+            <a:pPr>
+              <a:spcAft>
+                <a:spcPts val="800"/>
+              </a:spcAft>
+              <a:defRPr sz="1800">
+                <a:solidFill>
+                  <a:srgbClr val="5C6574"/>
+                </a:solidFill>
+              </a:defRPr>
+            </a:pPr>
+            <a:r>
+              <a:rPr lang="en-US" altLang="ko-KR" dirty="0"/>
+              <a:t>-</a:t>
+            </a:r>
+            <a:r>
+              <a:rPr lang="ko-KR" altLang="en-US" dirty="0"/>
+              <a:t>단순 고전적 계산</a:t>
+            </a:r>
+            <a:endParaRPr lang="en-US" altLang="ko-KR" dirty="0"/>
+          </a:p>
+          <a:p>
+            <a:pPr>
+              <a:spcAft>
+                <a:spcPts val="800"/>
+              </a:spcAft>
+              <a:defRPr sz="1800">
+                <a:solidFill>
+                  <a:srgbClr val="5C6574"/>
+                </a:solidFill>
+              </a:defRPr>
+            </a:pPr>
+            <a:r>
+              <a:rPr lang="en-US" dirty="0"/>
+              <a:t>-AI</a:t>
+            </a:r>
+            <a:r>
+              <a:rPr lang="ko-KR" altLang="en-US" dirty="0"/>
+              <a:t>의 도입이 불필요</a:t>
+            </a:r>
+            <a:endParaRPr lang="en-US" dirty="0"/>
+          </a:p>
+          <a:p>
+            <a:pPr>
+              <a:spcAft>
+                <a:spcPts val="800"/>
+              </a:spcAft>
+              <a:defRPr sz="1800">
+                <a:solidFill>
+                  <a:srgbClr val="5C6574"/>
+                </a:solidFill>
+              </a:defRPr>
+            </a:pPr>
+            <a:endParaRPr dirty="0"/>
+          </a:p>
+        </p:txBody>
+      </p:sp>
+      <p:sp>
+        <p:nvSpPr>
+          <p:cNvPr id="22" name="TextBox 21">
+            <a:extLst>
+              <a:ext uri="{FF2B5EF4-FFF2-40B4-BE49-F238E27FC236}">
+                <a16:creationId xmlns:a16="http://schemas.microsoft.com/office/drawing/2014/main" id="{B07A595A-7468-3A19-3BEE-22CA86E2AB67}"/>
+              </a:ext>
+            </a:extLst>
+          </p:cNvPr>
+          <p:cNvSpPr txBox="1"/>
+          <p:nvPr/>
+        </p:nvSpPr>
+        <p:spPr>
+          <a:xfrm>
+            <a:off x="8231913" y="4143039"/>
+            <a:ext cx="2875519" cy="1128514"/>
+          </a:xfrm>
+          <a:prstGeom prst="rect">
+            <a:avLst/>
+          </a:prstGeom>
+          <a:noFill/>
+        </p:spPr>
+        <p:txBody>
+          <a:bodyPr wrap="square">
+            <a:spAutoFit/>
+          </a:bodyPr>
+          <a:lstStyle/>
+          <a:p>
+            <a:pPr>
+              <a:spcAft>
+                <a:spcPts val="800"/>
+              </a:spcAft>
+              <a:defRPr sz="1800">
+                <a:solidFill>
+                  <a:srgbClr val="5C6574"/>
+                </a:solidFill>
+              </a:defRPr>
+            </a:pPr>
+            <a:r>
+              <a:rPr lang="ko-KR" altLang="en-US" dirty="0"/>
+              <a:t>난이도 ★★★★★</a:t>
+            </a:r>
+            <a:endParaRPr lang="en-US" altLang="ko-KR" dirty="0"/>
+          </a:p>
+          <a:p>
+            <a:pPr>
+              <a:spcAft>
+                <a:spcPts val="800"/>
+              </a:spcAft>
+              <a:defRPr sz="1800">
+                <a:solidFill>
+                  <a:srgbClr val="5C6574"/>
+                </a:solidFill>
+              </a:defRPr>
+            </a:pPr>
+            <a:r>
+              <a:rPr lang="en-US" dirty="0"/>
+              <a:t>-</a:t>
+            </a:r>
+            <a:r>
+              <a:rPr lang="ko-KR" altLang="en-US" dirty="0"/>
+              <a:t>자체 생산 데이터 사용</a:t>
+            </a:r>
+            <a:endParaRPr lang="en-US" altLang="ko-KR" dirty="0"/>
+          </a:p>
+          <a:p>
+            <a:pPr>
+              <a:spcAft>
+                <a:spcPts val="800"/>
+              </a:spcAft>
+              <a:defRPr sz="1800">
+                <a:solidFill>
+                  <a:srgbClr val="5C6574"/>
+                </a:solidFill>
+              </a:defRPr>
+            </a:pPr>
+            <a:r>
+              <a:rPr lang="en-US" dirty="0"/>
+              <a:t>-</a:t>
+            </a:r>
+            <a:r>
+              <a:rPr lang="ko-KR" altLang="en-US" dirty="0"/>
+              <a:t>데이터로 통계적 추정</a:t>
+            </a:r>
+            <a:endParaRPr dirty="0"/>
+          </a:p>
+        </p:txBody>
+      </p:sp>
+    </p:spTree>
+    <p:extLst>
+      <p:ext uri="{BB962C8B-B14F-4D97-AF65-F5344CB8AC3E}">
+        <p14:creationId xmlns:p14="http://schemas.microsoft.com/office/powerpoint/2010/main" val="538983994"/>
+      </p:ext>
+    </p:extLst>
   </p:cSld>
   <p:clrMapOvr>
     <a:masterClrMapping/>
@@ -5736,4 +13730,324 @@
     </a:ext>
   </a:extLst>
 </a:theme>
+</file>
+
+<file path=ppt/theme/theme2.xml><?xml version="1.0" encoding="utf-8"?>
+<a:theme xmlns:a="http://schemas.openxmlformats.org/drawingml/2006/main" name="Office Theme">
+  <a:themeElements>
+    <a:clrScheme name="Office">
+      <a:dk1>
+        <a:sysClr val="windowText" lastClr="000000"/>
+      </a:dk1>
+      <a:lt1>
+        <a:sysClr val="window" lastClr="FFFFFF"/>
+      </a:lt1>
+      <a:dk2>
+        <a:srgbClr val="1F497D"/>
+      </a:dk2>
+      <a:lt2>
+        <a:srgbClr val="EEECE1"/>
+      </a:lt2>
+      <a:accent1>
+        <a:srgbClr val="4F81BD"/>
+      </a:accent1>
+      <a:accent2>
+        <a:srgbClr val="C0504D"/>
+      </a:accent2>
+      <a:accent3>
+        <a:srgbClr val="9BBB59"/>
+      </a:accent3>
+      <a:accent4>
+        <a:srgbClr val="8064A2"/>
+      </a:accent4>
+      <a:accent5>
+        <a:srgbClr val="4BACC6"/>
+      </a:accent5>
+      <a:accent6>
+        <a:srgbClr val="F79646"/>
+      </a:accent6>
+      <a:hlink>
+        <a:srgbClr val="0000FF"/>
+      </a:hlink>
+      <a:folHlink>
+        <a:srgbClr val="800080"/>
+      </a:folHlink>
+    </a:clrScheme>
+    <a:fontScheme name="Office">
+      <a:majorFont>
+        <a:latin typeface="Calibri"/>
+        <a:ea typeface=""/>
+        <a:cs typeface=""/>
+        <a:font script="Jpan" typeface="ＭＳ Ｐゴシック"/>
+        <a:font script="Hang" typeface="맑은 고딕"/>
+        <a:font script="Hans" typeface="宋体"/>
+        <a:font script="Hant" typeface="新細明體"/>
+        <a:font script="Arab" typeface="Times New Roman"/>
+        <a:font script="Hebr" typeface="Times New Roman"/>
+        <a:font script="Thai" typeface="Angsana New"/>
+        <a:font script="Ethi" typeface="Nyala"/>
+        <a:font script="Beng" typeface="Vrinda"/>
+        <a:font script="Gujr" typeface="Shruti"/>
+        <a:font script="Khmr" typeface="MoolBoran"/>
+        <a:font script="Knda" typeface="Tunga"/>
+        <a:font script="Guru" typeface="Raavi"/>
+        <a:font script="Cans" typeface="Euphemia"/>
+        <a:font script="Cher" typeface="Plantagenet Cherokee"/>
+        <a:font script="Yiii" typeface="Microsoft Yi Baiti"/>
+        <a:font script="Tibt" typeface="Microsoft Himalaya"/>
+        <a:font script="Thaa" typeface="MV Boli"/>
+        <a:font script="Deva" typeface="Mangal"/>
+        <a:font script="Telu" typeface="Gautami"/>
+        <a:font script="Taml" typeface="Latha"/>
+        <a:font script="Syrc" typeface="Estrangelo Edessa"/>
+        <a:font script="Orya" typeface="Kalinga"/>
+        <a:font script="Mlym" typeface="Kartika"/>
+        <a:font script="Laoo" typeface="DokChampa"/>
+        <a:font script="Sinh" typeface="Iskoola Pota"/>
+        <a:font script="Mong" typeface="Mongolian Baiti"/>
+        <a:font script="Viet" typeface="Times New Roman"/>
+        <a:font script="Uigh" typeface="Microsoft Uighur"/>
+        <a:font script="Geor" typeface="Sylfaen"/>
+      </a:majorFont>
+      <a:minorFont>
+        <a:latin typeface="Calibri"/>
+        <a:ea typeface=""/>
+        <a:cs typeface=""/>
+        <a:font script="Jpan" typeface="ＭＳ Ｐゴシック"/>
+        <a:font script="Hang" typeface="맑은 고딕"/>
+        <a:font script="Hans" typeface="宋体"/>
+        <a:font script="Hant" typeface="新細明體"/>
+        <a:font script="Arab" typeface="Arial"/>
+        <a:font script="Hebr" typeface="Arial"/>
+        <a:font script="Thai" typeface="Cordia New"/>
+        <a:font script="Ethi" typeface="Nyala"/>
+        <a:font script="Beng" typeface="Vrinda"/>
+        <a:font script="Gujr" typeface="Shruti"/>
+        <a:font script="Khmr" typeface="DaunPenh"/>
+        <a:font script="Knda" typeface="Tunga"/>
+        <a:font script="Guru" typeface="Raavi"/>
+        <a:font script="Cans" typeface="Euphemia"/>
+        <a:font script="Cher" typeface="Plantagenet Cherokee"/>
+        <a:font script="Yiii" typeface="Microsoft Yi Baiti"/>
+        <a:font script="Tibt" typeface="Microsoft Himalaya"/>
+        <a:font script="Thaa" typeface="MV Boli"/>
+        <a:font script="Deva" typeface="Mangal"/>
+        <a:font script="Telu" typeface="Gautami"/>
+        <a:font script="Taml" typeface="Latha"/>
+        <a:font script="Syrc" typeface="Estrangelo Edessa"/>
+        <a:font script="Orya" typeface="Kalinga"/>
+        <a:font script="Mlym" typeface="Kartika"/>
+        <a:font script="Laoo" typeface="DokChampa"/>
+        <a:font script="Sinh" typeface="Iskoola Pota"/>
+        <a:font script="Mong" typeface="Mongolian Baiti"/>
+        <a:font script="Viet" typeface="Arial"/>
+        <a:font script="Uigh" typeface="Microsoft Uighur"/>
+        <a:font script="Geor" typeface="Sylfaen"/>
+      </a:minorFont>
+    </a:fontScheme>
+    <a:fmtScheme name="Office">
+      <a:fillStyleLst>
+        <a:solidFill>
+          <a:schemeClr val="phClr"/>
+        </a:solidFill>
+        <a:gradFill rotWithShape="1">
+          <a:gsLst>
+            <a:gs pos="0">
+              <a:schemeClr val="phClr">
+                <a:tint val="50000"/>
+                <a:satMod val="300000"/>
+              </a:schemeClr>
+            </a:gs>
+            <a:gs pos="35000">
+              <a:schemeClr val="phClr">
+                <a:tint val="37000"/>
+                <a:satMod val="300000"/>
+              </a:schemeClr>
+            </a:gs>
+            <a:gs pos="100000">
+              <a:schemeClr val="phClr">
+                <a:tint val="15000"/>
+                <a:satMod val="350000"/>
+              </a:schemeClr>
+            </a:gs>
+          </a:gsLst>
+          <a:lin ang="16200000" scaled="1"/>
+        </a:gradFill>
+        <a:gradFill rotWithShape="1">
+          <a:gsLst>
+            <a:gs pos="0">
+              <a:schemeClr val="phClr">
+                <a:tint val="100000"/>
+                <a:shade val="100000"/>
+                <a:satMod val="130000"/>
+              </a:schemeClr>
+            </a:gs>
+            <a:gs pos="100000">
+              <a:schemeClr val="phClr">
+                <a:tint val="50000"/>
+                <a:shade val="100000"/>
+                <a:satMod val="350000"/>
+              </a:schemeClr>
+            </a:gs>
+          </a:gsLst>
+          <a:lin ang="16200000" scaled="0"/>
+        </a:gradFill>
+      </a:fillStyleLst>
+      <a:lnStyleLst>
+        <a:ln w="9525" cap="flat" cmpd="sng" algn="ctr">
+          <a:solidFill>
+            <a:schemeClr val="phClr">
+              <a:shade val="95000"/>
+              <a:satMod val="105000"/>
+            </a:schemeClr>
+          </a:solidFill>
+          <a:prstDash val="solid"/>
+        </a:ln>
+        <a:ln w="25400" cap="flat" cmpd="sng" algn="ctr">
+          <a:solidFill>
+            <a:schemeClr val="phClr"/>
+          </a:solidFill>
+          <a:prstDash val="solid"/>
+        </a:ln>
+        <a:ln w="38100" cap="flat" cmpd="sng" algn="ctr">
+          <a:solidFill>
+            <a:schemeClr val="phClr"/>
+          </a:solidFill>
+          <a:prstDash val="solid"/>
+        </a:ln>
+      </a:lnStyleLst>
+      <a:effectStyleLst>
+        <a:effectStyle>
+          <a:effectLst>
+            <a:outerShdw blurRad="40000" dist="20000" dir="5400000" rotWithShape="0">
+              <a:srgbClr val="000000">
+                <a:alpha val="38000"/>
+              </a:srgbClr>
+            </a:outerShdw>
+          </a:effectLst>
+        </a:effectStyle>
+        <a:effectStyle>
+          <a:effectLst>
+            <a:outerShdw blurRad="40000" dist="23000" dir="5400000" rotWithShape="0">
+              <a:srgbClr val="000000">
+                <a:alpha val="35000"/>
+              </a:srgbClr>
+            </a:outerShdw>
+          </a:effectLst>
+        </a:effectStyle>
+        <a:effectStyle>
+          <a:effectLst>
+            <a:outerShdw blurRad="40000" dist="23000" dir="5400000" rotWithShape="0">
+              <a:srgbClr val="000000">
+                <a:alpha val="35000"/>
+              </a:srgbClr>
+            </a:outerShdw>
+          </a:effectLst>
+          <a:scene3d>
+            <a:camera prst="orthographicFront">
+              <a:rot lat="0" lon="0" rev="0"/>
+            </a:camera>
+            <a:lightRig rig="threePt" dir="t">
+              <a:rot lat="0" lon="0" rev="1200000"/>
+            </a:lightRig>
+          </a:scene3d>
+          <a:sp3d>
+            <a:bevelT w="63500" h="25400"/>
+          </a:sp3d>
+        </a:effectStyle>
+      </a:effectStyleLst>
+      <a:bgFillStyleLst>
+        <a:solidFill>
+          <a:schemeClr val="phClr"/>
+        </a:solidFill>
+        <a:gradFill rotWithShape="1">
+          <a:gsLst>
+            <a:gs pos="0">
+              <a:schemeClr val="phClr">
+                <a:tint val="40000"/>
+                <a:satMod val="350000"/>
+              </a:schemeClr>
+            </a:gs>
+            <a:gs pos="40000">
+              <a:schemeClr val="phClr">
+                <a:tint val="45000"/>
+                <a:shade val="99000"/>
+                <a:satMod val="350000"/>
+              </a:schemeClr>
+            </a:gs>
+            <a:gs pos="100000">
+              <a:schemeClr val="phClr">
+                <a:shade val="20000"/>
+                <a:satMod val="255000"/>
+              </a:schemeClr>
+            </a:gs>
+          </a:gsLst>
+          <a:path path="circle">
+            <a:fillToRect l="50000" t="-80000" r="50000" b="180000"/>
+          </a:path>
+        </a:gradFill>
+        <a:gradFill rotWithShape="1">
+          <a:gsLst>
+            <a:gs pos="0">
+              <a:schemeClr val="phClr">
+                <a:tint val="80000"/>
+                <a:satMod val="300000"/>
+              </a:schemeClr>
+            </a:gs>
+            <a:gs pos="100000">
+              <a:schemeClr val="phClr">
+                <a:shade val="30000"/>
+                <a:satMod val="200000"/>
+              </a:schemeClr>
+            </a:gs>
+          </a:gsLst>
+          <a:path path="circle">
+            <a:fillToRect l="50000" t="50000" r="50000" b="50000"/>
+          </a:path>
+        </a:gradFill>
+      </a:bgFillStyleLst>
+    </a:fmtScheme>
+  </a:themeElements>
+  <a:objectDefaults>
+    <a:spDef>
+      <a:spPr/>
+      <a:bodyPr/>
+      <a:lstStyle/>
+      <a:style>
+        <a:lnRef idx="1">
+          <a:schemeClr val="accent1"/>
+        </a:lnRef>
+        <a:fillRef idx="3">
+          <a:schemeClr val="accent1"/>
+        </a:fillRef>
+        <a:effectRef idx="2">
+          <a:schemeClr val="accent1"/>
+        </a:effectRef>
+        <a:fontRef idx="minor">
+          <a:schemeClr val="lt1"/>
+        </a:fontRef>
+      </a:style>
+    </a:spDef>
+    <a:lnDef>
+      <a:spPr/>
+      <a:bodyPr/>
+      <a:lstStyle/>
+      <a:style>
+        <a:lnRef idx="2">
+          <a:schemeClr val="accent1"/>
+        </a:lnRef>
+        <a:fillRef idx="0">
+          <a:schemeClr val="accent1"/>
+        </a:fillRef>
+        <a:effectRef idx="1">
+          <a:schemeClr val="accent1"/>
+        </a:effectRef>
+        <a:fontRef idx="minor">
+          <a:schemeClr val="tx1"/>
+        </a:fontRef>
+      </a:style>
+    </a:lnDef>
+  </a:objectDefaults>
+  <a:extraClrSchemeLst/>
+</a:theme>
 </file>
--- a/Documents/보고서 파일.pptx
+++ b/Documents/보고서 파일.pptx
@@ -132,7 +132,7 @@
   <pc:docChgLst>
     <pc:chgData name="연우 오" userId="c3558644dac54ca4" providerId="LiveId" clId="{9333FDCA-79D6-4088-A778-579BE454CE38}"/>
     <pc:docChg chg="undo redo custSel addSld delSld modSld sldOrd">
-      <pc:chgData name="연우 오" userId="c3558644dac54ca4" providerId="LiveId" clId="{9333FDCA-79D6-4088-A778-579BE454CE38}" dt="2026-08-21T08:12:44.228" v="3810" actId="20577"/>
+      <pc:chgData name="연우 오" userId="c3558644dac54ca4" providerId="LiveId" clId="{9333FDCA-79D6-4088-A778-579BE454CE38}" dt="2026-08-22T07:04:46.752" v="3811" actId="1076"/>
       <pc:docMkLst>
         <pc:docMk/>
       </pc:docMkLst>
@@ -335,7 +335,7 @@
         </pc:spChg>
       </pc:sldChg>
       <pc:sldChg chg="addSp delSp modSp add del mod">
-        <pc:chgData name="연우 오" userId="c3558644dac54ca4" providerId="LiveId" clId="{9333FDCA-79D6-4088-A778-579BE454CE38}" dt="2026-08-21T08:12:44.228" v="3810" actId="20577"/>
+        <pc:chgData name="연우 오" userId="c3558644dac54ca4" providerId="LiveId" clId="{9333FDCA-79D6-4088-A778-579BE454CE38}" dt="2026-08-22T07:04:46.752" v="3811" actId="1076"/>
         <pc:sldMkLst>
           <pc:docMk/>
           <pc:sldMk cId="0" sldId="258"/>
@@ -365,7 +365,7 @@
           </ac:spMkLst>
         </pc:spChg>
         <pc:spChg chg="mod">
-          <ac:chgData name="연우 오" userId="c3558644dac54ca4" providerId="LiveId" clId="{9333FDCA-79D6-4088-A778-579BE454CE38}" dt="2026-08-21T08:12:44.228" v="3810" actId="20577"/>
+          <ac:chgData name="연우 오" userId="c3558644dac54ca4" providerId="LiveId" clId="{9333FDCA-79D6-4088-A778-579BE454CE38}" dt="2026-08-22T07:04:46.752" v="3811" actId="1076"/>
           <ac:spMkLst>
             <pc:docMk/>
             <pc:sldMk cId="0" sldId="258"/>
@@ -9377,7 +9377,7 @@
             </p:nvSpPr>
             <p:spPr>
               <a:xfrm>
-                <a:off x="2779793" y="1975104"/>
+                <a:off x="2620136" y="1737360"/>
                 <a:ext cx="6601936" cy="913648"/>
               </a:xfrm>
               <a:prstGeom prst="rect">
@@ -9822,7 +9822,7 @@
             </p:nvSpPr>
             <p:spPr>
               <a:xfrm>
-                <a:off x="2779793" y="1975104"/>
+                <a:off x="2620136" y="1737360"/>
                 <a:ext cx="6601936" cy="913648"/>
               </a:xfrm>
               <a:prstGeom prst="rect">
